--- a/docs/plots/carbo/jx_carbo_linsubhr_dosedisc_sideeffect.pptx
+++ b/docs/plots/carbo/jx_carbo_linsubhr_dosedisc_sideeffect.pptx
@@ -3132,515 +3132,521 @@
           <p:spPr>
             <a:xfrm>
               <a:off x="1172049" y="1896563"/>
-              <a:ext cx="7090630" cy="3595380"/>
+              <a:ext cx="7090630" cy="3574389"/>
             </a:xfrm>
             <a:custGeom>
               <a:avLst/>
               <a:pathLst>
-                <a:path w="7090630" h="3595380">
+                <a:path w="7090630" h="3574389">
                   <a:moveTo>
-                    <a:pt x="0" y="3264831"/>
+                    <a:pt x="0" y="3204174"/>
                   </a:moveTo>
                   <a:lnTo>
-                    <a:pt x="71622" y="3257406"/>
-                  </a:lnTo>
-                  <a:lnTo>
-                    <a:pt x="143245" y="3249839"/>
-                  </a:lnTo>
-                  <a:lnTo>
-                    <a:pt x="214867" y="3242128"/>
-                  </a:lnTo>
-                  <a:lnTo>
-                    <a:pt x="286490" y="3234268"/>
-                  </a:lnTo>
-                  <a:lnTo>
-                    <a:pt x="358112" y="3226259"/>
-                  </a:lnTo>
-                  <a:lnTo>
-                    <a:pt x="429735" y="3218096"/>
-                  </a:lnTo>
-                  <a:lnTo>
-                    <a:pt x="501357" y="3209776"/>
-                  </a:lnTo>
-                  <a:lnTo>
-                    <a:pt x="572980" y="3201298"/>
-                  </a:lnTo>
-                  <a:lnTo>
-                    <a:pt x="644602" y="3192657"/>
-                  </a:lnTo>
-                  <a:lnTo>
-                    <a:pt x="716225" y="3183850"/>
-                  </a:lnTo>
-                  <a:lnTo>
-                    <a:pt x="787847" y="3174875"/>
-                  </a:lnTo>
-                  <a:lnTo>
-                    <a:pt x="859470" y="3165728"/>
-                  </a:lnTo>
-                  <a:lnTo>
-                    <a:pt x="931092" y="3156406"/>
-                  </a:lnTo>
-                  <a:lnTo>
-                    <a:pt x="1002715" y="3146906"/>
-                  </a:lnTo>
-                  <a:lnTo>
-                    <a:pt x="1074337" y="3137223"/>
-                  </a:lnTo>
-                  <a:lnTo>
-                    <a:pt x="1145960" y="3127356"/>
-                  </a:lnTo>
-                  <a:lnTo>
-                    <a:pt x="1217582" y="3117299"/>
-                  </a:lnTo>
-                  <a:lnTo>
-                    <a:pt x="1289205" y="3107050"/>
-                  </a:lnTo>
-                  <a:lnTo>
-                    <a:pt x="1360827" y="3096605"/>
-                  </a:lnTo>
-                  <a:lnTo>
-                    <a:pt x="1432450" y="3085959"/>
-                  </a:lnTo>
-                  <a:lnTo>
-                    <a:pt x="1504073" y="3075110"/>
-                  </a:lnTo>
-                  <a:lnTo>
-                    <a:pt x="1575695" y="3064053"/>
-                  </a:lnTo>
-                  <a:lnTo>
-                    <a:pt x="1647318" y="3052785"/>
-                  </a:lnTo>
-                  <a:lnTo>
-                    <a:pt x="1718940" y="3041301"/>
-                  </a:lnTo>
-                  <a:lnTo>
-                    <a:pt x="1790563" y="3029596"/>
-                  </a:lnTo>
-                  <a:lnTo>
-                    <a:pt x="1862185" y="3017668"/>
-                  </a:lnTo>
-                  <a:lnTo>
-                    <a:pt x="1933808" y="3005512"/>
-                  </a:lnTo>
-                  <a:lnTo>
-                    <a:pt x="2005430" y="2993122"/>
-                  </a:lnTo>
-                  <a:lnTo>
-                    <a:pt x="2077053" y="2980496"/>
-                  </a:lnTo>
-                  <a:lnTo>
-                    <a:pt x="2148675" y="2967628"/>
-                  </a:lnTo>
-                  <a:lnTo>
-                    <a:pt x="2220298" y="2954513"/>
-                  </a:lnTo>
-                  <a:lnTo>
-                    <a:pt x="2291920" y="2941147"/>
-                  </a:lnTo>
-                  <a:lnTo>
-                    <a:pt x="2363543" y="2927526"/>
-                  </a:lnTo>
-                  <a:lnTo>
-                    <a:pt x="2435165" y="2913643"/>
-                  </a:lnTo>
-                  <a:lnTo>
-                    <a:pt x="2506788" y="2899495"/>
-                  </a:lnTo>
-                  <a:lnTo>
-                    <a:pt x="2578410" y="2885076"/>
-                  </a:lnTo>
-                  <a:lnTo>
-                    <a:pt x="2650033" y="2870381"/>
-                  </a:lnTo>
-                  <a:lnTo>
-                    <a:pt x="2721655" y="2855405"/>
-                  </a:lnTo>
-                  <a:lnTo>
-                    <a:pt x="2793278" y="2840142"/>
-                  </a:lnTo>
-                  <a:lnTo>
-                    <a:pt x="2864901" y="2824587"/>
-                  </a:lnTo>
-                  <a:lnTo>
-                    <a:pt x="2936523" y="2808733"/>
-                  </a:lnTo>
-                  <a:lnTo>
-                    <a:pt x="3008146" y="2792577"/>
-                  </a:lnTo>
-                  <a:lnTo>
-                    <a:pt x="3079768" y="2759657"/>
-                  </a:lnTo>
-                  <a:lnTo>
-                    <a:pt x="3151391" y="2700750"/>
-                  </a:lnTo>
-                  <a:lnTo>
-                    <a:pt x="3223013" y="2637957"/>
-                  </a:lnTo>
-                  <a:lnTo>
-                    <a:pt x="3294636" y="2571022"/>
-                  </a:lnTo>
-                  <a:lnTo>
-                    <a:pt x="3366258" y="2499671"/>
-                  </a:lnTo>
-                  <a:lnTo>
-                    <a:pt x="3437881" y="2423614"/>
-                  </a:lnTo>
-                  <a:lnTo>
-                    <a:pt x="3509503" y="2342539"/>
-                  </a:lnTo>
-                  <a:lnTo>
-                    <a:pt x="3581126" y="2256117"/>
-                  </a:lnTo>
-                  <a:lnTo>
-                    <a:pt x="3652748" y="2163993"/>
-                  </a:lnTo>
-                  <a:lnTo>
-                    <a:pt x="3724371" y="2065792"/>
-                  </a:lnTo>
-                  <a:lnTo>
-                    <a:pt x="3795993" y="1961113"/>
-                  </a:lnTo>
-                  <a:lnTo>
-                    <a:pt x="3867616" y="1849529"/>
-                  </a:lnTo>
-                  <a:lnTo>
-                    <a:pt x="3939238" y="1730584"/>
-                  </a:lnTo>
-                  <a:lnTo>
-                    <a:pt x="4010861" y="1603793"/>
-                  </a:lnTo>
-                  <a:lnTo>
-                    <a:pt x="4082483" y="1468638"/>
-                  </a:lnTo>
-                  <a:lnTo>
-                    <a:pt x="4154106" y="1324567"/>
-                  </a:lnTo>
-                  <a:lnTo>
-                    <a:pt x="4225729" y="1170993"/>
-                  </a:lnTo>
-                  <a:lnTo>
-                    <a:pt x="4297351" y="1007287"/>
-                  </a:lnTo>
-                  <a:lnTo>
-                    <a:pt x="4368974" y="832783"/>
-                  </a:lnTo>
-                  <a:lnTo>
-                    <a:pt x="4440596" y="646767"/>
-                  </a:lnTo>
-                  <a:lnTo>
-                    <a:pt x="4512219" y="448480"/>
-                  </a:lnTo>
-                  <a:lnTo>
-                    <a:pt x="4583841" y="237113"/>
-                  </a:lnTo>
-                  <a:lnTo>
-                    <a:pt x="4655464" y="11803"/>
-                  </a:lnTo>
-                  <a:lnTo>
-                    <a:pt x="4658984" y="0"/>
+                    <a:pt x="71622" y="3197145"/>
+                  </a:lnTo>
+                  <a:lnTo>
+                    <a:pt x="143245" y="3190006"/>
+                  </a:lnTo>
+                  <a:lnTo>
+                    <a:pt x="214867" y="3182755"/>
+                  </a:lnTo>
+                  <a:lnTo>
+                    <a:pt x="286490" y="3175390"/>
+                  </a:lnTo>
+                  <a:lnTo>
+                    <a:pt x="358112" y="3167910"/>
+                  </a:lnTo>
+                  <a:lnTo>
+                    <a:pt x="429735" y="3160312"/>
+                  </a:lnTo>
+                  <a:lnTo>
+                    <a:pt x="501357" y="3152596"/>
+                  </a:lnTo>
+                  <a:lnTo>
+                    <a:pt x="572980" y="3144759"/>
+                  </a:lnTo>
+                  <a:lnTo>
+                    <a:pt x="644602" y="3136799"/>
+                  </a:lnTo>
+                  <a:lnTo>
+                    <a:pt x="716225" y="3128714"/>
+                  </a:lnTo>
+                  <a:lnTo>
+                    <a:pt x="787847" y="3120502"/>
+                  </a:lnTo>
+                  <a:lnTo>
+                    <a:pt x="859470" y="3112162"/>
+                  </a:lnTo>
+                  <a:lnTo>
+                    <a:pt x="931092" y="3103691"/>
+                  </a:lnTo>
+                  <a:lnTo>
+                    <a:pt x="1002715" y="3095087"/>
+                  </a:lnTo>
+                  <a:lnTo>
+                    <a:pt x="1074337" y="3086348"/>
+                  </a:lnTo>
+                  <a:lnTo>
+                    <a:pt x="1145960" y="3077472"/>
+                  </a:lnTo>
+                  <a:lnTo>
+                    <a:pt x="1217582" y="3068458"/>
+                  </a:lnTo>
+                  <a:lnTo>
+                    <a:pt x="1289205" y="3059302"/>
+                  </a:lnTo>
+                  <a:lnTo>
+                    <a:pt x="1360827" y="3050002"/>
+                  </a:lnTo>
+                  <a:lnTo>
+                    <a:pt x="1432450" y="3040557"/>
+                  </a:lnTo>
+                  <a:lnTo>
+                    <a:pt x="1504073" y="3030963"/>
+                  </a:lnTo>
+                  <a:lnTo>
+                    <a:pt x="1575695" y="3021220"/>
+                  </a:lnTo>
+                  <a:lnTo>
+                    <a:pt x="1647318" y="3011323"/>
+                  </a:lnTo>
+                  <a:lnTo>
+                    <a:pt x="1718940" y="3001272"/>
+                  </a:lnTo>
+                  <a:lnTo>
+                    <a:pt x="1790563" y="2991063"/>
+                  </a:lnTo>
+                  <a:lnTo>
+                    <a:pt x="1862185" y="2980694"/>
+                  </a:lnTo>
+                  <a:lnTo>
+                    <a:pt x="1933808" y="2970162"/>
+                  </a:lnTo>
+                  <a:lnTo>
+                    <a:pt x="2005430" y="2959465"/>
+                  </a:lnTo>
+                  <a:lnTo>
+                    <a:pt x="2077053" y="2948601"/>
+                  </a:lnTo>
+                  <a:lnTo>
+                    <a:pt x="2148675" y="2937567"/>
+                  </a:lnTo>
+                  <a:lnTo>
+                    <a:pt x="2220298" y="2926359"/>
+                  </a:lnTo>
+                  <a:lnTo>
+                    <a:pt x="2291920" y="2914976"/>
+                  </a:lnTo>
+                  <a:lnTo>
+                    <a:pt x="2363543" y="2903414"/>
+                  </a:lnTo>
+                  <a:lnTo>
+                    <a:pt x="2435165" y="2891671"/>
+                  </a:lnTo>
+                  <a:lnTo>
+                    <a:pt x="2506788" y="2879745"/>
+                  </a:lnTo>
+                  <a:lnTo>
+                    <a:pt x="2578410" y="2867631"/>
+                  </a:lnTo>
+                  <a:lnTo>
+                    <a:pt x="2650033" y="2855327"/>
+                  </a:lnTo>
+                  <a:lnTo>
+                    <a:pt x="2721655" y="2842831"/>
+                  </a:lnTo>
+                  <a:lnTo>
+                    <a:pt x="2793278" y="2830138"/>
+                  </a:lnTo>
+                  <a:lnTo>
+                    <a:pt x="2864901" y="2817247"/>
+                  </a:lnTo>
+                  <a:lnTo>
+                    <a:pt x="2936523" y="2804154"/>
+                  </a:lnTo>
+                  <a:lnTo>
+                    <a:pt x="3008146" y="2790855"/>
+                  </a:lnTo>
+                  <a:lnTo>
+                    <a:pt x="3079768" y="2762364"/>
+                  </a:lnTo>
+                  <a:lnTo>
+                    <a:pt x="3151391" y="2710570"/>
+                  </a:lnTo>
+                  <a:lnTo>
+                    <a:pt x="3223013" y="2655762"/>
+                  </a:lnTo>
+                  <a:lnTo>
+                    <a:pt x="3294636" y="2597766"/>
+                  </a:lnTo>
+                  <a:lnTo>
+                    <a:pt x="3366258" y="2536396"/>
+                  </a:lnTo>
+                  <a:lnTo>
+                    <a:pt x="3437881" y="2471455"/>
+                  </a:lnTo>
+                  <a:lnTo>
+                    <a:pt x="3509503" y="2402737"/>
+                  </a:lnTo>
+                  <a:lnTo>
+                    <a:pt x="3581126" y="2330020"/>
+                  </a:lnTo>
+                  <a:lnTo>
+                    <a:pt x="3652748" y="2253073"/>
+                  </a:lnTo>
+                  <a:lnTo>
+                    <a:pt x="3724371" y="2171649"/>
+                  </a:lnTo>
+                  <a:lnTo>
+                    <a:pt x="3795993" y="2085488"/>
+                  </a:lnTo>
+                  <a:lnTo>
+                    <a:pt x="3867616" y="1994315"/>
+                  </a:lnTo>
+                  <a:lnTo>
+                    <a:pt x="3939238" y="1897837"/>
+                  </a:lnTo>
+                  <a:lnTo>
+                    <a:pt x="4010861" y="1795747"/>
+                  </a:lnTo>
+                  <a:lnTo>
+                    <a:pt x="4082483" y="1687717"/>
+                  </a:lnTo>
+                  <a:lnTo>
+                    <a:pt x="4154106" y="1573402"/>
+                  </a:lnTo>
+                  <a:lnTo>
+                    <a:pt x="4225729" y="1452437"/>
+                  </a:lnTo>
+                  <a:lnTo>
+                    <a:pt x="4297351" y="1324434"/>
+                  </a:lnTo>
+                  <a:lnTo>
+                    <a:pt x="4368974" y="1188984"/>
+                  </a:lnTo>
+                  <a:lnTo>
+                    <a:pt x="4440596" y="1045654"/>
+                  </a:lnTo>
+                  <a:lnTo>
+                    <a:pt x="4512219" y="893986"/>
+                  </a:lnTo>
+                  <a:lnTo>
+                    <a:pt x="4583841" y="733494"/>
+                  </a:lnTo>
+                  <a:lnTo>
+                    <a:pt x="4655464" y="563665"/>
+                  </a:lnTo>
+                  <a:lnTo>
+                    <a:pt x="4727086" y="383955"/>
+                  </a:lnTo>
+                  <a:lnTo>
+                    <a:pt x="4798709" y="193791"/>
+                  </a:lnTo>
+                  <a:lnTo>
+                    <a:pt x="4867684" y="0"/>
                   </a:lnTo>
                   <a:lnTo>
                     <a:pt x="7090630" y="0"/>
                   </a:lnTo>
                   <a:lnTo>
-                    <a:pt x="7090630" y="1117621"/>
-                  </a:lnTo>
-                  <a:lnTo>
-                    <a:pt x="7019007" y="1165242"/>
-                  </a:lnTo>
-                  <a:lnTo>
-                    <a:pt x="6947385" y="1211969"/>
-                  </a:lnTo>
-                  <a:lnTo>
-                    <a:pt x="6875762" y="1257818"/>
-                  </a:lnTo>
-                  <a:lnTo>
-                    <a:pt x="6804139" y="1302805"/>
-                  </a:lnTo>
-                  <a:lnTo>
-                    <a:pt x="6732517" y="1346948"/>
-                  </a:lnTo>
-                  <a:lnTo>
-                    <a:pt x="6660894" y="1390261"/>
-                  </a:lnTo>
-                  <a:lnTo>
-                    <a:pt x="6589272" y="1432760"/>
-                  </a:lnTo>
-                  <a:lnTo>
-                    <a:pt x="6517649" y="1474462"/>
-                  </a:lnTo>
-                  <a:lnTo>
-                    <a:pt x="6446027" y="1515379"/>
-                  </a:lnTo>
-                  <a:lnTo>
-                    <a:pt x="6374404" y="1555529"/>
-                  </a:lnTo>
-                  <a:lnTo>
-                    <a:pt x="6302782" y="1594924"/>
-                  </a:lnTo>
-                  <a:lnTo>
-                    <a:pt x="6231159" y="1633578"/>
-                  </a:lnTo>
-                  <a:lnTo>
-                    <a:pt x="6159537" y="1671507"/>
-                  </a:lnTo>
-                  <a:lnTo>
-                    <a:pt x="6087914" y="1708723"/>
-                  </a:lnTo>
-                  <a:lnTo>
-                    <a:pt x="6016292" y="1745241"/>
-                  </a:lnTo>
-                  <a:lnTo>
-                    <a:pt x="5944669" y="1781072"/>
-                  </a:lnTo>
-                  <a:lnTo>
-                    <a:pt x="5873047" y="1816230"/>
-                  </a:lnTo>
-                  <a:lnTo>
-                    <a:pt x="5801424" y="1850727"/>
-                  </a:lnTo>
-                  <a:lnTo>
-                    <a:pt x="5729802" y="1884577"/>
-                  </a:lnTo>
-                  <a:lnTo>
-                    <a:pt x="5658179" y="1917791"/>
-                  </a:lnTo>
-                  <a:lnTo>
-                    <a:pt x="5586557" y="1950380"/>
-                  </a:lnTo>
-                  <a:lnTo>
-                    <a:pt x="5514934" y="1982358"/>
-                  </a:lnTo>
-                  <a:lnTo>
-                    <a:pt x="5443311" y="2013735"/>
-                  </a:lnTo>
-                  <a:lnTo>
-                    <a:pt x="5371689" y="2044522"/>
-                  </a:lnTo>
-                  <a:lnTo>
-                    <a:pt x="5300066" y="2074731"/>
-                  </a:lnTo>
-                  <a:lnTo>
-                    <a:pt x="5228444" y="2104373"/>
-                  </a:lnTo>
-                  <a:lnTo>
-                    <a:pt x="5156821" y="2133458"/>
-                  </a:lnTo>
-                  <a:lnTo>
-                    <a:pt x="5085199" y="2161996"/>
-                  </a:lnTo>
-                  <a:lnTo>
-                    <a:pt x="5013576" y="2189998"/>
-                  </a:lnTo>
-                  <a:lnTo>
-                    <a:pt x="4941954" y="2217475"/>
-                  </a:lnTo>
-                  <a:lnTo>
-                    <a:pt x="4870331" y="2244435"/>
-                  </a:lnTo>
-                  <a:lnTo>
-                    <a:pt x="4798709" y="2270888"/>
-                  </a:lnTo>
-                  <a:lnTo>
-                    <a:pt x="4727086" y="2296845"/>
-                  </a:lnTo>
-                  <a:lnTo>
-                    <a:pt x="4655464" y="2322314"/>
-                  </a:lnTo>
-                  <a:lnTo>
-                    <a:pt x="4583841" y="2347305"/>
-                  </a:lnTo>
-                  <a:lnTo>
-                    <a:pt x="4512219" y="2371826"/>
-                  </a:lnTo>
-                  <a:lnTo>
-                    <a:pt x="4440596" y="2395886"/>
-                  </a:lnTo>
-                  <a:lnTo>
-                    <a:pt x="4368974" y="2419495"/>
-                  </a:lnTo>
-                  <a:lnTo>
-                    <a:pt x="4297351" y="2442660"/>
-                  </a:lnTo>
-                  <a:lnTo>
-                    <a:pt x="4225729" y="2465390"/>
-                  </a:lnTo>
-                  <a:lnTo>
-                    <a:pt x="4154106" y="2487693"/>
-                  </a:lnTo>
-                  <a:lnTo>
-                    <a:pt x="4082483" y="2509577"/>
-                  </a:lnTo>
-                  <a:lnTo>
-                    <a:pt x="4010861" y="2531050"/>
-                  </a:lnTo>
-                  <a:lnTo>
-                    <a:pt x="3939238" y="2552119"/>
-                  </a:lnTo>
-                  <a:lnTo>
-                    <a:pt x="3867616" y="2572793"/>
-                  </a:lnTo>
-                  <a:lnTo>
-                    <a:pt x="3795993" y="2593078"/>
-                  </a:lnTo>
-                  <a:lnTo>
-                    <a:pt x="3724371" y="2612983"/>
-                  </a:lnTo>
-                  <a:lnTo>
-                    <a:pt x="3652748" y="2632513"/>
-                  </a:lnTo>
-                  <a:lnTo>
-                    <a:pt x="3581126" y="2651676"/>
-                  </a:lnTo>
-                  <a:lnTo>
-                    <a:pt x="3509503" y="2670480"/>
-                  </a:lnTo>
-                  <a:lnTo>
-                    <a:pt x="3437881" y="2688930"/>
-                  </a:lnTo>
-                  <a:lnTo>
-                    <a:pt x="3366258" y="2707034"/>
-                  </a:lnTo>
-                  <a:lnTo>
-                    <a:pt x="3294636" y="2724797"/>
-                  </a:lnTo>
-                  <a:lnTo>
-                    <a:pt x="3223013" y="2742227"/>
-                  </a:lnTo>
-                  <a:lnTo>
-                    <a:pt x="3151391" y="2759330"/>
-                  </a:lnTo>
-                  <a:lnTo>
-                    <a:pt x="3079768" y="2776111"/>
-                  </a:lnTo>
-                  <a:lnTo>
-                    <a:pt x="3008146" y="2814919"/>
-                  </a:lnTo>
-                  <a:lnTo>
-                    <a:pt x="2936523" y="2866760"/>
-                  </a:lnTo>
-                  <a:lnTo>
-                    <a:pt x="2864901" y="2915394"/>
-                  </a:lnTo>
-                  <a:lnTo>
-                    <a:pt x="2793278" y="2961018"/>
-                  </a:lnTo>
-                  <a:lnTo>
-                    <a:pt x="2721655" y="3003819"/>
-                  </a:lnTo>
-                  <a:lnTo>
-                    <a:pt x="2650033" y="3043971"/>
-                  </a:lnTo>
-                  <a:lnTo>
-                    <a:pt x="2578410" y="3081638"/>
-                  </a:lnTo>
-                  <a:lnTo>
-                    <a:pt x="2506788" y="3116974"/>
-                  </a:lnTo>
-                  <a:lnTo>
-                    <a:pt x="2435165" y="3150123"/>
-                  </a:lnTo>
-                  <a:lnTo>
-                    <a:pt x="2363543" y="3181221"/>
-                  </a:lnTo>
-                  <a:lnTo>
-                    <a:pt x="2291920" y="3210395"/>
-                  </a:lnTo>
-                  <a:lnTo>
-                    <a:pt x="2220298" y="3237763"/>
-                  </a:lnTo>
-                  <a:lnTo>
-                    <a:pt x="2148675" y="3263437"/>
-                  </a:lnTo>
-                  <a:lnTo>
-                    <a:pt x="2077053" y="3287523"/>
-                  </a:lnTo>
-                  <a:lnTo>
-                    <a:pt x="2005430" y="3310118"/>
-                  </a:lnTo>
-                  <a:lnTo>
-                    <a:pt x="1933808" y="3331315"/>
-                  </a:lnTo>
-                  <a:lnTo>
-                    <a:pt x="1862185" y="3351200"/>
-                  </a:lnTo>
-                  <a:lnTo>
-                    <a:pt x="1790563" y="3369855"/>
-                  </a:lnTo>
-                  <a:lnTo>
-                    <a:pt x="1718940" y="3387355"/>
-                  </a:lnTo>
-                  <a:lnTo>
-                    <a:pt x="1647318" y="3403772"/>
-                  </a:lnTo>
-                  <a:lnTo>
-                    <a:pt x="1575695" y="3419173"/>
-                  </a:lnTo>
-                  <a:lnTo>
-                    <a:pt x="1504073" y="3433621"/>
-                  </a:lnTo>
-                  <a:lnTo>
-                    <a:pt x="1432450" y="3447175"/>
-                  </a:lnTo>
-                  <a:lnTo>
-                    <a:pt x="1360827" y="3459890"/>
-                  </a:lnTo>
-                  <a:lnTo>
-                    <a:pt x="1289205" y="3471819"/>
-                  </a:lnTo>
-                  <a:lnTo>
-                    <a:pt x="1217582" y="3483009"/>
-                  </a:lnTo>
-                  <a:lnTo>
-                    <a:pt x="1145960" y="3493507"/>
-                  </a:lnTo>
-                  <a:lnTo>
-                    <a:pt x="1074337" y="3503355"/>
-                  </a:lnTo>
-                  <a:lnTo>
-                    <a:pt x="1002715" y="3512593"/>
-                  </a:lnTo>
-                  <a:lnTo>
-                    <a:pt x="931092" y="3521260"/>
-                  </a:lnTo>
-                  <a:lnTo>
-                    <a:pt x="859470" y="3529391"/>
-                  </a:lnTo>
-                  <a:lnTo>
-                    <a:pt x="787847" y="3537018"/>
-                  </a:lnTo>
-                  <a:lnTo>
-                    <a:pt x="716225" y="3544173"/>
-                  </a:lnTo>
-                  <a:lnTo>
-                    <a:pt x="644602" y="3550886"/>
-                  </a:lnTo>
-                  <a:lnTo>
-                    <a:pt x="572980" y="3557183"/>
-                  </a:lnTo>
-                  <a:lnTo>
-                    <a:pt x="501357" y="3563091"/>
-                  </a:lnTo>
-                  <a:lnTo>
-                    <a:pt x="429735" y="3568632"/>
-                  </a:lnTo>
-                  <a:lnTo>
-                    <a:pt x="358112" y="3573831"/>
-                  </a:lnTo>
-                  <a:lnTo>
-                    <a:pt x="286490" y="3578709"/>
-                  </a:lnTo>
-                  <a:lnTo>
-                    <a:pt x="214867" y="3583284"/>
-                  </a:lnTo>
-                  <a:lnTo>
-                    <a:pt x="143245" y="3587576"/>
-                  </a:lnTo>
-                  <a:lnTo>
-                    <a:pt x="71622" y="3591603"/>
-                  </a:lnTo>
-                  <a:lnTo>
-                    <a:pt x="0" y="3595380"/>
+                    <a:pt x="7090630" y="1561530"/>
+                  </a:lnTo>
+                  <a:lnTo>
+                    <a:pt x="7019007" y="1593799"/>
+                  </a:lnTo>
+                  <a:lnTo>
+                    <a:pt x="6947385" y="1625570"/>
+                  </a:lnTo>
+                  <a:lnTo>
+                    <a:pt x="6875762" y="1656850"/>
+                  </a:lnTo>
+                  <a:lnTo>
+                    <a:pt x="6804139" y="1687648"/>
+                  </a:lnTo>
+                  <a:lnTo>
+                    <a:pt x="6732517" y="1717970"/>
+                  </a:lnTo>
+                  <a:lnTo>
+                    <a:pt x="6660894" y="1747825"/>
+                  </a:lnTo>
+                  <a:lnTo>
+                    <a:pt x="6589272" y="1777219"/>
+                  </a:lnTo>
+                  <a:lnTo>
+                    <a:pt x="6517649" y="1806159"/>
+                  </a:lnTo>
+                  <a:lnTo>
+                    <a:pt x="6446027" y="1834653"/>
+                  </a:lnTo>
+                  <a:lnTo>
+                    <a:pt x="6374404" y="1862707"/>
+                  </a:lnTo>
+                  <a:lnTo>
+                    <a:pt x="6302782" y="1890328"/>
+                  </a:lnTo>
+                  <a:lnTo>
+                    <a:pt x="6231159" y="1917523"/>
+                  </a:lnTo>
+                  <a:lnTo>
+                    <a:pt x="6159537" y="1944298"/>
+                  </a:lnTo>
+                  <a:lnTo>
+                    <a:pt x="6087914" y="1970660"/>
+                  </a:lnTo>
+                  <a:lnTo>
+                    <a:pt x="6016292" y="1996615"/>
+                  </a:lnTo>
+                  <a:lnTo>
+                    <a:pt x="5944669" y="2022170"/>
+                  </a:lnTo>
+                  <a:lnTo>
+                    <a:pt x="5873047" y="2047330"/>
+                  </a:lnTo>
+                  <a:lnTo>
+                    <a:pt x="5801424" y="2072102"/>
+                  </a:lnTo>
+                  <a:lnTo>
+                    <a:pt x="5729802" y="2096492"/>
+                  </a:lnTo>
+                  <a:lnTo>
+                    <a:pt x="5658179" y="2120505"/>
+                  </a:lnTo>
+                  <a:lnTo>
+                    <a:pt x="5586557" y="2144148"/>
+                  </a:lnTo>
+                  <a:lnTo>
+                    <a:pt x="5514934" y="2167426"/>
+                  </a:lnTo>
+                  <a:lnTo>
+                    <a:pt x="5443311" y="2190345"/>
+                  </a:lnTo>
+                  <a:lnTo>
+                    <a:pt x="5371689" y="2212911"/>
+                  </a:lnTo>
+                  <a:lnTo>
+                    <a:pt x="5300066" y="2235127"/>
+                  </a:lnTo>
+                  <a:lnTo>
+                    <a:pt x="5228444" y="2257002"/>
+                  </a:lnTo>
+                  <a:lnTo>
+                    <a:pt x="5156821" y="2278538"/>
+                  </a:lnTo>
+                  <a:lnTo>
+                    <a:pt x="5085199" y="2299742"/>
+                  </a:lnTo>
+                  <a:lnTo>
+                    <a:pt x="5013576" y="2320620"/>
+                  </a:lnTo>
+                  <a:lnTo>
+                    <a:pt x="4941954" y="2341174"/>
+                  </a:lnTo>
+                  <a:lnTo>
+                    <a:pt x="4870331" y="2361412"/>
+                  </a:lnTo>
+                  <a:lnTo>
+                    <a:pt x="4798709" y="2381338"/>
+                  </a:lnTo>
+                  <a:lnTo>
+                    <a:pt x="4727086" y="2400955"/>
+                  </a:lnTo>
+                  <a:lnTo>
+                    <a:pt x="4655464" y="2420271"/>
+                  </a:lnTo>
+                  <a:lnTo>
+                    <a:pt x="4583841" y="2439288"/>
+                  </a:lnTo>
+                  <a:lnTo>
+                    <a:pt x="4512219" y="2458011"/>
+                  </a:lnTo>
+                  <a:lnTo>
+                    <a:pt x="4440596" y="2476446"/>
+                  </a:lnTo>
+                  <a:lnTo>
+                    <a:pt x="4368974" y="2494596"/>
+                  </a:lnTo>
+                  <a:lnTo>
+                    <a:pt x="4297351" y="2512467"/>
+                  </a:lnTo>
+                  <a:lnTo>
+                    <a:pt x="4225729" y="2530061"/>
+                  </a:lnTo>
+                  <a:lnTo>
+                    <a:pt x="4154106" y="2547384"/>
+                  </a:lnTo>
+                  <a:lnTo>
+                    <a:pt x="4082483" y="2564440"/>
+                  </a:lnTo>
+                  <a:lnTo>
+                    <a:pt x="4010861" y="2581232"/>
+                  </a:lnTo>
+                  <a:lnTo>
+                    <a:pt x="3939238" y="2597765"/>
+                  </a:lnTo>
+                  <a:lnTo>
+                    <a:pt x="3867616" y="2614043"/>
+                  </a:lnTo>
+                  <a:lnTo>
+                    <a:pt x="3795993" y="2630070"/>
+                  </a:lnTo>
+                  <a:lnTo>
+                    <a:pt x="3724371" y="2645850"/>
+                  </a:lnTo>
+                  <a:lnTo>
+                    <a:pt x="3652748" y="2661386"/>
+                  </a:lnTo>
+                  <a:lnTo>
+                    <a:pt x="3581126" y="2676683"/>
+                  </a:lnTo>
+                  <a:lnTo>
+                    <a:pt x="3509503" y="2691743"/>
+                  </a:lnTo>
+                  <a:lnTo>
+                    <a:pt x="3437881" y="2706571"/>
+                  </a:lnTo>
+                  <a:lnTo>
+                    <a:pt x="3366258" y="2721170"/>
+                  </a:lnTo>
+                  <a:lnTo>
+                    <a:pt x="3294636" y="2735544"/>
+                  </a:lnTo>
+                  <a:lnTo>
+                    <a:pt x="3223013" y="2749696"/>
+                  </a:lnTo>
+                  <a:lnTo>
+                    <a:pt x="3151391" y="2763630"/>
+                  </a:lnTo>
+                  <a:lnTo>
+                    <a:pt x="3079768" y="2777348"/>
+                  </a:lnTo>
+                  <a:lnTo>
+                    <a:pt x="3008146" y="2811311"/>
+                  </a:lnTo>
+                  <a:lnTo>
+                    <a:pt x="2936523" y="2857567"/>
+                  </a:lnTo>
+                  <a:lnTo>
+                    <a:pt x="2864901" y="2901279"/>
+                  </a:lnTo>
+                  <a:lnTo>
+                    <a:pt x="2793278" y="2942589"/>
+                  </a:lnTo>
+                  <a:lnTo>
+                    <a:pt x="2721655" y="2981627"/>
+                  </a:lnTo>
+                  <a:lnTo>
+                    <a:pt x="2650033" y="3018519"/>
+                  </a:lnTo>
+                  <a:lnTo>
+                    <a:pt x="2578410" y="3053382"/>
+                  </a:lnTo>
+                  <a:lnTo>
+                    <a:pt x="2506788" y="3086329"/>
+                  </a:lnTo>
+                  <a:lnTo>
+                    <a:pt x="2435165" y="3117464"/>
+                  </a:lnTo>
+                  <a:lnTo>
+                    <a:pt x="2363543" y="3146888"/>
+                  </a:lnTo>
+                  <a:lnTo>
+                    <a:pt x="2291920" y="3174694"/>
+                  </a:lnTo>
+                  <a:lnTo>
+                    <a:pt x="2220298" y="3200971"/>
+                  </a:lnTo>
+                  <a:lnTo>
+                    <a:pt x="2148675" y="3225804"/>
+                  </a:lnTo>
+                  <a:lnTo>
+                    <a:pt x="2077053" y="3249271"/>
+                  </a:lnTo>
+                  <a:lnTo>
+                    <a:pt x="2005430" y="3271448"/>
+                  </a:lnTo>
+                  <a:lnTo>
+                    <a:pt x="1933808" y="3292406"/>
+                  </a:lnTo>
+                  <a:lnTo>
+                    <a:pt x="1862185" y="3312211"/>
+                  </a:lnTo>
+                  <a:lnTo>
+                    <a:pt x="1790563" y="3330928"/>
+                  </a:lnTo>
+                  <a:lnTo>
+                    <a:pt x="1718940" y="3348616"/>
+                  </a:lnTo>
+                  <a:lnTo>
+                    <a:pt x="1647318" y="3365331"/>
+                  </a:lnTo>
+                  <a:lnTo>
+                    <a:pt x="1575695" y="3381127"/>
+                  </a:lnTo>
+                  <a:lnTo>
+                    <a:pt x="1504073" y="3396055"/>
+                  </a:lnTo>
+                  <a:lnTo>
+                    <a:pt x="1432450" y="3410162"/>
+                  </a:lnTo>
+                  <a:lnTo>
+                    <a:pt x="1360827" y="3423493"/>
+                  </a:lnTo>
+                  <a:lnTo>
+                    <a:pt x="1289205" y="3436092"/>
+                  </a:lnTo>
+                  <a:lnTo>
+                    <a:pt x="1217582" y="3447997"/>
+                  </a:lnTo>
+                  <a:lnTo>
+                    <a:pt x="1145960" y="3459249"/>
+                  </a:lnTo>
+                  <a:lnTo>
+                    <a:pt x="1074337" y="3469881"/>
+                  </a:lnTo>
+                  <a:lnTo>
+                    <a:pt x="1002715" y="3479929"/>
+                  </a:lnTo>
+                  <a:lnTo>
+                    <a:pt x="931092" y="3489425"/>
+                  </a:lnTo>
+                  <a:lnTo>
+                    <a:pt x="859470" y="3498399"/>
+                  </a:lnTo>
+                  <a:lnTo>
+                    <a:pt x="787847" y="3506879"/>
+                  </a:lnTo>
+                  <a:lnTo>
+                    <a:pt x="716225" y="3514893"/>
+                  </a:lnTo>
+                  <a:lnTo>
+                    <a:pt x="644602" y="3522466"/>
+                  </a:lnTo>
+                  <a:lnTo>
+                    <a:pt x="572980" y="3529623"/>
+                  </a:lnTo>
+                  <a:lnTo>
+                    <a:pt x="501357" y="3536387"/>
+                  </a:lnTo>
+                  <a:lnTo>
+                    <a:pt x="429735" y="3542778"/>
+                  </a:lnTo>
+                  <a:lnTo>
+                    <a:pt x="358112" y="3548819"/>
+                  </a:lnTo>
+                  <a:lnTo>
+                    <a:pt x="286490" y="3554527"/>
+                  </a:lnTo>
+                  <a:lnTo>
+                    <a:pt x="214867" y="3559921"/>
+                  </a:lnTo>
+                  <a:lnTo>
+                    <a:pt x="143245" y="3565019"/>
+                  </a:lnTo>
+                  <a:lnTo>
+                    <a:pt x="71622" y="3569837"/>
+                  </a:lnTo>
+                  <a:lnTo>
+                    <a:pt x="0" y="3574389"/>
                   </a:lnTo>
                   <a:close/>
                 </a:path>
@@ -3667,212 +3673,218 @@
           <p:spPr>
             <a:xfrm>
               <a:off x="1172049" y="1896563"/>
-              <a:ext cx="4658984" cy="3264831"/>
+              <a:ext cx="4867684" cy="3204174"/>
             </a:xfrm>
             <a:custGeom>
               <a:avLst/>
               <a:pathLst>
-                <a:path w="4658984" h="3264831">
+                <a:path w="4867684" h="3204174">
                   <a:moveTo>
-                    <a:pt x="0" y="3264831"/>
+                    <a:pt x="0" y="3204174"/>
                   </a:moveTo>
                   <a:lnTo>
-                    <a:pt x="71622" y="3257406"/>
-                  </a:lnTo>
-                  <a:lnTo>
-                    <a:pt x="143245" y="3249839"/>
-                  </a:lnTo>
-                  <a:lnTo>
-                    <a:pt x="214867" y="3242128"/>
-                  </a:lnTo>
-                  <a:lnTo>
-                    <a:pt x="286490" y="3234268"/>
-                  </a:lnTo>
-                  <a:lnTo>
-                    <a:pt x="358112" y="3226259"/>
-                  </a:lnTo>
-                  <a:lnTo>
-                    <a:pt x="429735" y="3218096"/>
-                  </a:lnTo>
-                  <a:lnTo>
-                    <a:pt x="501357" y="3209776"/>
-                  </a:lnTo>
-                  <a:lnTo>
-                    <a:pt x="572980" y="3201298"/>
-                  </a:lnTo>
-                  <a:lnTo>
-                    <a:pt x="644602" y="3192657"/>
-                  </a:lnTo>
-                  <a:lnTo>
-                    <a:pt x="716225" y="3183850"/>
-                  </a:lnTo>
-                  <a:lnTo>
-                    <a:pt x="787847" y="3174875"/>
-                  </a:lnTo>
-                  <a:lnTo>
-                    <a:pt x="859470" y="3165728"/>
-                  </a:lnTo>
-                  <a:lnTo>
-                    <a:pt x="931092" y="3156406"/>
-                  </a:lnTo>
-                  <a:lnTo>
-                    <a:pt x="1002715" y="3146906"/>
-                  </a:lnTo>
-                  <a:lnTo>
-                    <a:pt x="1074337" y="3137223"/>
-                  </a:lnTo>
-                  <a:lnTo>
-                    <a:pt x="1145960" y="3127356"/>
-                  </a:lnTo>
-                  <a:lnTo>
-                    <a:pt x="1217582" y="3117299"/>
-                  </a:lnTo>
-                  <a:lnTo>
-                    <a:pt x="1289205" y="3107050"/>
-                  </a:lnTo>
-                  <a:lnTo>
-                    <a:pt x="1360827" y="3096605"/>
-                  </a:lnTo>
-                  <a:lnTo>
-                    <a:pt x="1432450" y="3085959"/>
-                  </a:lnTo>
-                  <a:lnTo>
-                    <a:pt x="1504073" y="3075110"/>
-                  </a:lnTo>
-                  <a:lnTo>
-                    <a:pt x="1575695" y="3064053"/>
-                  </a:lnTo>
-                  <a:lnTo>
-                    <a:pt x="1647318" y="3052785"/>
-                  </a:lnTo>
-                  <a:lnTo>
-                    <a:pt x="1718940" y="3041301"/>
-                  </a:lnTo>
-                  <a:lnTo>
-                    <a:pt x="1790563" y="3029596"/>
-                  </a:lnTo>
-                  <a:lnTo>
-                    <a:pt x="1862185" y="3017668"/>
-                  </a:lnTo>
-                  <a:lnTo>
-                    <a:pt x="1933808" y="3005512"/>
-                  </a:lnTo>
-                  <a:lnTo>
-                    <a:pt x="2005430" y="2993122"/>
-                  </a:lnTo>
-                  <a:lnTo>
-                    <a:pt x="2077053" y="2980496"/>
-                  </a:lnTo>
-                  <a:lnTo>
-                    <a:pt x="2148675" y="2967628"/>
-                  </a:lnTo>
-                  <a:lnTo>
-                    <a:pt x="2220298" y="2954513"/>
-                  </a:lnTo>
-                  <a:lnTo>
-                    <a:pt x="2291920" y="2941147"/>
-                  </a:lnTo>
-                  <a:lnTo>
-                    <a:pt x="2363543" y="2927526"/>
-                  </a:lnTo>
-                  <a:lnTo>
-                    <a:pt x="2435165" y="2913643"/>
-                  </a:lnTo>
-                  <a:lnTo>
-                    <a:pt x="2506788" y="2899495"/>
-                  </a:lnTo>
-                  <a:lnTo>
-                    <a:pt x="2578410" y="2885076"/>
-                  </a:lnTo>
-                  <a:lnTo>
-                    <a:pt x="2650033" y="2870381"/>
-                  </a:lnTo>
-                  <a:lnTo>
-                    <a:pt x="2721655" y="2855405"/>
-                  </a:lnTo>
-                  <a:lnTo>
-                    <a:pt x="2793278" y="2840142"/>
-                  </a:lnTo>
-                  <a:lnTo>
-                    <a:pt x="2864901" y="2824587"/>
-                  </a:lnTo>
-                  <a:lnTo>
-                    <a:pt x="2936523" y="2808733"/>
-                  </a:lnTo>
-                  <a:lnTo>
-                    <a:pt x="3008146" y="2792577"/>
-                  </a:lnTo>
-                  <a:lnTo>
-                    <a:pt x="3079768" y="2759657"/>
-                  </a:lnTo>
-                  <a:lnTo>
-                    <a:pt x="3151391" y="2700750"/>
-                  </a:lnTo>
-                  <a:lnTo>
-                    <a:pt x="3223013" y="2637957"/>
-                  </a:lnTo>
-                  <a:lnTo>
-                    <a:pt x="3294636" y="2571022"/>
-                  </a:lnTo>
-                  <a:lnTo>
-                    <a:pt x="3366258" y="2499671"/>
-                  </a:lnTo>
-                  <a:lnTo>
-                    <a:pt x="3437881" y="2423614"/>
-                  </a:lnTo>
-                  <a:lnTo>
-                    <a:pt x="3509503" y="2342539"/>
-                  </a:lnTo>
-                  <a:lnTo>
-                    <a:pt x="3581126" y="2256117"/>
-                  </a:lnTo>
-                  <a:lnTo>
-                    <a:pt x="3652748" y="2163993"/>
-                  </a:lnTo>
-                  <a:lnTo>
-                    <a:pt x="3724371" y="2065792"/>
-                  </a:lnTo>
-                  <a:lnTo>
-                    <a:pt x="3795993" y="1961113"/>
-                  </a:lnTo>
-                  <a:lnTo>
-                    <a:pt x="3867616" y="1849529"/>
-                  </a:lnTo>
-                  <a:lnTo>
-                    <a:pt x="3939238" y="1730584"/>
-                  </a:lnTo>
-                  <a:lnTo>
-                    <a:pt x="4010861" y="1603793"/>
-                  </a:lnTo>
-                  <a:lnTo>
-                    <a:pt x="4082483" y="1468638"/>
-                  </a:lnTo>
-                  <a:lnTo>
-                    <a:pt x="4154106" y="1324567"/>
-                  </a:lnTo>
-                  <a:lnTo>
-                    <a:pt x="4225729" y="1170993"/>
-                  </a:lnTo>
-                  <a:lnTo>
-                    <a:pt x="4297351" y="1007287"/>
-                  </a:lnTo>
-                  <a:lnTo>
-                    <a:pt x="4368974" y="832783"/>
-                  </a:lnTo>
-                  <a:lnTo>
-                    <a:pt x="4440596" y="646767"/>
-                  </a:lnTo>
-                  <a:lnTo>
-                    <a:pt x="4512219" y="448480"/>
-                  </a:lnTo>
-                  <a:lnTo>
-                    <a:pt x="4583841" y="237113"/>
-                  </a:lnTo>
-                  <a:lnTo>
-                    <a:pt x="4655464" y="11803"/>
-                  </a:lnTo>
-                  <a:lnTo>
-                    <a:pt x="4658984" y="0"/>
+                    <a:pt x="71622" y="3197145"/>
+                  </a:lnTo>
+                  <a:lnTo>
+                    <a:pt x="143245" y="3190006"/>
+                  </a:lnTo>
+                  <a:lnTo>
+                    <a:pt x="214867" y="3182755"/>
+                  </a:lnTo>
+                  <a:lnTo>
+                    <a:pt x="286490" y="3175390"/>
+                  </a:lnTo>
+                  <a:lnTo>
+                    <a:pt x="358112" y="3167910"/>
+                  </a:lnTo>
+                  <a:lnTo>
+                    <a:pt x="429735" y="3160312"/>
+                  </a:lnTo>
+                  <a:lnTo>
+                    <a:pt x="501357" y="3152596"/>
+                  </a:lnTo>
+                  <a:lnTo>
+                    <a:pt x="572980" y="3144759"/>
+                  </a:lnTo>
+                  <a:lnTo>
+                    <a:pt x="644602" y="3136799"/>
+                  </a:lnTo>
+                  <a:lnTo>
+                    <a:pt x="716225" y="3128714"/>
+                  </a:lnTo>
+                  <a:lnTo>
+                    <a:pt x="787847" y="3120502"/>
+                  </a:lnTo>
+                  <a:lnTo>
+                    <a:pt x="859470" y="3112162"/>
+                  </a:lnTo>
+                  <a:lnTo>
+                    <a:pt x="931092" y="3103691"/>
+                  </a:lnTo>
+                  <a:lnTo>
+                    <a:pt x="1002715" y="3095087"/>
+                  </a:lnTo>
+                  <a:lnTo>
+                    <a:pt x="1074337" y="3086348"/>
+                  </a:lnTo>
+                  <a:lnTo>
+                    <a:pt x="1145960" y="3077472"/>
+                  </a:lnTo>
+                  <a:lnTo>
+                    <a:pt x="1217582" y="3068458"/>
+                  </a:lnTo>
+                  <a:lnTo>
+                    <a:pt x="1289205" y="3059302"/>
+                  </a:lnTo>
+                  <a:lnTo>
+                    <a:pt x="1360827" y="3050002"/>
+                  </a:lnTo>
+                  <a:lnTo>
+                    <a:pt x="1432450" y="3040557"/>
+                  </a:lnTo>
+                  <a:lnTo>
+                    <a:pt x="1504073" y="3030963"/>
+                  </a:lnTo>
+                  <a:lnTo>
+                    <a:pt x="1575695" y="3021220"/>
+                  </a:lnTo>
+                  <a:lnTo>
+                    <a:pt x="1647318" y="3011323"/>
+                  </a:lnTo>
+                  <a:lnTo>
+                    <a:pt x="1718940" y="3001272"/>
+                  </a:lnTo>
+                  <a:lnTo>
+                    <a:pt x="1790563" y="2991063"/>
+                  </a:lnTo>
+                  <a:lnTo>
+                    <a:pt x="1862185" y="2980694"/>
+                  </a:lnTo>
+                  <a:lnTo>
+                    <a:pt x="1933808" y="2970162"/>
+                  </a:lnTo>
+                  <a:lnTo>
+                    <a:pt x="2005430" y="2959465"/>
+                  </a:lnTo>
+                  <a:lnTo>
+                    <a:pt x="2077053" y="2948601"/>
+                  </a:lnTo>
+                  <a:lnTo>
+                    <a:pt x="2148675" y="2937567"/>
+                  </a:lnTo>
+                  <a:lnTo>
+                    <a:pt x="2220298" y="2926359"/>
+                  </a:lnTo>
+                  <a:lnTo>
+                    <a:pt x="2291920" y="2914976"/>
+                  </a:lnTo>
+                  <a:lnTo>
+                    <a:pt x="2363543" y="2903414"/>
+                  </a:lnTo>
+                  <a:lnTo>
+                    <a:pt x="2435165" y="2891671"/>
+                  </a:lnTo>
+                  <a:lnTo>
+                    <a:pt x="2506788" y="2879745"/>
+                  </a:lnTo>
+                  <a:lnTo>
+                    <a:pt x="2578410" y="2867631"/>
+                  </a:lnTo>
+                  <a:lnTo>
+                    <a:pt x="2650033" y="2855327"/>
+                  </a:lnTo>
+                  <a:lnTo>
+                    <a:pt x="2721655" y="2842831"/>
+                  </a:lnTo>
+                  <a:lnTo>
+                    <a:pt x="2793278" y="2830138"/>
+                  </a:lnTo>
+                  <a:lnTo>
+                    <a:pt x="2864901" y="2817247"/>
+                  </a:lnTo>
+                  <a:lnTo>
+                    <a:pt x="2936523" y="2804154"/>
+                  </a:lnTo>
+                  <a:lnTo>
+                    <a:pt x="3008146" y="2790855"/>
+                  </a:lnTo>
+                  <a:lnTo>
+                    <a:pt x="3079768" y="2762364"/>
+                  </a:lnTo>
+                  <a:lnTo>
+                    <a:pt x="3151391" y="2710570"/>
+                  </a:lnTo>
+                  <a:lnTo>
+                    <a:pt x="3223013" y="2655762"/>
+                  </a:lnTo>
+                  <a:lnTo>
+                    <a:pt x="3294636" y="2597766"/>
+                  </a:lnTo>
+                  <a:lnTo>
+                    <a:pt x="3366258" y="2536396"/>
+                  </a:lnTo>
+                  <a:lnTo>
+                    <a:pt x="3437881" y="2471455"/>
+                  </a:lnTo>
+                  <a:lnTo>
+                    <a:pt x="3509503" y="2402737"/>
+                  </a:lnTo>
+                  <a:lnTo>
+                    <a:pt x="3581126" y="2330020"/>
+                  </a:lnTo>
+                  <a:lnTo>
+                    <a:pt x="3652748" y="2253073"/>
+                  </a:lnTo>
+                  <a:lnTo>
+                    <a:pt x="3724371" y="2171649"/>
+                  </a:lnTo>
+                  <a:lnTo>
+                    <a:pt x="3795993" y="2085488"/>
+                  </a:lnTo>
+                  <a:lnTo>
+                    <a:pt x="3867616" y="1994315"/>
+                  </a:lnTo>
+                  <a:lnTo>
+                    <a:pt x="3939238" y="1897837"/>
+                  </a:lnTo>
+                  <a:lnTo>
+                    <a:pt x="4010861" y="1795747"/>
+                  </a:lnTo>
+                  <a:lnTo>
+                    <a:pt x="4082483" y="1687717"/>
+                  </a:lnTo>
+                  <a:lnTo>
+                    <a:pt x="4154106" y="1573402"/>
+                  </a:lnTo>
+                  <a:lnTo>
+                    <a:pt x="4225729" y="1452437"/>
+                  </a:lnTo>
+                  <a:lnTo>
+                    <a:pt x="4297351" y="1324434"/>
+                  </a:lnTo>
+                  <a:lnTo>
+                    <a:pt x="4368974" y="1188984"/>
+                  </a:lnTo>
+                  <a:lnTo>
+                    <a:pt x="4440596" y="1045654"/>
+                  </a:lnTo>
+                  <a:lnTo>
+                    <a:pt x="4512219" y="893986"/>
+                  </a:lnTo>
+                  <a:lnTo>
+                    <a:pt x="4583841" y="733494"/>
+                  </a:lnTo>
+                  <a:lnTo>
+                    <a:pt x="4655464" y="563665"/>
+                  </a:lnTo>
+                  <a:lnTo>
+                    <a:pt x="4727086" y="383955"/>
+                  </a:lnTo>
+                  <a:lnTo>
+                    <a:pt x="4798709" y="193791"/>
+                  </a:lnTo>
+                  <a:lnTo>
+                    <a:pt x="4867684" y="0"/>
                   </a:lnTo>
                 </a:path>
               </a:pathLst>
@@ -3892,312 +3904,312 @@
           </p:nvSpPr>
           <p:spPr>
             <a:xfrm>
-              <a:off x="1172049" y="3014184"/>
-              <a:ext cx="7090630" cy="2477759"/>
+              <a:off x="1172049" y="3458094"/>
+              <a:ext cx="7090630" cy="2012858"/>
             </a:xfrm>
             <a:custGeom>
               <a:avLst/>
               <a:pathLst>
-                <a:path w="7090630" h="2477759">
+                <a:path w="7090630" h="2012858">
                   <a:moveTo>
                     <a:pt x="7090630" y="0"/>
                   </a:moveTo>
                   <a:lnTo>
-                    <a:pt x="7019007" y="47621"/>
-                  </a:lnTo>
-                  <a:lnTo>
-                    <a:pt x="6947385" y="94347"/>
-                  </a:lnTo>
-                  <a:lnTo>
-                    <a:pt x="6875762" y="140196"/>
-                  </a:lnTo>
-                  <a:lnTo>
-                    <a:pt x="6804139" y="185184"/>
-                  </a:lnTo>
-                  <a:lnTo>
-                    <a:pt x="6732517" y="229326"/>
-                  </a:lnTo>
-                  <a:lnTo>
-                    <a:pt x="6660894" y="272639"/>
-                  </a:lnTo>
-                  <a:lnTo>
-                    <a:pt x="6589272" y="315139"/>
-                  </a:lnTo>
-                  <a:lnTo>
-                    <a:pt x="6517649" y="356840"/>
-                  </a:lnTo>
-                  <a:lnTo>
-                    <a:pt x="6446027" y="397758"/>
-                  </a:lnTo>
-                  <a:lnTo>
-                    <a:pt x="6374404" y="437907"/>
-                  </a:lnTo>
-                  <a:lnTo>
-                    <a:pt x="6302782" y="477302"/>
-                  </a:lnTo>
-                  <a:lnTo>
-                    <a:pt x="6231159" y="515957"/>
-                  </a:lnTo>
-                  <a:lnTo>
-                    <a:pt x="6159537" y="553886"/>
-                  </a:lnTo>
-                  <a:lnTo>
-                    <a:pt x="6087914" y="591102"/>
-                  </a:lnTo>
-                  <a:lnTo>
-                    <a:pt x="6016292" y="627619"/>
-                  </a:lnTo>
-                  <a:lnTo>
-                    <a:pt x="5944669" y="663450"/>
-                  </a:lnTo>
-                  <a:lnTo>
-                    <a:pt x="5873047" y="698608"/>
-                  </a:lnTo>
-                  <a:lnTo>
-                    <a:pt x="5801424" y="733106"/>
-                  </a:lnTo>
-                  <a:lnTo>
-                    <a:pt x="5729802" y="766956"/>
-                  </a:lnTo>
-                  <a:lnTo>
-                    <a:pt x="5658179" y="800169"/>
-                  </a:lnTo>
-                  <a:lnTo>
-                    <a:pt x="5586557" y="832759"/>
-                  </a:lnTo>
-                  <a:lnTo>
-                    <a:pt x="5514934" y="864737"/>
-                  </a:lnTo>
-                  <a:lnTo>
-                    <a:pt x="5443311" y="896113"/>
-                  </a:lnTo>
-                  <a:lnTo>
-                    <a:pt x="5371689" y="926901"/>
-                  </a:lnTo>
-                  <a:lnTo>
-                    <a:pt x="5300066" y="957110"/>
-                  </a:lnTo>
-                  <a:lnTo>
-                    <a:pt x="5228444" y="986751"/>
-                  </a:lnTo>
-                  <a:lnTo>
-                    <a:pt x="5156821" y="1015836"/>
-                  </a:lnTo>
-                  <a:lnTo>
-                    <a:pt x="5085199" y="1044375"/>
-                  </a:lnTo>
-                  <a:lnTo>
-                    <a:pt x="5013576" y="1072377"/>
-                  </a:lnTo>
-                  <a:lnTo>
-                    <a:pt x="4941954" y="1099853"/>
-                  </a:lnTo>
-                  <a:lnTo>
-                    <a:pt x="4870331" y="1126813"/>
-                  </a:lnTo>
-                  <a:lnTo>
-                    <a:pt x="4798709" y="1153267"/>
-                  </a:lnTo>
-                  <a:lnTo>
-                    <a:pt x="4727086" y="1179224"/>
-                  </a:lnTo>
-                  <a:lnTo>
-                    <a:pt x="4655464" y="1204693"/>
-                  </a:lnTo>
-                  <a:lnTo>
-                    <a:pt x="4583841" y="1229683"/>
-                  </a:lnTo>
-                  <a:lnTo>
-                    <a:pt x="4512219" y="1254204"/>
-                  </a:lnTo>
-                  <a:lnTo>
-                    <a:pt x="4440596" y="1278265"/>
-                  </a:lnTo>
-                  <a:lnTo>
-                    <a:pt x="4368974" y="1301874"/>
-                  </a:lnTo>
-                  <a:lnTo>
-                    <a:pt x="4297351" y="1325039"/>
-                  </a:lnTo>
-                  <a:lnTo>
-                    <a:pt x="4225729" y="1347769"/>
-                  </a:lnTo>
-                  <a:lnTo>
-                    <a:pt x="4154106" y="1370071"/>
-                  </a:lnTo>
-                  <a:lnTo>
-                    <a:pt x="4082483" y="1391955"/>
-                  </a:lnTo>
-                  <a:lnTo>
-                    <a:pt x="4010861" y="1413428"/>
-                  </a:lnTo>
-                  <a:lnTo>
-                    <a:pt x="3939238" y="1434498"/>
-                  </a:lnTo>
-                  <a:lnTo>
-                    <a:pt x="3867616" y="1455171"/>
-                  </a:lnTo>
-                  <a:lnTo>
-                    <a:pt x="3795993" y="1475457"/>
-                  </a:lnTo>
-                  <a:lnTo>
-                    <a:pt x="3724371" y="1495361"/>
-                  </a:lnTo>
-                  <a:lnTo>
-                    <a:pt x="3652748" y="1514891"/>
-                  </a:lnTo>
-                  <a:lnTo>
-                    <a:pt x="3581126" y="1534055"/>
-                  </a:lnTo>
-                  <a:lnTo>
-                    <a:pt x="3509503" y="1552858"/>
-                  </a:lnTo>
-                  <a:lnTo>
-                    <a:pt x="3437881" y="1571309"/>
-                  </a:lnTo>
-                  <a:lnTo>
-                    <a:pt x="3366258" y="1589412"/>
-                  </a:lnTo>
-                  <a:lnTo>
-                    <a:pt x="3294636" y="1607176"/>
-                  </a:lnTo>
-                  <a:lnTo>
-                    <a:pt x="3223013" y="1624606"/>
-                  </a:lnTo>
-                  <a:lnTo>
-                    <a:pt x="3151391" y="1641708"/>
-                  </a:lnTo>
-                  <a:lnTo>
-                    <a:pt x="3079768" y="1658489"/>
-                  </a:lnTo>
-                  <a:lnTo>
-                    <a:pt x="3008146" y="1697297"/>
-                  </a:lnTo>
-                  <a:lnTo>
-                    <a:pt x="2936523" y="1749139"/>
-                  </a:lnTo>
-                  <a:lnTo>
-                    <a:pt x="2864901" y="1797773"/>
-                  </a:lnTo>
-                  <a:lnTo>
-                    <a:pt x="2793278" y="1843397"/>
-                  </a:lnTo>
-                  <a:lnTo>
-                    <a:pt x="2721655" y="1886197"/>
-                  </a:lnTo>
-                  <a:lnTo>
-                    <a:pt x="2650033" y="1926349"/>
-                  </a:lnTo>
-                  <a:lnTo>
-                    <a:pt x="2578410" y="1964016"/>
-                  </a:lnTo>
-                  <a:lnTo>
-                    <a:pt x="2506788" y="1999352"/>
-                  </a:lnTo>
-                  <a:lnTo>
-                    <a:pt x="2435165" y="2032502"/>
-                  </a:lnTo>
-                  <a:lnTo>
-                    <a:pt x="2363543" y="2063600"/>
-                  </a:lnTo>
-                  <a:lnTo>
-                    <a:pt x="2291920" y="2092773"/>
-                  </a:lnTo>
-                  <a:lnTo>
-                    <a:pt x="2220298" y="2120141"/>
-                  </a:lnTo>
-                  <a:lnTo>
-                    <a:pt x="2148675" y="2145816"/>
-                  </a:lnTo>
-                  <a:lnTo>
-                    <a:pt x="2077053" y="2169902"/>
-                  </a:lnTo>
-                  <a:lnTo>
-                    <a:pt x="2005430" y="2192497"/>
-                  </a:lnTo>
-                  <a:lnTo>
-                    <a:pt x="1933808" y="2213694"/>
-                  </a:lnTo>
-                  <a:lnTo>
-                    <a:pt x="1862185" y="2233579"/>
-                  </a:lnTo>
-                  <a:lnTo>
-                    <a:pt x="1790563" y="2252233"/>
-                  </a:lnTo>
-                  <a:lnTo>
-                    <a:pt x="1718940" y="2269733"/>
-                  </a:lnTo>
-                  <a:lnTo>
-                    <a:pt x="1647318" y="2286150"/>
-                  </a:lnTo>
-                  <a:lnTo>
-                    <a:pt x="1575695" y="2301552"/>
-                  </a:lnTo>
-                  <a:lnTo>
-                    <a:pt x="1504073" y="2316000"/>
-                  </a:lnTo>
-                  <a:lnTo>
-                    <a:pt x="1432450" y="2329554"/>
-                  </a:lnTo>
-                  <a:lnTo>
-                    <a:pt x="1360827" y="2342269"/>
-                  </a:lnTo>
-                  <a:lnTo>
-                    <a:pt x="1289205" y="2354197"/>
-                  </a:lnTo>
-                  <a:lnTo>
-                    <a:pt x="1217582" y="2365387"/>
-                  </a:lnTo>
-                  <a:lnTo>
-                    <a:pt x="1145960" y="2375885"/>
-                  </a:lnTo>
-                  <a:lnTo>
-                    <a:pt x="1074337" y="2385733"/>
-                  </a:lnTo>
-                  <a:lnTo>
-                    <a:pt x="1002715" y="2394972"/>
-                  </a:lnTo>
-                  <a:lnTo>
-                    <a:pt x="931092" y="2403639"/>
-                  </a:lnTo>
-                  <a:lnTo>
-                    <a:pt x="859470" y="2411769"/>
-                  </a:lnTo>
-                  <a:lnTo>
-                    <a:pt x="787847" y="2419396"/>
-                  </a:lnTo>
-                  <a:lnTo>
-                    <a:pt x="716225" y="2426552"/>
-                  </a:lnTo>
-                  <a:lnTo>
-                    <a:pt x="644602" y="2433264"/>
-                  </a:lnTo>
-                  <a:lnTo>
-                    <a:pt x="572980" y="2439562"/>
-                  </a:lnTo>
-                  <a:lnTo>
-                    <a:pt x="501357" y="2445469"/>
-                  </a:lnTo>
-                  <a:lnTo>
-                    <a:pt x="429735" y="2451011"/>
-                  </a:lnTo>
-                  <a:lnTo>
-                    <a:pt x="358112" y="2456210"/>
-                  </a:lnTo>
-                  <a:lnTo>
-                    <a:pt x="286490" y="2461087"/>
-                  </a:lnTo>
-                  <a:lnTo>
-                    <a:pt x="214867" y="2465662"/>
-                  </a:lnTo>
-                  <a:lnTo>
-                    <a:pt x="143245" y="2469955"/>
-                  </a:lnTo>
-                  <a:lnTo>
-                    <a:pt x="71622" y="2473981"/>
-                  </a:lnTo>
-                  <a:lnTo>
-                    <a:pt x="0" y="2477759"/>
+                    <a:pt x="7019007" y="32268"/>
+                  </a:lnTo>
+                  <a:lnTo>
+                    <a:pt x="6947385" y="64039"/>
+                  </a:lnTo>
+                  <a:lnTo>
+                    <a:pt x="6875762" y="95319"/>
+                  </a:lnTo>
+                  <a:lnTo>
+                    <a:pt x="6804139" y="126117"/>
+                  </a:lnTo>
+                  <a:lnTo>
+                    <a:pt x="6732517" y="156439"/>
+                  </a:lnTo>
+                  <a:lnTo>
+                    <a:pt x="6660894" y="186294"/>
+                  </a:lnTo>
+                  <a:lnTo>
+                    <a:pt x="6589272" y="215688"/>
+                  </a:lnTo>
+                  <a:lnTo>
+                    <a:pt x="6517649" y="244628"/>
+                  </a:lnTo>
+                  <a:lnTo>
+                    <a:pt x="6446027" y="273122"/>
+                  </a:lnTo>
+                  <a:lnTo>
+                    <a:pt x="6374404" y="301176"/>
+                  </a:lnTo>
+                  <a:lnTo>
+                    <a:pt x="6302782" y="328797"/>
+                  </a:lnTo>
+                  <a:lnTo>
+                    <a:pt x="6231159" y="355992"/>
+                  </a:lnTo>
+                  <a:lnTo>
+                    <a:pt x="6159537" y="382767"/>
+                  </a:lnTo>
+                  <a:lnTo>
+                    <a:pt x="6087914" y="409129"/>
+                  </a:lnTo>
+                  <a:lnTo>
+                    <a:pt x="6016292" y="435084"/>
+                  </a:lnTo>
+                  <a:lnTo>
+                    <a:pt x="5944669" y="460639"/>
+                  </a:lnTo>
+                  <a:lnTo>
+                    <a:pt x="5873047" y="485799"/>
+                  </a:lnTo>
+                  <a:lnTo>
+                    <a:pt x="5801424" y="510571"/>
+                  </a:lnTo>
+                  <a:lnTo>
+                    <a:pt x="5729802" y="534961"/>
+                  </a:lnTo>
+                  <a:lnTo>
+                    <a:pt x="5658179" y="558975"/>
+                  </a:lnTo>
+                  <a:lnTo>
+                    <a:pt x="5586557" y="582618"/>
+                  </a:lnTo>
+                  <a:lnTo>
+                    <a:pt x="5514934" y="605896"/>
+                  </a:lnTo>
+                  <a:lnTo>
+                    <a:pt x="5443311" y="628815"/>
+                  </a:lnTo>
+                  <a:lnTo>
+                    <a:pt x="5371689" y="651380"/>
+                  </a:lnTo>
+                  <a:lnTo>
+                    <a:pt x="5300066" y="673597"/>
+                  </a:lnTo>
+                  <a:lnTo>
+                    <a:pt x="5228444" y="695471"/>
+                  </a:lnTo>
+                  <a:lnTo>
+                    <a:pt x="5156821" y="717007"/>
+                  </a:lnTo>
+                  <a:lnTo>
+                    <a:pt x="5085199" y="738212"/>
+                  </a:lnTo>
+                  <a:lnTo>
+                    <a:pt x="5013576" y="759089"/>
+                  </a:lnTo>
+                  <a:lnTo>
+                    <a:pt x="4941954" y="779644"/>
+                  </a:lnTo>
+                  <a:lnTo>
+                    <a:pt x="4870331" y="799881"/>
+                  </a:lnTo>
+                  <a:lnTo>
+                    <a:pt x="4798709" y="819807"/>
+                  </a:lnTo>
+                  <a:lnTo>
+                    <a:pt x="4727086" y="839425"/>
+                  </a:lnTo>
+                  <a:lnTo>
+                    <a:pt x="4655464" y="858740"/>
+                  </a:lnTo>
+                  <a:lnTo>
+                    <a:pt x="4583841" y="877757"/>
+                  </a:lnTo>
+                  <a:lnTo>
+                    <a:pt x="4512219" y="896481"/>
+                  </a:lnTo>
+                  <a:lnTo>
+                    <a:pt x="4440596" y="914915"/>
+                  </a:lnTo>
+                  <a:lnTo>
+                    <a:pt x="4368974" y="933066"/>
+                  </a:lnTo>
+                  <a:lnTo>
+                    <a:pt x="4297351" y="950936"/>
+                  </a:lnTo>
+                  <a:lnTo>
+                    <a:pt x="4225729" y="968530"/>
+                  </a:lnTo>
+                  <a:lnTo>
+                    <a:pt x="4154106" y="985853"/>
+                  </a:lnTo>
+                  <a:lnTo>
+                    <a:pt x="4082483" y="1002909"/>
+                  </a:lnTo>
+                  <a:lnTo>
+                    <a:pt x="4010861" y="1019701"/>
+                  </a:lnTo>
+                  <a:lnTo>
+                    <a:pt x="3939238" y="1036235"/>
+                  </a:lnTo>
+                  <a:lnTo>
+                    <a:pt x="3867616" y="1052513"/>
+                  </a:lnTo>
+                  <a:lnTo>
+                    <a:pt x="3795993" y="1068540"/>
+                  </a:lnTo>
+                  <a:lnTo>
+                    <a:pt x="3724371" y="1084319"/>
+                  </a:lnTo>
+                  <a:lnTo>
+                    <a:pt x="3652748" y="1099855"/>
+                  </a:lnTo>
+                  <a:lnTo>
+                    <a:pt x="3581126" y="1115152"/>
+                  </a:lnTo>
+                  <a:lnTo>
+                    <a:pt x="3509503" y="1130212"/>
+                  </a:lnTo>
+                  <a:lnTo>
+                    <a:pt x="3437881" y="1145040"/>
+                  </a:lnTo>
+                  <a:lnTo>
+                    <a:pt x="3366258" y="1159639"/>
+                  </a:lnTo>
+                  <a:lnTo>
+                    <a:pt x="3294636" y="1174013"/>
+                  </a:lnTo>
+                  <a:lnTo>
+                    <a:pt x="3223013" y="1188165"/>
+                  </a:lnTo>
+                  <a:lnTo>
+                    <a:pt x="3151391" y="1202099"/>
+                  </a:lnTo>
+                  <a:lnTo>
+                    <a:pt x="3079768" y="1215818"/>
+                  </a:lnTo>
+                  <a:lnTo>
+                    <a:pt x="3008146" y="1249780"/>
+                  </a:lnTo>
+                  <a:lnTo>
+                    <a:pt x="2936523" y="1296036"/>
+                  </a:lnTo>
+                  <a:lnTo>
+                    <a:pt x="2864901" y="1339749"/>
+                  </a:lnTo>
+                  <a:lnTo>
+                    <a:pt x="2793278" y="1381058"/>
+                  </a:lnTo>
+                  <a:lnTo>
+                    <a:pt x="2721655" y="1420096"/>
+                  </a:lnTo>
+                  <a:lnTo>
+                    <a:pt x="2650033" y="1456988"/>
+                  </a:lnTo>
+                  <a:lnTo>
+                    <a:pt x="2578410" y="1491851"/>
+                  </a:lnTo>
+                  <a:lnTo>
+                    <a:pt x="2506788" y="1524798"/>
+                  </a:lnTo>
+                  <a:lnTo>
+                    <a:pt x="2435165" y="1555934"/>
+                  </a:lnTo>
+                  <a:lnTo>
+                    <a:pt x="2363543" y="1585357"/>
+                  </a:lnTo>
+                  <a:lnTo>
+                    <a:pt x="2291920" y="1613163"/>
+                  </a:lnTo>
+                  <a:lnTo>
+                    <a:pt x="2220298" y="1639441"/>
+                  </a:lnTo>
+                  <a:lnTo>
+                    <a:pt x="2148675" y="1664273"/>
+                  </a:lnTo>
+                  <a:lnTo>
+                    <a:pt x="2077053" y="1687740"/>
+                  </a:lnTo>
+                  <a:lnTo>
+                    <a:pt x="2005430" y="1709917"/>
+                  </a:lnTo>
+                  <a:lnTo>
+                    <a:pt x="1933808" y="1730875"/>
+                  </a:lnTo>
+                  <a:lnTo>
+                    <a:pt x="1862185" y="1750681"/>
+                  </a:lnTo>
+                  <a:lnTo>
+                    <a:pt x="1790563" y="1769397"/>
+                  </a:lnTo>
+                  <a:lnTo>
+                    <a:pt x="1718940" y="1787085"/>
+                  </a:lnTo>
+                  <a:lnTo>
+                    <a:pt x="1647318" y="1803800"/>
+                  </a:lnTo>
+                  <a:lnTo>
+                    <a:pt x="1575695" y="1819596"/>
+                  </a:lnTo>
+                  <a:lnTo>
+                    <a:pt x="1504073" y="1834524"/>
+                  </a:lnTo>
+                  <a:lnTo>
+                    <a:pt x="1432450" y="1848631"/>
+                  </a:lnTo>
+                  <a:lnTo>
+                    <a:pt x="1360827" y="1861962"/>
+                  </a:lnTo>
+                  <a:lnTo>
+                    <a:pt x="1289205" y="1874561"/>
+                  </a:lnTo>
+                  <a:lnTo>
+                    <a:pt x="1217582" y="1886467"/>
+                  </a:lnTo>
+                  <a:lnTo>
+                    <a:pt x="1145960" y="1897718"/>
+                  </a:lnTo>
+                  <a:lnTo>
+                    <a:pt x="1074337" y="1908351"/>
+                  </a:lnTo>
+                  <a:lnTo>
+                    <a:pt x="1002715" y="1918399"/>
+                  </a:lnTo>
+                  <a:lnTo>
+                    <a:pt x="931092" y="1927894"/>
+                  </a:lnTo>
+                  <a:lnTo>
+                    <a:pt x="859470" y="1936868"/>
+                  </a:lnTo>
+                  <a:lnTo>
+                    <a:pt x="787847" y="1945348"/>
+                  </a:lnTo>
+                  <a:lnTo>
+                    <a:pt x="716225" y="1953362"/>
+                  </a:lnTo>
+                  <a:lnTo>
+                    <a:pt x="644602" y="1960935"/>
+                  </a:lnTo>
+                  <a:lnTo>
+                    <a:pt x="572980" y="1968093"/>
+                  </a:lnTo>
+                  <a:lnTo>
+                    <a:pt x="501357" y="1974856"/>
+                  </a:lnTo>
+                  <a:lnTo>
+                    <a:pt x="429735" y="1981248"/>
+                  </a:lnTo>
+                  <a:lnTo>
+                    <a:pt x="358112" y="1987288"/>
+                  </a:lnTo>
+                  <a:lnTo>
+                    <a:pt x="286490" y="1992996"/>
+                  </a:lnTo>
+                  <a:lnTo>
+                    <a:pt x="214867" y="1998391"/>
+                  </a:lnTo>
+                  <a:lnTo>
+                    <a:pt x="143245" y="2003488"/>
+                  </a:lnTo>
+                  <a:lnTo>
+                    <a:pt x="71622" y="2008306"/>
+                  </a:lnTo>
+                  <a:lnTo>
+                    <a:pt x="0" y="2012858"/>
                   </a:lnTo>
                 </a:path>
               </a:pathLst>
@@ -4218,248 +4230,263 @@
           <p:spPr>
             <a:xfrm>
               <a:off x="1172049" y="1896563"/>
-              <a:ext cx="5531195" cy="3503622"/>
+              <a:ext cx="5900974" cy="3465308"/>
             </a:xfrm>
             <a:custGeom>
               <a:avLst/>
               <a:pathLst>
-                <a:path w="5531195" h="3503622">
+                <a:path w="5900974" h="3465308">
                   <a:moveTo>
-                    <a:pt x="0" y="3503622"/>
+                    <a:pt x="0" y="3465308"/>
                   </a:moveTo>
                   <a:lnTo>
-                    <a:pt x="71622" y="3497320"/>
-                  </a:lnTo>
-                  <a:lnTo>
-                    <a:pt x="143245" y="3490750"/>
-                  </a:lnTo>
-                  <a:lnTo>
-                    <a:pt x="214867" y="3483904"/>
-                  </a:lnTo>
-                  <a:lnTo>
-                    <a:pt x="286490" y="3476767"/>
-                  </a:lnTo>
-                  <a:lnTo>
-                    <a:pt x="358112" y="3469329"/>
-                  </a:lnTo>
-                  <a:lnTo>
-                    <a:pt x="429735" y="3461576"/>
-                  </a:lnTo>
-                  <a:lnTo>
-                    <a:pt x="501357" y="3453495"/>
-                  </a:lnTo>
-                  <a:lnTo>
-                    <a:pt x="572980" y="3445073"/>
-                  </a:lnTo>
-                  <a:lnTo>
-                    <a:pt x="644602" y="3436294"/>
-                  </a:lnTo>
-                  <a:lnTo>
-                    <a:pt x="716225" y="3427144"/>
-                  </a:lnTo>
-                  <a:lnTo>
-                    <a:pt x="787847" y="3417607"/>
-                  </a:lnTo>
-                  <a:lnTo>
-                    <a:pt x="859470" y="3407667"/>
-                  </a:lnTo>
-                  <a:lnTo>
-                    <a:pt x="931092" y="3397306"/>
-                  </a:lnTo>
-                  <a:lnTo>
-                    <a:pt x="1002715" y="3386507"/>
-                  </a:lnTo>
-                  <a:lnTo>
-                    <a:pt x="1074337" y="3375251"/>
-                  </a:lnTo>
-                  <a:lnTo>
-                    <a:pt x="1145960" y="3363520"/>
-                  </a:lnTo>
-                  <a:lnTo>
-                    <a:pt x="1217582" y="3351292"/>
-                  </a:lnTo>
-                  <a:lnTo>
-                    <a:pt x="1289205" y="3338547"/>
-                  </a:lnTo>
-                  <a:lnTo>
-                    <a:pt x="1360827" y="3325263"/>
-                  </a:lnTo>
-                  <a:lnTo>
-                    <a:pt x="1432450" y="3311417"/>
-                  </a:lnTo>
-                  <a:lnTo>
-                    <a:pt x="1504073" y="3296985"/>
-                  </a:lnTo>
-                  <a:lnTo>
-                    <a:pt x="1575695" y="3281944"/>
-                  </a:lnTo>
-                  <a:lnTo>
-                    <a:pt x="1647318" y="3266266"/>
-                  </a:lnTo>
-                  <a:lnTo>
-                    <a:pt x="1718940" y="3249925"/>
-                  </a:lnTo>
-                  <a:lnTo>
-                    <a:pt x="1790563" y="3232893"/>
-                  </a:lnTo>
-                  <a:lnTo>
-                    <a:pt x="1862185" y="3215140"/>
-                  </a:lnTo>
-                  <a:lnTo>
-                    <a:pt x="1933808" y="3196637"/>
-                  </a:lnTo>
-                  <a:lnTo>
-                    <a:pt x="2005430" y="3177351"/>
-                  </a:lnTo>
-                  <a:lnTo>
-                    <a:pt x="2077053" y="3157250"/>
-                  </a:lnTo>
-                  <a:lnTo>
-                    <a:pt x="2148675" y="3136298"/>
-                  </a:lnTo>
-                  <a:lnTo>
-                    <a:pt x="2220298" y="3114461"/>
-                  </a:lnTo>
-                  <a:lnTo>
-                    <a:pt x="2291920" y="3091699"/>
-                  </a:lnTo>
-                  <a:lnTo>
-                    <a:pt x="2363543" y="3067976"/>
-                  </a:lnTo>
-                  <a:lnTo>
-                    <a:pt x="2435165" y="3043248"/>
-                  </a:lnTo>
-                  <a:lnTo>
-                    <a:pt x="2506788" y="3017475"/>
-                  </a:lnTo>
-                  <a:lnTo>
-                    <a:pt x="2578410" y="2990612"/>
-                  </a:lnTo>
-                  <a:lnTo>
-                    <a:pt x="2650033" y="2962613"/>
-                  </a:lnTo>
-                  <a:lnTo>
-                    <a:pt x="2721655" y="2933430"/>
-                  </a:lnTo>
-                  <a:lnTo>
-                    <a:pt x="2793278" y="2903012"/>
-                  </a:lnTo>
-                  <a:lnTo>
-                    <a:pt x="2864901" y="2871308"/>
-                  </a:lnTo>
-                  <a:lnTo>
-                    <a:pt x="2936523" y="2838264"/>
-                  </a:lnTo>
-                  <a:lnTo>
-                    <a:pt x="3008146" y="2803821"/>
-                  </a:lnTo>
-                  <a:lnTo>
-                    <a:pt x="3079768" y="2767922"/>
-                  </a:lnTo>
-                  <a:lnTo>
-                    <a:pt x="3151391" y="2730505"/>
-                  </a:lnTo>
-                  <a:lnTo>
-                    <a:pt x="3223013" y="2691505"/>
-                  </a:lnTo>
-                  <a:lnTo>
-                    <a:pt x="3294636" y="2650856"/>
-                  </a:lnTo>
-                  <a:lnTo>
-                    <a:pt x="3366258" y="2608487"/>
-                  </a:lnTo>
-                  <a:lnTo>
-                    <a:pt x="3437881" y="2564327"/>
-                  </a:lnTo>
-                  <a:lnTo>
-                    <a:pt x="3509503" y="2518299"/>
-                  </a:lnTo>
-                  <a:lnTo>
-                    <a:pt x="3581126" y="2470325"/>
-                  </a:lnTo>
-                  <a:lnTo>
-                    <a:pt x="3652748" y="2420321"/>
-                  </a:lnTo>
-                  <a:lnTo>
-                    <a:pt x="3724371" y="2368203"/>
-                  </a:lnTo>
-                  <a:lnTo>
-                    <a:pt x="3795993" y="2313880"/>
-                  </a:lnTo>
-                  <a:lnTo>
-                    <a:pt x="3867616" y="2257260"/>
-                  </a:lnTo>
-                  <a:lnTo>
-                    <a:pt x="3939238" y="2198246"/>
-                  </a:lnTo>
-                  <a:lnTo>
-                    <a:pt x="4010861" y="2136735"/>
-                  </a:lnTo>
-                  <a:lnTo>
-                    <a:pt x="4082483" y="2072623"/>
-                  </a:lnTo>
-                  <a:lnTo>
-                    <a:pt x="4154106" y="2005800"/>
-                  </a:lnTo>
-                  <a:lnTo>
-                    <a:pt x="4225729" y="1936150"/>
-                  </a:lnTo>
-                  <a:lnTo>
-                    <a:pt x="4297351" y="1863555"/>
-                  </a:lnTo>
-                  <a:lnTo>
-                    <a:pt x="4368974" y="1787890"/>
-                  </a:lnTo>
-                  <a:lnTo>
-                    <a:pt x="4440596" y="1709024"/>
-                  </a:lnTo>
-                  <a:lnTo>
-                    <a:pt x="4512219" y="1626823"/>
-                  </a:lnTo>
-                  <a:lnTo>
-                    <a:pt x="4583841" y="1541145"/>
-                  </a:lnTo>
-                  <a:lnTo>
-                    <a:pt x="4655464" y="1451844"/>
-                  </a:lnTo>
-                  <a:lnTo>
-                    <a:pt x="4727086" y="1358766"/>
-                  </a:lnTo>
-                  <a:lnTo>
-                    <a:pt x="4798709" y="1261752"/>
-                  </a:lnTo>
-                  <a:lnTo>
-                    <a:pt x="4870331" y="1160635"/>
-                  </a:lnTo>
-                  <a:lnTo>
-                    <a:pt x="4941954" y="1055241"/>
-                  </a:lnTo>
-                  <a:lnTo>
-                    <a:pt x="5013576" y="945389"/>
-                  </a:lnTo>
-                  <a:lnTo>
-                    <a:pt x="5085199" y="830892"/>
-                  </a:lnTo>
-                  <a:lnTo>
-                    <a:pt x="5156821" y="711552"/>
-                  </a:lnTo>
-                  <a:lnTo>
-                    <a:pt x="5228444" y="587165"/>
-                  </a:lnTo>
-                  <a:lnTo>
-                    <a:pt x="5300066" y="457518"/>
-                  </a:lnTo>
-                  <a:lnTo>
-                    <a:pt x="5371689" y="322387"/>
-                  </a:lnTo>
-                  <a:lnTo>
-                    <a:pt x="5443311" y="181541"/>
-                  </a:lnTo>
-                  <a:lnTo>
-                    <a:pt x="5514934" y="34739"/>
-                  </a:lnTo>
-                  <a:lnTo>
-                    <a:pt x="5531195" y="0"/>
+                    <a:pt x="71622" y="3458431"/>
+                  </a:lnTo>
+                  <a:lnTo>
+                    <a:pt x="143245" y="3451302"/>
+                  </a:lnTo>
+                  <a:lnTo>
+                    <a:pt x="214867" y="3443911"/>
+                  </a:lnTo>
+                  <a:lnTo>
+                    <a:pt x="286490" y="3436249"/>
+                  </a:lnTo>
+                  <a:lnTo>
+                    <a:pt x="358112" y="3428306"/>
+                  </a:lnTo>
+                  <a:lnTo>
+                    <a:pt x="429735" y="3420071"/>
+                  </a:lnTo>
+                  <a:lnTo>
+                    <a:pt x="501357" y="3411534"/>
+                  </a:lnTo>
+                  <a:lnTo>
+                    <a:pt x="572980" y="3402683"/>
+                  </a:lnTo>
+                  <a:lnTo>
+                    <a:pt x="644602" y="3393508"/>
+                  </a:lnTo>
+                  <a:lnTo>
+                    <a:pt x="716225" y="3383996"/>
+                  </a:lnTo>
+                  <a:lnTo>
+                    <a:pt x="787847" y="3374134"/>
+                  </a:lnTo>
+                  <a:lnTo>
+                    <a:pt x="859470" y="3363911"/>
+                  </a:lnTo>
+                  <a:lnTo>
+                    <a:pt x="931092" y="3353312"/>
+                  </a:lnTo>
+                  <a:lnTo>
+                    <a:pt x="1002715" y="3342324"/>
+                  </a:lnTo>
+                  <a:lnTo>
+                    <a:pt x="1074337" y="3330933"/>
+                  </a:lnTo>
+                  <a:lnTo>
+                    <a:pt x="1145960" y="3319124"/>
+                  </a:lnTo>
+                  <a:lnTo>
+                    <a:pt x="1217582" y="3306882"/>
+                  </a:lnTo>
+                  <a:lnTo>
+                    <a:pt x="1289205" y="3294189"/>
+                  </a:lnTo>
+                  <a:lnTo>
+                    <a:pt x="1360827" y="3281031"/>
+                  </a:lnTo>
+                  <a:lnTo>
+                    <a:pt x="1432450" y="3267391"/>
+                  </a:lnTo>
+                  <a:lnTo>
+                    <a:pt x="1504073" y="3253249"/>
+                  </a:lnTo>
+                  <a:lnTo>
+                    <a:pt x="1575695" y="3238588"/>
+                  </a:lnTo>
+                  <a:lnTo>
+                    <a:pt x="1647318" y="3223389"/>
+                  </a:lnTo>
+                  <a:lnTo>
+                    <a:pt x="1718940" y="3207632"/>
+                  </a:lnTo>
+                  <a:lnTo>
+                    <a:pt x="1790563" y="3191297"/>
+                  </a:lnTo>
+                  <a:lnTo>
+                    <a:pt x="1862185" y="3174362"/>
+                  </a:lnTo>
+                  <a:lnTo>
+                    <a:pt x="1933808" y="3156805"/>
+                  </a:lnTo>
+                  <a:lnTo>
+                    <a:pt x="2005430" y="3138604"/>
+                  </a:lnTo>
+                  <a:lnTo>
+                    <a:pt x="2077053" y="3119735"/>
+                  </a:lnTo>
+                  <a:lnTo>
+                    <a:pt x="2148675" y="3100173"/>
+                  </a:lnTo>
+                  <a:lnTo>
+                    <a:pt x="2220298" y="3079894"/>
+                  </a:lnTo>
+                  <a:lnTo>
+                    <a:pt x="2291920" y="3058869"/>
+                  </a:lnTo>
+                  <a:lnTo>
+                    <a:pt x="2363543" y="3037073"/>
+                  </a:lnTo>
+                  <a:lnTo>
+                    <a:pt x="2435165" y="3014477"/>
+                  </a:lnTo>
+                  <a:lnTo>
+                    <a:pt x="2506788" y="2991052"/>
+                  </a:lnTo>
+                  <a:lnTo>
+                    <a:pt x="2578410" y="2966766"/>
+                  </a:lnTo>
+                  <a:lnTo>
+                    <a:pt x="2650033" y="2941589"/>
+                  </a:lnTo>
+                  <a:lnTo>
+                    <a:pt x="2721655" y="2915488"/>
+                  </a:lnTo>
+                  <a:lnTo>
+                    <a:pt x="2793278" y="2888429"/>
+                  </a:lnTo>
+                  <a:lnTo>
+                    <a:pt x="2864901" y="2860377"/>
+                  </a:lnTo>
+                  <a:lnTo>
+                    <a:pt x="2936523" y="2831294"/>
+                  </a:lnTo>
+                  <a:lnTo>
+                    <a:pt x="3008146" y="2801145"/>
+                  </a:lnTo>
+                  <a:lnTo>
+                    <a:pt x="3079768" y="2769888"/>
+                  </a:lnTo>
+                  <a:lnTo>
+                    <a:pt x="3151391" y="2737484"/>
+                  </a:lnTo>
+                  <a:lnTo>
+                    <a:pt x="3223013" y="2703891"/>
+                  </a:lnTo>
+                  <a:lnTo>
+                    <a:pt x="3294636" y="2669065"/>
+                  </a:lnTo>
+                  <a:lnTo>
+                    <a:pt x="3366258" y="2632960"/>
+                  </a:lnTo>
+                  <a:lnTo>
+                    <a:pt x="3437881" y="2595530"/>
+                  </a:lnTo>
+                  <a:lnTo>
+                    <a:pt x="3509503" y="2556726"/>
+                  </a:lnTo>
+                  <a:lnTo>
+                    <a:pt x="3581126" y="2516497"/>
+                  </a:lnTo>
+                  <a:lnTo>
+                    <a:pt x="3652748" y="2474792"/>
+                  </a:lnTo>
+                  <a:lnTo>
+                    <a:pt x="3724371" y="2431556"/>
+                  </a:lnTo>
+                  <a:lnTo>
+                    <a:pt x="3795993" y="2386733"/>
+                  </a:lnTo>
+                  <a:lnTo>
+                    <a:pt x="3867616" y="2340264"/>
+                  </a:lnTo>
+                  <a:lnTo>
+                    <a:pt x="3939238" y="2292090"/>
+                  </a:lnTo>
+                  <a:lnTo>
+                    <a:pt x="4010861" y="2242147"/>
+                  </a:lnTo>
+                  <a:lnTo>
+                    <a:pt x="4082483" y="2190371"/>
+                  </a:lnTo>
+                  <a:lnTo>
+                    <a:pt x="4154106" y="2136695"/>
+                  </a:lnTo>
+                  <a:lnTo>
+                    <a:pt x="4225729" y="2081048"/>
+                  </a:lnTo>
+                  <a:lnTo>
+                    <a:pt x="4297351" y="2023358"/>
+                  </a:lnTo>
+                  <a:lnTo>
+                    <a:pt x="4368974" y="1963551"/>
+                  </a:lnTo>
+                  <a:lnTo>
+                    <a:pt x="4440596" y="1901549"/>
+                  </a:lnTo>
+                  <a:lnTo>
+                    <a:pt x="4512219" y="1837270"/>
+                  </a:lnTo>
+                  <a:lnTo>
+                    <a:pt x="4583841" y="1770632"/>
+                  </a:lnTo>
+                  <a:lnTo>
+                    <a:pt x="4655464" y="1701548"/>
+                  </a:lnTo>
+                  <a:lnTo>
+                    <a:pt x="4727086" y="1629928"/>
+                  </a:lnTo>
+                  <a:lnTo>
+                    <a:pt x="4798709" y="1555679"/>
+                  </a:lnTo>
+                  <a:lnTo>
+                    <a:pt x="4870331" y="1478704"/>
+                  </a:lnTo>
+                  <a:lnTo>
+                    <a:pt x="4941954" y="1398904"/>
+                  </a:lnTo>
+                  <a:lnTo>
+                    <a:pt x="5013576" y="1316175"/>
+                  </a:lnTo>
+                  <a:lnTo>
+                    <a:pt x="5085199" y="1230409"/>
+                  </a:lnTo>
+                  <a:lnTo>
+                    <a:pt x="5156821" y="1141494"/>
+                  </a:lnTo>
+                  <a:lnTo>
+                    <a:pt x="5228444" y="1049316"/>
+                  </a:lnTo>
+                  <a:lnTo>
+                    <a:pt x="5300066" y="953754"/>
+                  </a:lnTo>
+                  <a:lnTo>
+                    <a:pt x="5371689" y="854685"/>
+                  </a:lnTo>
+                  <a:lnTo>
+                    <a:pt x="5443311" y="751978"/>
+                  </a:lnTo>
+                  <a:lnTo>
+                    <a:pt x="5514934" y="645502"/>
+                  </a:lnTo>
+                  <a:lnTo>
+                    <a:pt x="5586557" y="535117"/>
+                  </a:lnTo>
+                  <a:lnTo>
+                    <a:pt x="5658179" y="420680"/>
+                  </a:lnTo>
+                  <a:lnTo>
+                    <a:pt x="5729802" y="302042"/>
+                  </a:lnTo>
+                  <a:lnTo>
+                    <a:pt x="5801424" y="179050"/>
+                  </a:lnTo>
+                  <a:lnTo>
+                    <a:pt x="5873047" y="51542"/>
+                  </a:lnTo>
+                  <a:lnTo>
+                    <a:pt x="5900974" y="0"/>
                   </a:lnTo>
                 </a:path>
               </a:pathLst>

--- a/docs/plots/carbo/jx_carbo_linsubhr_dosedisc_sideeffect.pptx
+++ b/docs/plots/carbo/jx_carbo_linsubhr_dosedisc_sideeffect.pptx
@@ -3132,521 +3132,518 @@
           <p:spPr>
             <a:xfrm>
               <a:off x="1172049" y="1896563"/>
-              <a:ext cx="7090630" cy="3574389"/>
+              <a:ext cx="7090630" cy="3581736"/>
             </a:xfrm>
             <a:custGeom>
               <a:avLst/>
               <a:pathLst>
-                <a:path w="7090630" h="3574389">
+                <a:path w="7090630" h="3581736">
                   <a:moveTo>
-                    <a:pt x="0" y="3204174"/>
+                    <a:pt x="0" y="3221070"/>
                   </a:moveTo>
                   <a:lnTo>
-                    <a:pt x="71622" y="3197145"/>
-                  </a:lnTo>
-                  <a:lnTo>
-                    <a:pt x="143245" y="3190006"/>
-                  </a:lnTo>
-                  <a:lnTo>
-                    <a:pt x="214867" y="3182755"/>
-                  </a:lnTo>
-                  <a:lnTo>
-                    <a:pt x="286490" y="3175390"/>
-                  </a:lnTo>
-                  <a:lnTo>
-                    <a:pt x="358112" y="3167910"/>
-                  </a:lnTo>
-                  <a:lnTo>
-                    <a:pt x="429735" y="3160312"/>
-                  </a:lnTo>
-                  <a:lnTo>
-                    <a:pt x="501357" y="3152596"/>
-                  </a:lnTo>
-                  <a:lnTo>
-                    <a:pt x="572980" y="3144759"/>
-                  </a:lnTo>
-                  <a:lnTo>
-                    <a:pt x="644602" y="3136799"/>
-                  </a:lnTo>
-                  <a:lnTo>
-                    <a:pt x="716225" y="3128714"/>
-                  </a:lnTo>
-                  <a:lnTo>
-                    <a:pt x="787847" y="3120502"/>
-                  </a:lnTo>
-                  <a:lnTo>
-                    <a:pt x="859470" y="3112162"/>
-                  </a:lnTo>
-                  <a:lnTo>
-                    <a:pt x="931092" y="3103691"/>
-                  </a:lnTo>
-                  <a:lnTo>
-                    <a:pt x="1002715" y="3095087"/>
-                  </a:lnTo>
-                  <a:lnTo>
-                    <a:pt x="1074337" y="3086348"/>
-                  </a:lnTo>
-                  <a:lnTo>
-                    <a:pt x="1145960" y="3077472"/>
-                  </a:lnTo>
-                  <a:lnTo>
-                    <a:pt x="1217582" y="3068458"/>
-                  </a:lnTo>
-                  <a:lnTo>
-                    <a:pt x="1289205" y="3059302"/>
-                  </a:lnTo>
-                  <a:lnTo>
-                    <a:pt x="1360827" y="3050002"/>
-                  </a:lnTo>
-                  <a:lnTo>
-                    <a:pt x="1432450" y="3040557"/>
-                  </a:lnTo>
-                  <a:lnTo>
-                    <a:pt x="1504073" y="3030963"/>
-                  </a:lnTo>
-                  <a:lnTo>
-                    <a:pt x="1575695" y="3021220"/>
-                  </a:lnTo>
-                  <a:lnTo>
-                    <a:pt x="1647318" y="3011323"/>
-                  </a:lnTo>
-                  <a:lnTo>
-                    <a:pt x="1718940" y="3001272"/>
-                  </a:lnTo>
-                  <a:lnTo>
-                    <a:pt x="1790563" y="2991063"/>
-                  </a:lnTo>
-                  <a:lnTo>
-                    <a:pt x="1862185" y="2980694"/>
-                  </a:lnTo>
-                  <a:lnTo>
-                    <a:pt x="1933808" y="2970162"/>
-                  </a:lnTo>
-                  <a:lnTo>
-                    <a:pt x="2005430" y="2959465"/>
-                  </a:lnTo>
-                  <a:lnTo>
-                    <a:pt x="2077053" y="2948601"/>
-                  </a:lnTo>
-                  <a:lnTo>
-                    <a:pt x="2148675" y="2937567"/>
-                  </a:lnTo>
-                  <a:lnTo>
-                    <a:pt x="2220298" y="2926359"/>
-                  </a:lnTo>
-                  <a:lnTo>
-                    <a:pt x="2291920" y="2914976"/>
-                  </a:lnTo>
-                  <a:lnTo>
-                    <a:pt x="2363543" y="2903414"/>
-                  </a:lnTo>
-                  <a:lnTo>
-                    <a:pt x="2435165" y="2891671"/>
-                  </a:lnTo>
-                  <a:lnTo>
-                    <a:pt x="2506788" y="2879745"/>
-                  </a:lnTo>
-                  <a:lnTo>
-                    <a:pt x="2578410" y="2867631"/>
-                  </a:lnTo>
-                  <a:lnTo>
-                    <a:pt x="2650033" y="2855327"/>
-                  </a:lnTo>
-                  <a:lnTo>
-                    <a:pt x="2721655" y="2842831"/>
-                  </a:lnTo>
-                  <a:lnTo>
-                    <a:pt x="2793278" y="2830138"/>
-                  </a:lnTo>
-                  <a:lnTo>
-                    <a:pt x="2864901" y="2817247"/>
-                  </a:lnTo>
-                  <a:lnTo>
-                    <a:pt x="2936523" y="2804154"/>
-                  </a:lnTo>
-                  <a:lnTo>
-                    <a:pt x="3008146" y="2790855"/>
-                  </a:lnTo>
-                  <a:lnTo>
-                    <a:pt x="3079768" y="2762364"/>
-                  </a:lnTo>
-                  <a:lnTo>
-                    <a:pt x="3151391" y="2710570"/>
-                  </a:lnTo>
-                  <a:lnTo>
-                    <a:pt x="3223013" y="2655762"/>
-                  </a:lnTo>
-                  <a:lnTo>
-                    <a:pt x="3294636" y="2597766"/>
-                  </a:lnTo>
-                  <a:lnTo>
-                    <a:pt x="3366258" y="2536396"/>
-                  </a:lnTo>
-                  <a:lnTo>
-                    <a:pt x="3437881" y="2471455"/>
-                  </a:lnTo>
-                  <a:lnTo>
-                    <a:pt x="3509503" y="2402737"/>
-                  </a:lnTo>
-                  <a:lnTo>
-                    <a:pt x="3581126" y="2330020"/>
-                  </a:lnTo>
-                  <a:lnTo>
-                    <a:pt x="3652748" y="2253073"/>
-                  </a:lnTo>
-                  <a:lnTo>
-                    <a:pt x="3724371" y="2171649"/>
-                  </a:lnTo>
-                  <a:lnTo>
-                    <a:pt x="3795993" y="2085488"/>
-                  </a:lnTo>
-                  <a:lnTo>
-                    <a:pt x="3867616" y="1994315"/>
-                  </a:lnTo>
-                  <a:lnTo>
-                    <a:pt x="3939238" y="1897837"/>
-                  </a:lnTo>
-                  <a:lnTo>
-                    <a:pt x="4010861" y="1795747"/>
-                  </a:lnTo>
-                  <a:lnTo>
-                    <a:pt x="4082483" y="1687717"/>
-                  </a:lnTo>
-                  <a:lnTo>
-                    <a:pt x="4154106" y="1573402"/>
-                  </a:lnTo>
-                  <a:lnTo>
-                    <a:pt x="4225729" y="1452437"/>
-                  </a:lnTo>
-                  <a:lnTo>
-                    <a:pt x="4297351" y="1324434"/>
-                  </a:lnTo>
-                  <a:lnTo>
-                    <a:pt x="4368974" y="1188984"/>
-                  </a:lnTo>
-                  <a:lnTo>
-                    <a:pt x="4440596" y="1045654"/>
-                  </a:lnTo>
-                  <a:lnTo>
-                    <a:pt x="4512219" y="893986"/>
-                  </a:lnTo>
-                  <a:lnTo>
-                    <a:pt x="4583841" y="733494"/>
-                  </a:lnTo>
-                  <a:lnTo>
-                    <a:pt x="4655464" y="563665"/>
-                  </a:lnTo>
-                  <a:lnTo>
-                    <a:pt x="4727086" y="383955"/>
-                  </a:lnTo>
-                  <a:lnTo>
-                    <a:pt x="4798709" y="193791"/>
-                  </a:lnTo>
-                  <a:lnTo>
-                    <a:pt x="4867684" y="0"/>
+                    <a:pt x="71622" y="3213911"/>
+                  </a:lnTo>
+                  <a:lnTo>
+                    <a:pt x="143245" y="3206632"/>
+                  </a:lnTo>
+                  <a:lnTo>
+                    <a:pt x="214867" y="3199233"/>
+                  </a:lnTo>
+                  <a:lnTo>
+                    <a:pt x="286490" y="3191711"/>
+                  </a:lnTo>
+                  <a:lnTo>
+                    <a:pt x="358112" y="3184065"/>
+                  </a:lnTo>
+                  <a:lnTo>
+                    <a:pt x="429735" y="3176291"/>
+                  </a:lnTo>
+                  <a:lnTo>
+                    <a:pt x="501357" y="3168389"/>
+                  </a:lnTo>
+                  <a:lnTo>
+                    <a:pt x="572980" y="3160355"/>
+                  </a:lnTo>
+                  <a:lnTo>
+                    <a:pt x="644602" y="3152188"/>
+                  </a:lnTo>
+                  <a:lnTo>
+                    <a:pt x="716225" y="3143886"/>
+                  </a:lnTo>
+                  <a:lnTo>
+                    <a:pt x="787847" y="3135446"/>
+                  </a:lnTo>
+                  <a:lnTo>
+                    <a:pt x="859470" y="3126866"/>
+                  </a:lnTo>
+                  <a:lnTo>
+                    <a:pt x="931092" y="3118143"/>
+                  </a:lnTo>
+                  <a:lnTo>
+                    <a:pt x="1002715" y="3109276"/>
+                  </a:lnTo>
+                  <a:lnTo>
+                    <a:pt x="1074337" y="3100262"/>
+                  </a:lnTo>
+                  <a:lnTo>
+                    <a:pt x="1145960" y="3091098"/>
+                  </a:lnTo>
+                  <a:lnTo>
+                    <a:pt x="1217582" y="3081783"/>
+                  </a:lnTo>
+                  <a:lnTo>
+                    <a:pt x="1289205" y="3072312"/>
+                  </a:lnTo>
+                  <a:lnTo>
+                    <a:pt x="1360827" y="3062685"/>
+                  </a:lnTo>
+                  <a:lnTo>
+                    <a:pt x="1432450" y="3052898"/>
+                  </a:lnTo>
+                  <a:lnTo>
+                    <a:pt x="1504073" y="3042948"/>
+                  </a:lnTo>
+                  <a:lnTo>
+                    <a:pt x="1575695" y="3032834"/>
+                  </a:lnTo>
+                  <a:lnTo>
+                    <a:pt x="1647318" y="3022551"/>
+                  </a:lnTo>
+                  <a:lnTo>
+                    <a:pt x="1718940" y="3012098"/>
+                  </a:lnTo>
+                  <a:lnTo>
+                    <a:pt x="1790563" y="3001472"/>
+                  </a:lnTo>
+                  <a:lnTo>
+                    <a:pt x="1862185" y="2990669"/>
+                  </a:lnTo>
+                  <a:lnTo>
+                    <a:pt x="1933808" y="2979688"/>
+                  </a:lnTo>
+                  <a:lnTo>
+                    <a:pt x="2005430" y="2968524"/>
+                  </a:lnTo>
+                  <a:lnTo>
+                    <a:pt x="2077053" y="2957174"/>
+                  </a:lnTo>
+                  <a:lnTo>
+                    <a:pt x="2148675" y="2945637"/>
+                  </a:lnTo>
+                  <a:lnTo>
+                    <a:pt x="2220298" y="2933908"/>
+                  </a:lnTo>
+                  <a:lnTo>
+                    <a:pt x="2291920" y="2921984"/>
+                  </a:lnTo>
+                  <a:lnTo>
+                    <a:pt x="2363543" y="2909863"/>
+                  </a:lnTo>
+                  <a:lnTo>
+                    <a:pt x="2435165" y="2897541"/>
+                  </a:lnTo>
+                  <a:lnTo>
+                    <a:pt x="2506788" y="2885014"/>
+                  </a:lnTo>
+                  <a:lnTo>
+                    <a:pt x="2578410" y="2872279"/>
+                  </a:lnTo>
+                  <a:lnTo>
+                    <a:pt x="2650033" y="2859334"/>
+                  </a:lnTo>
+                  <a:lnTo>
+                    <a:pt x="2721655" y="2846173"/>
+                  </a:lnTo>
+                  <a:lnTo>
+                    <a:pt x="2793278" y="2832794"/>
+                  </a:lnTo>
+                  <a:lnTo>
+                    <a:pt x="2864901" y="2819193"/>
+                  </a:lnTo>
+                  <a:lnTo>
+                    <a:pt x="2936523" y="2805367"/>
+                  </a:lnTo>
+                  <a:lnTo>
+                    <a:pt x="3008146" y="2791311"/>
+                  </a:lnTo>
+                  <a:lnTo>
+                    <a:pt x="3079768" y="2761510"/>
+                  </a:lnTo>
+                  <a:lnTo>
+                    <a:pt x="3151391" y="2707481"/>
+                  </a:lnTo>
+                  <a:lnTo>
+                    <a:pt x="3223013" y="2650175"/>
+                  </a:lnTo>
+                  <a:lnTo>
+                    <a:pt x="3294636" y="2589395"/>
+                  </a:lnTo>
+                  <a:lnTo>
+                    <a:pt x="3366258" y="2524930"/>
+                  </a:lnTo>
+                  <a:lnTo>
+                    <a:pt x="3437881" y="2456556"/>
+                  </a:lnTo>
+                  <a:lnTo>
+                    <a:pt x="3509503" y="2384037"/>
+                  </a:lnTo>
+                  <a:lnTo>
+                    <a:pt x="3581126" y="2307121"/>
+                  </a:lnTo>
+                  <a:lnTo>
+                    <a:pt x="3652748" y="2225542"/>
+                  </a:lnTo>
+                  <a:lnTo>
+                    <a:pt x="3724371" y="2139016"/>
+                  </a:lnTo>
+                  <a:lnTo>
+                    <a:pt x="3795993" y="2047244"/>
+                  </a:lnTo>
+                  <a:lnTo>
+                    <a:pt x="3867616" y="1949908"/>
+                  </a:lnTo>
+                  <a:lnTo>
+                    <a:pt x="3939238" y="1846671"/>
+                  </a:lnTo>
+                  <a:lnTo>
+                    <a:pt x="4010861" y="1737174"/>
+                  </a:lnTo>
+                  <a:lnTo>
+                    <a:pt x="4082483" y="1621038"/>
+                  </a:lnTo>
+                  <a:lnTo>
+                    <a:pt x="4154106" y="1497861"/>
+                  </a:lnTo>
+                  <a:lnTo>
+                    <a:pt x="4225729" y="1367216"/>
+                  </a:lnTo>
+                  <a:lnTo>
+                    <a:pt x="4297351" y="1228650"/>
+                  </a:lnTo>
+                  <a:lnTo>
+                    <a:pt x="4368974" y="1081682"/>
+                  </a:lnTo>
+                  <a:lnTo>
+                    <a:pt x="4440596" y="925804"/>
+                  </a:lnTo>
+                  <a:lnTo>
+                    <a:pt x="4512219" y="760475"/>
+                  </a:lnTo>
+                  <a:lnTo>
+                    <a:pt x="4583841" y="585121"/>
+                  </a:lnTo>
+                  <a:lnTo>
+                    <a:pt x="4655464" y="399136"/>
+                  </a:lnTo>
+                  <a:lnTo>
+                    <a:pt x="4727086" y="201875"/>
+                  </a:lnTo>
+                  <a:lnTo>
+                    <a:pt x="4796194" y="0"/>
                   </a:lnTo>
                   <a:lnTo>
                     <a:pt x="7090630" y="0"/>
                   </a:lnTo>
                   <a:lnTo>
-                    <a:pt x="7090630" y="1561530"/>
-                  </a:lnTo>
-                  <a:lnTo>
-                    <a:pt x="7019007" y="1593799"/>
-                  </a:lnTo>
-                  <a:lnTo>
-                    <a:pt x="6947385" y="1625570"/>
-                  </a:lnTo>
-                  <a:lnTo>
-                    <a:pt x="6875762" y="1656850"/>
-                  </a:lnTo>
-                  <a:lnTo>
-                    <a:pt x="6804139" y="1687648"/>
-                  </a:lnTo>
-                  <a:lnTo>
-                    <a:pt x="6732517" y="1717970"/>
-                  </a:lnTo>
-                  <a:lnTo>
-                    <a:pt x="6660894" y="1747825"/>
-                  </a:lnTo>
-                  <a:lnTo>
-                    <a:pt x="6589272" y="1777219"/>
-                  </a:lnTo>
-                  <a:lnTo>
-                    <a:pt x="6517649" y="1806159"/>
-                  </a:lnTo>
-                  <a:lnTo>
-                    <a:pt x="6446027" y="1834653"/>
-                  </a:lnTo>
-                  <a:lnTo>
-                    <a:pt x="6374404" y="1862707"/>
-                  </a:lnTo>
-                  <a:lnTo>
-                    <a:pt x="6302782" y="1890328"/>
-                  </a:lnTo>
-                  <a:lnTo>
-                    <a:pt x="6231159" y="1917523"/>
-                  </a:lnTo>
-                  <a:lnTo>
-                    <a:pt x="6159537" y="1944298"/>
-                  </a:lnTo>
-                  <a:lnTo>
-                    <a:pt x="6087914" y="1970660"/>
-                  </a:lnTo>
-                  <a:lnTo>
-                    <a:pt x="6016292" y="1996615"/>
-                  </a:lnTo>
-                  <a:lnTo>
-                    <a:pt x="5944669" y="2022170"/>
-                  </a:lnTo>
-                  <a:lnTo>
-                    <a:pt x="5873047" y="2047330"/>
-                  </a:lnTo>
-                  <a:lnTo>
-                    <a:pt x="5801424" y="2072102"/>
-                  </a:lnTo>
-                  <a:lnTo>
-                    <a:pt x="5729802" y="2096492"/>
-                  </a:lnTo>
-                  <a:lnTo>
-                    <a:pt x="5658179" y="2120505"/>
-                  </a:lnTo>
-                  <a:lnTo>
-                    <a:pt x="5586557" y="2144148"/>
-                  </a:lnTo>
-                  <a:lnTo>
-                    <a:pt x="5514934" y="2167426"/>
-                  </a:lnTo>
-                  <a:lnTo>
-                    <a:pt x="5443311" y="2190345"/>
-                  </a:lnTo>
-                  <a:lnTo>
-                    <a:pt x="5371689" y="2212911"/>
-                  </a:lnTo>
-                  <a:lnTo>
-                    <a:pt x="5300066" y="2235127"/>
-                  </a:lnTo>
-                  <a:lnTo>
-                    <a:pt x="5228444" y="2257002"/>
-                  </a:lnTo>
-                  <a:lnTo>
-                    <a:pt x="5156821" y="2278538"/>
-                  </a:lnTo>
-                  <a:lnTo>
-                    <a:pt x="5085199" y="2299742"/>
-                  </a:lnTo>
-                  <a:lnTo>
-                    <a:pt x="5013576" y="2320620"/>
-                  </a:lnTo>
-                  <a:lnTo>
-                    <a:pt x="4941954" y="2341174"/>
-                  </a:lnTo>
-                  <a:lnTo>
-                    <a:pt x="4870331" y="2361412"/>
-                  </a:lnTo>
-                  <a:lnTo>
-                    <a:pt x="4798709" y="2381338"/>
-                  </a:lnTo>
-                  <a:lnTo>
-                    <a:pt x="4727086" y="2400955"/>
-                  </a:lnTo>
-                  <a:lnTo>
-                    <a:pt x="4655464" y="2420271"/>
-                  </a:lnTo>
-                  <a:lnTo>
-                    <a:pt x="4583841" y="2439288"/>
-                  </a:lnTo>
-                  <a:lnTo>
-                    <a:pt x="4512219" y="2458011"/>
-                  </a:lnTo>
-                  <a:lnTo>
-                    <a:pt x="4440596" y="2476446"/>
-                  </a:lnTo>
-                  <a:lnTo>
-                    <a:pt x="4368974" y="2494596"/>
-                  </a:lnTo>
-                  <a:lnTo>
-                    <a:pt x="4297351" y="2512467"/>
-                  </a:lnTo>
-                  <a:lnTo>
-                    <a:pt x="4225729" y="2530061"/>
-                  </a:lnTo>
-                  <a:lnTo>
-                    <a:pt x="4154106" y="2547384"/>
-                  </a:lnTo>
-                  <a:lnTo>
-                    <a:pt x="4082483" y="2564440"/>
-                  </a:lnTo>
-                  <a:lnTo>
-                    <a:pt x="4010861" y="2581232"/>
-                  </a:lnTo>
-                  <a:lnTo>
-                    <a:pt x="3939238" y="2597765"/>
-                  </a:lnTo>
-                  <a:lnTo>
-                    <a:pt x="3867616" y="2614043"/>
-                  </a:lnTo>
-                  <a:lnTo>
-                    <a:pt x="3795993" y="2630070"/>
-                  </a:lnTo>
-                  <a:lnTo>
-                    <a:pt x="3724371" y="2645850"/>
-                  </a:lnTo>
-                  <a:lnTo>
-                    <a:pt x="3652748" y="2661386"/>
-                  </a:lnTo>
-                  <a:lnTo>
-                    <a:pt x="3581126" y="2676683"/>
-                  </a:lnTo>
-                  <a:lnTo>
-                    <a:pt x="3509503" y="2691743"/>
-                  </a:lnTo>
-                  <a:lnTo>
-                    <a:pt x="3437881" y="2706571"/>
-                  </a:lnTo>
-                  <a:lnTo>
-                    <a:pt x="3366258" y="2721170"/>
-                  </a:lnTo>
-                  <a:lnTo>
-                    <a:pt x="3294636" y="2735544"/>
-                  </a:lnTo>
-                  <a:lnTo>
-                    <a:pt x="3223013" y="2749696"/>
-                  </a:lnTo>
-                  <a:lnTo>
-                    <a:pt x="3151391" y="2763630"/>
-                  </a:lnTo>
-                  <a:lnTo>
-                    <a:pt x="3079768" y="2777348"/>
-                  </a:lnTo>
-                  <a:lnTo>
-                    <a:pt x="3008146" y="2811311"/>
-                  </a:lnTo>
-                  <a:lnTo>
-                    <a:pt x="2936523" y="2857567"/>
-                  </a:lnTo>
-                  <a:lnTo>
-                    <a:pt x="2864901" y="2901279"/>
-                  </a:lnTo>
-                  <a:lnTo>
-                    <a:pt x="2793278" y="2942589"/>
-                  </a:lnTo>
-                  <a:lnTo>
-                    <a:pt x="2721655" y="2981627"/>
-                  </a:lnTo>
-                  <a:lnTo>
-                    <a:pt x="2650033" y="3018519"/>
-                  </a:lnTo>
-                  <a:lnTo>
-                    <a:pt x="2578410" y="3053382"/>
-                  </a:lnTo>
-                  <a:lnTo>
-                    <a:pt x="2506788" y="3086329"/>
-                  </a:lnTo>
-                  <a:lnTo>
-                    <a:pt x="2435165" y="3117464"/>
-                  </a:lnTo>
-                  <a:lnTo>
-                    <a:pt x="2363543" y="3146888"/>
-                  </a:lnTo>
-                  <a:lnTo>
-                    <a:pt x="2291920" y="3174694"/>
-                  </a:lnTo>
-                  <a:lnTo>
-                    <a:pt x="2220298" y="3200971"/>
-                  </a:lnTo>
-                  <a:lnTo>
-                    <a:pt x="2148675" y="3225804"/>
-                  </a:lnTo>
-                  <a:lnTo>
-                    <a:pt x="2077053" y="3249271"/>
-                  </a:lnTo>
-                  <a:lnTo>
-                    <a:pt x="2005430" y="3271448"/>
-                  </a:lnTo>
-                  <a:lnTo>
-                    <a:pt x="1933808" y="3292406"/>
-                  </a:lnTo>
-                  <a:lnTo>
-                    <a:pt x="1862185" y="3312211"/>
-                  </a:lnTo>
-                  <a:lnTo>
-                    <a:pt x="1790563" y="3330928"/>
-                  </a:lnTo>
-                  <a:lnTo>
-                    <a:pt x="1718940" y="3348616"/>
-                  </a:lnTo>
-                  <a:lnTo>
-                    <a:pt x="1647318" y="3365331"/>
-                  </a:lnTo>
-                  <a:lnTo>
-                    <a:pt x="1575695" y="3381127"/>
-                  </a:lnTo>
-                  <a:lnTo>
-                    <a:pt x="1504073" y="3396055"/>
-                  </a:lnTo>
-                  <a:lnTo>
-                    <a:pt x="1432450" y="3410162"/>
-                  </a:lnTo>
-                  <a:lnTo>
-                    <a:pt x="1360827" y="3423493"/>
-                  </a:lnTo>
-                  <a:lnTo>
-                    <a:pt x="1289205" y="3436092"/>
-                  </a:lnTo>
-                  <a:lnTo>
-                    <a:pt x="1217582" y="3447997"/>
-                  </a:lnTo>
-                  <a:lnTo>
-                    <a:pt x="1145960" y="3459249"/>
-                  </a:lnTo>
-                  <a:lnTo>
-                    <a:pt x="1074337" y="3469881"/>
-                  </a:lnTo>
-                  <a:lnTo>
-                    <a:pt x="1002715" y="3479929"/>
-                  </a:lnTo>
-                  <a:lnTo>
-                    <a:pt x="931092" y="3489425"/>
-                  </a:lnTo>
-                  <a:lnTo>
-                    <a:pt x="859470" y="3498399"/>
-                  </a:lnTo>
-                  <a:lnTo>
-                    <a:pt x="787847" y="3506879"/>
-                  </a:lnTo>
-                  <a:lnTo>
-                    <a:pt x="716225" y="3514893"/>
-                  </a:lnTo>
-                  <a:lnTo>
-                    <a:pt x="644602" y="3522466"/>
-                  </a:lnTo>
-                  <a:lnTo>
-                    <a:pt x="572980" y="3529623"/>
-                  </a:lnTo>
-                  <a:lnTo>
-                    <a:pt x="501357" y="3536387"/>
-                  </a:lnTo>
-                  <a:lnTo>
-                    <a:pt x="429735" y="3542778"/>
-                  </a:lnTo>
-                  <a:lnTo>
-                    <a:pt x="358112" y="3548819"/>
-                  </a:lnTo>
-                  <a:lnTo>
-                    <a:pt x="286490" y="3554527"/>
-                  </a:lnTo>
-                  <a:lnTo>
-                    <a:pt x="214867" y="3559921"/>
-                  </a:lnTo>
-                  <a:lnTo>
-                    <a:pt x="143245" y="3565019"/>
-                  </a:lnTo>
-                  <a:lnTo>
-                    <a:pt x="71622" y="3569837"/>
-                  </a:lnTo>
-                  <a:lnTo>
-                    <a:pt x="0" y="3574389"/>
+                    <a:pt x="7090630" y="1452394"/>
+                  </a:lnTo>
+                  <a:lnTo>
+                    <a:pt x="7019007" y="1488299"/>
+                  </a:lnTo>
+                  <a:lnTo>
+                    <a:pt x="6947385" y="1523619"/>
+                  </a:lnTo>
+                  <a:lnTo>
+                    <a:pt x="6875762" y="1558362"/>
+                  </a:lnTo>
+                  <a:lnTo>
+                    <a:pt x="6804139" y="1592538"/>
+                  </a:lnTo>
+                  <a:lnTo>
+                    <a:pt x="6732517" y="1626157"/>
+                  </a:lnTo>
+                  <a:lnTo>
+                    <a:pt x="6660894" y="1659226"/>
+                  </a:lnTo>
+                  <a:lnTo>
+                    <a:pt x="6589272" y="1691757"/>
+                  </a:lnTo>
+                  <a:lnTo>
+                    <a:pt x="6517649" y="1723756"/>
+                  </a:lnTo>
+                  <a:lnTo>
+                    <a:pt x="6446027" y="1755233"/>
+                  </a:lnTo>
+                  <a:lnTo>
+                    <a:pt x="6374404" y="1786197"/>
+                  </a:lnTo>
+                  <a:lnTo>
+                    <a:pt x="6302782" y="1816655"/>
+                  </a:lnTo>
+                  <a:lnTo>
+                    <a:pt x="6231159" y="1846616"/>
+                  </a:lnTo>
+                  <a:lnTo>
+                    <a:pt x="6159537" y="1876088"/>
+                  </a:lnTo>
+                  <a:lnTo>
+                    <a:pt x="6087914" y="1905079"/>
+                  </a:lnTo>
+                  <a:lnTo>
+                    <a:pt x="6016292" y="1933598"/>
+                  </a:lnTo>
+                  <a:lnTo>
+                    <a:pt x="5944669" y="1961650"/>
+                  </a:lnTo>
+                  <a:lnTo>
+                    <a:pt x="5873047" y="1989245"/>
+                  </a:lnTo>
+                  <a:lnTo>
+                    <a:pt x="5801424" y="2016390"/>
+                  </a:lnTo>
+                  <a:lnTo>
+                    <a:pt x="5729802" y="2043092"/>
+                  </a:lnTo>
+                  <a:lnTo>
+                    <a:pt x="5658179" y="2069358"/>
+                  </a:lnTo>
+                  <a:lnTo>
+                    <a:pt x="5586557" y="2095195"/>
+                  </a:lnTo>
+                  <a:lnTo>
+                    <a:pt x="5514934" y="2120611"/>
+                  </a:lnTo>
+                  <a:lnTo>
+                    <a:pt x="5443311" y="2145612"/>
+                  </a:lnTo>
+                  <a:lnTo>
+                    <a:pt x="5371689" y="2170205"/>
+                  </a:lnTo>
+                  <a:lnTo>
+                    <a:pt x="5300066" y="2194396"/>
+                  </a:lnTo>
+                  <a:lnTo>
+                    <a:pt x="5228444" y="2218193"/>
+                  </a:lnTo>
+                  <a:lnTo>
+                    <a:pt x="5156821" y="2241602"/>
+                  </a:lnTo>
+                  <a:lnTo>
+                    <a:pt x="5085199" y="2264628"/>
+                  </a:lnTo>
+                  <a:lnTo>
+                    <a:pt x="5013576" y="2287279"/>
+                  </a:lnTo>
+                  <a:lnTo>
+                    <a:pt x="4941954" y="2309560"/>
+                  </a:lnTo>
+                  <a:lnTo>
+                    <a:pt x="4870331" y="2331477"/>
+                  </a:lnTo>
+                  <a:lnTo>
+                    <a:pt x="4798709" y="2353037"/>
+                  </a:lnTo>
+                  <a:lnTo>
+                    <a:pt x="4727086" y="2374245"/>
+                  </a:lnTo>
+                  <a:lnTo>
+                    <a:pt x="4655464" y="2395107"/>
+                  </a:lnTo>
+                  <a:lnTo>
+                    <a:pt x="4583841" y="2415629"/>
+                  </a:lnTo>
+                  <a:lnTo>
+                    <a:pt x="4512219" y="2435815"/>
+                  </a:lnTo>
+                  <a:lnTo>
+                    <a:pt x="4440596" y="2455672"/>
+                  </a:lnTo>
+                  <a:lnTo>
+                    <a:pt x="4368974" y="2475206"/>
+                  </a:lnTo>
+                  <a:lnTo>
+                    <a:pt x="4297351" y="2494420"/>
+                  </a:lnTo>
+                  <a:lnTo>
+                    <a:pt x="4225729" y="2513321"/>
+                  </a:lnTo>
+                  <a:lnTo>
+                    <a:pt x="4154106" y="2531913"/>
+                  </a:lnTo>
+                  <a:lnTo>
+                    <a:pt x="4082483" y="2550202"/>
+                  </a:lnTo>
+                  <a:lnTo>
+                    <a:pt x="4010861" y="2568193"/>
+                  </a:lnTo>
+                  <a:lnTo>
+                    <a:pt x="3939238" y="2585890"/>
+                  </a:lnTo>
+                  <a:lnTo>
+                    <a:pt x="3867616" y="2603298"/>
+                  </a:lnTo>
+                  <a:lnTo>
+                    <a:pt x="3795993" y="2620422"/>
+                  </a:lnTo>
+                  <a:lnTo>
+                    <a:pt x="3724371" y="2637266"/>
+                  </a:lnTo>
+                  <a:lnTo>
+                    <a:pt x="3652748" y="2653836"/>
+                  </a:lnTo>
+                  <a:lnTo>
+                    <a:pt x="3581126" y="2670136"/>
+                  </a:lnTo>
+                  <a:lnTo>
+                    <a:pt x="3509503" y="2686169"/>
+                  </a:lnTo>
+                  <a:lnTo>
+                    <a:pt x="3437881" y="2701941"/>
+                  </a:lnTo>
+                  <a:lnTo>
+                    <a:pt x="3366258" y="2717455"/>
+                  </a:lnTo>
+                  <a:lnTo>
+                    <a:pt x="3294636" y="2732716"/>
+                  </a:lnTo>
+                  <a:lnTo>
+                    <a:pt x="3223013" y="2747728"/>
+                  </a:lnTo>
+                  <a:lnTo>
+                    <a:pt x="3151391" y="2762495"/>
+                  </a:lnTo>
+                  <a:lnTo>
+                    <a:pt x="3079768" y="2777021"/>
+                  </a:lnTo>
+                  <a:lnTo>
+                    <a:pt x="3008146" y="2812452"/>
+                  </a:lnTo>
+                  <a:lnTo>
+                    <a:pt x="2936523" y="2860481"/>
+                  </a:lnTo>
+                  <a:lnTo>
+                    <a:pt x="2864901" y="2905764"/>
+                  </a:lnTo>
+                  <a:lnTo>
+                    <a:pt x="2793278" y="2948459"/>
+                  </a:lnTo>
+                  <a:lnTo>
+                    <a:pt x="2721655" y="2988714"/>
+                  </a:lnTo>
+                  <a:lnTo>
+                    <a:pt x="2650033" y="3026667"/>
+                  </a:lnTo>
+                  <a:lnTo>
+                    <a:pt x="2578410" y="3062450"/>
+                  </a:lnTo>
+                  <a:lnTo>
+                    <a:pt x="2506788" y="3096188"/>
+                  </a:lnTo>
+                  <a:lnTo>
+                    <a:pt x="2435165" y="3127998"/>
+                  </a:lnTo>
+                  <a:lnTo>
+                    <a:pt x="2363543" y="3157989"/>
+                  </a:lnTo>
+                  <a:lnTo>
+                    <a:pt x="2291920" y="3186266"/>
+                  </a:lnTo>
+                  <a:lnTo>
+                    <a:pt x="2220298" y="3212926"/>
+                  </a:lnTo>
+                  <a:lnTo>
+                    <a:pt x="2148675" y="3238062"/>
+                  </a:lnTo>
+                  <a:lnTo>
+                    <a:pt x="2077053" y="3261761"/>
+                  </a:lnTo>
+                  <a:lnTo>
+                    <a:pt x="2005430" y="3284106"/>
+                  </a:lnTo>
+                  <a:lnTo>
+                    <a:pt x="1933808" y="3305173"/>
+                  </a:lnTo>
+                  <a:lnTo>
+                    <a:pt x="1862185" y="3325036"/>
+                  </a:lnTo>
+                  <a:lnTo>
+                    <a:pt x="1790563" y="3343764"/>
+                  </a:lnTo>
+                  <a:lnTo>
+                    <a:pt x="1718940" y="3361421"/>
+                  </a:lnTo>
+                  <a:lnTo>
+                    <a:pt x="1647318" y="3378068"/>
+                  </a:lnTo>
+                  <a:lnTo>
+                    <a:pt x="1575695" y="3393764"/>
+                  </a:lnTo>
+                  <a:lnTo>
+                    <a:pt x="1504073" y="3408563"/>
+                  </a:lnTo>
+                  <a:lnTo>
+                    <a:pt x="1432450" y="3422516"/>
+                  </a:lnTo>
+                  <a:lnTo>
+                    <a:pt x="1360827" y="3435671"/>
+                  </a:lnTo>
+                  <a:lnTo>
+                    <a:pt x="1289205" y="3448074"/>
+                  </a:lnTo>
+                  <a:lnTo>
+                    <a:pt x="1217582" y="3459768"/>
+                  </a:lnTo>
+                  <a:lnTo>
+                    <a:pt x="1145960" y="3470793"/>
+                  </a:lnTo>
+                  <a:lnTo>
+                    <a:pt x="1074337" y="3481189"/>
+                  </a:lnTo>
+                  <a:lnTo>
+                    <a:pt x="1002715" y="3490990"/>
+                  </a:lnTo>
+                  <a:lnTo>
+                    <a:pt x="931092" y="3500231"/>
+                  </a:lnTo>
+                  <a:lnTo>
+                    <a:pt x="859470" y="3508943"/>
+                  </a:lnTo>
+                  <a:lnTo>
+                    <a:pt x="787847" y="3517158"/>
+                  </a:lnTo>
+                  <a:lnTo>
+                    <a:pt x="716225" y="3524903"/>
+                  </a:lnTo>
+                  <a:lnTo>
+                    <a:pt x="644602" y="3532205"/>
+                  </a:lnTo>
+                  <a:lnTo>
+                    <a:pt x="572980" y="3539090"/>
+                  </a:lnTo>
+                  <a:lnTo>
+                    <a:pt x="501357" y="3545581"/>
+                  </a:lnTo>
+                  <a:lnTo>
+                    <a:pt x="429735" y="3551701"/>
+                  </a:lnTo>
+                  <a:lnTo>
+                    <a:pt x="358112" y="3557472"/>
+                  </a:lnTo>
+                  <a:lnTo>
+                    <a:pt x="286490" y="3562912"/>
+                  </a:lnTo>
+                  <a:lnTo>
+                    <a:pt x="214867" y="3568041"/>
+                  </a:lnTo>
+                  <a:lnTo>
+                    <a:pt x="143245" y="3572878"/>
+                  </a:lnTo>
+                  <a:lnTo>
+                    <a:pt x="71622" y="3577437"/>
+                  </a:lnTo>
+                  <a:lnTo>
+                    <a:pt x="0" y="3581736"/>
                   </a:lnTo>
                   <a:close/>
                 </a:path>
@@ -3673,218 +3670,215 @@
           <p:spPr>
             <a:xfrm>
               <a:off x="1172049" y="1896563"/>
-              <a:ext cx="4867684" cy="3204174"/>
+              <a:ext cx="4796194" cy="3221070"/>
             </a:xfrm>
             <a:custGeom>
               <a:avLst/>
               <a:pathLst>
-                <a:path w="4867684" h="3204174">
+                <a:path w="4796194" h="3221070">
                   <a:moveTo>
-                    <a:pt x="0" y="3204174"/>
+                    <a:pt x="0" y="3221070"/>
                   </a:moveTo>
                   <a:lnTo>
-                    <a:pt x="71622" y="3197145"/>
-                  </a:lnTo>
-                  <a:lnTo>
-                    <a:pt x="143245" y="3190006"/>
-                  </a:lnTo>
-                  <a:lnTo>
-                    <a:pt x="214867" y="3182755"/>
-                  </a:lnTo>
-                  <a:lnTo>
-                    <a:pt x="286490" y="3175390"/>
-                  </a:lnTo>
-                  <a:lnTo>
-                    <a:pt x="358112" y="3167910"/>
-                  </a:lnTo>
-                  <a:lnTo>
-                    <a:pt x="429735" y="3160312"/>
-                  </a:lnTo>
-                  <a:lnTo>
-                    <a:pt x="501357" y="3152596"/>
-                  </a:lnTo>
-                  <a:lnTo>
-                    <a:pt x="572980" y="3144759"/>
-                  </a:lnTo>
-                  <a:lnTo>
-                    <a:pt x="644602" y="3136799"/>
-                  </a:lnTo>
-                  <a:lnTo>
-                    <a:pt x="716225" y="3128714"/>
-                  </a:lnTo>
-                  <a:lnTo>
-                    <a:pt x="787847" y="3120502"/>
-                  </a:lnTo>
-                  <a:lnTo>
-                    <a:pt x="859470" y="3112162"/>
-                  </a:lnTo>
-                  <a:lnTo>
-                    <a:pt x="931092" y="3103691"/>
-                  </a:lnTo>
-                  <a:lnTo>
-                    <a:pt x="1002715" y="3095087"/>
-                  </a:lnTo>
-                  <a:lnTo>
-                    <a:pt x="1074337" y="3086348"/>
-                  </a:lnTo>
-                  <a:lnTo>
-                    <a:pt x="1145960" y="3077472"/>
-                  </a:lnTo>
-                  <a:lnTo>
-                    <a:pt x="1217582" y="3068458"/>
-                  </a:lnTo>
-                  <a:lnTo>
-                    <a:pt x="1289205" y="3059302"/>
-                  </a:lnTo>
-                  <a:lnTo>
-                    <a:pt x="1360827" y="3050002"/>
-                  </a:lnTo>
-                  <a:lnTo>
-                    <a:pt x="1432450" y="3040557"/>
-                  </a:lnTo>
-                  <a:lnTo>
-                    <a:pt x="1504073" y="3030963"/>
-                  </a:lnTo>
-                  <a:lnTo>
-                    <a:pt x="1575695" y="3021220"/>
-                  </a:lnTo>
-                  <a:lnTo>
-                    <a:pt x="1647318" y="3011323"/>
-                  </a:lnTo>
-                  <a:lnTo>
-                    <a:pt x="1718940" y="3001272"/>
-                  </a:lnTo>
-                  <a:lnTo>
-                    <a:pt x="1790563" y="2991063"/>
-                  </a:lnTo>
-                  <a:lnTo>
-                    <a:pt x="1862185" y="2980694"/>
-                  </a:lnTo>
-                  <a:lnTo>
-                    <a:pt x="1933808" y="2970162"/>
-                  </a:lnTo>
-                  <a:lnTo>
-                    <a:pt x="2005430" y="2959465"/>
-                  </a:lnTo>
-                  <a:lnTo>
-                    <a:pt x="2077053" y="2948601"/>
-                  </a:lnTo>
-                  <a:lnTo>
-                    <a:pt x="2148675" y="2937567"/>
-                  </a:lnTo>
-                  <a:lnTo>
-                    <a:pt x="2220298" y="2926359"/>
-                  </a:lnTo>
-                  <a:lnTo>
-                    <a:pt x="2291920" y="2914976"/>
-                  </a:lnTo>
-                  <a:lnTo>
-                    <a:pt x="2363543" y="2903414"/>
-                  </a:lnTo>
-                  <a:lnTo>
-                    <a:pt x="2435165" y="2891671"/>
-                  </a:lnTo>
-                  <a:lnTo>
-                    <a:pt x="2506788" y="2879745"/>
-                  </a:lnTo>
-                  <a:lnTo>
-                    <a:pt x="2578410" y="2867631"/>
-                  </a:lnTo>
-                  <a:lnTo>
-                    <a:pt x="2650033" y="2855327"/>
-                  </a:lnTo>
-                  <a:lnTo>
-                    <a:pt x="2721655" y="2842831"/>
-                  </a:lnTo>
-                  <a:lnTo>
-                    <a:pt x="2793278" y="2830138"/>
-                  </a:lnTo>
-                  <a:lnTo>
-                    <a:pt x="2864901" y="2817247"/>
-                  </a:lnTo>
-                  <a:lnTo>
-                    <a:pt x="2936523" y="2804154"/>
-                  </a:lnTo>
-                  <a:lnTo>
-                    <a:pt x="3008146" y="2790855"/>
-                  </a:lnTo>
-                  <a:lnTo>
-                    <a:pt x="3079768" y="2762364"/>
-                  </a:lnTo>
-                  <a:lnTo>
-                    <a:pt x="3151391" y="2710570"/>
-                  </a:lnTo>
-                  <a:lnTo>
-                    <a:pt x="3223013" y="2655762"/>
-                  </a:lnTo>
-                  <a:lnTo>
-                    <a:pt x="3294636" y="2597766"/>
-                  </a:lnTo>
-                  <a:lnTo>
-                    <a:pt x="3366258" y="2536396"/>
-                  </a:lnTo>
-                  <a:lnTo>
-                    <a:pt x="3437881" y="2471455"/>
-                  </a:lnTo>
-                  <a:lnTo>
-                    <a:pt x="3509503" y="2402737"/>
-                  </a:lnTo>
-                  <a:lnTo>
-                    <a:pt x="3581126" y="2330020"/>
-                  </a:lnTo>
-                  <a:lnTo>
-                    <a:pt x="3652748" y="2253073"/>
-                  </a:lnTo>
-                  <a:lnTo>
-                    <a:pt x="3724371" y="2171649"/>
-                  </a:lnTo>
-                  <a:lnTo>
-                    <a:pt x="3795993" y="2085488"/>
-                  </a:lnTo>
-                  <a:lnTo>
-                    <a:pt x="3867616" y="1994315"/>
-                  </a:lnTo>
-                  <a:lnTo>
-                    <a:pt x="3939238" y="1897837"/>
-                  </a:lnTo>
-                  <a:lnTo>
-                    <a:pt x="4010861" y="1795747"/>
-                  </a:lnTo>
-                  <a:lnTo>
-                    <a:pt x="4082483" y="1687717"/>
-                  </a:lnTo>
-                  <a:lnTo>
-                    <a:pt x="4154106" y="1573402"/>
-                  </a:lnTo>
-                  <a:lnTo>
-                    <a:pt x="4225729" y="1452437"/>
-                  </a:lnTo>
-                  <a:lnTo>
-                    <a:pt x="4297351" y="1324434"/>
-                  </a:lnTo>
-                  <a:lnTo>
-                    <a:pt x="4368974" y="1188984"/>
-                  </a:lnTo>
-                  <a:lnTo>
-                    <a:pt x="4440596" y="1045654"/>
-                  </a:lnTo>
-                  <a:lnTo>
-                    <a:pt x="4512219" y="893986"/>
-                  </a:lnTo>
-                  <a:lnTo>
-                    <a:pt x="4583841" y="733494"/>
-                  </a:lnTo>
-                  <a:lnTo>
-                    <a:pt x="4655464" y="563665"/>
-                  </a:lnTo>
-                  <a:lnTo>
-                    <a:pt x="4727086" y="383955"/>
-                  </a:lnTo>
-                  <a:lnTo>
-                    <a:pt x="4798709" y="193791"/>
-                  </a:lnTo>
-                  <a:lnTo>
-                    <a:pt x="4867684" y="0"/>
+                    <a:pt x="71622" y="3213911"/>
+                  </a:lnTo>
+                  <a:lnTo>
+                    <a:pt x="143245" y="3206632"/>
+                  </a:lnTo>
+                  <a:lnTo>
+                    <a:pt x="214867" y="3199233"/>
+                  </a:lnTo>
+                  <a:lnTo>
+                    <a:pt x="286490" y="3191711"/>
+                  </a:lnTo>
+                  <a:lnTo>
+                    <a:pt x="358112" y="3184065"/>
+                  </a:lnTo>
+                  <a:lnTo>
+                    <a:pt x="429735" y="3176291"/>
+                  </a:lnTo>
+                  <a:lnTo>
+                    <a:pt x="501357" y="3168389"/>
+                  </a:lnTo>
+                  <a:lnTo>
+                    <a:pt x="572980" y="3160355"/>
+                  </a:lnTo>
+                  <a:lnTo>
+                    <a:pt x="644602" y="3152188"/>
+                  </a:lnTo>
+                  <a:lnTo>
+                    <a:pt x="716225" y="3143886"/>
+                  </a:lnTo>
+                  <a:lnTo>
+                    <a:pt x="787847" y="3135446"/>
+                  </a:lnTo>
+                  <a:lnTo>
+                    <a:pt x="859470" y="3126866"/>
+                  </a:lnTo>
+                  <a:lnTo>
+                    <a:pt x="931092" y="3118143"/>
+                  </a:lnTo>
+                  <a:lnTo>
+                    <a:pt x="1002715" y="3109276"/>
+                  </a:lnTo>
+                  <a:lnTo>
+                    <a:pt x="1074337" y="3100262"/>
+                  </a:lnTo>
+                  <a:lnTo>
+                    <a:pt x="1145960" y="3091098"/>
+                  </a:lnTo>
+                  <a:lnTo>
+                    <a:pt x="1217582" y="3081783"/>
+                  </a:lnTo>
+                  <a:lnTo>
+                    <a:pt x="1289205" y="3072312"/>
+                  </a:lnTo>
+                  <a:lnTo>
+                    <a:pt x="1360827" y="3062685"/>
+                  </a:lnTo>
+                  <a:lnTo>
+                    <a:pt x="1432450" y="3052898"/>
+                  </a:lnTo>
+                  <a:lnTo>
+                    <a:pt x="1504073" y="3042948"/>
+                  </a:lnTo>
+                  <a:lnTo>
+                    <a:pt x="1575695" y="3032834"/>
+                  </a:lnTo>
+                  <a:lnTo>
+                    <a:pt x="1647318" y="3022551"/>
+                  </a:lnTo>
+                  <a:lnTo>
+                    <a:pt x="1718940" y="3012098"/>
+                  </a:lnTo>
+                  <a:lnTo>
+                    <a:pt x="1790563" y="3001472"/>
+                  </a:lnTo>
+                  <a:lnTo>
+                    <a:pt x="1862185" y="2990669"/>
+                  </a:lnTo>
+                  <a:lnTo>
+                    <a:pt x="1933808" y="2979688"/>
+                  </a:lnTo>
+                  <a:lnTo>
+                    <a:pt x="2005430" y="2968524"/>
+                  </a:lnTo>
+                  <a:lnTo>
+                    <a:pt x="2077053" y="2957174"/>
+                  </a:lnTo>
+                  <a:lnTo>
+                    <a:pt x="2148675" y="2945637"/>
+                  </a:lnTo>
+                  <a:lnTo>
+                    <a:pt x="2220298" y="2933908"/>
+                  </a:lnTo>
+                  <a:lnTo>
+                    <a:pt x="2291920" y="2921984"/>
+                  </a:lnTo>
+                  <a:lnTo>
+                    <a:pt x="2363543" y="2909863"/>
+                  </a:lnTo>
+                  <a:lnTo>
+                    <a:pt x="2435165" y="2897541"/>
+                  </a:lnTo>
+                  <a:lnTo>
+                    <a:pt x="2506788" y="2885014"/>
+                  </a:lnTo>
+                  <a:lnTo>
+                    <a:pt x="2578410" y="2872279"/>
+                  </a:lnTo>
+                  <a:lnTo>
+                    <a:pt x="2650033" y="2859334"/>
+                  </a:lnTo>
+                  <a:lnTo>
+                    <a:pt x="2721655" y="2846173"/>
+                  </a:lnTo>
+                  <a:lnTo>
+                    <a:pt x="2793278" y="2832794"/>
+                  </a:lnTo>
+                  <a:lnTo>
+                    <a:pt x="2864901" y="2819193"/>
+                  </a:lnTo>
+                  <a:lnTo>
+                    <a:pt x="2936523" y="2805367"/>
+                  </a:lnTo>
+                  <a:lnTo>
+                    <a:pt x="3008146" y="2791311"/>
+                  </a:lnTo>
+                  <a:lnTo>
+                    <a:pt x="3079768" y="2761510"/>
+                  </a:lnTo>
+                  <a:lnTo>
+                    <a:pt x="3151391" y="2707481"/>
+                  </a:lnTo>
+                  <a:lnTo>
+                    <a:pt x="3223013" y="2650175"/>
+                  </a:lnTo>
+                  <a:lnTo>
+                    <a:pt x="3294636" y="2589395"/>
+                  </a:lnTo>
+                  <a:lnTo>
+                    <a:pt x="3366258" y="2524930"/>
+                  </a:lnTo>
+                  <a:lnTo>
+                    <a:pt x="3437881" y="2456556"/>
+                  </a:lnTo>
+                  <a:lnTo>
+                    <a:pt x="3509503" y="2384037"/>
+                  </a:lnTo>
+                  <a:lnTo>
+                    <a:pt x="3581126" y="2307121"/>
+                  </a:lnTo>
+                  <a:lnTo>
+                    <a:pt x="3652748" y="2225542"/>
+                  </a:lnTo>
+                  <a:lnTo>
+                    <a:pt x="3724371" y="2139016"/>
+                  </a:lnTo>
+                  <a:lnTo>
+                    <a:pt x="3795993" y="2047244"/>
+                  </a:lnTo>
+                  <a:lnTo>
+                    <a:pt x="3867616" y="1949908"/>
+                  </a:lnTo>
+                  <a:lnTo>
+                    <a:pt x="3939238" y="1846671"/>
+                  </a:lnTo>
+                  <a:lnTo>
+                    <a:pt x="4010861" y="1737174"/>
+                  </a:lnTo>
+                  <a:lnTo>
+                    <a:pt x="4082483" y="1621038"/>
+                  </a:lnTo>
+                  <a:lnTo>
+                    <a:pt x="4154106" y="1497861"/>
+                  </a:lnTo>
+                  <a:lnTo>
+                    <a:pt x="4225729" y="1367216"/>
+                  </a:lnTo>
+                  <a:lnTo>
+                    <a:pt x="4297351" y="1228650"/>
+                  </a:lnTo>
+                  <a:lnTo>
+                    <a:pt x="4368974" y="1081682"/>
+                  </a:lnTo>
+                  <a:lnTo>
+                    <a:pt x="4440596" y="925804"/>
+                  </a:lnTo>
+                  <a:lnTo>
+                    <a:pt x="4512219" y="760475"/>
+                  </a:lnTo>
+                  <a:lnTo>
+                    <a:pt x="4583841" y="585121"/>
+                  </a:lnTo>
+                  <a:lnTo>
+                    <a:pt x="4655464" y="399136"/>
+                  </a:lnTo>
+                  <a:lnTo>
+                    <a:pt x="4727086" y="201875"/>
+                  </a:lnTo>
+                  <a:lnTo>
+                    <a:pt x="4796194" y="0"/>
                   </a:lnTo>
                 </a:path>
               </a:pathLst>
@@ -3904,312 +3898,312 @@
           </p:nvSpPr>
           <p:spPr>
             <a:xfrm>
-              <a:off x="1172049" y="3458094"/>
-              <a:ext cx="7090630" cy="2012858"/>
+              <a:off x="1172049" y="3348957"/>
+              <a:ext cx="7090630" cy="2129342"/>
             </a:xfrm>
             <a:custGeom>
               <a:avLst/>
               <a:pathLst>
-                <a:path w="7090630" h="2012858">
+                <a:path w="7090630" h="2129342">
                   <a:moveTo>
                     <a:pt x="7090630" y="0"/>
                   </a:moveTo>
                   <a:lnTo>
-                    <a:pt x="7019007" y="32268"/>
-                  </a:lnTo>
-                  <a:lnTo>
-                    <a:pt x="6947385" y="64039"/>
-                  </a:lnTo>
-                  <a:lnTo>
-                    <a:pt x="6875762" y="95319"/>
-                  </a:lnTo>
-                  <a:lnTo>
-                    <a:pt x="6804139" y="126117"/>
-                  </a:lnTo>
-                  <a:lnTo>
-                    <a:pt x="6732517" y="156439"/>
-                  </a:lnTo>
-                  <a:lnTo>
-                    <a:pt x="6660894" y="186294"/>
-                  </a:lnTo>
-                  <a:lnTo>
-                    <a:pt x="6589272" y="215688"/>
-                  </a:lnTo>
-                  <a:lnTo>
-                    <a:pt x="6517649" y="244628"/>
-                  </a:lnTo>
-                  <a:lnTo>
-                    <a:pt x="6446027" y="273122"/>
-                  </a:lnTo>
-                  <a:lnTo>
-                    <a:pt x="6374404" y="301176"/>
-                  </a:lnTo>
-                  <a:lnTo>
-                    <a:pt x="6302782" y="328797"/>
-                  </a:lnTo>
-                  <a:lnTo>
-                    <a:pt x="6231159" y="355992"/>
-                  </a:lnTo>
-                  <a:lnTo>
-                    <a:pt x="6159537" y="382767"/>
-                  </a:lnTo>
-                  <a:lnTo>
-                    <a:pt x="6087914" y="409129"/>
-                  </a:lnTo>
-                  <a:lnTo>
-                    <a:pt x="6016292" y="435084"/>
-                  </a:lnTo>
-                  <a:lnTo>
-                    <a:pt x="5944669" y="460639"/>
-                  </a:lnTo>
-                  <a:lnTo>
-                    <a:pt x="5873047" y="485799"/>
-                  </a:lnTo>
-                  <a:lnTo>
-                    <a:pt x="5801424" y="510571"/>
-                  </a:lnTo>
-                  <a:lnTo>
-                    <a:pt x="5729802" y="534961"/>
-                  </a:lnTo>
-                  <a:lnTo>
-                    <a:pt x="5658179" y="558975"/>
-                  </a:lnTo>
-                  <a:lnTo>
-                    <a:pt x="5586557" y="582618"/>
-                  </a:lnTo>
-                  <a:lnTo>
-                    <a:pt x="5514934" y="605896"/>
-                  </a:lnTo>
-                  <a:lnTo>
-                    <a:pt x="5443311" y="628815"/>
-                  </a:lnTo>
-                  <a:lnTo>
-                    <a:pt x="5371689" y="651380"/>
-                  </a:lnTo>
-                  <a:lnTo>
-                    <a:pt x="5300066" y="673597"/>
-                  </a:lnTo>
-                  <a:lnTo>
-                    <a:pt x="5228444" y="695471"/>
-                  </a:lnTo>
-                  <a:lnTo>
-                    <a:pt x="5156821" y="717007"/>
-                  </a:lnTo>
-                  <a:lnTo>
-                    <a:pt x="5085199" y="738212"/>
-                  </a:lnTo>
-                  <a:lnTo>
-                    <a:pt x="5013576" y="759089"/>
-                  </a:lnTo>
-                  <a:lnTo>
-                    <a:pt x="4941954" y="779644"/>
-                  </a:lnTo>
-                  <a:lnTo>
-                    <a:pt x="4870331" y="799881"/>
-                  </a:lnTo>
-                  <a:lnTo>
-                    <a:pt x="4798709" y="819807"/>
-                  </a:lnTo>
-                  <a:lnTo>
-                    <a:pt x="4727086" y="839425"/>
-                  </a:lnTo>
-                  <a:lnTo>
-                    <a:pt x="4655464" y="858740"/>
-                  </a:lnTo>
-                  <a:lnTo>
-                    <a:pt x="4583841" y="877757"/>
-                  </a:lnTo>
-                  <a:lnTo>
-                    <a:pt x="4512219" y="896481"/>
-                  </a:lnTo>
-                  <a:lnTo>
-                    <a:pt x="4440596" y="914915"/>
-                  </a:lnTo>
-                  <a:lnTo>
-                    <a:pt x="4368974" y="933066"/>
-                  </a:lnTo>
-                  <a:lnTo>
-                    <a:pt x="4297351" y="950936"/>
-                  </a:lnTo>
-                  <a:lnTo>
-                    <a:pt x="4225729" y="968530"/>
-                  </a:lnTo>
-                  <a:lnTo>
-                    <a:pt x="4154106" y="985853"/>
-                  </a:lnTo>
-                  <a:lnTo>
-                    <a:pt x="4082483" y="1002909"/>
-                  </a:lnTo>
-                  <a:lnTo>
-                    <a:pt x="4010861" y="1019701"/>
-                  </a:lnTo>
-                  <a:lnTo>
-                    <a:pt x="3939238" y="1036235"/>
-                  </a:lnTo>
-                  <a:lnTo>
-                    <a:pt x="3867616" y="1052513"/>
-                  </a:lnTo>
-                  <a:lnTo>
-                    <a:pt x="3795993" y="1068540"/>
-                  </a:lnTo>
-                  <a:lnTo>
-                    <a:pt x="3724371" y="1084319"/>
-                  </a:lnTo>
-                  <a:lnTo>
-                    <a:pt x="3652748" y="1099855"/>
-                  </a:lnTo>
-                  <a:lnTo>
-                    <a:pt x="3581126" y="1115152"/>
-                  </a:lnTo>
-                  <a:lnTo>
-                    <a:pt x="3509503" y="1130212"/>
-                  </a:lnTo>
-                  <a:lnTo>
-                    <a:pt x="3437881" y="1145040"/>
-                  </a:lnTo>
-                  <a:lnTo>
-                    <a:pt x="3366258" y="1159639"/>
-                  </a:lnTo>
-                  <a:lnTo>
-                    <a:pt x="3294636" y="1174013"/>
-                  </a:lnTo>
-                  <a:lnTo>
-                    <a:pt x="3223013" y="1188165"/>
-                  </a:lnTo>
-                  <a:lnTo>
-                    <a:pt x="3151391" y="1202099"/>
-                  </a:lnTo>
-                  <a:lnTo>
-                    <a:pt x="3079768" y="1215818"/>
-                  </a:lnTo>
-                  <a:lnTo>
-                    <a:pt x="3008146" y="1249780"/>
-                  </a:lnTo>
-                  <a:lnTo>
-                    <a:pt x="2936523" y="1296036"/>
-                  </a:lnTo>
-                  <a:lnTo>
-                    <a:pt x="2864901" y="1339749"/>
-                  </a:lnTo>
-                  <a:lnTo>
-                    <a:pt x="2793278" y="1381058"/>
-                  </a:lnTo>
-                  <a:lnTo>
-                    <a:pt x="2721655" y="1420096"/>
-                  </a:lnTo>
-                  <a:lnTo>
-                    <a:pt x="2650033" y="1456988"/>
-                  </a:lnTo>
-                  <a:lnTo>
-                    <a:pt x="2578410" y="1491851"/>
-                  </a:lnTo>
-                  <a:lnTo>
-                    <a:pt x="2506788" y="1524798"/>
-                  </a:lnTo>
-                  <a:lnTo>
-                    <a:pt x="2435165" y="1555934"/>
-                  </a:lnTo>
-                  <a:lnTo>
-                    <a:pt x="2363543" y="1585357"/>
-                  </a:lnTo>
-                  <a:lnTo>
-                    <a:pt x="2291920" y="1613163"/>
-                  </a:lnTo>
-                  <a:lnTo>
-                    <a:pt x="2220298" y="1639441"/>
-                  </a:lnTo>
-                  <a:lnTo>
-                    <a:pt x="2148675" y="1664273"/>
-                  </a:lnTo>
-                  <a:lnTo>
-                    <a:pt x="2077053" y="1687740"/>
-                  </a:lnTo>
-                  <a:lnTo>
-                    <a:pt x="2005430" y="1709917"/>
-                  </a:lnTo>
-                  <a:lnTo>
-                    <a:pt x="1933808" y="1730875"/>
-                  </a:lnTo>
-                  <a:lnTo>
-                    <a:pt x="1862185" y="1750681"/>
-                  </a:lnTo>
-                  <a:lnTo>
-                    <a:pt x="1790563" y="1769397"/>
-                  </a:lnTo>
-                  <a:lnTo>
-                    <a:pt x="1718940" y="1787085"/>
-                  </a:lnTo>
-                  <a:lnTo>
-                    <a:pt x="1647318" y="1803800"/>
-                  </a:lnTo>
-                  <a:lnTo>
-                    <a:pt x="1575695" y="1819596"/>
-                  </a:lnTo>
-                  <a:lnTo>
-                    <a:pt x="1504073" y="1834524"/>
-                  </a:lnTo>
-                  <a:lnTo>
-                    <a:pt x="1432450" y="1848631"/>
-                  </a:lnTo>
-                  <a:lnTo>
-                    <a:pt x="1360827" y="1861962"/>
-                  </a:lnTo>
-                  <a:lnTo>
-                    <a:pt x="1289205" y="1874561"/>
-                  </a:lnTo>
-                  <a:lnTo>
-                    <a:pt x="1217582" y="1886467"/>
-                  </a:lnTo>
-                  <a:lnTo>
-                    <a:pt x="1145960" y="1897718"/>
-                  </a:lnTo>
-                  <a:lnTo>
-                    <a:pt x="1074337" y="1908351"/>
-                  </a:lnTo>
-                  <a:lnTo>
-                    <a:pt x="1002715" y="1918399"/>
-                  </a:lnTo>
-                  <a:lnTo>
-                    <a:pt x="931092" y="1927894"/>
-                  </a:lnTo>
-                  <a:lnTo>
-                    <a:pt x="859470" y="1936868"/>
-                  </a:lnTo>
-                  <a:lnTo>
-                    <a:pt x="787847" y="1945348"/>
-                  </a:lnTo>
-                  <a:lnTo>
-                    <a:pt x="716225" y="1953362"/>
-                  </a:lnTo>
-                  <a:lnTo>
-                    <a:pt x="644602" y="1960935"/>
-                  </a:lnTo>
-                  <a:lnTo>
-                    <a:pt x="572980" y="1968093"/>
-                  </a:lnTo>
-                  <a:lnTo>
-                    <a:pt x="501357" y="1974856"/>
-                  </a:lnTo>
-                  <a:lnTo>
-                    <a:pt x="429735" y="1981248"/>
-                  </a:lnTo>
-                  <a:lnTo>
-                    <a:pt x="358112" y="1987288"/>
-                  </a:lnTo>
-                  <a:lnTo>
-                    <a:pt x="286490" y="1992996"/>
-                  </a:lnTo>
-                  <a:lnTo>
-                    <a:pt x="214867" y="1998391"/>
-                  </a:lnTo>
-                  <a:lnTo>
-                    <a:pt x="143245" y="2003488"/>
-                  </a:lnTo>
-                  <a:lnTo>
-                    <a:pt x="71622" y="2008306"/>
-                  </a:lnTo>
-                  <a:lnTo>
-                    <a:pt x="0" y="2012858"/>
+                    <a:pt x="7019007" y="35905"/>
+                  </a:lnTo>
+                  <a:lnTo>
+                    <a:pt x="6947385" y="71224"/>
+                  </a:lnTo>
+                  <a:lnTo>
+                    <a:pt x="6875762" y="105968"/>
+                  </a:lnTo>
+                  <a:lnTo>
+                    <a:pt x="6804139" y="140144"/>
+                  </a:lnTo>
+                  <a:lnTo>
+                    <a:pt x="6732517" y="173762"/>
+                  </a:lnTo>
+                  <a:lnTo>
+                    <a:pt x="6660894" y="206832"/>
+                  </a:lnTo>
+                  <a:lnTo>
+                    <a:pt x="6589272" y="239362"/>
+                  </a:lnTo>
+                  <a:lnTo>
+                    <a:pt x="6517649" y="271362"/>
+                  </a:lnTo>
+                  <a:lnTo>
+                    <a:pt x="6446027" y="302839"/>
+                  </a:lnTo>
+                  <a:lnTo>
+                    <a:pt x="6374404" y="333802"/>
+                  </a:lnTo>
+                  <a:lnTo>
+                    <a:pt x="6302782" y="364260"/>
+                  </a:lnTo>
+                  <a:lnTo>
+                    <a:pt x="6231159" y="394221"/>
+                  </a:lnTo>
+                  <a:lnTo>
+                    <a:pt x="6159537" y="423694"/>
+                  </a:lnTo>
+                  <a:lnTo>
+                    <a:pt x="6087914" y="452685"/>
+                  </a:lnTo>
+                  <a:lnTo>
+                    <a:pt x="6016292" y="481203"/>
+                  </a:lnTo>
+                  <a:lnTo>
+                    <a:pt x="5944669" y="509256"/>
+                  </a:lnTo>
+                  <a:lnTo>
+                    <a:pt x="5873047" y="536851"/>
+                  </a:lnTo>
+                  <a:lnTo>
+                    <a:pt x="5801424" y="563996"/>
+                  </a:lnTo>
+                  <a:lnTo>
+                    <a:pt x="5729802" y="590697"/>
+                  </a:lnTo>
+                  <a:lnTo>
+                    <a:pt x="5658179" y="616963"/>
+                  </a:lnTo>
+                  <a:lnTo>
+                    <a:pt x="5586557" y="642801"/>
+                  </a:lnTo>
+                  <a:lnTo>
+                    <a:pt x="5514934" y="668216"/>
+                  </a:lnTo>
+                  <a:lnTo>
+                    <a:pt x="5443311" y="693217"/>
+                  </a:lnTo>
+                  <a:lnTo>
+                    <a:pt x="5371689" y="717810"/>
+                  </a:lnTo>
+                  <a:lnTo>
+                    <a:pt x="5300066" y="742002"/>
+                  </a:lnTo>
+                  <a:lnTo>
+                    <a:pt x="5228444" y="765799"/>
+                  </a:lnTo>
+                  <a:lnTo>
+                    <a:pt x="5156821" y="789207"/>
+                  </a:lnTo>
+                  <a:lnTo>
+                    <a:pt x="5085199" y="812234"/>
+                  </a:lnTo>
+                  <a:lnTo>
+                    <a:pt x="5013576" y="834884"/>
+                  </a:lnTo>
+                  <a:lnTo>
+                    <a:pt x="4941954" y="857165"/>
+                  </a:lnTo>
+                  <a:lnTo>
+                    <a:pt x="4870331" y="879083"/>
+                  </a:lnTo>
+                  <a:lnTo>
+                    <a:pt x="4798709" y="900643"/>
+                  </a:lnTo>
+                  <a:lnTo>
+                    <a:pt x="4727086" y="921851"/>
+                  </a:lnTo>
+                  <a:lnTo>
+                    <a:pt x="4655464" y="942713"/>
+                  </a:lnTo>
+                  <a:lnTo>
+                    <a:pt x="4583841" y="963234"/>
+                  </a:lnTo>
+                  <a:lnTo>
+                    <a:pt x="4512219" y="983421"/>
+                  </a:lnTo>
+                  <a:lnTo>
+                    <a:pt x="4440596" y="1003278"/>
+                  </a:lnTo>
+                  <a:lnTo>
+                    <a:pt x="4368974" y="1022811"/>
+                  </a:lnTo>
+                  <a:lnTo>
+                    <a:pt x="4297351" y="1042026"/>
+                  </a:lnTo>
+                  <a:lnTo>
+                    <a:pt x="4225729" y="1060926"/>
+                  </a:lnTo>
+                  <a:lnTo>
+                    <a:pt x="4154106" y="1079519"/>
+                  </a:lnTo>
+                  <a:lnTo>
+                    <a:pt x="4082483" y="1097808"/>
+                  </a:lnTo>
+                  <a:lnTo>
+                    <a:pt x="4010861" y="1115798"/>
+                  </a:lnTo>
+                  <a:lnTo>
+                    <a:pt x="3939238" y="1133495"/>
+                  </a:lnTo>
+                  <a:lnTo>
+                    <a:pt x="3867616" y="1150903"/>
+                  </a:lnTo>
+                  <a:lnTo>
+                    <a:pt x="3795993" y="1168027"/>
+                  </a:lnTo>
+                  <a:lnTo>
+                    <a:pt x="3724371" y="1184872"/>
+                  </a:lnTo>
+                  <a:lnTo>
+                    <a:pt x="3652748" y="1201442"/>
+                  </a:lnTo>
+                  <a:lnTo>
+                    <a:pt x="3581126" y="1217741"/>
+                  </a:lnTo>
+                  <a:lnTo>
+                    <a:pt x="3509503" y="1233774"/>
+                  </a:lnTo>
+                  <a:lnTo>
+                    <a:pt x="3437881" y="1249546"/>
+                  </a:lnTo>
+                  <a:lnTo>
+                    <a:pt x="3366258" y="1265061"/>
+                  </a:lnTo>
+                  <a:lnTo>
+                    <a:pt x="3294636" y="1280322"/>
+                  </a:lnTo>
+                  <a:lnTo>
+                    <a:pt x="3223013" y="1295334"/>
+                  </a:lnTo>
+                  <a:lnTo>
+                    <a:pt x="3151391" y="1310101"/>
+                  </a:lnTo>
+                  <a:lnTo>
+                    <a:pt x="3079768" y="1324627"/>
+                  </a:lnTo>
+                  <a:lnTo>
+                    <a:pt x="3008146" y="1360057"/>
+                  </a:lnTo>
+                  <a:lnTo>
+                    <a:pt x="2936523" y="1408086"/>
+                  </a:lnTo>
+                  <a:lnTo>
+                    <a:pt x="2864901" y="1453370"/>
+                  </a:lnTo>
+                  <a:lnTo>
+                    <a:pt x="2793278" y="1496065"/>
+                  </a:lnTo>
+                  <a:lnTo>
+                    <a:pt x="2721655" y="1536319"/>
+                  </a:lnTo>
+                  <a:lnTo>
+                    <a:pt x="2650033" y="1574272"/>
+                  </a:lnTo>
+                  <a:lnTo>
+                    <a:pt x="2578410" y="1610056"/>
+                  </a:lnTo>
+                  <a:lnTo>
+                    <a:pt x="2506788" y="1643794"/>
+                  </a:lnTo>
+                  <a:lnTo>
+                    <a:pt x="2435165" y="1675603"/>
+                  </a:lnTo>
+                  <a:lnTo>
+                    <a:pt x="2363543" y="1705595"/>
+                  </a:lnTo>
+                  <a:lnTo>
+                    <a:pt x="2291920" y="1733871"/>
+                  </a:lnTo>
+                  <a:lnTo>
+                    <a:pt x="2220298" y="1760531"/>
+                  </a:lnTo>
+                  <a:lnTo>
+                    <a:pt x="2148675" y="1785668"/>
+                  </a:lnTo>
+                  <a:lnTo>
+                    <a:pt x="2077053" y="1809367"/>
+                  </a:lnTo>
+                  <a:lnTo>
+                    <a:pt x="2005430" y="1831712"/>
+                  </a:lnTo>
+                  <a:lnTo>
+                    <a:pt x="1933808" y="1852779"/>
+                  </a:lnTo>
+                  <a:lnTo>
+                    <a:pt x="1862185" y="1872642"/>
+                  </a:lnTo>
+                  <a:lnTo>
+                    <a:pt x="1790563" y="1891369"/>
+                  </a:lnTo>
+                  <a:lnTo>
+                    <a:pt x="1718940" y="1909026"/>
+                  </a:lnTo>
+                  <a:lnTo>
+                    <a:pt x="1647318" y="1925674"/>
+                  </a:lnTo>
+                  <a:lnTo>
+                    <a:pt x="1575695" y="1941370"/>
+                  </a:lnTo>
+                  <a:lnTo>
+                    <a:pt x="1504073" y="1956168"/>
+                  </a:lnTo>
+                  <a:lnTo>
+                    <a:pt x="1432450" y="1970121"/>
+                  </a:lnTo>
+                  <a:lnTo>
+                    <a:pt x="1360827" y="1983276"/>
+                  </a:lnTo>
+                  <a:lnTo>
+                    <a:pt x="1289205" y="1995679"/>
+                  </a:lnTo>
+                  <a:lnTo>
+                    <a:pt x="1217582" y="2007373"/>
+                  </a:lnTo>
+                  <a:lnTo>
+                    <a:pt x="1145960" y="2018399"/>
+                  </a:lnTo>
+                  <a:lnTo>
+                    <a:pt x="1074337" y="2028794"/>
+                  </a:lnTo>
+                  <a:lnTo>
+                    <a:pt x="1002715" y="2038596"/>
+                  </a:lnTo>
+                  <a:lnTo>
+                    <a:pt x="931092" y="2047836"/>
+                  </a:lnTo>
+                  <a:lnTo>
+                    <a:pt x="859470" y="2056549"/>
+                  </a:lnTo>
+                  <a:lnTo>
+                    <a:pt x="787847" y="2064763"/>
+                  </a:lnTo>
+                  <a:lnTo>
+                    <a:pt x="716225" y="2072508"/>
+                  </a:lnTo>
+                  <a:lnTo>
+                    <a:pt x="644602" y="2079811"/>
+                  </a:lnTo>
+                  <a:lnTo>
+                    <a:pt x="572980" y="2086695"/>
+                  </a:lnTo>
+                  <a:lnTo>
+                    <a:pt x="501357" y="2093187"/>
+                  </a:lnTo>
+                  <a:lnTo>
+                    <a:pt x="429735" y="2099307"/>
+                  </a:lnTo>
+                  <a:lnTo>
+                    <a:pt x="358112" y="2105077"/>
+                  </a:lnTo>
+                  <a:lnTo>
+                    <a:pt x="286490" y="2110518"/>
+                  </a:lnTo>
+                  <a:lnTo>
+                    <a:pt x="214867" y="2115647"/>
+                  </a:lnTo>
+                  <a:lnTo>
+                    <a:pt x="143245" y="2120483"/>
+                  </a:lnTo>
+                  <a:lnTo>
+                    <a:pt x="71622" y="2125043"/>
+                  </a:lnTo>
+                  <a:lnTo>
+                    <a:pt x="0" y="2129342"/>
                   </a:lnTo>
                 </a:path>
               </a:pathLst>
@@ -4230,263 +4224,257 @@
           <p:spPr>
             <a:xfrm>
               <a:off x="1172049" y="1896563"/>
-              <a:ext cx="5900974" cy="3465308"/>
+              <a:ext cx="5779213" cy="3477711"/>
             </a:xfrm>
             <a:custGeom>
               <a:avLst/>
               <a:pathLst>
-                <a:path w="5900974" h="3465308">
+                <a:path w="5779213" h="3477711">
                   <a:moveTo>
-                    <a:pt x="0" y="3465308"/>
+                    <a:pt x="0" y="3477711"/>
                   </a:moveTo>
                   <a:lnTo>
-                    <a:pt x="71622" y="3458431"/>
-                  </a:lnTo>
-                  <a:lnTo>
-                    <a:pt x="143245" y="3451302"/>
-                  </a:lnTo>
-                  <a:lnTo>
-                    <a:pt x="214867" y="3443911"/>
-                  </a:lnTo>
-                  <a:lnTo>
-                    <a:pt x="286490" y="3436249"/>
-                  </a:lnTo>
-                  <a:lnTo>
-                    <a:pt x="358112" y="3428306"/>
-                  </a:lnTo>
-                  <a:lnTo>
-                    <a:pt x="429735" y="3420071"/>
-                  </a:lnTo>
-                  <a:lnTo>
-                    <a:pt x="501357" y="3411534"/>
-                  </a:lnTo>
-                  <a:lnTo>
-                    <a:pt x="572980" y="3402683"/>
-                  </a:lnTo>
-                  <a:lnTo>
-                    <a:pt x="644602" y="3393508"/>
-                  </a:lnTo>
-                  <a:lnTo>
-                    <a:pt x="716225" y="3383996"/>
-                  </a:lnTo>
-                  <a:lnTo>
-                    <a:pt x="787847" y="3374134"/>
-                  </a:lnTo>
-                  <a:lnTo>
-                    <a:pt x="859470" y="3363911"/>
-                  </a:lnTo>
-                  <a:lnTo>
-                    <a:pt x="931092" y="3353312"/>
-                  </a:lnTo>
-                  <a:lnTo>
-                    <a:pt x="1002715" y="3342324"/>
-                  </a:lnTo>
-                  <a:lnTo>
-                    <a:pt x="1074337" y="3330933"/>
-                  </a:lnTo>
-                  <a:lnTo>
-                    <a:pt x="1145960" y="3319124"/>
-                  </a:lnTo>
-                  <a:lnTo>
-                    <a:pt x="1217582" y="3306882"/>
-                  </a:lnTo>
-                  <a:lnTo>
-                    <a:pt x="1289205" y="3294189"/>
-                  </a:lnTo>
-                  <a:lnTo>
-                    <a:pt x="1360827" y="3281031"/>
-                  </a:lnTo>
-                  <a:lnTo>
-                    <a:pt x="1432450" y="3267391"/>
-                  </a:lnTo>
-                  <a:lnTo>
-                    <a:pt x="1504073" y="3253249"/>
-                  </a:lnTo>
-                  <a:lnTo>
-                    <a:pt x="1575695" y="3238588"/>
-                  </a:lnTo>
-                  <a:lnTo>
-                    <a:pt x="1647318" y="3223389"/>
-                  </a:lnTo>
-                  <a:lnTo>
-                    <a:pt x="1718940" y="3207632"/>
-                  </a:lnTo>
-                  <a:lnTo>
-                    <a:pt x="1790563" y="3191297"/>
-                  </a:lnTo>
-                  <a:lnTo>
-                    <a:pt x="1862185" y="3174362"/>
-                  </a:lnTo>
-                  <a:lnTo>
-                    <a:pt x="1933808" y="3156805"/>
-                  </a:lnTo>
-                  <a:lnTo>
-                    <a:pt x="2005430" y="3138604"/>
-                  </a:lnTo>
-                  <a:lnTo>
-                    <a:pt x="2077053" y="3119735"/>
-                  </a:lnTo>
-                  <a:lnTo>
-                    <a:pt x="2148675" y="3100173"/>
-                  </a:lnTo>
-                  <a:lnTo>
-                    <a:pt x="2220298" y="3079894"/>
-                  </a:lnTo>
-                  <a:lnTo>
-                    <a:pt x="2291920" y="3058869"/>
-                  </a:lnTo>
-                  <a:lnTo>
-                    <a:pt x="2363543" y="3037073"/>
-                  </a:lnTo>
-                  <a:lnTo>
-                    <a:pt x="2435165" y="3014477"/>
-                  </a:lnTo>
-                  <a:lnTo>
-                    <a:pt x="2506788" y="2991052"/>
-                  </a:lnTo>
-                  <a:lnTo>
-                    <a:pt x="2578410" y="2966766"/>
-                  </a:lnTo>
-                  <a:lnTo>
-                    <a:pt x="2650033" y="2941589"/>
-                  </a:lnTo>
-                  <a:lnTo>
-                    <a:pt x="2721655" y="2915488"/>
-                  </a:lnTo>
-                  <a:lnTo>
-                    <a:pt x="2793278" y="2888429"/>
-                  </a:lnTo>
-                  <a:lnTo>
-                    <a:pt x="2864901" y="2860377"/>
-                  </a:lnTo>
-                  <a:lnTo>
-                    <a:pt x="2936523" y="2831294"/>
-                  </a:lnTo>
-                  <a:lnTo>
-                    <a:pt x="3008146" y="2801145"/>
-                  </a:lnTo>
-                  <a:lnTo>
-                    <a:pt x="3079768" y="2769888"/>
-                  </a:lnTo>
-                  <a:lnTo>
-                    <a:pt x="3151391" y="2737484"/>
-                  </a:lnTo>
-                  <a:lnTo>
-                    <a:pt x="3223013" y="2703891"/>
-                  </a:lnTo>
-                  <a:lnTo>
-                    <a:pt x="3294636" y="2669065"/>
-                  </a:lnTo>
-                  <a:lnTo>
-                    <a:pt x="3366258" y="2632960"/>
-                  </a:lnTo>
-                  <a:lnTo>
-                    <a:pt x="3437881" y="2595530"/>
-                  </a:lnTo>
-                  <a:lnTo>
-                    <a:pt x="3509503" y="2556726"/>
-                  </a:lnTo>
-                  <a:lnTo>
-                    <a:pt x="3581126" y="2516497"/>
-                  </a:lnTo>
-                  <a:lnTo>
-                    <a:pt x="3652748" y="2474792"/>
-                  </a:lnTo>
-                  <a:lnTo>
-                    <a:pt x="3724371" y="2431556"/>
-                  </a:lnTo>
-                  <a:lnTo>
-                    <a:pt x="3795993" y="2386733"/>
-                  </a:lnTo>
-                  <a:lnTo>
-                    <a:pt x="3867616" y="2340264"/>
-                  </a:lnTo>
-                  <a:lnTo>
-                    <a:pt x="3939238" y="2292090"/>
-                  </a:lnTo>
-                  <a:lnTo>
-                    <a:pt x="4010861" y="2242147"/>
-                  </a:lnTo>
-                  <a:lnTo>
-                    <a:pt x="4082483" y="2190371"/>
-                  </a:lnTo>
-                  <a:lnTo>
-                    <a:pt x="4154106" y="2136695"/>
-                  </a:lnTo>
-                  <a:lnTo>
-                    <a:pt x="4225729" y="2081048"/>
-                  </a:lnTo>
-                  <a:lnTo>
-                    <a:pt x="4297351" y="2023358"/>
-                  </a:lnTo>
-                  <a:lnTo>
-                    <a:pt x="4368974" y="1963551"/>
-                  </a:lnTo>
-                  <a:lnTo>
-                    <a:pt x="4440596" y="1901549"/>
-                  </a:lnTo>
-                  <a:lnTo>
-                    <a:pt x="4512219" y="1837270"/>
-                  </a:lnTo>
-                  <a:lnTo>
-                    <a:pt x="4583841" y="1770632"/>
-                  </a:lnTo>
-                  <a:lnTo>
-                    <a:pt x="4655464" y="1701548"/>
-                  </a:lnTo>
-                  <a:lnTo>
-                    <a:pt x="4727086" y="1629928"/>
-                  </a:lnTo>
-                  <a:lnTo>
-                    <a:pt x="4798709" y="1555679"/>
-                  </a:lnTo>
-                  <a:lnTo>
-                    <a:pt x="4870331" y="1478704"/>
-                  </a:lnTo>
-                  <a:lnTo>
-                    <a:pt x="4941954" y="1398904"/>
-                  </a:lnTo>
-                  <a:lnTo>
-                    <a:pt x="5013576" y="1316175"/>
-                  </a:lnTo>
-                  <a:lnTo>
-                    <a:pt x="5085199" y="1230409"/>
-                  </a:lnTo>
-                  <a:lnTo>
-                    <a:pt x="5156821" y="1141494"/>
-                  </a:lnTo>
-                  <a:lnTo>
-                    <a:pt x="5228444" y="1049316"/>
-                  </a:lnTo>
-                  <a:lnTo>
-                    <a:pt x="5300066" y="953754"/>
-                  </a:lnTo>
-                  <a:lnTo>
-                    <a:pt x="5371689" y="854685"/>
-                  </a:lnTo>
-                  <a:lnTo>
-                    <a:pt x="5443311" y="751978"/>
-                  </a:lnTo>
-                  <a:lnTo>
-                    <a:pt x="5514934" y="645502"/>
-                  </a:lnTo>
-                  <a:lnTo>
-                    <a:pt x="5586557" y="535117"/>
-                  </a:lnTo>
-                  <a:lnTo>
-                    <a:pt x="5658179" y="420680"/>
-                  </a:lnTo>
-                  <a:lnTo>
-                    <a:pt x="5729802" y="302042"/>
-                  </a:lnTo>
-                  <a:lnTo>
-                    <a:pt x="5801424" y="179050"/>
-                  </a:lnTo>
-                  <a:lnTo>
-                    <a:pt x="5873047" y="51542"/>
-                  </a:lnTo>
-                  <a:lnTo>
-                    <a:pt x="5900974" y="0"/>
+                    <a:pt x="71622" y="3470997"/>
+                  </a:lnTo>
+                  <a:lnTo>
+                    <a:pt x="143245" y="3464026"/>
+                  </a:lnTo>
+                  <a:lnTo>
+                    <a:pt x="214867" y="3456788"/>
+                  </a:lnTo>
+                  <a:lnTo>
+                    <a:pt x="286490" y="3449272"/>
+                  </a:lnTo>
+                  <a:lnTo>
+                    <a:pt x="358112" y="3441467"/>
+                  </a:lnTo>
+                  <a:lnTo>
+                    <a:pt x="429735" y="3433363"/>
+                  </a:lnTo>
+                  <a:lnTo>
+                    <a:pt x="501357" y="3424947"/>
+                  </a:lnTo>
+                  <a:lnTo>
+                    <a:pt x="572980" y="3416209"/>
+                  </a:lnTo>
+                  <a:lnTo>
+                    <a:pt x="644602" y="3407136"/>
+                  </a:lnTo>
+                  <a:lnTo>
+                    <a:pt x="716225" y="3397714"/>
+                  </a:lnTo>
+                  <a:lnTo>
+                    <a:pt x="787847" y="3387931"/>
+                  </a:lnTo>
+                  <a:lnTo>
+                    <a:pt x="859470" y="3377772"/>
+                  </a:lnTo>
+                  <a:lnTo>
+                    <a:pt x="931092" y="3367223"/>
+                  </a:lnTo>
+                  <a:lnTo>
+                    <a:pt x="1002715" y="3356270"/>
+                  </a:lnTo>
+                  <a:lnTo>
+                    <a:pt x="1074337" y="3344896"/>
+                  </a:lnTo>
+                  <a:lnTo>
+                    <a:pt x="1145960" y="3333086"/>
+                  </a:lnTo>
+                  <a:lnTo>
+                    <a:pt x="1217582" y="3320823"/>
+                  </a:lnTo>
+                  <a:lnTo>
+                    <a:pt x="1289205" y="3308088"/>
+                  </a:lnTo>
+                  <a:lnTo>
+                    <a:pt x="1360827" y="3294866"/>
+                  </a:lnTo>
+                  <a:lnTo>
+                    <a:pt x="1432450" y="3281135"/>
+                  </a:lnTo>
+                  <a:lnTo>
+                    <a:pt x="1504073" y="3266878"/>
+                  </a:lnTo>
+                  <a:lnTo>
+                    <a:pt x="1575695" y="3252074"/>
+                  </a:lnTo>
+                  <a:lnTo>
+                    <a:pt x="1647318" y="3236701"/>
+                  </a:lnTo>
+                  <a:lnTo>
+                    <a:pt x="1718940" y="3220739"/>
+                  </a:lnTo>
+                  <a:lnTo>
+                    <a:pt x="1790563" y="3204164"/>
+                  </a:lnTo>
+                  <a:lnTo>
+                    <a:pt x="1862185" y="3186953"/>
+                  </a:lnTo>
+                  <a:lnTo>
+                    <a:pt x="1933808" y="3169081"/>
+                  </a:lnTo>
+                  <a:lnTo>
+                    <a:pt x="2005430" y="3150524"/>
+                  </a:lnTo>
+                  <a:lnTo>
+                    <a:pt x="2077053" y="3131255"/>
+                  </a:lnTo>
+                  <a:lnTo>
+                    <a:pt x="2148675" y="3111245"/>
+                  </a:lnTo>
+                  <a:lnTo>
+                    <a:pt x="2220298" y="3090469"/>
+                  </a:lnTo>
+                  <a:lnTo>
+                    <a:pt x="2291920" y="3068894"/>
+                  </a:lnTo>
+                  <a:lnTo>
+                    <a:pt x="2363543" y="3046492"/>
+                  </a:lnTo>
+                  <a:lnTo>
+                    <a:pt x="2435165" y="3023230"/>
+                  </a:lnTo>
+                  <a:lnTo>
+                    <a:pt x="2506788" y="2999075"/>
+                  </a:lnTo>
+                  <a:lnTo>
+                    <a:pt x="2578410" y="2973994"/>
+                  </a:lnTo>
+                  <a:lnTo>
+                    <a:pt x="2650033" y="2947950"/>
+                  </a:lnTo>
+                  <a:lnTo>
+                    <a:pt x="2721655" y="2920906"/>
+                  </a:lnTo>
+                  <a:lnTo>
+                    <a:pt x="2793278" y="2892824"/>
+                  </a:lnTo>
+                  <a:lnTo>
+                    <a:pt x="2864901" y="2863665"/>
+                  </a:lnTo>
+                  <a:lnTo>
+                    <a:pt x="2936523" y="2833387"/>
+                  </a:lnTo>
+                  <a:lnTo>
+                    <a:pt x="3008146" y="2801947"/>
+                  </a:lnTo>
+                  <a:lnTo>
+                    <a:pt x="3079768" y="2769300"/>
+                  </a:lnTo>
+                  <a:lnTo>
+                    <a:pt x="3151391" y="2735400"/>
+                  </a:lnTo>
+                  <a:lnTo>
+                    <a:pt x="3223013" y="2700200"/>
+                  </a:lnTo>
+                  <a:lnTo>
+                    <a:pt x="3294636" y="2663648"/>
+                  </a:lnTo>
+                  <a:lnTo>
+                    <a:pt x="3366258" y="2625694"/>
+                  </a:lnTo>
+                  <a:lnTo>
+                    <a:pt x="3437881" y="2586284"/>
+                  </a:lnTo>
+                  <a:lnTo>
+                    <a:pt x="3509503" y="2545360"/>
+                  </a:lnTo>
+                  <a:lnTo>
+                    <a:pt x="3581126" y="2502867"/>
+                  </a:lnTo>
+                  <a:lnTo>
+                    <a:pt x="3652748" y="2458742"/>
+                  </a:lnTo>
+                  <a:lnTo>
+                    <a:pt x="3724371" y="2412925"/>
+                  </a:lnTo>
+                  <a:lnTo>
+                    <a:pt x="3795993" y="2365349"/>
+                  </a:lnTo>
+                  <a:lnTo>
+                    <a:pt x="3867616" y="2315947"/>
+                  </a:lnTo>
+                  <a:lnTo>
+                    <a:pt x="3939238" y="2264649"/>
+                  </a:lnTo>
+                  <a:lnTo>
+                    <a:pt x="4010861" y="2211383"/>
+                  </a:lnTo>
+                  <a:lnTo>
+                    <a:pt x="4082483" y="2156072"/>
+                  </a:lnTo>
+                  <a:lnTo>
+                    <a:pt x="4154106" y="2098639"/>
+                  </a:lnTo>
+                  <a:lnTo>
+                    <a:pt x="4225729" y="2039002"/>
+                  </a:lnTo>
+                  <a:lnTo>
+                    <a:pt x="4297351" y="1977076"/>
+                  </a:lnTo>
+                  <a:lnTo>
+                    <a:pt x="4368974" y="1912774"/>
+                  </a:lnTo>
+                  <a:lnTo>
+                    <a:pt x="4440596" y="1846004"/>
+                  </a:lnTo>
+                  <a:lnTo>
+                    <a:pt x="4512219" y="1776671"/>
+                  </a:lnTo>
+                  <a:lnTo>
+                    <a:pt x="4583841" y="1704678"/>
+                  </a:lnTo>
+                  <a:lnTo>
+                    <a:pt x="4655464" y="1629922"/>
+                  </a:lnTo>
+                  <a:lnTo>
+                    <a:pt x="4727086" y="1552297"/>
+                  </a:lnTo>
+                  <a:lnTo>
+                    <a:pt x="4798709" y="1471693"/>
+                  </a:lnTo>
+                  <a:lnTo>
+                    <a:pt x="4870331" y="1387996"/>
+                  </a:lnTo>
+                  <a:lnTo>
+                    <a:pt x="4941954" y="1301086"/>
+                  </a:lnTo>
+                  <a:lnTo>
+                    <a:pt x="5013576" y="1210842"/>
+                  </a:lnTo>
+                  <a:lnTo>
+                    <a:pt x="5085199" y="1117134"/>
+                  </a:lnTo>
+                  <a:lnTo>
+                    <a:pt x="5156821" y="1019830"/>
+                  </a:lnTo>
+                  <a:lnTo>
+                    <a:pt x="5228444" y="918792"/>
+                  </a:lnTo>
+                  <a:lnTo>
+                    <a:pt x="5300066" y="813877"/>
+                  </a:lnTo>
+                  <a:lnTo>
+                    <a:pt x="5371689" y="704935"/>
+                  </a:lnTo>
+                  <a:lnTo>
+                    <a:pt x="5443311" y="591812"/>
+                  </a:lnTo>
+                  <a:lnTo>
+                    <a:pt x="5514934" y="474348"/>
+                  </a:lnTo>
+                  <a:lnTo>
+                    <a:pt x="5586557" y="352376"/>
+                  </a:lnTo>
+                  <a:lnTo>
+                    <a:pt x="5658179" y="225724"/>
+                  </a:lnTo>
+                  <a:lnTo>
+                    <a:pt x="5729802" y="94210"/>
+                  </a:lnTo>
+                  <a:lnTo>
+                    <a:pt x="5779213" y="0"/>
                   </a:lnTo>
                 </a:path>
               </a:pathLst>

--- a/docs/plots/carbo/jx_carbo_linsubhr_dosedisc_sideeffect.pptx
+++ b/docs/plots/carbo/jx_carbo_linsubhr_dosedisc_sideeffect.pptx
@@ -3132,518 +3132,521 @@
           <p:spPr>
             <a:xfrm>
               <a:off x="1172049" y="1896563"/>
-              <a:ext cx="7090630" cy="3581736"/>
+              <a:ext cx="7090630" cy="3574389"/>
             </a:xfrm>
             <a:custGeom>
               <a:avLst/>
               <a:pathLst>
-                <a:path w="7090630" h="3581736">
+                <a:path w="7090630" h="3574389">
                   <a:moveTo>
-                    <a:pt x="0" y="3221070"/>
+                    <a:pt x="0" y="3204174"/>
                   </a:moveTo>
                   <a:lnTo>
-                    <a:pt x="71622" y="3213911"/>
-                  </a:lnTo>
-                  <a:lnTo>
-                    <a:pt x="143245" y="3206632"/>
-                  </a:lnTo>
-                  <a:lnTo>
-                    <a:pt x="214867" y="3199233"/>
-                  </a:lnTo>
-                  <a:lnTo>
-                    <a:pt x="286490" y="3191711"/>
-                  </a:lnTo>
-                  <a:lnTo>
-                    <a:pt x="358112" y="3184065"/>
-                  </a:lnTo>
-                  <a:lnTo>
-                    <a:pt x="429735" y="3176291"/>
-                  </a:lnTo>
-                  <a:lnTo>
-                    <a:pt x="501357" y="3168389"/>
-                  </a:lnTo>
-                  <a:lnTo>
-                    <a:pt x="572980" y="3160355"/>
-                  </a:lnTo>
-                  <a:lnTo>
-                    <a:pt x="644602" y="3152188"/>
-                  </a:lnTo>
-                  <a:lnTo>
-                    <a:pt x="716225" y="3143886"/>
-                  </a:lnTo>
-                  <a:lnTo>
-                    <a:pt x="787847" y="3135446"/>
-                  </a:lnTo>
-                  <a:lnTo>
-                    <a:pt x="859470" y="3126866"/>
-                  </a:lnTo>
-                  <a:lnTo>
-                    <a:pt x="931092" y="3118143"/>
-                  </a:lnTo>
-                  <a:lnTo>
-                    <a:pt x="1002715" y="3109276"/>
-                  </a:lnTo>
-                  <a:lnTo>
-                    <a:pt x="1074337" y="3100262"/>
-                  </a:lnTo>
-                  <a:lnTo>
-                    <a:pt x="1145960" y="3091098"/>
-                  </a:lnTo>
-                  <a:lnTo>
-                    <a:pt x="1217582" y="3081783"/>
-                  </a:lnTo>
-                  <a:lnTo>
-                    <a:pt x="1289205" y="3072312"/>
-                  </a:lnTo>
-                  <a:lnTo>
-                    <a:pt x="1360827" y="3062685"/>
-                  </a:lnTo>
-                  <a:lnTo>
-                    <a:pt x="1432450" y="3052898"/>
-                  </a:lnTo>
-                  <a:lnTo>
-                    <a:pt x="1504073" y="3042948"/>
-                  </a:lnTo>
-                  <a:lnTo>
-                    <a:pt x="1575695" y="3032834"/>
-                  </a:lnTo>
-                  <a:lnTo>
-                    <a:pt x="1647318" y="3022551"/>
-                  </a:lnTo>
-                  <a:lnTo>
-                    <a:pt x="1718940" y="3012098"/>
-                  </a:lnTo>
-                  <a:lnTo>
-                    <a:pt x="1790563" y="3001472"/>
-                  </a:lnTo>
-                  <a:lnTo>
-                    <a:pt x="1862185" y="2990669"/>
-                  </a:lnTo>
-                  <a:lnTo>
-                    <a:pt x="1933808" y="2979688"/>
-                  </a:lnTo>
-                  <a:lnTo>
-                    <a:pt x="2005430" y="2968524"/>
-                  </a:lnTo>
-                  <a:lnTo>
-                    <a:pt x="2077053" y="2957174"/>
-                  </a:lnTo>
-                  <a:lnTo>
-                    <a:pt x="2148675" y="2945637"/>
-                  </a:lnTo>
-                  <a:lnTo>
-                    <a:pt x="2220298" y="2933908"/>
-                  </a:lnTo>
-                  <a:lnTo>
-                    <a:pt x="2291920" y="2921984"/>
-                  </a:lnTo>
-                  <a:lnTo>
-                    <a:pt x="2363543" y="2909863"/>
-                  </a:lnTo>
-                  <a:lnTo>
-                    <a:pt x="2435165" y="2897541"/>
-                  </a:lnTo>
-                  <a:lnTo>
-                    <a:pt x="2506788" y="2885014"/>
-                  </a:lnTo>
-                  <a:lnTo>
-                    <a:pt x="2578410" y="2872279"/>
-                  </a:lnTo>
-                  <a:lnTo>
-                    <a:pt x="2650033" y="2859334"/>
-                  </a:lnTo>
-                  <a:lnTo>
-                    <a:pt x="2721655" y="2846173"/>
-                  </a:lnTo>
-                  <a:lnTo>
-                    <a:pt x="2793278" y="2832794"/>
-                  </a:lnTo>
-                  <a:lnTo>
-                    <a:pt x="2864901" y="2819193"/>
-                  </a:lnTo>
-                  <a:lnTo>
-                    <a:pt x="2936523" y="2805367"/>
-                  </a:lnTo>
-                  <a:lnTo>
-                    <a:pt x="3008146" y="2791311"/>
-                  </a:lnTo>
-                  <a:lnTo>
-                    <a:pt x="3079768" y="2761510"/>
-                  </a:lnTo>
-                  <a:lnTo>
-                    <a:pt x="3151391" y="2707481"/>
-                  </a:lnTo>
-                  <a:lnTo>
-                    <a:pt x="3223013" y="2650175"/>
-                  </a:lnTo>
-                  <a:lnTo>
-                    <a:pt x="3294636" y="2589395"/>
-                  </a:lnTo>
-                  <a:lnTo>
-                    <a:pt x="3366258" y="2524930"/>
-                  </a:lnTo>
-                  <a:lnTo>
-                    <a:pt x="3437881" y="2456556"/>
-                  </a:lnTo>
-                  <a:lnTo>
-                    <a:pt x="3509503" y="2384037"/>
-                  </a:lnTo>
-                  <a:lnTo>
-                    <a:pt x="3581126" y="2307121"/>
-                  </a:lnTo>
-                  <a:lnTo>
-                    <a:pt x="3652748" y="2225542"/>
-                  </a:lnTo>
-                  <a:lnTo>
-                    <a:pt x="3724371" y="2139016"/>
-                  </a:lnTo>
-                  <a:lnTo>
-                    <a:pt x="3795993" y="2047244"/>
-                  </a:lnTo>
-                  <a:lnTo>
-                    <a:pt x="3867616" y="1949908"/>
-                  </a:lnTo>
-                  <a:lnTo>
-                    <a:pt x="3939238" y="1846671"/>
-                  </a:lnTo>
-                  <a:lnTo>
-                    <a:pt x="4010861" y="1737174"/>
-                  </a:lnTo>
-                  <a:lnTo>
-                    <a:pt x="4082483" y="1621038"/>
-                  </a:lnTo>
-                  <a:lnTo>
-                    <a:pt x="4154106" y="1497861"/>
-                  </a:lnTo>
-                  <a:lnTo>
-                    <a:pt x="4225729" y="1367216"/>
-                  </a:lnTo>
-                  <a:lnTo>
-                    <a:pt x="4297351" y="1228650"/>
-                  </a:lnTo>
-                  <a:lnTo>
-                    <a:pt x="4368974" y="1081682"/>
-                  </a:lnTo>
-                  <a:lnTo>
-                    <a:pt x="4440596" y="925804"/>
-                  </a:lnTo>
-                  <a:lnTo>
-                    <a:pt x="4512219" y="760475"/>
-                  </a:lnTo>
-                  <a:lnTo>
-                    <a:pt x="4583841" y="585121"/>
-                  </a:lnTo>
-                  <a:lnTo>
-                    <a:pt x="4655464" y="399136"/>
-                  </a:lnTo>
-                  <a:lnTo>
-                    <a:pt x="4727086" y="201875"/>
-                  </a:lnTo>
-                  <a:lnTo>
-                    <a:pt x="4796194" y="0"/>
+                    <a:pt x="71622" y="3197145"/>
+                  </a:lnTo>
+                  <a:lnTo>
+                    <a:pt x="143245" y="3190006"/>
+                  </a:lnTo>
+                  <a:lnTo>
+                    <a:pt x="214867" y="3182755"/>
+                  </a:lnTo>
+                  <a:lnTo>
+                    <a:pt x="286490" y="3175390"/>
+                  </a:lnTo>
+                  <a:lnTo>
+                    <a:pt x="358112" y="3167910"/>
+                  </a:lnTo>
+                  <a:lnTo>
+                    <a:pt x="429735" y="3160312"/>
+                  </a:lnTo>
+                  <a:lnTo>
+                    <a:pt x="501357" y="3152596"/>
+                  </a:lnTo>
+                  <a:lnTo>
+                    <a:pt x="572980" y="3144759"/>
+                  </a:lnTo>
+                  <a:lnTo>
+                    <a:pt x="644602" y="3136799"/>
+                  </a:lnTo>
+                  <a:lnTo>
+                    <a:pt x="716225" y="3128714"/>
+                  </a:lnTo>
+                  <a:lnTo>
+                    <a:pt x="787847" y="3120502"/>
+                  </a:lnTo>
+                  <a:lnTo>
+                    <a:pt x="859470" y="3112162"/>
+                  </a:lnTo>
+                  <a:lnTo>
+                    <a:pt x="931092" y="3103691"/>
+                  </a:lnTo>
+                  <a:lnTo>
+                    <a:pt x="1002715" y="3095087"/>
+                  </a:lnTo>
+                  <a:lnTo>
+                    <a:pt x="1074337" y="3086348"/>
+                  </a:lnTo>
+                  <a:lnTo>
+                    <a:pt x="1145960" y="3077472"/>
+                  </a:lnTo>
+                  <a:lnTo>
+                    <a:pt x="1217582" y="3068458"/>
+                  </a:lnTo>
+                  <a:lnTo>
+                    <a:pt x="1289205" y="3059302"/>
+                  </a:lnTo>
+                  <a:lnTo>
+                    <a:pt x="1360827" y="3050002"/>
+                  </a:lnTo>
+                  <a:lnTo>
+                    <a:pt x="1432450" y="3040557"/>
+                  </a:lnTo>
+                  <a:lnTo>
+                    <a:pt x="1504073" y="3030963"/>
+                  </a:lnTo>
+                  <a:lnTo>
+                    <a:pt x="1575695" y="3021220"/>
+                  </a:lnTo>
+                  <a:lnTo>
+                    <a:pt x="1647318" y="3011323"/>
+                  </a:lnTo>
+                  <a:lnTo>
+                    <a:pt x="1718940" y="3001272"/>
+                  </a:lnTo>
+                  <a:lnTo>
+                    <a:pt x="1790563" y="2991063"/>
+                  </a:lnTo>
+                  <a:lnTo>
+                    <a:pt x="1862185" y="2980694"/>
+                  </a:lnTo>
+                  <a:lnTo>
+                    <a:pt x="1933808" y="2970162"/>
+                  </a:lnTo>
+                  <a:lnTo>
+                    <a:pt x="2005430" y="2959465"/>
+                  </a:lnTo>
+                  <a:lnTo>
+                    <a:pt x="2077053" y="2948601"/>
+                  </a:lnTo>
+                  <a:lnTo>
+                    <a:pt x="2148675" y="2937567"/>
+                  </a:lnTo>
+                  <a:lnTo>
+                    <a:pt x="2220298" y="2926359"/>
+                  </a:lnTo>
+                  <a:lnTo>
+                    <a:pt x="2291920" y="2914976"/>
+                  </a:lnTo>
+                  <a:lnTo>
+                    <a:pt x="2363543" y="2903414"/>
+                  </a:lnTo>
+                  <a:lnTo>
+                    <a:pt x="2435165" y="2891671"/>
+                  </a:lnTo>
+                  <a:lnTo>
+                    <a:pt x="2506788" y="2879745"/>
+                  </a:lnTo>
+                  <a:lnTo>
+                    <a:pt x="2578410" y="2867631"/>
+                  </a:lnTo>
+                  <a:lnTo>
+                    <a:pt x="2650033" y="2855327"/>
+                  </a:lnTo>
+                  <a:lnTo>
+                    <a:pt x="2721655" y="2842831"/>
+                  </a:lnTo>
+                  <a:lnTo>
+                    <a:pt x="2793278" y="2830138"/>
+                  </a:lnTo>
+                  <a:lnTo>
+                    <a:pt x="2864901" y="2817247"/>
+                  </a:lnTo>
+                  <a:lnTo>
+                    <a:pt x="2936523" y="2804154"/>
+                  </a:lnTo>
+                  <a:lnTo>
+                    <a:pt x="3008146" y="2790855"/>
+                  </a:lnTo>
+                  <a:lnTo>
+                    <a:pt x="3079768" y="2762364"/>
+                  </a:lnTo>
+                  <a:lnTo>
+                    <a:pt x="3151391" y="2710570"/>
+                  </a:lnTo>
+                  <a:lnTo>
+                    <a:pt x="3223013" y="2655762"/>
+                  </a:lnTo>
+                  <a:lnTo>
+                    <a:pt x="3294636" y="2597766"/>
+                  </a:lnTo>
+                  <a:lnTo>
+                    <a:pt x="3366258" y="2536396"/>
+                  </a:lnTo>
+                  <a:lnTo>
+                    <a:pt x="3437881" y="2471455"/>
+                  </a:lnTo>
+                  <a:lnTo>
+                    <a:pt x="3509503" y="2402737"/>
+                  </a:lnTo>
+                  <a:lnTo>
+                    <a:pt x="3581126" y="2330020"/>
+                  </a:lnTo>
+                  <a:lnTo>
+                    <a:pt x="3652748" y="2253073"/>
+                  </a:lnTo>
+                  <a:lnTo>
+                    <a:pt x="3724371" y="2171649"/>
+                  </a:lnTo>
+                  <a:lnTo>
+                    <a:pt x="3795993" y="2085488"/>
+                  </a:lnTo>
+                  <a:lnTo>
+                    <a:pt x="3867616" y="1994315"/>
+                  </a:lnTo>
+                  <a:lnTo>
+                    <a:pt x="3939238" y="1897837"/>
+                  </a:lnTo>
+                  <a:lnTo>
+                    <a:pt x="4010861" y="1795747"/>
+                  </a:lnTo>
+                  <a:lnTo>
+                    <a:pt x="4082483" y="1687717"/>
+                  </a:lnTo>
+                  <a:lnTo>
+                    <a:pt x="4154106" y="1573402"/>
+                  </a:lnTo>
+                  <a:lnTo>
+                    <a:pt x="4225729" y="1452437"/>
+                  </a:lnTo>
+                  <a:lnTo>
+                    <a:pt x="4297351" y="1324434"/>
+                  </a:lnTo>
+                  <a:lnTo>
+                    <a:pt x="4368974" y="1188984"/>
+                  </a:lnTo>
+                  <a:lnTo>
+                    <a:pt x="4440596" y="1045654"/>
+                  </a:lnTo>
+                  <a:lnTo>
+                    <a:pt x="4512219" y="893986"/>
+                  </a:lnTo>
+                  <a:lnTo>
+                    <a:pt x="4583841" y="733494"/>
+                  </a:lnTo>
+                  <a:lnTo>
+                    <a:pt x="4655464" y="563665"/>
+                  </a:lnTo>
+                  <a:lnTo>
+                    <a:pt x="4727086" y="383955"/>
+                  </a:lnTo>
+                  <a:lnTo>
+                    <a:pt x="4798709" y="193791"/>
+                  </a:lnTo>
+                  <a:lnTo>
+                    <a:pt x="4867684" y="0"/>
                   </a:lnTo>
                   <a:lnTo>
                     <a:pt x="7090630" y="0"/>
                   </a:lnTo>
                   <a:lnTo>
-                    <a:pt x="7090630" y="1452394"/>
-                  </a:lnTo>
-                  <a:lnTo>
-                    <a:pt x="7019007" y="1488299"/>
-                  </a:lnTo>
-                  <a:lnTo>
-                    <a:pt x="6947385" y="1523619"/>
-                  </a:lnTo>
-                  <a:lnTo>
-                    <a:pt x="6875762" y="1558362"/>
-                  </a:lnTo>
-                  <a:lnTo>
-                    <a:pt x="6804139" y="1592538"/>
-                  </a:lnTo>
-                  <a:lnTo>
-                    <a:pt x="6732517" y="1626157"/>
-                  </a:lnTo>
-                  <a:lnTo>
-                    <a:pt x="6660894" y="1659226"/>
-                  </a:lnTo>
-                  <a:lnTo>
-                    <a:pt x="6589272" y="1691757"/>
-                  </a:lnTo>
-                  <a:lnTo>
-                    <a:pt x="6517649" y="1723756"/>
-                  </a:lnTo>
-                  <a:lnTo>
-                    <a:pt x="6446027" y="1755233"/>
-                  </a:lnTo>
-                  <a:lnTo>
-                    <a:pt x="6374404" y="1786197"/>
-                  </a:lnTo>
-                  <a:lnTo>
-                    <a:pt x="6302782" y="1816655"/>
-                  </a:lnTo>
-                  <a:lnTo>
-                    <a:pt x="6231159" y="1846616"/>
-                  </a:lnTo>
-                  <a:lnTo>
-                    <a:pt x="6159537" y="1876088"/>
-                  </a:lnTo>
-                  <a:lnTo>
-                    <a:pt x="6087914" y="1905079"/>
-                  </a:lnTo>
-                  <a:lnTo>
-                    <a:pt x="6016292" y="1933598"/>
-                  </a:lnTo>
-                  <a:lnTo>
-                    <a:pt x="5944669" y="1961650"/>
-                  </a:lnTo>
-                  <a:lnTo>
-                    <a:pt x="5873047" y="1989245"/>
-                  </a:lnTo>
-                  <a:lnTo>
-                    <a:pt x="5801424" y="2016390"/>
-                  </a:lnTo>
-                  <a:lnTo>
-                    <a:pt x="5729802" y="2043092"/>
-                  </a:lnTo>
-                  <a:lnTo>
-                    <a:pt x="5658179" y="2069358"/>
-                  </a:lnTo>
-                  <a:lnTo>
-                    <a:pt x="5586557" y="2095195"/>
-                  </a:lnTo>
-                  <a:lnTo>
-                    <a:pt x="5514934" y="2120611"/>
-                  </a:lnTo>
-                  <a:lnTo>
-                    <a:pt x="5443311" y="2145612"/>
-                  </a:lnTo>
-                  <a:lnTo>
-                    <a:pt x="5371689" y="2170205"/>
-                  </a:lnTo>
-                  <a:lnTo>
-                    <a:pt x="5300066" y="2194396"/>
-                  </a:lnTo>
-                  <a:lnTo>
-                    <a:pt x="5228444" y="2218193"/>
-                  </a:lnTo>
-                  <a:lnTo>
-                    <a:pt x="5156821" y="2241602"/>
-                  </a:lnTo>
-                  <a:lnTo>
-                    <a:pt x="5085199" y="2264628"/>
-                  </a:lnTo>
-                  <a:lnTo>
-                    <a:pt x="5013576" y="2287279"/>
-                  </a:lnTo>
-                  <a:lnTo>
-                    <a:pt x="4941954" y="2309560"/>
-                  </a:lnTo>
-                  <a:lnTo>
-                    <a:pt x="4870331" y="2331477"/>
-                  </a:lnTo>
-                  <a:lnTo>
-                    <a:pt x="4798709" y="2353037"/>
-                  </a:lnTo>
-                  <a:lnTo>
-                    <a:pt x="4727086" y="2374245"/>
-                  </a:lnTo>
-                  <a:lnTo>
-                    <a:pt x="4655464" y="2395107"/>
-                  </a:lnTo>
-                  <a:lnTo>
-                    <a:pt x="4583841" y="2415629"/>
-                  </a:lnTo>
-                  <a:lnTo>
-                    <a:pt x="4512219" y="2435815"/>
-                  </a:lnTo>
-                  <a:lnTo>
-                    <a:pt x="4440596" y="2455672"/>
-                  </a:lnTo>
-                  <a:lnTo>
-                    <a:pt x="4368974" y="2475206"/>
-                  </a:lnTo>
-                  <a:lnTo>
-                    <a:pt x="4297351" y="2494420"/>
-                  </a:lnTo>
-                  <a:lnTo>
-                    <a:pt x="4225729" y="2513321"/>
-                  </a:lnTo>
-                  <a:lnTo>
-                    <a:pt x="4154106" y="2531913"/>
-                  </a:lnTo>
-                  <a:lnTo>
-                    <a:pt x="4082483" y="2550202"/>
-                  </a:lnTo>
-                  <a:lnTo>
-                    <a:pt x="4010861" y="2568193"/>
-                  </a:lnTo>
-                  <a:lnTo>
-                    <a:pt x="3939238" y="2585890"/>
-                  </a:lnTo>
-                  <a:lnTo>
-                    <a:pt x="3867616" y="2603298"/>
-                  </a:lnTo>
-                  <a:lnTo>
-                    <a:pt x="3795993" y="2620422"/>
-                  </a:lnTo>
-                  <a:lnTo>
-                    <a:pt x="3724371" y="2637266"/>
-                  </a:lnTo>
-                  <a:lnTo>
-                    <a:pt x="3652748" y="2653836"/>
-                  </a:lnTo>
-                  <a:lnTo>
-                    <a:pt x="3581126" y="2670136"/>
-                  </a:lnTo>
-                  <a:lnTo>
-                    <a:pt x="3509503" y="2686169"/>
-                  </a:lnTo>
-                  <a:lnTo>
-                    <a:pt x="3437881" y="2701941"/>
-                  </a:lnTo>
-                  <a:lnTo>
-                    <a:pt x="3366258" y="2717455"/>
-                  </a:lnTo>
-                  <a:lnTo>
-                    <a:pt x="3294636" y="2732716"/>
-                  </a:lnTo>
-                  <a:lnTo>
-                    <a:pt x="3223013" y="2747728"/>
-                  </a:lnTo>
-                  <a:lnTo>
-                    <a:pt x="3151391" y="2762495"/>
-                  </a:lnTo>
-                  <a:lnTo>
-                    <a:pt x="3079768" y="2777021"/>
-                  </a:lnTo>
-                  <a:lnTo>
-                    <a:pt x="3008146" y="2812452"/>
-                  </a:lnTo>
-                  <a:lnTo>
-                    <a:pt x="2936523" y="2860481"/>
-                  </a:lnTo>
-                  <a:lnTo>
-                    <a:pt x="2864901" y="2905764"/>
-                  </a:lnTo>
-                  <a:lnTo>
-                    <a:pt x="2793278" y="2948459"/>
-                  </a:lnTo>
-                  <a:lnTo>
-                    <a:pt x="2721655" y="2988714"/>
-                  </a:lnTo>
-                  <a:lnTo>
-                    <a:pt x="2650033" y="3026667"/>
-                  </a:lnTo>
-                  <a:lnTo>
-                    <a:pt x="2578410" y="3062450"/>
-                  </a:lnTo>
-                  <a:lnTo>
-                    <a:pt x="2506788" y="3096188"/>
-                  </a:lnTo>
-                  <a:lnTo>
-                    <a:pt x="2435165" y="3127998"/>
-                  </a:lnTo>
-                  <a:lnTo>
-                    <a:pt x="2363543" y="3157989"/>
-                  </a:lnTo>
-                  <a:lnTo>
-                    <a:pt x="2291920" y="3186266"/>
-                  </a:lnTo>
-                  <a:lnTo>
-                    <a:pt x="2220298" y="3212926"/>
-                  </a:lnTo>
-                  <a:lnTo>
-                    <a:pt x="2148675" y="3238062"/>
-                  </a:lnTo>
-                  <a:lnTo>
-                    <a:pt x="2077053" y="3261761"/>
-                  </a:lnTo>
-                  <a:lnTo>
-                    <a:pt x="2005430" y="3284106"/>
-                  </a:lnTo>
-                  <a:lnTo>
-                    <a:pt x="1933808" y="3305173"/>
-                  </a:lnTo>
-                  <a:lnTo>
-                    <a:pt x="1862185" y="3325036"/>
-                  </a:lnTo>
-                  <a:lnTo>
-                    <a:pt x="1790563" y="3343764"/>
-                  </a:lnTo>
-                  <a:lnTo>
-                    <a:pt x="1718940" y="3361421"/>
-                  </a:lnTo>
-                  <a:lnTo>
-                    <a:pt x="1647318" y="3378068"/>
-                  </a:lnTo>
-                  <a:lnTo>
-                    <a:pt x="1575695" y="3393764"/>
-                  </a:lnTo>
-                  <a:lnTo>
-                    <a:pt x="1504073" y="3408563"/>
-                  </a:lnTo>
-                  <a:lnTo>
-                    <a:pt x="1432450" y="3422516"/>
-                  </a:lnTo>
-                  <a:lnTo>
-                    <a:pt x="1360827" y="3435671"/>
-                  </a:lnTo>
-                  <a:lnTo>
-                    <a:pt x="1289205" y="3448074"/>
-                  </a:lnTo>
-                  <a:lnTo>
-                    <a:pt x="1217582" y="3459768"/>
-                  </a:lnTo>
-                  <a:lnTo>
-                    <a:pt x="1145960" y="3470793"/>
-                  </a:lnTo>
-                  <a:lnTo>
-                    <a:pt x="1074337" y="3481189"/>
-                  </a:lnTo>
-                  <a:lnTo>
-                    <a:pt x="1002715" y="3490990"/>
-                  </a:lnTo>
-                  <a:lnTo>
-                    <a:pt x="931092" y="3500231"/>
-                  </a:lnTo>
-                  <a:lnTo>
-                    <a:pt x="859470" y="3508943"/>
-                  </a:lnTo>
-                  <a:lnTo>
-                    <a:pt x="787847" y="3517158"/>
-                  </a:lnTo>
-                  <a:lnTo>
-                    <a:pt x="716225" y="3524903"/>
-                  </a:lnTo>
-                  <a:lnTo>
-                    <a:pt x="644602" y="3532205"/>
-                  </a:lnTo>
-                  <a:lnTo>
-                    <a:pt x="572980" y="3539090"/>
-                  </a:lnTo>
-                  <a:lnTo>
-                    <a:pt x="501357" y="3545581"/>
-                  </a:lnTo>
-                  <a:lnTo>
-                    <a:pt x="429735" y="3551701"/>
-                  </a:lnTo>
-                  <a:lnTo>
-                    <a:pt x="358112" y="3557472"/>
-                  </a:lnTo>
-                  <a:lnTo>
-                    <a:pt x="286490" y="3562912"/>
-                  </a:lnTo>
-                  <a:lnTo>
-                    <a:pt x="214867" y="3568041"/>
-                  </a:lnTo>
-                  <a:lnTo>
-                    <a:pt x="143245" y="3572878"/>
-                  </a:lnTo>
-                  <a:lnTo>
-                    <a:pt x="71622" y="3577437"/>
-                  </a:lnTo>
-                  <a:lnTo>
-                    <a:pt x="0" y="3581736"/>
+                    <a:pt x="7090630" y="1561530"/>
+                  </a:lnTo>
+                  <a:lnTo>
+                    <a:pt x="7019007" y="1593799"/>
+                  </a:lnTo>
+                  <a:lnTo>
+                    <a:pt x="6947385" y="1625570"/>
+                  </a:lnTo>
+                  <a:lnTo>
+                    <a:pt x="6875762" y="1656850"/>
+                  </a:lnTo>
+                  <a:lnTo>
+                    <a:pt x="6804139" y="1687648"/>
+                  </a:lnTo>
+                  <a:lnTo>
+                    <a:pt x="6732517" y="1717970"/>
+                  </a:lnTo>
+                  <a:lnTo>
+                    <a:pt x="6660894" y="1747825"/>
+                  </a:lnTo>
+                  <a:lnTo>
+                    <a:pt x="6589272" y="1777219"/>
+                  </a:lnTo>
+                  <a:lnTo>
+                    <a:pt x="6517649" y="1806159"/>
+                  </a:lnTo>
+                  <a:lnTo>
+                    <a:pt x="6446027" y="1834653"/>
+                  </a:lnTo>
+                  <a:lnTo>
+                    <a:pt x="6374404" y="1862707"/>
+                  </a:lnTo>
+                  <a:lnTo>
+                    <a:pt x="6302782" y="1890328"/>
+                  </a:lnTo>
+                  <a:lnTo>
+                    <a:pt x="6231159" y="1917523"/>
+                  </a:lnTo>
+                  <a:lnTo>
+                    <a:pt x="6159537" y="1944298"/>
+                  </a:lnTo>
+                  <a:lnTo>
+                    <a:pt x="6087914" y="1970660"/>
+                  </a:lnTo>
+                  <a:lnTo>
+                    <a:pt x="6016292" y="1996615"/>
+                  </a:lnTo>
+                  <a:lnTo>
+                    <a:pt x="5944669" y="2022170"/>
+                  </a:lnTo>
+                  <a:lnTo>
+                    <a:pt x="5873047" y="2047330"/>
+                  </a:lnTo>
+                  <a:lnTo>
+                    <a:pt x="5801424" y="2072102"/>
+                  </a:lnTo>
+                  <a:lnTo>
+                    <a:pt x="5729802" y="2096492"/>
+                  </a:lnTo>
+                  <a:lnTo>
+                    <a:pt x="5658179" y="2120505"/>
+                  </a:lnTo>
+                  <a:lnTo>
+                    <a:pt x="5586557" y="2144148"/>
+                  </a:lnTo>
+                  <a:lnTo>
+                    <a:pt x="5514934" y="2167426"/>
+                  </a:lnTo>
+                  <a:lnTo>
+                    <a:pt x="5443311" y="2190345"/>
+                  </a:lnTo>
+                  <a:lnTo>
+                    <a:pt x="5371689" y="2212911"/>
+                  </a:lnTo>
+                  <a:lnTo>
+                    <a:pt x="5300066" y="2235127"/>
+                  </a:lnTo>
+                  <a:lnTo>
+                    <a:pt x="5228444" y="2257002"/>
+                  </a:lnTo>
+                  <a:lnTo>
+                    <a:pt x="5156821" y="2278538"/>
+                  </a:lnTo>
+                  <a:lnTo>
+                    <a:pt x="5085199" y="2299742"/>
+                  </a:lnTo>
+                  <a:lnTo>
+                    <a:pt x="5013576" y="2320620"/>
+                  </a:lnTo>
+                  <a:lnTo>
+                    <a:pt x="4941954" y="2341174"/>
+                  </a:lnTo>
+                  <a:lnTo>
+                    <a:pt x="4870331" y="2361412"/>
+                  </a:lnTo>
+                  <a:lnTo>
+                    <a:pt x="4798709" y="2381338"/>
+                  </a:lnTo>
+                  <a:lnTo>
+                    <a:pt x="4727086" y="2400955"/>
+                  </a:lnTo>
+                  <a:lnTo>
+                    <a:pt x="4655464" y="2420271"/>
+                  </a:lnTo>
+                  <a:lnTo>
+                    <a:pt x="4583841" y="2439288"/>
+                  </a:lnTo>
+                  <a:lnTo>
+                    <a:pt x="4512219" y="2458011"/>
+                  </a:lnTo>
+                  <a:lnTo>
+                    <a:pt x="4440596" y="2476446"/>
+                  </a:lnTo>
+                  <a:lnTo>
+                    <a:pt x="4368974" y="2494596"/>
+                  </a:lnTo>
+                  <a:lnTo>
+                    <a:pt x="4297351" y="2512467"/>
+                  </a:lnTo>
+                  <a:lnTo>
+                    <a:pt x="4225729" y="2530061"/>
+                  </a:lnTo>
+                  <a:lnTo>
+                    <a:pt x="4154106" y="2547384"/>
+                  </a:lnTo>
+                  <a:lnTo>
+                    <a:pt x="4082483" y="2564440"/>
+                  </a:lnTo>
+                  <a:lnTo>
+                    <a:pt x="4010861" y="2581232"/>
+                  </a:lnTo>
+                  <a:lnTo>
+                    <a:pt x="3939238" y="2597765"/>
+                  </a:lnTo>
+                  <a:lnTo>
+                    <a:pt x="3867616" y="2614043"/>
+                  </a:lnTo>
+                  <a:lnTo>
+                    <a:pt x="3795993" y="2630070"/>
+                  </a:lnTo>
+                  <a:lnTo>
+                    <a:pt x="3724371" y="2645850"/>
+                  </a:lnTo>
+                  <a:lnTo>
+                    <a:pt x="3652748" y="2661386"/>
+                  </a:lnTo>
+                  <a:lnTo>
+                    <a:pt x="3581126" y="2676683"/>
+                  </a:lnTo>
+                  <a:lnTo>
+                    <a:pt x="3509503" y="2691743"/>
+                  </a:lnTo>
+                  <a:lnTo>
+                    <a:pt x="3437881" y="2706571"/>
+                  </a:lnTo>
+                  <a:lnTo>
+                    <a:pt x="3366258" y="2721170"/>
+                  </a:lnTo>
+                  <a:lnTo>
+                    <a:pt x="3294636" y="2735544"/>
+                  </a:lnTo>
+                  <a:lnTo>
+                    <a:pt x="3223013" y="2749696"/>
+                  </a:lnTo>
+                  <a:lnTo>
+                    <a:pt x="3151391" y="2763630"/>
+                  </a:lnTo>
+                  <a:lnTo>
+                    <a:pt x="3079768" y="2777348"/>
+                  </a:lnTo>
+                  <a:lnTo>
+                    <a:pt x="3008146" y="2811311"/>
+                  </a:lnTo>
+                  <a:lnTo>
+                    <a:pt x="2936523" y="2857567"/>
+                  </a:lnTo>
+                  <a:lnTo>
+                    <a:pt x="2864901" y="2901279"/>
+                  </a:lnTo>
+                  <a:lnTo>
+                    <a:pt x="2793278" y="2942589"/>
+                  </a:lnTo>
+                  <a:lnTo>
+                    <a:pt x="2721655" y="2981627"/>
+                  </a:lnTo>
+                  <a:lnTo>
+                    <a:pt x="2650033" y="3018519"/>
+                  </a:lnTo>
+                  <a:lnTo>
+                    <a:pt x="2578410" y="3053382"/>
+                  </a:lnTo>
+                  <a:lnTo>
+                    <a:pt x="2506788" y="3086329"/>
+                  </a:lnTo>
+                  <a:lnTo>
+                    <a:pt x="2435165" y="3117464"/>
+                  </a:lnTo>
+                  <a:lnTo>
+                    <a:pt x="2363543" y="3146888"/>
+                  </a:lnTo>
+                  <a:lnTo>
+                    <a:pt x="2291920" y="3174694"/>
+                  </a:lnTo>
+                  <a:lnTo>
+                    <a:pt x="2220298" y="3200971"/>
+                  </a:lnTo>
+                  <a:lnTo>
+                    <a:pt x="2148675" y="3225804"/>
+                  </a:lnTo>
+                  <a:lnTo>
+                    <a:pt x="2077053" y="3249271"/>
+                  </a:lnTo>
+                  <a:lnTo>
+                    <a:pt x="2005430" y="3271448"/>
+                  </a:lnTo>
+                  <a:lnTo>
+                    <a:pt x="1933808" y="3292406"/>
+                  </a:lnTo>
+                  <a:lnTo>
+                    <a:pt x="1862185" y="3312211"/>
+                  </a:lnTo>
+                  <a:lnTo>
+                    <a:pt x="1790563" y="3330928"/>
+                  </a:lnTo>
+                  <a:lnTo>
+                    <a:pt x="1718940" y="3348616"/>
+                  </a:lnTo>
+                  <a:lnTo>
+                    <a:pt x="1647318" y="3365331"/>
+                  </a:lnTo>
+                  <a:lnTo>
+                    <a:pt x="1575695" y="3381127"/>
+                  </a:lnTo>
+                  <a:lnTo>
+                    <a:pt x="1504073" y="3396055"/>
+                  </a:lnTo>
+                  <a:lnTo>
+                    <a:pt x="1432450" y="3410162"/>
+                  </a:lnTo>
+                  <a:lnTo>
+                    <a:pt x="1360827" y="3423493"/>
+                  </a:lnTo>
+                  <a:lnTo>
+                    <a:pt x="1289205" y="3436092"/>
+                  </a:lnTo>
+                  <a:lnTo>
+                    <a:pt x="1217582" y="3447997"/>
+                  </a:lnTo>
+                  <a:lnTo>
+                    <a:pt x="1145960" y="3459249"/>
+                  </a:lnTo>
+                  <a:lnTo>
+                    <a:pt x="1074337" y="3469881"/>
+                  </a:lnTo>
+                  <a:lnTo>
+                    <a:pt x="1002715" y="3479929"/>
+                  </a:lnTo>
+                  <a:lnTo>
+                    <a:pt x="931092" y="3489425"/>
+                  </a:lnTo>
+                  <a:lnTo>
+                    <a:pt x="859470" y="3498399"/>
+                  </a:lnTo>
+                  <a:lnTo>
+                    <a:pt x="787847" y="3506879"/>
+                  </a:lnTo>
+                  <a:lnTo>
+                    <a:pt x="716225" y="3514893"/>
+                  </a:lnTo>
+                  <a:lnTo>
+                    <a:pt x="644602" y="3522466"/>
+                  </a:lnTo>
+                  <a:lnTo>
+                    <a:pt x="572980" y="3529623"/>
+                  </a:lnTo>
+                  <a:lnTo>
+                    <a:pt x="501357" y="3536387"/>
+                  </a:lnTo>
+                  <a:lnTo>
+                    <a:pt x="429735" y="3542778"/>
+                  </a:lnTo>
+                  <a:lnTo>
+                    <a:pt x="358112" y="3548819"/>
+                  </a:lnTo>
+                  <a:lnTo>
+                    <a:pt x="286490" y="3554527"/>
+                  </a:lnTo>
+                  <a:lnTo>
+                    <a:pt x="214867" y="3559921"/>
+                  </a:lnTo>
+                  <a:lnTo>
+                    <a:pt x="143245" y="3565019"/>
+                  </a:lnTo>
+                  <a:lnTo>
+                    <a:pt x="71622" y="3569837"/>
+                  </a:lnTo>
+                  <a:lnTo>
+                    <a:pt x="0" y="3574389"/>
                   </a:lnTo>
                   <a:close/>
                 </a:path>
@@ -3670,215 +3673,218 @@
           <p:spPr>
             <a:xfrm>
               <a:off x="1172049" y="1896563"/>
-              <a:ext cx="4796194" cy="3221070"/>
+              <a:ext cx="4867684" cy="3204174"/>
             </a:xfrm>
             <a:custGeom>
               <a:avLst/>
               <a:pathLst>
-                <a:path w="4796194" h="3221070">
+                <a:path w="4867684" h="3204174">
                   <a:moveTo>
-                    <a:pt x="0" y="3221070"/>
+                    <a:pt x="0" y="3204174"/>
                   </a:moveTo>
                   <a:lnTo>
-                    <a:pt x="71622" y="3213911"/>
-                  </a:lnTo>
-                  <a:lnTo>
-                    <a:pt x="143245" y="3206632"/>
-                  </a:lnTo>
-                  <a:lnTo>
-                    <a:pt x="214867" y="3199233"/>
-                  </a:lnTo>
-                  <a:lnTo>
-                    <a:pt x="286490" y="3191711"/>
-                  </a:lnTo>
-                  <a:lnTo>
-                    <a:pt x="358112" y="3184065"/>
-                  </a:lnTo>
-                  <a:lnTo>
-                    <a:pt x="429735" y="3176291"/>
-                  </a:lnTo>
-                  <a:lnTo>
-                    <a:pt x="501357" y="3168389"/>
-                  </a:lnTo>
-                  <a:lnTo>
-                    <a:pt x="572980" y="3160355"/>
-                  </a:lnTo>
-                  <a:lnTo>
-                    <a:pt x="644602" y="3152188"/>
-                  </a:lnTo>
-                  <a:lnTo>
-                    <a:pt x="716225" y="3143886"/>
-                  </a:lnTo>
-                  <a:lnTo>
-                    <a:pt x="787847" y="3135446"/>
-                  </a:lnTo>
-                  <a:lnTo>
-                    <a:pt x="859470" y="3126866"/>
-                  </a:lnTo>
-                  <a:lnTo>
-                    <a:pt x="931092" y="3118143"/>
-                  </a:lnTo>
-                  <a:lnTo>
-                    <a:pt x="1002715" y="3109276"/>
-                  </a:lnTo>
-                  <a:lnTo>
-                    <a:pt x="1074337" y="3100262"/>
-                  </a:lnTo>
-                  <a:lnTo>
-                    <a:pt x="1145960" y="3091098"/>
-                  </a:lnTo>
-                  <a:lnTo>
-                    <a:pt x="1217582" y="3081783"/>
-                  </a:lnTo>
-                  <a:lnTo>
-                    <a:pt x="1289205" y="3072312"/>
-                  </a:lnTo>
-                  <a:lnTo>
-                    <a:pt x="1360827" y="3062685"/>
-                  </a:lnTo>
-                  <a:lnTo>
-                    <a:pt x="1432450" y="3052898"/>
-                  </a:lnTo>
-                  <a:lnTo>
-                    <a:pt x="1504073" y="3042948"/>
-                  </a:lnTo>
-                  <a:lnTo>
-                    <a:pt x="1575695" y="3032834"/>
-                  </a:lnTo>
-                  <a:lnTo>
-                    <a:pt x="1647318" y="3022551"/>
-                  </a:lnTo>
-                  <a:lnTo>
-                    <a:pt x="1718940" y="3012098"/>
-                  </a:lnTo>
-                  <a:lnTo>
-                    <a:pt x="1790563" y="3001472"/>
-                  </a:lnTo>
-                  <a:lnTo>
-                    <a:pt x="1862185" y="2990669"/>
-                  </a:lnTo>
-                  <a:lnTo>
-                    <a:pt x="1933808" y="2979688"/>
-                  </a:lnTo>
-                  <a:lnTo>
-                    <a:pt x="2005430" y="2968524"/>
-                  </a:lnTo>
-                  <a:lnTo>
-                    <a:pt x="2077053" y="2957174"/>
-                  </a:lnTo>
-                  <a:lnTo>
-                    <a:pt x="2148675" y="2945637"/>
-                  </a:lnTo>
-                  <a:lnTo>
-                    <a:pt x="2220298" y="2933908"/>
-                  </a:lnTo>
-                  <a:lnTo>
-                    <a:pt x="2291920" y="2921984"/>
-                  </a:lnTo>
-                  <a:lnTo>
-                    <a:pt x="2363543" y="2909863"/>
-                  </a:lnTo>
-                  <a:lnTo>
-                    <a:pt x="2435165" y="2897541"/>
-                  </a:lnTo>
-                  <a:lnTo>
-                    <a:pt x="2506788" y="2885014"/>
-                  </a:lnTo>
-                  <a:lnTo>
-                    <a:pt x="2578410" y="2872279"/>
-                  </a:lnTo>
-                  <a:lnTo>
-                    <a:pt x="2650033" y="2859334"/>
-                  </a:lnTo>
-                  <a:lnTo>
-                    <a:pt x="2721655" y="2846173"/>
-                  </a:lnTo>
-                  <a:lnTo>
-                    <a:pt x="2793278" y="2832794"/>
-                  </a:lnTo>
-                  <a:lnTo>
-                    <a:pt x="2864901" y="2819193"/>
-                  </a:lnTo>
-                  <a:lnTo>
-                    <a:pt x="2936523" y="2805367"/>
-                  </a:lnTo>
-                  <a:lnTo>
-                    <a:pt x="3008146" y="2791311"/>
-                  </a:lnTo>
-                  <a:lnTo>
-                    <a:pt x="3079768" y="2761510"/>
-                  </a:lnTo>
-                  <a:lnTo>
-                    <a:pt x="3151391" y="2707481"/>
-                  </a:lnTo>
-                  <a:lnTo>
-                    <a:pt x="3223013" y="2650175"/>
-                  </a:lnTo>
-                  <a:lnTo>
-                    <a:pt x="3294636" y="2589395"/>
-                  </a:lnTo>
-                  <a:lnTo>
-                    <a:pt x="3366258" y="2524930"/>
-                  </a:lnTo>
-                  <a:lnTo>
-                    <a:pt x="3437881" y="2456556"/>
-                  </a:lnTo>
-                  <a:lnTo>
-                    <a:pt x="3509503" y="2384037"/>
-                  </a:lnTo>
-                  <a:lnTo>
-                    <a:pt x="3581126" y="2307121"/>
-                  </a:lnTo>
-                  <a:lnTo>
-                    <a:pt x="3652748" y="2225542"/>
-                  </a:lnTo>
-                  <a:lnTo>
-                    <a:pt x="3724371" y="2139016"/>
-                  </a:lnTo>
-                  <a:lnTo>
-                    <a:pt x="3795993" y="2047244"/>
-                  </a:lnTo>
-                  <a:lnTo>
-                    <a:pt x="3867616" y="1949908"/>
-                  </a:lnTo>
-                  <a:lnTo>
-                    <a:pt x="3939238" y="1846671"/>
-                  </a:lnTo>
-                  <a:lnTo>
-                    <a:pt x="4010861" y="1737174"/>
-                  </a:lnTo>
-                  <a:lnTo>
-                    <a:pt x="4082483" y="1621038"/>
-                  </a:lnTo>
-                  <a:lnTo>
-                    <a:pt x="4154106" y="1497861"/>
-                  </a:lnTo>
-                  <a:lnTo>
-                    <a:pt x="4225729" y="1367216"/>
-                  </a:lnTo>
-                  <a:lnTo>
-                    <a:pt x="4297351" y="1228650"/>
-                  </a:lnTo>
-                  <a:lnTo>
-                    <a:pt x="4368974" y="1081682"/>
-                  </a:lnTo>
-                  <a:lnTo>
-                    <a:pt x="4440596" y="925804"/>
-                  </a:lnTo>
-                  <a:lnTo>
-                    <a:pt x="4512219" y="760475"/>
-                  </a:lnTo>
-                  <a:lnTo>
-                    <a:pt x="4583841" y="585121"/>
-                  </a:lnTo>
-                  <a:lnTo>
-                    <a:pt x="4655464" y="399136"/>
-                  </a:lnTo>
-                  <a:lnTo>
-                    <a:pt x="4727086" y="201875"/>
-                  </a:lnTo>
-                  <a:lnTo>
-                    <a:pt x="4796194" y="0"/>
+                    <a:pt x="71622" y="3197145"/>
+                  </a:lnTo>
+                  <a:lnTo>
+                    <a:pt x="143245" y="3190006"/>
+                  </a:lnTo>
+                  <a:lnTo>
+                    <a:pt x="214867" y="3182755"/>
+                  </a:lnTo>
+                  <a:lnTo>
+                    <a:pt x="286490" y="3175390"/>
+                  </a:lnTo>
+                  <a:lnTo>
+                    <a:pt x="358112" y="3167910"/>
+                  </a:lnTo>
+                  <a:lnTo>
+                    <a:pt x="429735" y="3160312"/>
+                  </a:lnTo>
+                  <a:lnTo>
+                    <a:pt x="501357" y="3152596"/>
+                  </a:lnTo>
+                  <a:lnTo>
+                    <a:pt x="572980" y="3144759"/>
+                  </a:lnTo>
+                  <a:lnTo>
+                    <a:pt x="644602" y="3136799"/>
+                  </a:lnTo>
+                  <a:lnTo>
+                    <a:pt x="716225" y="3128714"/>
+                  </a:lnTo>
+                  <a:lnTo>
+                    <a:pt x="787847" y="3120502"/>
+                  </a:lnTo>
+                  <a:lnTo>
+                    <a:pt x="859470" y="3112162"/>
+                  </a:lnTo>
+                  <a:lnTo>
+                    <a:pt x="931092" y="3103691"/>
+                  </a:lnTo>
+                  <a:lnTo>
+                    <a:pt x="1002715" y="3095087"/>
+                  </a:lnTo>
+                  <a:lnTo>
+                    <a:pt x="1074337" y="3086348"/>
+                  </a:lnTo>
+                  <a:lnTo>
+                    <a:pt x="1145960" y="3077472"/>
+                  </a:lnTo>
+                  <a:lnTo>
+                    <a:pt x="1217582" y="3068458"/>
+                  </a:lnTo>
+                  <a:lnTo>
+                    <a:pt x="1289205" y="3059302"/>
+                  </a:lnTo>
+                  <a:lnTo>
+                    <a:pt x="1360827" y="3050002"/>
+                  </a:lnTo>
+                  <a:lnTo>
+                    <a:pt x="1432450" y="3040557"/>
+                  </a:lnTo>
+                  <a:lnTo>
+                    <a:pt x="1504073" y="3030963"/>
+                  </a:lnTo>
+                  <a:lnTo>
+                    <a:pt x="1575695" y="3021220"/>
+                  </a:lnTo>
+                  <a:lnTo>
+                    <a:pt x="1647318" y="3011323"/>
+                  </a:lnTo>
+                  <a:lnTo>
+                    <a:pt x="1718940" y="3001272"/>
+                  </a:lnTo>
+                  <a:lnTo>
+                    <a:pt x="1790563" y="2991063"/>
+                  </a:lnTo>
+                  <a:lnTo>
+                    <a:pt x="1862185" y="2980694"/>
+                  </a:lnTo>
+                  <a:lnTo>
+                    <a:pt x="1933808" y="2970162"/>
+                  </a:lnTo>
+                  <a:lnTo>
+                    <a:pt x="2005430" y="2959465"/>
+                  </a:lnTo>
+                  <a:lnTo>
+                    <a:pt x="2077053" y="2948601"/>
+                  </a:lnTo>
+                  <a:lnTo>
+                    <a:pt x="2148675" y="2937567"/>
+                  </a:lnTo>
+                  <a:lnTo>
+                    <a:pt x="2220298" y="2926359"/>
+                  </a:lnTo>
+                  <a:lnTo>
+                    <a:pt x="2291920" y="2914976"/>
+                  </a:lnTo>
+                  <a:lnTo>
+                    <a:pt x="2363543" y="2903414"/>
+                  </a:lnTo>
+                  <a:lnTo>
+                    <a:pt x="2435165" y="2891671"/>
+                  </a:lnTo>
+                  <a:lnTo>
+                    <a:pt x="2506788" y="2879745"/>
+                  </a:lnTo>
+                  <a:lnTo>
+                    <a:pt x="2578410" y="2867631"/>
+                  </a:lnTo>
+                  <a:lnTo>
+                    <a:pt x="2650033" y="2855327"/>
+                  </a:lnTo>
+                  <a:lnTo>
+                    <a:pt x="2721655" y="2842831"/>
+                  </a:lnTo>
+                  <a:lnTo>
+                    <a:pt x="2793278" y="2830138"/>
+                  </a:lnTo>
+                  <a:lnTo>
+                    <a:pt x="2864901" y="2817247"/>
+                  </a:lnTo>
+                  <a:lnTo>
+                    <a:pt x="2936523" y="2804154"/>
+                  </a:lnTo>
+                  <a:lnTo>
+                    <a:pt x="3008146" y="2790855"/>
+                  </a:lnTo>
+                  <a:lnTo>
+                    <a:pt x="3079768" y="2762364"/>
+                  </a:lnTo>
+                  <a:lnTo>
+                    <a:pt x="3151391" y="2710570"/>
+                  </a:lnTo>
+                  <a:lnTo>
+                    <a:pt x="3223013" y="2655762"/>
+                  </a:lnTo>
+                  <a:lnTo>
+                    <a:pt x="3294636" y="2597766"/>
+                  </a:lnTo>
+                  <a:lnTo>
+                    <a:pt x="3366258" y="2536396"/>
+                  </a:lnTo>
+                  <a:lnTo>
+                    <a:pt x="3437881" y="2471455"/>
+                  </a:lnTo>
+                  <a:lnTo>
+                    <a:pt x="3509503" y="2402737"/>
+                  </a:lnTo>
+                  <a:lnTo>
+                    <a:pt x="3581126" y="2330020"/>
+                  </a:lnTo>
+                  <a:lnTo>
+                    <a:pt x="3652748" y="2253073"/>
+                  </a:lnTo>
+                  <a:lnTo>
+                    <a:pt x="3724371" y="2171649"/>
+                  </a:lnTo>
+                  <a:lnTo>
+                    <a:pt x="3795993" y="2085488"/>
+                  </a:lnTo>
+                  <a:lnTo>
+                    <a:pt x="3867616" y="1994315"/>
+                  </a:lnTo>
+                  <a:lnTo>
+                    <a:pt x="3939238" y="1897837"/>
+                  </a:lnTo>
+                  <a:lnTo>
+                    <a:pt x="4010861" y="1795747"/>
+                  </a:lnTo>
+                  <a:lnTo>
+                    <a:pt x="4082483" y="1687717"/>
+                  </a:lnTo>
+                  <a:lnTo>
+                    <a:pt x="4154106" y="1573402"/>
+                  </a:lnTo>
+                  <a:lnTo>
+                    <a:pt x="4225729" y="1452437"/>
+                  </a:lnTo>
+                  <a:lnTo>
+                    <a:pt x="4297351" y="1324434"/>
+                  </a:lnTo>
+                  <a:lnTo>
+                    <a:pt x="4368974" y="1188984"/>
+                  </a:lnTo>
+                  <a:lnTo>
+                    <a:pt x="4440596" y="1045654"/>
+                  </a:lnTo>
+                  <a:lnTo>
+                    <a:pt x="4512219" y="893986"/>
+                  </a:lnTo>
+                  <a:lnTo>
+                    <a:pt x="4583841" y="733494"/>
+                  </a:lnTo>
+                  <a:lnTo>
+                    <a:pt x="4655464" y="563665"/>
+                  </a:lnTo>
+                  <a:lnTo>
+                    <a:pt x="4727086" y="383955"/>
+                  </a:lnTo>
+                  <a:lnTo>
+                    <a:pt x="4798709" y="193791"/>
+                  </a:lnTo>
+                  <a:lnTo>
+                    <a:pt x="4867684" y="0"/>
                   </a:lnTo>
                 </a:path>
               </a:pathLst>
@@ -3898,312 +3904,312 @@
           </p:nvSpPr>
           <p:spPr>
             <a:xfrm>
-              <a:off x="1172049" y="3348957"/>
-              <a:ext cx="7090630" cy="2129342"/>
+              <a:off x="1172049" y="3458094"/>
+              <a:ext cx="7090630" cy="2012858"/>
             </a:xfrm>
             <a:custGeom>
               <a:avLst/>
               <a:pathLst>
-                <a:path w="7090630" h="2129342">
+                <a:path w="7090630" h="2012858">
                   <a:moveTo>
                     <a:pt x="7090630" y="0"/>
                   </a:moveTo>
                   <a:lnTo>
-                    <a:pt x="7019007" y="35905"/>
-                  </a:lnTo>
-                  <a:lnTo>
-                    <a:pt x="6947385" y="71224"/>
-                  </a:lnTo>
-                  <a:lnTo>
-                    <a:pt x="6875762" y="105968"/>
-                  </a:lnTo>
-                  <a:lnTo>
-                    <a:pt x="6804139" y="140144"/>
-                  </a:lnTo>
-                  <a:lnTo>
-                    <a:pt x="6732517" y="173762"/>
-                  </a:lnTo>
-                  <a:lnTo>
-                    <a:pt x="6660894" y="206832"/>
-                  </a:lnTo>
-                  <a:lnTo>
-                    <a:pt x="6589272" y="239362"/>
-                  </a:lnTo>
-                  <a:lnTo>
-                    <a:pt x="6517649" y="271362"/>
-                  </a:lnTo>
-                  <a:lnTo>
-                    <a:pt x="6446027" y="302839"/>
-                  </a:lnTo>
-                  <a:lnTo>
-                    <a:pt x="6374404" y="333802"/>
-                  </a:lnTo>
-                  <a:lnTo>
-                    <a:pt x="6302782" y="364260"/>
-                  </a:lnTo>
-                  <a:lnTo>
-                    <a:pt x="6231159" y="394221"/>
-                  </a:lnTo>
-                  <a:lnTo>
-                    <a:pt x="6159537" y="423694"/>
-                  </a:lnTo>
-                  <a:lnTo>
-                    <a:pt x="6087914" y="452685"/>
-                  </a:lnTo>
-                  <a:lnTo>
-                    <a:pt x="6016292" y="481203"/>
-                  </a:lnTo>
-                  <a:lnTo>
-                    <a:pt x="5944669" y="509256"/>
-                  </a:lnTo>
-                  <a:lnTo>
-                    <a:pt x="5873047" y="536851"/>
-                  </a:lnTo>
-                  <a:lnTo>
-                    <a:pt x="5801424" y="563996"/>
-                  </a:lnTo>
-                  <a:lnTo>
-                    <a:pt x="5729802" y="590697"/>
-                  </a:lnTo>
-                  <a:lnTo>
-                    <a:pt x="5658179" y="616963"/>
-                  </a:lnTo>
-                  <a:lnTo>
-                    <a:pt x="5586557" y="642801"/>
-                  </a:lnTo>
-                  <a:lnTo>
-                    <a:pt x="5514934" y="668216"/>
-                  </a:lnTo>
-                  <a:lnTo>
-                    <a:pt x="5443311" y="693217"/>
-                  </a:lnTo>
-                  <a:lnTo>
-                    <a:pt x="5371689" y="717810"/>
-                  </a:lnTo>
-                  <a:lnTo>
-                    <a:pt x="5300066" y="742002"/>
-                  </a:lnTo>
-                  <a:lnTo>
-                    <a:pt x="5228444" y="765799"/>
-                  </a:lnTo>
-                  <a:lnTo>
-                    <a:pt x="5156821" y="789207"/>
-                  </a:lnTo>
-                  <a:lnTo>
-                    <a:pt x="5085199" y="812234"/>
-                  </a:lnTo>
-                  <a:lnTo>
-                    <a:pt x="5013576" y="834884"/>
-                  </a:lnTo>
-                  <a:lnTo>
-                    <a:pt x="4941954" y="857165"/>
-                  </a:lnTo>
-                  <a:lnTo>
-                    <a:pt x="4870331" y="879083"/>
-                  </a:lnTo>
-                  <a:lnTo>
-                    <a:pt x="4798709" y="900643"/>
-                  </a:lnTo>
-                  <a:lnTo>
-                    <a:pt x="4727086" y="921851"/>
-                  </a:lnTo>
-                  <a:lnTo>
-                    <a:pt x="4655464" y="942713"/>
-                  </a:lnTo>
-                  <a:lnTo>
-                    <a:pt x="4583841" y="963234"/>
-                  </a:lnTo>
-                  <a:lnTo>
-                    <a:pt x="4512219" y="983421"/>
-                  </a:lnTo>
-                  <a:lnTo>
-                    <a:pt x="4440596" y="1003278"/>
-                  </a:lnTo>
-                  <a:lnTo>
-                    <a:pt x="4368974" y="1022811"/>
-                  </a:lnTo>
-                  <a:lnTo>
-                    <a:pt x="4297351" y="1042026"/>
-                  </a:lnTo>
-                  <a:lnTo>
-                    <a:pt x="4225729" y="1060926"/>
-                  </a:lnTo>
-                  <a:lnTo>
-                    <a:pt x="4154106" y="1079519"/>
-                  </a:lnTo>
-                  <a:lnTo>
-                    <a:pt x="4082483" y="1097808"/>
-                  </a:lnTo>
-                  <a:lnTo>
-                    <a:pt x="4010861" y="1115798"/>
-                  </a:lnTo>
-                  <a:lnTo>
-                    <a:pt x="3939238" y="1133495"/>
-                  </a:lnTo>
-                  <a:lnTo>
-                    <a:pt x="3867616" y="1150903"/>
-                  </a:lnTo>
-                  <a:lnTo>
-                    <a:pt x="3795993" y="1168027"/>
-                  </a:lnTo>
-                  <a:lnTo>
-                    <a:pt x="3724371" y="1184872"/>
-                  </a:lnTo>
-                  <a:lnTo>
-                    <a:pt x="3652748" y="1201442"/>
-                  </a:lnTo>
-                  <a:lnTo>
-                    <a:pt x="3581126" y="1217741"/>
-                  </a:lnTo>
-                  <a:lnTo>
-                    <a:pt x="3509503" y="1233774"/>
-                  </a:lnTo>
-                  <a:lnTo>
-                    <a:pt x="3437881" y="1249546"/>
-                  </a:lnTo>
-                  <a:lnTo>
-                    <a:pt x="3366258" y="1265061"/>
-                  </a:lnTo>
-                  <a:lnTo>
-                    <a:pt x="3294636" y="1280322"/>
-                  </a:lnTo>
-                  <a:lnTo>
-                    <a:pt x="3223013" y="1295334"/>
-                  </a:lnTo>
-                  <a:lnTo>
-                    <a:pt x="3151391" y="1310101"/>
-                  </a:lnTo>
-                  <a:lnTo>
-                    <a:pt x="3079768" y="1324627"/>
-                  </a:lnTo>
-                  <a:lnTo>
-                    <a:pt x="3008146" y="1360057"/>
-                  </a:lnTo>
-                  <a:lnTo>
-                    <a:pt x="2936523" y="1408086"/>
-                  </a:lnTo>
-                  <a:lnTo>
-                    <a:pt x="2864901" y="1453370"/>
-                  </a:lnTo>
-                  <a:lnTo>
-                    <a:pt x="2793278" y="1496065"/>
-                  </a:lnTo>
-                  <a:lnTo>
-                    <a:pt x="2721655" y="1536319"/>
-                  </a:lnTo>
-                  <a:lnTo>
-                    <a:pt x="2650033" y="1574272"/>
-                  </a:lnTo>
-                  <a:lnTo>
-                    <a:pt x="2578410" y="1610056"/>
-                  </a:lnTo>
-                  <a:lnTo>
-                    <a:pt x="2506788" y="1643794"/>
-                  </a:lnTo>
-                  <a:lnTo>
-                    <a:pt x="2435165" y="1675603"/>
-                  </a:lnTo>
-                  <a:lnTo>
-                    <a:pt x="2363543" y="1705595"/>
-                  </a:lnTo>
-                  <a:lnTo>
-                    <a:pt x="2291920" y="1733871"/>
-                  </a:lnTo>
-                  <a:lnTo>
-                    <a:pt x="2220298" y="1760531"/>
-                  </a:lnTo>
-                  <a:lnTo>
-                    <a:pt x="2148675" y="1785668"/>
-                  </a:lnTo>
-                  <a:lnTo>
-                    <a:pt x="2077053" y="1809367"/>
-                  </a:lnTo>
-                  <a:lnTo>
-                    <a:pt x="2005430" y="1831712"/>
-                  </a:lnTo>
-                  <a:lnTo>
-                    <a:pt x="1933808" y="1852779"/>
-                  </a:lnTo>
-                  <a:lnTo>
-                    <a:pt x="1862185" y="1872642"/>
-                  </a:lnTo>
-                  <a:lnTo>
-                    <a:pt x="1790563" y="1891369"/>
-                  </a:lnTo>
-                  <a:lnTo>
-                    <a:pt x="1718940" y="1909026"/>
-                  </a:lnTo>
-                  <a:lnTo>
-                    <a:pt x="1647318" y="1925674"/>
-                  </a:lnTo>
-                  <a:lnTo>
-                    <a:pt x="1575695" y="1941370"/>
-                  </a:lnTo>
-                  <a:lnTo>
-                    <a:pt x="1504073" y="1956168"/>
-                  </a:lnTo>
-                  <a:lnTo>
-                    <a:pt x="1432450" y="1970121"/>
-                  </a:lnTo>
-                  <a:lnTo>
-                    <a:pt x="1360827" y="1983276"/>
-                  </a:lnTo>
-                  <a:lnTo>
-                    <a:pt x="1289205" y="1995679"/>
-                  </a:lnTo>
-                  <a:lnTo>
-                    <a:pt x="1217582" y="2007373"/>
-                  </a:lnTo>
-                  <a:lnTo>
-                    <a:pt x="1145960" y="2018399"/>
-                  </a:lnTo>
-                  <a:lnTo>
-                    <a:pt x="1074337" y="2028794"/>
-                  </a:lnTo>
-                  <a:lnTo>
-                    <a:pt x="1002715" y="2038596"/>
-                  </a:lnTo>
-                  <a:lnTo>
-                    <a:pt x="931092" y="2047836"/>
-                  </a:lnTo>
-                  <a:lnTo>
-                    <a:pt x="859470" y="2056549"/>
-                  </a:lnTo>
-                  <a:lnTo>
-                    <a:pt x="787847" y="2064763"/>
-                  </a:lnTo>
-                  <a:lnTo>
-                    <a:pt x="716225" y="2072508"/>
-                  </a:lnTo>
-                  <a:lnTo>
-                    <a:pt x="644602" y="2079811"/>
-                  </a:lnTo>
-                  <a:lnTo>
-                    <a:pt x="572980" y="2086695"/>
-                  </a:lnTo>
-                  <a:lnTo>
-                    <a:pt x="501357" y="2093187"/>
-                  </a:lnTo>
-                  <a:lnTo>
-                    <a:pt x="429735" y="2099307"/>
-                  </a:lnTo>
-                  <a:lnTo>
-                    <a:pt x="358112" y="2105077"/>
-                  </a:lnTo>
-                  <a:lnTo>
-                    <a:pt x="286490" y="2110518"/>
-                  </a:lnTo>
-                  <a:lnTo>
-                    <a:pt x="214867" y="2115647"/>
-                  </a:lnTo>
-                  <a:lnTo>
-                    <a:pt x="143245" y="2120483"/>
-                  </a:lnTo>
-                  <a:lnTo>
-                    <a:pt x="71622" y="2125043"/>
-                  </a:lnTo>
-                  <a:lnTo>
-                    <a:pt x="0" y="2129342"/>
+                    <a:pt x="7019007" y="32268"/>
+                  </a:lnTo>
+                  <a:lnTo>
+                    <a:pt x="6947385" y="64039"/>
+                  </a:lnTo>
+                  <a:lnTo>
+                    <a:pt x="6875762" y="95319"/>
+                  </a:lnTo>
+                  <a:lnTo>
+                    <a:pt x="6804139" y="126117"/>
+                  </a:lnTo>
+                  <a:lnTo>
+                    <a:pt x="6732517" y="156439"/>
+                  </a:lnTo>
+                  <a:lnTo>
+                    <a:pt x="6660894" y="186294"/>
+                  </a:lnTo>
+                  <a:lnTo>
+                    <a:pt x="6589272" y="215688"/>
+                  </a:lnTo>
+                  <a:lnTo>
+                    <a:pt x="6517649" y="244628"/>
+                  </a:lnTo>
+                  <a:lnTo>
+                    <a:pt x="6446027" y="273122"/>
+                  </a:lnTo>
+                  <a:lnTo>
+                    <a:pt x="6374404" y="301176"/>
+                  </a:lnTo>
+                  <a:lnTo>
+                    <a:pt x="6302782" y="328797"/>
+                  </a:lnTo>
+                  <a:lnTo>
+                    <a:pt x="6231159" y="355992"/>
+                  </a:lnTo>
+                  <a:lnTo>
+                    <a:pt x="6159537" y="382767"/>
+                  </a:lnTo>
+                  <a:lnTo>
+                    <a:pt x="6087914" y="409129"/>
+                  </a:lnTo>
+                  <a:lnTo>
+                    <a:pt x="6016292" y="435084"/>
+                  </a:lnTo>
+                  <a:lnTo>
+                    <a:pt x="5944669" y="460639"/>
+                  </a:lnTo>
+                  <a:lnTo>
+                    <a:pt x="5873047" y="485799"/>
+                  </a:lnTo>
+                  <a:lnTo>
+                    <a:pt x="5801424" y="510571"/>
+                  </a:lnTo>
+                  <a:lnTo>
+                    <a:pt x="5729802" y="534961"/>
+                  </a:lnTo>
+                  <a:lnTo>
+                    <a:pt x="5658179" y="558975"/>
+                  </a:lnTo>
+                  <a:lnTo>
+                    <a:pt x="5586557" y="582618"/>
+                  </a:lnTo>
+                  <a:lnTo>
+                    <a:pt x="5514934" y="605896"/>
+                  </a:lnTo>
+                  <a:lnTo>
+                    <a:pt x="5443311" y="628815"/>
+                  </a:lnTo>
+                  <a:lnTo>
+                    <a:pt x="5371689" y="651380"/>
+                  </a:lnTo>
+                  <a:lnTo>
+                    <a:pt x="5300066" y="673597"/>
+                  </a:lnTo>
+                  <a:lnTo>
+                    <a:pt x="5228444" y="695471"/>
+                  </a:lnTo>
+                  <a:lnTo>
+                    <a:pt x="5156821" y="717007"/>
+                  </a:lnTo>
+                  <a:lnTo>
+                    <a:pt x="5085199" y="738212"/>
+                  </a:lnTo>
+                  <a:lnTo>
+                    <a:pt x="5013576" y="759089"/>
+                  </a:lnTo>
+                  <a:lnTo>
+                    <a:pt x="4941954" y="779644"/>
+                  </a:lnTo>
+                  <a:lnTo>
+                    <a:pt x="4870331" y="799881"/>
+                  </a:lnTo>
+                  <a:lnTo>
+                    <a:pt x="4798709" y="819807"/>
+                  </a:lnTo>
+                  <a:lnTo>
+                    <a:pt x="4727086" y="839425"/>
+                  </a:lnTo>
+                  <a:lnTo>
+                    <a:pt x="4655464" y="858740"/>
+                  </a:lnTo>
+                  <a:lnTo>
+                    <a:pt x="4583841" y="877757"/>
+                  </a:lnTo>
+                  <a:lnTo>
+                    <a:pt x="4512219" y="896481"/>
+                  </a:lnTo>
+                  <a:lnTo>
+                    <a:pt x="4440596" y="914915"/>
+                  </a:lnTo>
+                  <a:lnTo>
+                    <a:pt x="4368974" y="933066"/>
+                  </a:lnTo>
+                  <a:lnTo>
+                    <a:pt x="4297351" y="950936"/>
+                  </a:lnTo>
+                  <a:lnTo>
+                    <a:pt x="4225729" y="968530"/>
+                  </a:lnTo>
+                  <a:lnTo>
+                    <a:pt x="4154106" y="985853"/>
+                  </a:lnTo>
+                  <a:lnTo>
+                    <a:pt x="4082483" y="1002909"/>
+                  </a:lnTo>
+                  <a:lnTo>
+                    <a:pt x="4010861" y="1019701"/>
+                  </a:lnTo>
+                  <a:lnTo>
+                    <a:pt x="3939238" y="1036235"/>
+                  </a:lnTo>
+                  <a:lnTo>
+                    <a:pt x="3867616" y="1052513"/>
+                  </a:lnTo>
+                  <a:lnTo>
+                    <a:pt x="3795993" y="1068540"/>
+                  </a:lnTo>
+                  <a:lnTo>
+                    <a:pt x="3724371" y="1084319"/>
+                  </a:lnTo>
+                  <a:lnTo>
+                    <a:pt x="3652748" y="1099855"/>
+                  </a:lnTo>
+                  <a:lnTo>
+                    <a:pt x="3581126" y="1115152"/>
+                  </a:lnTo>
+                  <a:lnTo>
+                    <a:pt x="3509503" y="1130212"/>
+                  </a:lnTo>
+                  <a:lnTo>
+                    <a:pt x="3437881" y="1145040"/>
+                  </a:lnTo>
+                  <a:lnTo>
+                    <a:pt x="3366258" y="1159639"/>
+                  </a:lnTo>
+                  <a:lnTo>
+                    <a:pt x="3294636" y="1174013"/>
+                  </a:lnTo>
+                  <a:lnTo>
+                    <a:pt x="3223013" y="1188165"/>
+                  </a:lnTo>
+                  <a:lnTo>
+                    <a:pt x="3151391" y="1202099"/>
+                  </a:lnTo>
+                  <a:lnTo>
+                    <a:pt x="3079768" y="1215818"/>
+                  </a:lnTo>
+                  <a:lnTo>
+                    <a:pt x="3008146" y="1249780"/>
+                  </a:lnTo>
+                  <a:lnTo>
+                    <a:pt x="2936523" y="1296036"/>
+                  </a:lnTo>
+                  <a:lnTo>
+                    <a:pt x="2864901" y="1339749"/>
+                  </a:lnTo>
+                  <a:lnTo>
+                    <a:pt x="2793278" y="1381058"/>
+                  </a:lnTo>
+                  <a:lnTo>
+                    <a:pt x="2721655" y="1420096"/>
+                  </a:lnTo>
+                  <a:lnTo>
+                    <a:pt x="2650033" y="1456988"/>
+                  </a:lnTo>
+                  <a:lnTo>
+                    <a:pt x="2578410" y="1491851"/>
+                  </a:lnTo>
+                  <a:lnTo>
+                    <a:pt x="2506788" y="1524798"/>
+                  </a:lnTo>
+                  <a:lnTo>
+                    <a:pt x="2435165" y="1555934"/>
+                  </a:lnTo>
+                  <a:lnTo>
+                    <a:pt x="2363543" y="1585357"/>
+                  </a:lnTo>
+                  <a:lnTo>
+                    <a:pt x="2291920" y="1613163"/>
+                  </a:lnTo>
+                  <a:lnTo>
+                    <a:pt x="2220298" y="1639441"/>
+                  </a:lnTo>
+                  <a:lnTo>
+                    <a:pt x="2148675" y="1664273"/>
+                  </a:lnTo>
+                  <a:lnTo>
+                    <a:pt x="2077053" y="1687740"/>
+                  </a:lnTo>
+                  <a:lnTo>
+                    <a:pt x="2005430" y="1709917"/>
+                  </a:lnTo>
+                  <a:lnTo>
+                    <a:pt x="1933808" y="1730875"/>
+                  </a:lnTo>
+                  <a:lnTo>
+                    <a:pt x="1862185" y="1750681"/>
+                  </a:lnTo>
+                  <a:lnTo>
+                    <a:pt x="1790563" y="1769397"/>
+                  </a:lnTo>
+                  <a:lnTo>
+                    <a:pt x="1718940" y="1787085"/>
+                  </a:lnTo>
+                  <a:lnTo>
+                    <a:pt x="1647318" y="1803800"/>
+                  </a:lnTo>
+                  <a:lnTo>
+                    <a:pt x="1575695" y="1819596"/>
+                  </a:lnTo>
+                  <a:lnTo>
+                    <a:pt x="1504073" y="1834524"/>
+                  </a:lnTo>
+                  <a:lnTo>
+                    <a:pt x="1432450" y="1848631"/>
+                  </a:lnTo>
+                  <a:lnTo>
+                    <a:pt x="1360827" y="1861962"/>
+                  </a:lnTo>
+                  <a:lnTo>
+                    <a:pt x="1289205" y="1874561"/>
+                  </a:lnTo>
+                  <a:lnTo>
+                    <a:pt x="1217582" y="1886467"/>
+                  </a:lnTo>
+                  <a:lnTo>
+                    <a:pt x="1145960" y="1897718"/>
+                  </a:lnTo>
+                  <a:lnTo>
+                    <a:pt x="1074337" y="1908351"/>
+                  </a:lnTo>
+                  <a:lnTo>
+                    <a:pt x="1002715" y="1918399"/>
+                  </a:lnTo>
+                  <a:lnTo>
+                    <a:pt x="931092" y="1927894"/>
+                  </a:lnTo>
+                  <a:lnTo>
+                    <a:pt x="859470" y="1936868"/>
+                  </a:lnTo>
+                  <a:lnTo>
+                    <a:pt x="787847" y="1945348"/>
+                  </a:lnTo>
+                  <a:lnTo>
+                    <a:pt x="716225" y="1953362"/>
+                  </a:lnTo>
+                  <a:lnTo>
+                    <a:pt x="644602" y="1960935"/>
+                  </a:lnTo>
+                  <a:lnTo>
+                    <a:pt x="572980" y="1968093"/>
+                  </a:lnTo>
+                  <a:lnTo>
+                    <a:pt x="501357" y="1974856"/>
+                  </a:lnTo>
+                  <a:lnTo>
+                    <a:pt x="429735" y="1981248"/>
+                  </a:lnTo>
+                  <a:lnTo>
+                    <a:pt x="358112" y="1987288"/>
+                  </a:lnTo>
+                  <a:lnTo>
+                    <a:pt x="286490" y="1992996"/>
+                  </a:lnTo>
+                  <a:lnTo>
+                    <a:pt x="214867" y="1998391"/>
+                  </a:lnTo>
+                  <a:lnTo>
+                    <a:pt x="143245" y="2003488"/>
+                  </a:lnTo>
+                  <a:lnTo>
+                    <a:pt x="71622" y="2008306"/>
+                  </a:lnTo>
+                  <a:lnTo>
+                    <a:pt x="0" y="2012858"/>
                   </a:lnTo>
                 </a:path>
               </a:pathLst>
@@ -4224,257 +4230,263 @@
           <p:spPr>
             <a:xfrm>
               <a:off x="1172049" y="1896563"/>
-              <a:ext cx="5779213" cy="3477711"/>
+              <a:ext cx="5900974" cy="3465308"/>
             </a:xfrm>
             <a:custGeom>
               <a:avLst/>
               <a:pathLst>
-                <a:path w="5779213" h="3477711">
+                <a:path w="5900974" h="3465308">
                   <a:moveTo>
-                    <a:pt x="0" y="3477711"/>
+                    <a:pt x="0" y="3465308"/>
                   </a:moveTo>
                   <a:lnTo>
-                    <a:pt x="71622" y="3470997"/>
-                  </a:lnTo>
-                  <a:lnTo>
-                    <a:pt x="143245" y="3464026"/>
-                  </a:lnTo>
-                  <a:lnTo>
-                    <a:pt x="214867" y="3456788"/>
-                  </a:lnTo>
-                  <a:lnTo>
-                    <a:pt x="286490" y="3449272"/>
-                  </a:lnTo>
-                  <a:lnTo>
-                    <a:pt x="358112" y="3441467"/>
-                  </a:lnTo>
-                  <a:lnTo>
-                    <a:pt x="429735" y="3433363"/>
-                  </a:lnTo>
-                  <a:lnTo>
-                    <a:pt x="501357" y="3424947"/>
-                  </a:lnTo>
-                  <a:lnTo>
-                    <a:pt x="572980" y="3416209"/>
-                  </a:lnTo>
-                  <a:lnTo>
-                    <a:pt x="644602" y="3407136"/>
-                  </a:lnTo>
-                  <a:lnTo>
-                    <a:pt x="716225" y="3397714"/>
-                  </a:lnTo>
-                  <a:lnTo>
-                    <a:pt x="787847" y="3387931"/>
-                  </a:lnTo>
-                  <a:lnTo>
-                    <a:pt x="859470" y="3377772"/>
-                  </a:lnTo>
-                  <a:lnTo>
-                    <a:pt x="931092" y="3367223"/>
-                  </a:lnTo>
-                  <a:lnTo>
-                    <a:pt x="1002715" y="3356270"/>
-                  </a:lnTo>
-                  <a:lnTo>
-                    <a:pt x="1074337" y="3344896"/>
-                  </a:lnTo>
-                  <a:lnTo>
-                    <a:pt x="1145960" y="3333086"/>
-                  </a:lnTo>
-                  <a:lnTo>
-                    <a:pt x="1217582" y="3320823"/>
-                  </a:lnTo>
-                  <a:lnTo>
-                    <a:pt x="1289205" y="3308088"/>
-                  </a:lnTo>
-                  <a:lnTo>
-                    <a:pt x="1360827" y="3294866"/>
-                  </a:lnTo>
-                  <a:lnTo>
-                    <a:pt x="1432450" y="3281135"/>
-                  </a:lnTo>
-                  <a:lnTo>
-                    <a:pt x="1504073" y="3266878"/>
-                  </a:lnTo>
-                  <a:lnTo>
-                    <a:pt x="1575695" y="3252074"/>
-                  </a:lnTo>
-                  <a:lnTo>
-                    <a:pt x="1647318" y="3236701"/>
-                  </a:lnTo>
-                  <a:lnTo>
-                    <a:pt x="1718940" y="3220739"/>
-                  </a:lnTo>
-                  <a:lnTo>
-                    <a:pt x="1790563" y="3204164"/>
-                  </a:lnTo>
-                  <a:lnTo>
-                    <a:pt x="1862185" y="3186953"/>
-                  </a:lnTo>
-                  <a:lnTo>
-                    <a:pt x="1933808" y="3169081"/>
-                  </a:lnTo>
-                  <a:lnTo>
-                    <a:pt x="2005430" y="3150524"/>
-                  </a:lnTo>
-                  <a:lnTo>
-                    <a:pt x="2077053" y="3131255"/>
-                  </a:lnTo>
-                  <a:lnTo>
-                    <a:pt x="2148675" y="3111245"/>
-                  </a:lnTo>
-                  <a:lnTo>
-                    <a:pt x="2220298" y="3090469"/>
-                  </a:lnTo>
-                  <a:lnTo>
-                    <a:pt x="2291920" y="3068894"/>
-                  </a:lnTo>
-                  <a:lnTo>
-                    <a:pt x="2363543" y="3046492"/>
-                  </a:lnTo>
-                  <a:lnTo>
-                    <a:pt x="2435165" y="3023230"/>
-                  </a:lnTo>
-                  <a:lnTo>
-                    <a:pt x="2506788" y="2999075"/>
-                  </a:lnTo>
-                  <a:lnTo>
-                    <a:pt x="2578410" y="2973994"/>
-                  </a:lnTo>
-                  <a:lnTo>
-                    <a:pt x="2650033" y="2947950"/>
-                  </a:lnTo>
-                  <a:lnTo>
-                    <a:pt x="2721655" y="2920906"/>
-                  </a:lnTo>
-                  <a:lnTo>
-                    <a:pt x="2793278" y="2892824"/>
-                  </a:lnTo>
-                  <a:lnTo>
-                    <a:pt x="2864901" y="2863665"/>
-                  </a:lnTo>
-                  <a:lnTo>
-                    <a:pt x="2936523" y="2833387"/>
-                  </a:lnTo>
-                  <a:lnTo>
-                    <a:pt x="3008146" y="2801947"/>
-                  </a:lnTo>
-                  <a:lnTo>
-                    <a:pt x="3079768" y="2769300"/>
-                  </a:lnTo>
-                  <a:lnTo>
-                    <a:pt x="3151391" y="2735400"/>
-                  </a:lnTo>
-                  <a:lnTo>
-                    <a:pt x="3223013" y="2700200"/>
-                  </a:lnTo>
-                  <a:lnTo>
-                    <a:pt x="3294636" y="2663648"/>
-                  </a:lnTo>
-                  <a:lnTo>
-                    <a:pt x="3366258" y="2625694"/>
-                  </a:lnTo>
-                  <a:lnTo>
-                    <a:pt x="3437881" y="2586284"/>
-                  </a:lnTo>
-                  <a:lnTo>
-                    <a:pt x="3509503" y="2545360"/>
-                  </a:lnTo>
-                  <a:lnTo>
-                    <a:pt x="3581126" y="2502867"/>
-                  </a:lnTo>
-                  <a:lnTo>
-                    <a:pt x="3652748" y="2458742"/>
-                  </a:lnTo>
-                  <a:lnTo>
-                    <a:pt x="3724371" y="2412925"/>
-                  </a:lnTo>
-                  <a:lnTo>
-                    <a:pt x="3795993" y="2365349"/>
-                  </a:lnTo>
-                  <a:lnTo>
-                    <a:pt x="3867616" y="2315947"/>
-                  </a:lnTo>
-                  <a:lnTo>
-                    <a:pt x="3939238" y="2264649"/>
-                  </a:lnTo>
-                  <a:lnTo>
-                    <a:pt x="4010861" y="2211383"/>
-                  </a:lnTo>
-                  <a:lnTo>
-                    <a:pt x="4082483" y="2156072"/>
-                  </a:lnTo>
-                  <a:lnTo>
-                    <a:pt x="4154106" y="2098639"/>
-                  </a:lnTo>
-                  <a:lnTo>
-                    <a:pt x="4225729" y="2039002"/>
-                  </a:lnTo>
-                  <a:lnTo>
-                    <a:pt x="4297351" y="1977076"/>
-                  </a:lnTo>
-                  <a:lnTo>
-                    <a:pt x="4368974" y="1912774"/>
-                  </a:lnTo>
-                  <a:lnTo>
-                    <a:pt x="4440596" y="1846004"/>
-                  </a:lnTo>
-                  <a:lnTo>
-                    <a:pt x="4512219" y="1776671"/>
-                  </a:lnTo>
-                  <a:lnTo>
-                    <a:pt x="4583841" y="1704678"/>
-                  </a:lnTo>
-                  <a:lnTo>
-                    <a:pt x="4655464" y="1629922"/>
-                  </a:lnTo>
-                  <a:lnTo>
-                    <a:pt x="4727086" y="1552297"/>
-                  </a:lnTo>
-                  <a:lnTo>
-                    <a:pt x="4798709" y="1471693"/>
-                  </a:lnTo>
-                  <a:lnTo>
-                    <a:pt x="4870331" y="1387996"/>
-                  </a:lnTo>
-                  <a:lnTo>
-                    <a:pt x="4941954" y="1301086"/>
-                  </a:lnTo>
-                  <a:lnTo>
-                    <a:pt x="5013576" y="1210842"/>
-                  </a:lnTo>
-                  <a:lnTo>
-                    <a:pt x="5085199" y="1117134"/>
-                  </a:lnTo>
-                  <a:lnTo>
-                    <a:pt x="5156821" y="1019830"/>
-                  </a:lnTo>
-                  <a:lnTo>
-                    <a:pt x="5228444" y="918792"/>
-                  </a:lnTo>
-                  <a:lnTo>
-                    <a:pt x="5300066" y="813877"/>
-                  </a:lnTo>
-                  <a:lnTo>
-                    <a:pt x="5371689" y="704935"/>
-                  </a:lnTo>
-                  <a:lnTo>
-                    <a:pt x="5443311" y="591812"/>
-                  </a:lnTo>
-                  <a:lnTo>
-                    <a:pt x="5514934" y="474348"/>
-                  </a:lnTo>
-                  <a:lnTo>
-                    <a:pt x="5586557" y="352376"/>
-                  </a:lnTo>
-                  <a:lnTo>
-                    <a:pt x="5658179" y="225724"/>
-                  </a:lnTo>
-                  <a:lnTo>
-                    <a:pt x="5729802" y="94210"/>
-                  </a:lnTo>
-                  <a:lnTo>
-                    <a:pt x="5779213" y="0"/>
+                    <a:pt x="71622" y="3458431"/>
+                  </a:lnTo>
+                  <a:lnTo>
+                    <a:pt x="143245" y="3451302"/>
+                  </a:lnTo>
+                  <a:lnTo>
+                    <a:pt x="214867" y="3443911"/>
+                  </a:lnTo>
+                  <a:lnTo>
+                    <a:pt x="286490" y="3436249"/>
+                  </a:lnTo>
+                  <a:lnTo>
+                    <a:pt x="358112" y="3428306"/>
+                  </a:lnTo>
+                  <a:lnTo>
+                    <a:pt x="429735" y="3420071"/>
+                  </a:lnTo>
+                  <a:lnTo>
+                    <a:pt x="501357" y="3411534"/>
+                  </a:lnTo>
+                  <a:lnTo>
+                    <a:pt x="572980" y="3402683"/>
+                  </a:lnTo>
+                  <a:lnTo>
+                    <a:pt x="644602" y="3393508"/>
+                  </a:lnTo>
+                  <a:lnTo>
+                    <a:pt x="716225" y="3383996"/>
+                  </a:lnTo>
+                  <a:lnTo>
+                    <a:pt x="787847" y="3374134"/>
+                  </a:lnTo>
+                  <a:lnTo>
+                    <a:pt x="859470" y="3363911"/>
+                  </a:lnTo>
+                  <a:lnTo>
+                    <a:pt x="931092" y="3353312"/>
+                  </a:lnTo>
+                  <a:lnTo>
+                    <a:pt x="1002715" y="3342324"/>
+                  </a:lnTo>
+                  <a:lnTo>
+                    <a:pt x="1074337" y="3330933"/>
+                  </a:lnTo>
+                  <a:lnTo>
+                    <a:pt x="1145960" y="3319124"/>
+                  </a:lnTo>
+                  <a:lnTo>
+                    <a:pt x="1217582" y="3306882"/>
+                  </a:lnTo>
+                  <a:lnTo>
+                    <a:pt x="1289205" y="3294189"/>
+                  </a:lnTo>
+                  <a:lnTo>
+                    <a:pt x="1360827" y="3281031"/>
+                  </a:lnTo>
+                  <a:lnTo>
+                    <a:pt x="1432450" y="3267391"/>
+                  </a:lnTo>
+                  <a:lnTo>
+                    <a:pt x="1504073" y="3253249"/>
+                  </a:lnTo>
+                  <a:lnTo>
+                    <a:pt x="1575695" y="3238588"/>
+                  </a:lnTo>
+                  <a:lnTo>
+                    <a:pt x="1647318" y="3223389"/>
+                  </a:lnTo>
+                  <a:lnTo>
+                    <a:pt x="1718940" y="3207632"/>
+                  </a:lnTo>
+                  <a:lnTo>
+                    <a:pt x="1790563" y="3191297"/>
+                  </a:lnTo>
+                  <a:lnTo>
+                    <a:pt x="1862185" y="3174362"/>
+                  </a:lnTo>
+                  <a:lnTo>
+                    <a:pt x="1933808" y="3156805"/>
+                  </a:lnTo>
+                  <a:lnTo>
+                    <a:pt x="2005430" y="3138604"/>
+                  </a:lnTo>
+                  <a:lnTo>
+                    <a:pt x="2077053" y="3119735"/>
+                  </a:lnTo>
+                  <a:lnTo>
+                    <a:pt x="2148675" y="3100173"/>
+                  </a:lnTo>
+                  <a:lnTo>
+                    <a:pt x="2220298" y="3079894"/>
+                  </a:lnTo>
+                  <a:lnTo>
+                    <a:pt x="2291920" y="3058869"/>
+                  </a:lnTo>
+                  <a:lnTo>
+                    <a:pt x="2363543" y="3037073"/>
+                  </a:lnTo>
+                  <a:lnTo>
+                    <a:pt x="2435165" y="3014477"/>
+                  </a:lnTo>
+                  <a:lnTo>
+                    <a:pt x="2506788" y="2991052"/>
+                  </a:lnTo>
+                  <a:lnTo>
+                    <a:pt x="2578410" y="2966766"/>
+                  </a:lnTo>
+                  <a:lnTo>
+                    <a:pt x="2650033" y="2941589"/>
+                  </a:lnTo>
+                  <a:lnTo>
+                    <a:pt x="2721655" y="2915488"/>
+                  </a:lnTo>
+                  <a:lnTo>
+                    <a:pt x="2793278" y="2888429"/>
+                  </a:lnTo>
+                  <a:lnTo>
+                    <a:pt x="2864901" y="2860377"/>
+                  </a:lnTo>
+                  <a:lnTo>
+                    <a:pt x="2936523" y="2831294"/>
+                  </a:lnTo>
+                  <a:lnTo>
+                    <a:pt x="3008146" y="2801145"/>
+                  </a:lnTo>
+                  <a:lnTo>
+                    <a:pt x="3079768" y="2769888"/>
+                  </a:lnTo>
+                  <a:lnTo>
+                    <a:pt x="3151391" y="2737484"/>
+                  </a:lnTo>
+                  <a:lnTo>
+                    <a:pt x="3223013" y="2703891"/>
+                  </a:lnTo>
+                  <a:lnTo>
+                    <a:pt x="3294636" y="2669065"/>
+                  </a:lnTo>
+                  <a:lnTo>
+                    <a:pt x="3366258" y="2632960"/>
+                  </a:lnTo>
+                  <a:lnTo>
+                    <a:pt x="3437881" y="2595530"/>
+                  </a:lnTo>
+                  <a:lnTo>
+                    <a:pt x="3509503" y="2556726"/>
+                  </a:lnTo>
+                  <a:lnTo>
+                    <a:pt x="3581126" y="2516497"/>
+                  </a:lnTo>
+                  <a:lnTo>
+                    <a:pt x="3652748" y="2474792"/>
+                  </a:lnTo>
+                  <a:lnTo>
+                    <a:pt x="3724371" y="2431556"/>
+                  </a:lnTo>
+                  <a:lnTo>
+                    <a:pt x="3795993" y="2386733"/>
+                  </a:lnTo>
+                  <a:lnTo>
+                    <a:pt x="3867616" y="2340264"/>
+                  </a:lnTo>
+                  <a:lnTo>
+                    <a:pt x="3939238" y="2292090"/>
+                  </a:lnTo>
+                  <a:lnTo>
+                    <a:pt x="4010861" y="2242147"/>
+                  </a:lnTo>
+                  <a:lnTo>
+                    <a:pt x="4082483" y="2190371"/>
+                  </a:lnTo>
+                  <a:lnTo>
+                    <a:pt x="4154106" y="2136695"/>
+                  </a:lnTo>
+                  <a:lnTo>
+                    <a:pt x="4225729" y="2081048"/>
+                  </a:lnTo>
+                  <a:lnTo>
+                    <a:pt x="4297351" y="2023358"/>
+                  </a:lnTo>
+                  <a:lnTo>
+                    <a:pt x="4368974" y="1963551"/>
+                  </a:lnTo>
+                  <a:lnTo>
+                    <a:pt x="4440596" y="1901549"/>
+                  </a:lnTo>
+                  <a:lnTo>
+                    <a:pt x="4512219" y="1837270"/>
+                  </a:lnTo>
+                  <a:lnTo>
+                    <a:pt x="4583841" y="1770632"/>
+                  </a:lnTo>
+                  <a:lnTo>
+                    <a:pt x="4655464" y="1701548"/>
+                  </a:lnTo>
+                  <a:lnTo>
+                    <a:pt x="4727086" y="1629928"/>
+                  </a:lnTo>
+                  <a:lnTo>
+                    <a:pt x="4798709" y="1555679"/>
+                  </a:lnTo>
+                  <a:lnTo>
+                    <a:pt x="4870331" y="1478704"/>
+                  </a:lnTo>
+                  <a:lnTo>
+                    <a:pt x="4941954" y="1398904"/>
+                  </a:lnTo>
+                  <a:lnTo>
+                    <a:pt x="5013576" y="1316175"/>
+                  </a:lnTo>
+                  <a:lnTo>
+                    <a:pt x="5085199" y="1230409"/>
+                  </a:lnTo>
+                  <a:lnTo>
+                    <a:pt x="5156821" y="1141494"/>
+                  </a:lnTo>
+                  <a:lnTo>
+                    <a:pt x="5228444" y="1049316"/>
+                  </a:lnTo>
+                  <a:lnTo>
+                    <a:pt x="5300066" y="953754"/>
+                  </a:lnTo>
+                  <a:lnTo>
+                    <a:pt x="5371689" y="854685"/>
+                  </a:lnTo>
+                  <a:lnTo>
+                    <a:pt x="5443311" y="751978"/>
+                  </a:lnTo>
+                  <a:lnTo>
+                    <a:pt x="5514934" y="645502"/>
+                  </a:lnTo>
+                  <a:lnTo>
+                    <a:pt x="5586557" y="535117"/>
+                  </a:lnTo>
+                  <a:lnTo>
+                    <a:pt x="5658179" y="420680"/>
+                  </a:lnTo>
+                  <a:lnTo>
+                    <a:pt x="5729802" y="302042"/>
+                  </a:lnTo>
+                  <a:lnTo>
+                    <a:pt x="5801424" y="179050"/>
+                  </a:lnTo>
+                  <a:lnTo>
+                    <a:pt x="5873047" y="51542"/>
+                  </a:lnTo>
+                  <a:lnTo>
+                    <a:pt x="5900974" y="0"/>
                   </a:lnTo>
                 </a:path>
               </a:pathLst>

--- a/docs/plots/carbo/jx_carbo_linsubhr_dosedisc_sideeffect.pptx
+++ b/docs/plots/carbo/jx_carbo_linsubhr_dosedisc_sideeffect.pptx
@@ -3139,16 +3139,16 @@
               <a:pathLst>
                 <a:path w="7090630" h="3574389">
                   <a:moveTo>
-                    <a:pt x="0" y="3204174"/>
+                    <a:pt x="0" y="3204173"/>
                   </a:moveTo>
                   <a:lnTo>
                     <a:pt x="71622" y="3197145"/>
                   </a:lnTo>
                   <a:lnTo>
-                    <a:pt x="143245" y="3190006"/>
-                  </a:lnTo>
-                  <a:lnTo>
-                    <a:pt x="214867" y="3182755"/>
+                    <a:pt x="143245" y="3190005"/>
+                  </a:lnTo>
+                  <a:lnTo>
+                    <a:pt x="214867" y="3182754"/>
                   </a:lnTo>
                   <a:lnTo>
                     <a:pt x="286490" y="3175390"/>
@@ -3166,7 +3166,7 @@
                     <a:pt x="572980" y="3144759"/>
                   </a:lnTo>
                   <a:lnTo>
-                    <a:pt x="644602" y="3136799"/>
+                    <a:pt x="644602" y="3136798"/>
                   </a:lnTo>
                   <a:lnTo>
                     <a:pt x="716225" y="3128714"/>
@@ -3325,7 +3325,7 @@
                     <a:pt x="4368974" y="1188984"/>
                   </a:lnTo>
                   <a:lnTo>
-                    <a:pt x="4440596" y="1045654"/>
+                    <a:pt x="4440596" y="1045655"/>
                   </a:lnTo>
                   <a:lnTo>
                     <a:pt x="4512219" y="893986"/>
@@ -3349,22 +3349,22 @@
                     <a:pt x="7090630" y="0"/>
                   </a:lnTo>
                   <a:lnTo>
-                    <a:pt x="7090630" y="1561530"/>
-                  </a:lnTo>
-                  <a:lnTo>
-                    <a:pt x="7019007" y="1593799"/>
+                    <a:pt x="7090630" y="1561531"/>
+                  </a:lnTo>
+                  <a:lnTo>
+                    <a:pt x="7019007" y="1593800"/>
                   </a:lnTo>
                   <a:lnTo>
                     <a:pt x="6947385" y="1625570"/>
                   </a:lnTo>
                   <a:lnTo>
-                    <a:pt x="6875762" y="1656850"/>
+                    <a:pt x="6875762" y="1656851"/>
                   </a:lnTo>
                   <a:lnTo>
                     <a:pt x="6804139" y="1687648"/>
                   </a:lnTo>
                   <a:lnTo>
-                    <a:pt x="6732517" y="1717970"/>
+                    <a:pt x="6732517" y="1717971"/>
                   </a:lnTo>
                   <a:lnTo>
                     <a:pt x="6660894" y="1747825"/>
@@ -3373,7 +3373,7 @@
                     <a:pt x="6589272" y="1777219"/>
                   </a:lnTo>
                   <a:lnTo>
-                    <a:pt x="6517649" y="1806159"/>
+                    <a:pt x="6517649" y="1806160"/>
                   </a:lnTo>
                   <a:lnTo>
                     <a:pt x="6446027" y="1834653"/>
@@ -3403,28 +3403,28 @@
                     <a:pt x="5873047" y="2047330"/>
                   </a:lnTo>
                   <a:lnTo>
-                    <a:pt x="5801424" y="2072102"/>
+                    <a:pt x="5801424" y="2072103"/>
                   </a:lnTo>
                   <a:lnTo>
                     <a:pt x="5729802" y="2096492"/>
                   </a:lnTo>
                   <a:lnTo>
-                    <a:pt x="5658179" y="2120505"/>
-                  </a:lnTo>
-                  <a:lnTo>
-                    <a:pt x="5586557" y="2144148"/>
-                  </a:lnTo>
-                  <a:lnTo>
-                    <a:pt x="5514934" y="2167426"/>
-                  </a:lnTo>
-                  <a:lnTo>
-                    <a:pt x="5443311" y="2190345"/>
+                    <a:pt x="5658179" y="2120506"/>
+                  </a:lnTo>
+                  <a:lnTo>
+                    <a:pt x="5586557" y="2144149"/>
+                  </a:lnTo>
+                  <a:lnTo>
+                    <a:pt x="5514934" y="2167427"/>
+                  </a:lnTo>
+                  <a:lnTo>
+                    <a:pt x="5443311" y="2190346"/>
                   </a:lnTo>
                   <a:lnTo>
                     <a:pt x="5371689" y="2212911"/>
                   </a:lnTo>
                   <a:lnTo>
-                    <a:pt x="5300066" y="2235127"/>
+                    <a:pt x="5300066" y="2235128"/>
                   </a:lnTo>
                   <a:lnTo>
                     <a:pt x="5228444" y="2257002"/>
@@ -3433,13 +3433,13 @@
                     <a:pt x="5156821" y="2278538"/>
                   </a:lnTo>
                   <a:lnTo>
-                    <a:pt x="5085199" y="2299742"/>
+                    <a:pt x="5085199" y="2299743"/>
                   </a:lnTo>
                   <a:lnTo>
                     <a:pt x="5013576" y="2320620"/>
                   </a:lnTo>
                   <a:lnTo>
-                    <a:pt x="4941954" y="2341174"/>
+                    <a:pt x="4941954" y="2341175"/>
                   </a:lnTo>
                   <a:lnTo>
                     <a:pt x="4870331" y="2361412"/>
@@ -3448,7 +3448,7 @@
                     <a:pt x="4798709" y="2381338"/>
                   </a:lnTo>
                   <a:lnTo>
-                    <a:pt x="4727086" y="2400955"/>
+                    <a:pt x="4727086" y="2400956"/>
                   </a:lnTo>
                   <a:lnTo>
                     <a:pt x="4655464" y="2420271"/>
@@ -3457,13 +3457,13 @@
                     <a:pt x="4583841" y="2439288"/>
                   </a:lnTo>
                   <a:lnTo>
-                    <a:pt x="4512219" y="2458011"/>
+                    <a:pt x="4512219" y="2458012"/>
                   </a:lnTo>
                   <a:lnTo>
                     <a:pt x="4440596" y="2476446"/>
                   </a:lnTo>
                   <a:lnTo>
-                    <a:pt x="4368974" y="2494596"/>
+                    <a:pt x="4368974" y="2494597"/>
                   </a:lnTo>
                   <a:lnTo>
                     <a:pt x="4297351" y="2512467"/>
@@ -3484,10 +3484,10 @@
                     <a:pt x="3939238" y="2597765"/>
                   </a:lnTo>
                   <a:lnTo>
-                    <a:pt x="3867616" y="2614043"/>
-                  </a:lnTo>
-                  <a:lnTo>
-                    <a:pt x="3795993" y="2630070"/>
+                    <a:pt x="3867616" y="2614044"/>
+                  </a:lnTo>
+                  <a:lnTo>
+                    <a:pt x="3795993" y="2630071"/>
                   </a:lnTo>
                   <a:lnTo>
                     <a:pt x="3724371" y="2645850"/>
@@ -3673,23 +3673,23 @@
           <p:spPr>
             <a:xfrm>
               <a:off x="1172049" y="1896563"/>
-              <a:ext cx="4867684" cy="3204174"/>
+              <a:ext cx="4867684" cy="3204173"/>
             </a:xfrm>
             <a:custGeom>
               <a:avLst/>
               <a:pathLst>
-                <a:path w="4867684" h="3204174">
+                <a:path w="4867684" h="3204173">
                   <a:moveTo>
-                    <a:pt x="0" y="3204174"/>
+                    <a:pt x="0" y="3204173"/>
                   </a:moveTo>
                   <a:lnTo>
                     <a:pt x="71622" y="3197145"/>
                   </a:lnTo>
                   <a:lnTo>
-                    <a:pt x="143245" y="3190006"/>
-                  </a:lnTo>
-                  <a:lnTo>
-                    <a:pt x="214867" y="3182755"/>
+                    <a:pt x="143245" y="3190005"/>
+                  </a:lnTo>
+                  <a:lnTo>
+                    <a:pt x="214867" y="3182754"/>
                   </a:lnTo>
                   <a:lnTo>
                     <a:pt x="286490" y="3175390"/>
@@ -3707,7 +3707,7 @@
                     <a:pt x="572980" y="3144759"/>
                   </a:lnTo>
                   <a:lnTo>
-                    <a:pt x="644602" y="3136799"/>
+                    <a:pt x="644602" y="3136798"/>
                   </a:lnTo>
                   <a:lnTo>
                     <a:pt x="716225" y="3128714"/>
@@ -3866,7 +3866,7 @@
                     <a:pt x="4368974" y="1188984"/>
                   </a:lnTo>
                   <a:lnTo>
-                    <a:pt x="4440596" y="1045654"/>
+                    <a:pt x="4440596" y="1045655"/>
                   </a:lnTo>
                   <a:lnTo>
                     <a:pt x="4512219" y="893986"/>
@@ -3972,64 +3972,64 @@
                     <a:pt x="5729802" y="534961"/>
                   </a:lnTo>
                   <a:lnTo>
-                    <a:pt x="5658179" y="558975"/>
-                  </a:lnTo>
-                  <a:lnTo>
-                    <a:pt x="5586557" y="582618"/>
-                  </a:lnTo>
-                  <a:lnTo>
-                    <a:pt x="5514934" y="605896"/>
-                  </a:lnTo>
-                  <a:lnTo>
-                    <a:pt x="5443311" y="628815"/>
-                  </a:lnTo>
-                  <a:lnTo>
-                    <a:pt x="5371689" y="651380"/>
-                  </a:lnTo>
-                  <a:lnTo>
-                    <a:pt x="5300066" y="673597"/>
-                  </a:lnTo>
-                  <a:lnTo>
-                    <a:pt x="5228444" y="695471"/>
+                    <a:pt x="5658179" y="558974"/>
+                  </a:lnTo>
+                  <a:lnTo>
+                    <a:pt x="5586557" y="582617"/>
+                  </a:lnTo>
+                  <a:lnTo>
+                    <a:pt x="5514934" y="605895"/>
+                  </a:lnTo>
+                  <a:lnTo>
+                    <a:pt x="5443311" y="628814"/>
+                  </a:lnTo>
+                  <a:lnTo>
+                    <a:pt x="5371689" y="651379"/>
+                  </a:lnTo>
+                  <a:lnTo>
+                    <a:pt x="5300066" y="673596"/>
+                  </a:lnTo>
+                  <a:lnTo>
+                    <a:pt x="5228444" y="695470"/>
                   </a:lnTo>
                   <a:lnTo>
                     <a:pt x="5156821" y="717007"/>
                   </a:lnTo>
                   <a:lnTo>
-                    <a:pt x="5085199" y="738212"/>
-                  </a:lnTo>
-                  <a:lnTo>
-                    <a:pt x="5013576" y="759089"/>
-                  </a:lnTo>
-                  <a:lnTo>
-                    <a:pt x="4941954" y="779644"/>
+                    <a:pt x="5085199" y="738211"/>
+                  </a:lnTo>
+                  <a:lnTo>
+                    <a:pt x="5013576" y="759088"/>
+                  </a:lnTo>
+                  <a:lnTo>
+                    <a:pt x="4941954" y="779643"/>
                   </a:lnTo>
                   <a:lnTo>
                     <a:pt x="4870331" y="799881"/>
                   </a:lnTo>
                   <a:lnTo>
-                    <a:pt x="4798709" y="819807"/>
-                  </a:lnTo>
-                  <a:lnTo>
-                    <a:pt x="4727086" y="839425"/>
-                  </a:lnTo>
-                  <a:lnTo>
-                    <a:pt x="4655464" y="858740"/>
-                  </a:lnTo>
-                  <a:lnTo>
-                    <a:pt x="4583841" y="877757"/>
-                  </a:lnTo>
-                  <a:lnTo>
-                    <a:pt x="4512219" y="896481"/>
+                    <a:pt x="4798709" y="819806"/>
+                  </a:lnTo>
+                  <a:lnTo>
+                    <a:pt x="4727086" y="839424"/>
+                  </a:lnTo>
+                  <a:lnTo>
+                    <a:pt x="4655464" y="858739"/>
+                  </a:lnTo>
+                  <a:lnTo>
+                    <a:pt x="4583841" y="877756"/>
+                  </a:lnTo>
+                  <a:lnTo>
+                    <a:pt x="4512219" y="896480"/>
                   </a:lnTo>
                   <a:lnTo>
                     <a:pt x="4440596" y="914915"/>
                   </a:lnTo>
                   <a:lnTo>
-                    <a:pt x="4368974" y="933066"/>
-                  </a:lnTo>
-                  <a:lnTo>
-                    <a:pt x="4297351" y="950936"/>
+                    <a:pt x="4368974" y="933065"/>
+                  </a:lnTo>
+                  <a:lnTo>
+                    <a:pt x="4297351" y="950935"/>
                   </a:lnTo>
                   <a:lnTo>
                     <a:pt x="4225729" y="968530"/>
@@ -4038,19 +4038,19 @@
                     <a:pt x="4154106" y="985853"/>
                   </a:lnTo>
                   <a:lnTo>
-                    <a:pt x="4082483" y="1002909"/>
+                    <a:pt x="4082483" y="1002908"/>
                   </a:lnTo>
                   <a:lnTo>
                     <a:pt x="4010861" y="1019701"/>
                   </a:lnTo>
                   <a:lnTo>
-                    <a:pt x="3939238" y="1036235"/>
-                  </a:lnTo>
-                  <a:lnTo>
-                    <a:pt x="3867616" y="1052513"/>
-                  </a:lnTo>
-                  <a:lnTo>
-                    <a:pt x="3795993" y="1068540"/>
+                    <a:pt x="3939238" y="1036234"/>
+                  </a:lnTo>
+                  <a:lnTo>
+                    <a:pt x="3867616" y="1052512"/>
+                  </a:lnTo>
+                  <a:lnTo>
+                    <a:pt x="3795993" y="1068539"/>
                   </a:lnTo>
                   <a:lnTo>
                     <a:pt x="3724371" y="1084319"/>
@@ -4059,55 +4059,55 @@
                     <a:pt x="3652748" y="1099855"/>
                   </a:lnTo>
                   <a:lnTo>
-                    <a:pt x="3581126" y="1115152"/>
+                    <a:pt x="3581126" y="1115151"/>
                   </a:lnTo>
                   <a:lnTo>
                     <a:pt x="3509503" y="1130212"/>
                   </a:lnTo>
                   <a:lnTo>
-                    <a:pt x="3437881" y="1145040"/>
+                    <a:pt x="3437881" y="1145039"/>
                   </a:lnTo>
                   <a:lnTo>
                     <a:pt x="3366258" y="1159639"/>
                   </a:lnTo>
                   <a:lnTo>
-                    <a:pt x="3294636" y="1174013"/>
+                    <a:pt x="3294636" y="1174012"/>
                   </a:lnTo>
                   <a:lnTo>
                     <a:pt x="3223013" y="1188165"/>
                   </a:lnTo>
                   <a:lnTo>
-                    <a:pt x="3151391" y="1202099"/>
-                  </a:lnTo>
-                  <a:lnTo>
-                    <a:pt x="3079768" y="1215818"/>
-                  </a:lnTo>
-                  <a:lnTo>
-                    <a:pt x="3008146" y="1249780"/>
-                  </a:lnTo>
-                  <a:lnTo>
-                    <a:pt x="2936523" y="1296036"/>
-                  </a:lnTo>
-                  <a:lnTo>
-                    <a:pt x="2864901" y="1339749"/>
-                  </a:lnTo>
-                  <a:lnTo>
-                    <a:pt x="2793278" y="1381058"/>
-                  </a:lnTo>
-                  <a:lnTo>
-                    <a:pt x="2721655" y="1420096"/>
-                  </a:lnTo>
-                  <a:lnTo>
-                    <a:pt x="2650033" y="1456988"/>
+                    <a:pt x="3151391" y="1202098"/>
+                  </a:lnTo>
+                  <a:lnTo>
+                    <a:pt x="3079768" y="1215817"/>
+                  </a:lnTo>
+                  <a:lnTo>
+                    <a:pt x="3008146" y="1249779"/>
+                  </a:lnTo>
+                  <a:lnTo>
+                    <a:pt x="2936523" y="1296035"/>
+                  </a:lnTo>
+                  <a:lnTo>
+                    <a:pt x="2864901" y="1339748"/>
+                  </a:lnTo>
+                  <a:lnTo>
+                    <a:pt x="2793278" y="1381057"/>
+                  </a:lnTo>
+                  <a:lnTo>
+                    <a:pt x="2721655" y="1420095"/>
+                  </a:lnTo>
+                  <a:lnTo>
+                    <a:pt x="2650033" y="1456987"/>
                   </a:lnTo>
                   <a:lnTo>
                     <a:pt x="2578410" y="1491851"/>
                   </a:lnTo>
                   <a:lnTo>
-                    <a:pt x="2506788" y="1524798"/>
-                  </a:lnTo>
-                  <a:lnTo>
-                    <a:pt x="2435165" y="1555934"/>
+                    <a:pt x="2506788" y="1524797"/>
+                  </a:lnTo>
+                  <a:lnTo>
+                    <a:pt x="2435165" y="1555933"/>
                   </a:lnTo>
                   <a:lnTo>
                     <a:pt x="2363543" y="1585357"/>
@@ -4116,97 +4116,97 @@
                     <a:pt x="2291920" y="1613163"/>
                   </a:lnTo>
                   <a:lnTo>
-                    <a:pt x="2220298" y="1639441"/>
-                  </a:lnTo>
-                  <a:lnTo>
-                    <a:pt x="2148675" y="1664273"/>
-                  </a:lnTo>
-                  <a:lnTo>
-                    <a:pt x="2077053" y="1687740"/>
+                    <a:pt x="2220298" y="1639440"/>
+                  </a:lnTo>
+                  <a:lnTo>
+                    <a:pt x="2148675" y="1664272"/>
+                  </a:lnTo>
+                  <a:lnTo>
+                    <a:pt x="2077053" y="1687739"/>
                   </a:lnTo>
                   <a:lnTo>
                     <a:pt x="2005430" y="1709917"/>
                   </a:lnTo>
                   <a:lnTo>
-                    <a:pt x="1933808" y="1730875"/>
-                  </a:lnTo>
-                  <a:lnTo>
-                    <a:pt x="1862185" y="1750681"/>
-                  </a:lnTo>
-                  <a:lnTo>
-                    <a:pt x="1790563" y="1769397"/>
-                  </a:lnTo>
-                  <a:lnTo>
-                    <a:pt x="1718940" y="1787085"/>
-                  </a:lnTo>
-                  <a:lnTo>
-                    <a:pt x="1647318" y="1803800"/>
-                  </a:lnTo>
-                  <a:lnTo>
-                    <a:pt x="1575695" y="1819596"/>
-                  </a:lnTo>
-                  <a:lnTo>
-                    <a:pt x="1504073" y="1834524"/>
-                  </a:lnTo>
-                  <a:lnTo>
-                    <a:pt x="1432450" y="1848631"/>
+                    <a:pt x="1933808" y="1730874"/>
+                  </a:lnTo>
+                  <a:lnTo>
+                    <a:pt x="1862185" y="1750680"/>
+                  </a:lnTo>
+                  <a:lnTo>
+                    <a:pt x="1790563" y="1769396"/>
+                  </a:lnTo>
+                  <a:lnTo>
+                    <a:pt x="1718940" y="1787084"/>
+                  </a:lnTo>
+                  <a:lnTo>
+                    <a:pt x="1647318" y="1803799"/>
+                  </a:lnTo>
+                  <a:lnTo>
+                    <a:pt x="1575695" y="1819595"/>
+                  </a:lnTo>
+                  <a:lnTo>
+                    <a:pt x="1504073" y="1834523"/>
+                  </a:lnTo>
+                  <a:lnTo>
+                    <a:pt x="1432450" y="1848630"/>
                   </a:lnTo>
                   <a:lnTo>
                     <a:pt x="1360827" y="1861962"/>
                   </a:lnTo>
                   <a:lnTo>
-                    <a:pt x="1289205" y="1874561"/>
-                  </a:lnTo>
-                  <a:lnTo>
-                    <a:pt x="1217582" y="1886467"/>
-                  </a:lnTo>
-                  <a:lnTo>
-                    <a:pt x="1145960" y="1897718"/>
-                  </a:lnTo>
-                  <a:lnTo>
-                    <a:pt x="1074337" y="1908351"/>
-                  </a:lnTo>
-                  <a:lnTo>
-                    <a:pt x="1002715" y="1918399"/>
-                  </a:lnTo>
-                  <a:lnTo>
-                    <a:pt x="931092" y="1927894"/>
-                  </a:lnTo>
-                  <a:lnTo>
-                    <a:pt x="859470" y="1936868"/>
-                  </a:lnTo>
-                  <a:lnTo>
-                    <a:pt x="787847" y="1945348"/>
-                  </a:lnTo>
-                  <a:lnTo>
-                    <a:pt x="716225" y="1953362"/>
+                    <a:pt x="1289205" y="1874560"/>
+                  </a:lnTo>
+                  <a:lnTo>
+                    <a:pt x="1217582" y="1886466"/>
+                  </a:lnTo>
+                  <a:lnTo>
+                    <a:pt x="1145960" y="1897717"/>
+                  </a:lnTo>
+                  <a:lnTo>
+                    <a:pt x="1074337" y="1908350"/>
+                  </a:lnTo>
+                  <a:lnTo>
+                    <a:pt x="1002715" y="1918398"/>
+                  </a:lnTo>
+                  <a:lnTo>
+                    <a:pt x="931092" y="1927893"/>
+                  </a:lnTo>
+                  <a:lnTo>
+                    <a:pt x="859470" y="1936867"/>
+                  </a:lnTo>
+                  <a:lnTo>
+                    <a:pt x="787847" y="1945347"/>
+                  </a:lnTo>
+                  <a:lnTo>
+                    <a:pt x="716225" y="1953361"/>
                   </a:lnTo>
                   <a:lnTo>
                     <a:pt x="644602" y="1960935"/>
                   </a:lnTo>
                   <a:lnTo>
-                    <a:pt x="572980" y="1968093"/>
-                  </a:lnTo>
-                  <a:lnTo>
-                    <a:pt x="501357" y="1974856"/>
-                  </a:lnTo>
-                  <a:lnTo>
-                    <a:pt x="429735" y="1981248"/>
-                  </a:lnTo>
-                  <a:lnTo>
-                    <a:pt x="358112" y="1987288"/>
-                  </a:lnTo>
-                  <a:lnTo>
-                    <a:pt x="286490" y="1992996"/>
-                  </a:lnTo>
-                  <a:lnTo>
-                    <a:pt x="214867" y="1998391"/>
-                  </a:lnTo>
-                  <a:lnTo>
-                    <a:pt x="143245" y="2003488"/>
-                  </a:lnTo>
-                  <a:lnTo>
-                    <a:pt x="71622" y="2008306"/>
+                    <a:pt x="572980" y="1968092"/>
+                  </a:lnTo>
+                  <a:lnTo>
+                    <a:pt x="501357" y="1974855"/>
+                  </a:lnTo>
+                  <a:lnTo>
+                    <a:pt x="429735" y="1981247"/>
+                  </a:lnTo>
+                  <a:lnTo>
+                    <a:pt x="358112" y="1987287"/>
+                  </a:lnTo>
+                  <a:lnTo>
+                    <a:pt x="286490" y="1992995"/>
+                  </a:lnTo>
+                  <a:lnTo>
+                    <a:pt x="214867" y="1998390"/>
+                  </a:lnTo>
+                  <a:lnTo>
+                    <a:pt x="143245" y="2003487"/>
+                  </a:lnTo>
+                  <a:lnTo>
+                    <a:pt x="71622" y="2008305"/>
                   </a:lnTo>
                   <a:lnTo>
                     <a:pt x="0" y="2012858"/>
@@ -4297,7 +4297,7 @@
                     <a:pt x="1360827" y="3281031"/>
                   </a:lnTo>
                   <a:lnTo>
-                    <a:pt x="1432450" y="3267391"/>
+                    <a:pt x="1432450" y="3267390"/>
                   </a:lnTo>
                   <a:lnTo>
                     <a:pt x="1504073" y="3253249"/>
@@ -4441,10 +4441,10 @@
                     <a:pt x="4798709" y="1555679"/>
                   </a:lnTo>
                   <a:lnTo>
-                    <a:pt x="4870331" y="1478704"/>
-                  </a:lnTo>
-                  <a:lnTo>
-                    <a:pt x="4941954" y="1398904"/>
+                    <a:pt x="4870331" y="1478705"/>
+                  </a:lnTo>
+                  <a:lnTo>
+                    <a:pt x="4941954" y="1398905"/>
                   </a:lnTo>
                   <a:lnTo>
                     <a:pt x="5013576" y="1316175"/>
@@ -4453,19 +4453,19 @@
                     <a:pt x="5085199" y="1230409"/>
                   </a:lnTo>
                   <a:lnTo>
-                    <a:pt x="5156821" y="1141494"/>
-                  </a:lnTo>
-                  <a:lnTo>
-                    <a:pt x="5228444" y="1049316"/>
-                  </a:lnTo>
-                  <a:lnTo>
-                    <a:pt x="5300066" y="953754"/>
+                    <a:pt x="5156821" y="1141495"/>
+                  </a:lnTo>
+                  <a:lnTo>
+                    <a:pt x="5228444" y="1049317"/>
+                  </a:lnTo>
+                  <a:lnTo>
+                    <a:pt x="5300066" y="953755"/>
                   </a:lnTo>
                   <a:lnTo>
                     <a:pt x="5371689" y="854685"/>
                   </a:lnTo>
                   <a:lnTo>
-                    <a:pt x="5443311" y="751978"/>
+                    <a:pt x="5443311" y="751979"/>
                   </a:lnTo>
                   <a:lnTo>
                     <a:pt x="5514934" y="645502"/>
@@ -4477,13 +4477,13 @@
                     <a:pt x="5658179" y="420680"/>
                   </a:lnTo>
                   <a:lnTo>
-                    <a:pt x="5729802" y="302042"/>
+                    <a:pt x="5729802" y="302043"/>
                   </a:lnTo>
                   <a:lnTo>
                     <a:pt x="5801424" y="179050"/>
                   </a:lnTo>
                   <a:lnTo>
-                    <a:pt x="5873047" y="51542"/>
+                    <a:pt x="5873047" y="51543"/>
                   </a:lnTo>
                   <a:lnTo>
                     <a:pt x="5900974" y="0"/>

--- a/docs/plots/carbo/jx_carbo_linsubhr_dosedisc_sideeffect.pptx
+++ b/docs/plots/carbo/jx_carbo_linsubhr_dosedisc_sideeffect.pptx
@@ -2271,7 +2271,7 @@
           </p:nvSpPr>
           <p:spPr>
             <a:xfrm>
-              <a:off x="817517" y="5114368"/>
+              <a:off x="817517" y="5142518"/>
               <a:ext cx="7799693" cy="0"/>
             </a:xfrm>
             <a:custGeom>
@@ -2314,7 +2314,7 @@
           </p:nvSpPr>
           <p:spPr>
             <a:xfrm>
-              <a:off x="817517" y="4244691"/>
+              <a:off x="817517" y="4313054"/>
               <a:ext cx="7799693" cy="0"/>
             </a:xfrm>
             <a:custGeom>
@@ -2357,7 +2357,7 @@
           </p:nvSpPr>
           <p:spPr>
             <a:xfrm>
-              <a:off x="817517" y="3375014"/>
+              <a:off x="817517" y="3483591"/>
               <a:ext cx="7799693" cy="0"/>
             </a:xfrm>
             <a:custGeom>
@@ -2400,7 +2400,7 @@
           </p:nvSpPr>
           <p:spPr>
             <a:xfrm>
-              <a:off x="817517" y="2505337"/>
+              <a:off x="817517" y="2654127"/>
               <a:ext cx="7799693" cy="0"/>
             </a:xfrm>
             <a:custGeom>
@@ -2443,15 +2443,15 @@
           </p:nvSpPr>
           <p:spPr>
             <a:xfrm>
-              <a:off x="2122745" y="1896563"/>
-              <a:ext cx="0" cy="3826579"/>
+              <a:off x="2122745" y="2073503"/>
+              <a:ext cx="0" cy="3649639"/>
             </a:xfrm>
             <a:custGeom>
               <a:avLst/>
               <a:pathLst>
-                <a:path w="0" h="3826579">
+                <a:path w="0" h="3649639">
                   <a:moveTo>
-                    <a:pt x="0" y="3826579"/>
+                    <a:pt x="0" y="3649639"/>
                   </a:moveTo>
                   <a:lnTo>
                     <a:pt x="0" y="0"/>
@@ -2486,15 +2486,15 @@
           </p:nvSpPr>
           <p:spPr>
             <a:xfrm>
-              <a:off x="3487174" y="1896563"/>
-              <a:ext cx="0" cy="3826579"/>
+              <a:off x="3487174" y="2073503"/>
+              <a:ext cx="0" cy="3649639"/>
             </a:xfrm>
             <a:custGeom>
               <a:avLst/>
               <a:pathLst>
-                <a:path w="0" h="3826579">
+                <a:path w="0" h="3649639">
                   <a:moveTo>
-                    <a:pt x="0" y="3826579"/>
+                    <a:pt x="0" y="3649639"/>
                   </a:moveTo>
                   <a:lnTo>
                     <a:pt x="0" y="0"/>
@@ -2529,15 +2529,15 @@
           </p:nvSpPr>
           <p:spPr>
             <a:xfrm>
-              <a:off x="4851604" y="1896563"/>
-              <a:ext cx="0" cy="3826579"/>
+              <a:off x="4851604" y="2073503"/>
+              <a:ext cx="0" cy="3649639"/>
             </a:xfrm>
             <a:custGeom>
               <a:avLst/>
               <a:pathLst>
-                <a:path w="0" h="3826579">
+                <a:path w="0" h="3649639">
                   <a:moveTo>
-                    <a:pt x="0" y="3826579"/>
+                    <a:pt x="0" y="3649639"/>
                   </a:moveTo>
                   <a:lnTo>
                     <a:pt x="0" y="0"/>
@@ -2572,15 +2572,15 @@
           </p:nvSpPr>
           <p:spPr>
             <a:xfrm>
-              <a:off x="6216034" y="1896563"/>
-              <a:ext cx="0" cy="3826579"/>
+              <a:off x="6216034" y="2073503"/>
+              <a:ext cx="0" cy="3649639"/>
             </a:xfrm>
             <a:custGeom>
               <a:avLst/>
               <a:pathLst>
-                <a:path w="0" h="3826579">
+                <a:path w="0" h="3649639">
                   <a:moveTo>
-                    <a:pt x="0" y="3826579"/>
+                    <a:pt x="0" y="3649639"/>
                   </a:moveTo>
                   <a:lnTo>
                     <a:pt x="0" y="0"/>
@@ -2615,15 +2615,15 @@
           </p:nvSpPr>
           <p:spPr>
             <a:xfrm>
-              <a:off x="7580464" y="1896563"/>
-              <a:ext cx="0" cy="3826579"/>
+              <a:off x="7580464" y="2073503"/>
+              <a:ext cx="0" cy="3649639"/>
             </a:xfrm>
             <a:custGeom>
               <a:avLst/>
               <a:pathLst>
-                <a:path w="0" h="3826579">
+                <a:path w="0" h="3649639">
                   <a:moveTo>
-                    <a:pt x="0" y="3826579"/>
+                    <a:pt x="0" y="3649639"/>
                   </a:moveTo>
                   <a:lnTo>
                     <a:pt x="0" y="0"/>
@@ -2658,7 +2658,7 @@
           </p:nvSpPr>
           <p:spPr>
             <a:xfrm>
-              <a:off x="817517" y="5549207"/>
+              <a:off x="817517" y="5557249"/>
               <a:ext cx="7799693" cy="0"/>
             </a:xfrm>
             <a:custGeom>
@@ -2701,7 +2701,7 @@
           </p:nvSpPr>
           <p:spPr>
             <a:xfrm>
-              <a:off x="817517" y="4679530"/>
+              <a:off x="817517" y="4727786"/>
               <a:ext cx="7799693" cy="0"/>
             </a:xfrm>
             <a:custGeom>
@@ -2744,7 +2744,7 @@
           </p:nvSpPr>
           <p:spPr>
             <a:xfrm>
-              <a:off x="817517" y="3809853"/>
+              <a:off x="817517" y="3898322"/>
               <a:ext cx="7799693" cy="0"/>
             </a:xfrm>
             <a:custGeom>
@@ -2787,7 +2787,7 @@
           </p:nvSpPr>
           <p:spPr>
             <a:xfrm>
-              <a:off x="817517" y="2940175"/>
+              <a:off x="817517" y="3068859"/>
               <a:ext cx="7799693" cy="0"/>
             </a:xfrm>
             <a:custGeom>
@@ -2830,7 +2830,7 @@
           </p:nvSpPr>
           <p:spPr>
             <a:xfrm>
-              <a:off x="817517" y="2070498"/>
+              <a:off x="817517" y="2239395"/>
               <a:ext cx="7799693" cy="0"/>
             </a:xfrm>
             <a:custGeom>
@@ -2873,15 +2873,15 @@
           </p:nvSpPr>
           <p:spPr>
             <a:xfrm>
-              <a:off x="1440530" y="1896563"/>
-              <a:ext cx="0" cy="3826579"/>
+              <a:off x="1440530" y="2073503"/>
+              <a:ext cx="0" cy="3649639"/>
             </a:xfrm>
             <a:custGeom>
               <a:avLst/>
               <a:pathLst>
-                <a:path w="0" h="3826579">
+                <a:path w="0" h="3649639">
                   <a:moveTo>
-                    <a:pt x="0" y="3826579"/>
+                    <a:pt x="0" y="3649639"/>
                   </a:moveTo>
                   <a:lnTo>
                     <a:pt x="0" y="0"/>
@@ -2916,15 +2916,15 @@
           </p:nvSpPr>
           <p:spPr>
             <a:xfrm>
-              <a:off x="2804959" y="1896563"/>
-              <a:ext cx="0" cy="3826579"/>
+              <a:off x="2804959" y="2073503"/>
+              <a:ext cx="0" cy="3649639"/>
             </a:xfrm>
             <a:custGeom>
               <a:avLst/>
               <a:pathLst>
-                <a:path w="0" h="3826579">
+                <a:path w="0" h="3649639">
                   <a:moveTo>
-                    <a:pt x="0" y="3826579"/>
+                    <a:pt x="0" y="3649639"/>
                   </a:moveTo>
                   <a:lnTo>
                     <a:pt x="0" y="0"/>
@@ -2959,15 +2959,15 @@
           </p:nvSpPr>
           <p:spPr>
             <a:xfrm>
-              <a:off x="4169389" y="1896563"/>
-              <a:ext cx="0" cy="3826579"/>
+              <a:off x="4169389" y="2073503"/>
+              <a:ext cx="0" cy="3649639"/>
             </a:xfrm>
             <a:custGeom>
               <a:avLst/>
               <a:pathLst>
-                <a:path w="0" h="3826579">
+                <a:path w="0" h="3649639">
                   <a:moveTo>
-                    <a:pt x="0" y="3826579"/>
+                    <a:pt x="0" y="3649639"/>
                   </a:moveTo>
                   <a:lnTo>
                     <a:pt x="0" y="0"/>
@@ -3002,15 +3002,15 @@
           </p:nvSpPr>
           <p:spPr>
             <a:xfrm>
-              <a:off x="5533819" y="1896563"/>
-              <a:ext cx="0" cy="3826579"/>
+              <a:off x="5533819" y="2073503"/>
+              <a:ext cx="0" cy="3649639"/>
             </a:xfrm>
             <a:custGeom>
               <a:avLst/>
               <a:pathLst>
-                <a:path w="0" h="3826579">
+                <a:path w="0" h="3649639">
                   <a:moveTo>
-                    <a:pt x="0" y="3826579"/>
+                    <a:pt x="0" y="3649639"/>
                   </a:moveTo>
                   <a:lnTo>
                     <a:pt x="0" y="0"/>
@@ -3045,15 +3045,15 @@
           </p:nvSpPr>
           <p:spPr>
             <a:xfrm>
-              <a:off x="6898249" y="1896563"/>
-              <a:ext cx="0" cy="3826579"/>
+              <a:off x="6898249" y="2073503"/>
+              <a:ext cx="0" cy="3649639"/>
             </a:xfrm>
             <a:custGeom>
               <a:avLst/>
               <a:pathLst>
-                <a:path w="0" h="3826579">
+                <a:path w="0" h="3649639">
                   <a:moveTo>
-                    <a:pt x="0" y="3826579"/>
+                    <a:pt x="0" y="3649639"/>
                   </a:moveTo>
                   <a:lnTo>
                     <a:pt x="0" y="0"/>
@@ -3088,15 +3088,15 @@
           </p:nvSpPr>
           <p:spPr>
             <a:xfrm>
-              <a:off x="8262679" y="1896563"/>
-              <a:ext cx="0" cy="3826579"/>
+              <a:off x="8262679" y="2073503"/>
+              <a:ext cx="0" cy="3649639"/>
             </a:xfrm>
             <a:custGeom>
               <a:avLst/>
               <a:pathLst>
-                <a:path w="0" h="3826579">
+                <a:path w="0" h="3649639">
                   <a:moveTo>
-                    <a:pt x="0" y="3826579"/>
+                    <a:pt x="0" y="3649639"/>
                   </a:moveTo>
                   <a:lnTo>
                     <a:pt x="0" y="0"/>
@@ -3131,216 +3131,216 @@
           </p:nvSpPr>
           <p:spPr>
             <a:xfrm>
-              <a:off x="1172049" y="1896563"/>
-              <a:ext cx="7090630" cy="3574389"/>
+              <a:off x="1172049" y="2073503"/>
+              <a:ext cx="7090630" cy="3409111"/>
             </a:xfrm>
             <a:custGeom>
               <a:avLst/>
               <a:pathLst>
-                <a:path w="7090630" h="3574389">
+                <a:path w="7090630" h="3409111">
                   <a:moveTo>
-                    <a:pt x="0" y="3204173"/>
+                    <a:pt x="0" y="3056014"/>
                   </a:moveTo>
                   <a:lnTo>
-                    <a:pt x="71622" y="3197145"/>
-                  </a:lnTo>
-                  <a:lnTo>
-                    <a:pt x="143245" y="3190005"/>
-                  </a:lnTo>
-                  <a:lnTo>
-                    <a:pt x="214867" y="3182754"/>
-                  </a:lnTo>
-                  <a:lnTo>
-                    <a:pt x="286490" y="3175390"/>
-                  </a:lnTo>
-                  <a:lnTo>
-                    <a:pt x="358112" y="3167910"/>
-                  </a:lnTo>
-                  <a:lnTo>
-                    <a:pt x="429735" y="3160312"/>
-                  </a:lnTo>
-                  <a:lnTo>
-                    <a:pt x="501357" y="3152596"/>
-                  </a:lnTo>
-                  <a:lnTo>
-                    <a:pt x="572980" y="3144759"/>
-                  </a:lnTo>
-                  <a:lnTo>
-                    <a:pt x="644602" y="3136798"/>
-                  </a:lnTo>
-                  <a:lnTo>
-                    <a:pt x="716225" y="3128714"/>
-                  </a:lnTo>
-                  <a:lnTo>
-                    <a:pt x="787847" y="3120502"/>
-                  </a:lnTo>
-                  <a:lnTo>
-                    <a:pt x="859470" y="3112162"/>
-                  </a:lnTo>
-                  <a:lnTo>
-                    <a:pt x="931092" y="3103691"/>
-                  </a:lnTo>
-                  <a:lnTo>
-                    <a:pt x="1002715" y="3095087"/>
-                  </a:lnTo>
-                  <a:lnTo>
-                    <a:pt x="1074337" y="3086348"/>
-                  </a:lnTo>
-                  <a:lnTo>
-                    <a:pt x="1145960" y="3077472"/>
-                  </a:lnTo>
-                  <a:lnTo>
-                    <a:pt x="1217582" y="3068458"/>
-                  </a:lnTo>
-                  <a:lnTo>
-                    <a:pt x="1289205" y="3059302"/>
-                  </a:lnTo>
-                  <a:lnTo>
-                    <a:pt x="1360827" y="3050002"/>
-                  </a:lnTo>
-                  <a:lnTo>
-                    <a:pt x="1432450" y="3040557"/>
-                  </a:lnTo>
-                  <a:lnTo>
-                    <a:pt x="1504073" y="3030963"/>
-                  </a:lnTo>
-                  <a:lnTo>
-                    <a:pt x="1575695" y="3021220"/>
-                  </a:lnTo>
-                  <a:lnTo>
-                    <a:pt x="1647318" y="3011323"/>
-                  </a:lnTo>
-                  <a:lnTo>
-                    <a:pt x="1718940" y="3001272"/>
-                  </a:lnTo>
-                  <a:lnTo>
-                    <a:pt x="1790563" y="2991063"/>
-                  </a:lnTo>
-                  <a:lnTo>
-                    <a:pt x="1862185" y="2980694"/>
-                  </a:lnTo>
-                  <a:lnTo>
-                    <a:pt x="1933808" y="2970162"/>
-                  </a:lnTo>
-                  <a:lnTo>
-                    <a:pt x="2005430" y="2959465"/>
-                  </a:lnTo>
-                  <a:lnTo>
-                    <a:pt x="2077053" y="2948601"/>
-                  </a:lnTo>
-                  <a:lnTo>
-                    <a:pt x="2148675" y="2937567"/>
-                  </a:lnTo>
-                  <a:lnTo>
-                    <a:pt x="2220298" y="2926359"/>
-                  </a:lnTo>
-                  <a:lnTo>
-                    <a:pt x="2291920" y="2914976"/>
-                  </a:lnTo>
-                  <a:lnTo>
-                    <a:pt x="2363543" y="2903414"/>
-                  </a:lnTo>
-                  <a:lnTo>
-                    <a:pt x="2435165" y="2891671"/>
-                  </a:lnTo>
-                  <a:lnTo>
-                    <a:pt x="2506788" y="2879745"/>
-                  </a:lnTo>
-                  <a:lnTo>
-                    <a:pt x="2578410" y="2867631"/>
-                  </a:lnTo>
-                  <a:lnTo>
-                    <a:pt x="2650033" y="2855327"/>
-                  </a:lnTo>
-                  <a:lnTo>
-                    <a:pt x="2721655" y="2842831"/>
-                  </a:lnTo>
-                  <a:lnTo>
-                    <a:pt x="2793278" y="2830138"/>
-                  </a:lnTo>
-                  <a:lnTo>
-                    <a:pt x="2864901" y="2817247"/>
-                  </a:lnTo>
-                  <a:lnTo>
-                    <a:pt x="2936523" y="2804154"/>
-                  </a:lnTo>
-                  <a:lnTo>
-                    <a:pt x="3008146" y="2790855"/>
-                  </a:lnTo>
-                  <a:lnTo>
-                    <a:pt x="3079768" y="2762364"/>
-                  </a:lnTo>
-                  <a:lnTo>
-                    <a:pt x="3151391" y="2710570"/>
-                  </a:lnTo>
-                  <a:lnTo>
-                    <a:pt x="3223013" y="2655762"/>
-                  </a:lnTo>
-                  <a:lnTo>
-                    <a:pt x="3294636" y="2597766"/>
-                  </a:lnTo>
-                  <a:lnTo>
-                    <a:pt x="3366258" y="2536396"/>
-                  </a:lnTo>
-                  <a:lnTo>
-                    <a:pt x="3437881" y="2471455"/>
-                  </a:lnTo>
-                  <a:lnTo>
-                    <a:pt x="3509503" y="2402737"/>
-                  </a:lnTo>
-                  <a:lnTo>
-                    <a:pt x="3581126" y="2330020"/>
-                  </a:lnTo>
-                  <a:lnTo>
-                    <a:pt x="3652748" y="2253073"/>
-                  </a:lnTo>
-                  <a:lnTo>
-                    <a:pt x="3724371" y="2171649"/>
-                  </a:lnTo>
-                  <a:lnTo>
-                    <a:pt x="3795993" y="2085488"/>
-                  </a:lnTo>
-                  <a:lnTo>
-                    <a:pt x="3867616" y="1994315"/>
-                  </a:lnTo>
-                  <a:lnTo>
-                    <a:pt x="3939238" y="1897837"/>
-                  </a:lnTo>
-                  <a:lnTo>
-                    <a:pt x="4010861" y="1795747"/>
-                  </a:lnTo>
-                  <a:lnTo>
-                    <a:pt x="4082483" y="1687717"/>
-                  </a:lnTo>
-                  <a:lnTo>
-                    <a:pt x="4154106" y="1573402"/>
-                  </a:lnTo>
-                  <a:lnTo>
-                    <a:pt x="4225729" y="1452437"/>
-                  </a:lnTo>
-                  <a:lnTo>
-                    <a:pt x="4297351" y="1324434"/>
-                  </a:lnTo>
-                  <a:lnTo>
-                    <a:pt x="4368974" y="1188984"/>
-                  </a:lnTo>
-                  <a:lnTo>
-                    <a:pt x="4440596" y="1045655"/>
-                  </a:lnTo>
-                  <a:lnTo>
-                    <a:pt x="4512219" y="893986"/>
-                  </a:lnTo>
-                  <a:lnTo>
-                    <a:pt x="4583841" y="733494"/>
-                  </a:lnTo>
-                  <a:lnTo>
-                    <a:pt x="4655464" y="563665"/>
-                  </a:lnTo>
-                  <a:lnTo>
-                    <a:pt x="4727086" y="383955"/>
-                  </a:lnTo>
-                  <a:lnTo>
-                    <a:pt x="4798709" y="193791"/>
+                    <a:pt x="71622" y="3049310"/>
+                  </a:lnTo>
+                  <a:lnTo>
+                    <a:pt x="143245" y="3042501"/>
+                  </a:lnTo>
+                  <a:lnTo>
+                    <a:pt x="214867" y="3035585"/>
+                  </a:lnTo>
+                  <a:lnTo>
+                    <a:pt x="286490" y="3028561"/>
+                  </a:lnTo>
+                  <a:lnTo>
+                    <a:pt x="358112" y="3021427"/>
+                  </a:lnTo>
+                  <a:lnTo>
+                    <a:pt x="429735" y="3014181"/>
+                  </a:lnTo>
+                  <a:lnTo>
+                    <a:pt x="501357" y="3006821"/>
+                  </a:lnTo>
+                  <a:lnTo>
+                    <a:pt x="572980" y="2999346"/>
+                  </a:lnTo>
+                  <a:lnTo>
+                    <a:pt x="644602" y="2991754"/>
+                  </a:lnTo>
+                  <a:lnTo>
+                    <a:pt x="716225" y="2984043"/>
+                  </a:lnTo>
+                  <a:lnTo>
+                    <a:pt x="787847" y="2976211"/>
+                  </a:lnTo>
+                  <a:lnTo>
+                    <a:pt x="859470" y="2968256"/>
+                  </a:lnTo>
+                  <a:lnTo>
+                    <a:pt x="931092" y="2960177"/>
+                  </a:lnTo>
+                  <a:lnTo>
+                    <a:pt x="1002715" y="2951971"/>
+                  </a:lnTo>
+                  <a:lnTo>
+                    <a:pt x="1074337" y="2943636"/>
+                  </a:lnTo>
+                  <a:lnTo>
+                    <a:pt x="1145960" y="2935171"/>
+                  </a:lnTo>
+                  <a:lnTo>
+                    <a:pt x="1217582" y="2926573"/>
+                  </a:lnTo>
+                  <a:lnTo>
+                    <a:pt x="1289205" y="2917841"/>
+                  </a:lnTo>
+                  <a:lnTo>
+                    <a:pt x="1360827" y="2908971"/>
+                  </a:lnTo>
+                  <a:lnTo>
+                    <a:pt x="1432450" y="2899962"/>
+                  </a:lnTo>
+                  <a:lnTo>
+                    <a:pt x="1504073" y="2890813"/>
+                  </a:lnTo>
+                  <a:lnTo>
+                    <a:pt x="1575695" y="2881520"/>
+                  </a:lnTo>
+                  <a:lnTo>
+                    <a:pt x="1647318" y="2872081"/>
+                  </a:lnTo>
+                  <a:lnTo>
+                    <a:pt x="1718940" y="2862494"/>
+                  </a:lnTo>
+                  <a:lnTo>
+                    <a:pt x="1790563" y="2852757"/>
+                  </a:lnTo>
+                  <a:lnTo>
+                    <a:pt x="1862185" y="2842867"/>
+                  </a:lnTo>
+                  <a:lnTo>
+                    <a:pt x="1933808" y="2832823"/>
+                  </a:lnTo>
+                  <a:lnTo>
+                    <a:pt x="2005430" y="2822621"/>
+                  </a:lnTo>
+                  <a:lnTo>
+                    <a:pt x="2077053" y="2812259"/>
+                  </a:lnTo>
+                  <a:lnTo>
+                    <a:pt x="2148675" y="2801735"/>
+                  </a:lnTo>
+                  <a:lnTo>
+                    <a:pt x="2220298" y="2791045"/>
+                  </a:lnTo>
+                  <a:lnTo>
+                    <a:pt x="2291920" y="2780188"/>
+                  </a:lnTo>
+                  <a:lnTo>
+                    <a:pt x="2363543" y="2769161"/>
+                  </a:lnTo>
+                  <a:lnTo>
+                    <a:pt x="2435165" y="2757962"/>
+                  </a:lnTo>
+                  <a:lnTo>
+                    <a:pt x="2506788" y="2746586"/>
+                  </a:lnTo>
+                  <a:lnTo>
+                    <a:pt x="2578410" y="2735033"/>
+                  </a:lnTo>
+                  <a:lnTo>
+                    <a:pt x="2650033" y="2723298"/>
+                  </a:lnTo>
+                  <a:lnTo>
+                    <a:pt x="2721655" y="2711379"/>
+                  </a:lnTo>
+                  <a:lnTo>
+                    <a:pt x="2793278" y="2699274"/>
+                  </a:lnTo>
+                  <a:lnTo>
+                    <a:pt x="2864901" y="2686979"/>
+                  </a:lnTo>
+                  <a:lnTo>
+                    <a:pt x="2936523" y="2674491"/>
+                  </a:lnTo>
+                  <a:lnTo>
+                    <a:pt x="3008146" y="2661807"/>
+                  </a:lnTo>
+                  <a:lnTo>
+                    <a:pt x="3079768" y="2634634"/>
+                  </a:lnTo>
+                  <a:lnTo>
+                    <a:pt x="3151391" y="2585234"/>
+                  </a:lnTo>
+                  <a:lnTo>
+                    <a:pt x="3223013" y="2532961"/>
+                  </a:lnTo>
+                  <a:lnTo>
+                    <a:pt x="3294636" y="2477646"/>
+                  </a:lnTo>
+                  <a:lnTo>
+                    <a:pt x="3366258" y="2419114"/>
+                  </a:lnTo>
+                  <a:lnTo>
+                    <a:pt x="3437881" y="2357176"/>
+                  </a:lnTo>
+                  <a:lnTo>
+                    <a:pt x="3509503" y="2291635"/>
+                  </a:lnTo>
+                  <a:lnTo>
+                    <a:pt x="3581126" y="2222281"/>
+                  </a:lnTo>
+                  <a:lnTo>
+                    <a:pt x="3652748" y="2148892"/>
+                  </a:lnTo>
+                  <a:lnTo>
+                    <a:pt x="3724371" y="2071233"/>
+                  </a:lnTo>
+                  <a:lnTo>
+                    <a:pt x="3795993" y="1989056"/>
+                  </a:lnTo>
+                  <a:lnTo>
+                    <a:pt x="3867616" y="1902099"/>
+                  </a:lnTo>
+                  <a:lnTo>
+                    <a:pt x="3939238" y="1810082"/>
+                  </a:lnTo>
+                  <a:lnTo>
+                    <a:pt x="4010861" y="1712712"/>
+                  </a:lnTo>
+                  <a:lnTo>
+                    <a:pt x="4082483" y="1609678"/>
+                  </a:lnTo>
+                  <a:lnTo>
+                    <a:pt x="4154106" y="1500649"/>
+                  </a:lnTo>
+                  <a:lnTo>
+                    <a:pt x="4225729" y="1385277"/>
+                  </a:lnTo>
+                  <a:lnTo>
+                    <a:pt x="4297351" y="1263193"/>
+                  </a:lnTo>
+                  <a:lnTo>
+                    <a:pt x="4368974" y="1134006"/>
+                  </a:lnTo>
+                  <a:lnTo>
+                    <a:pt x="4440596" y="997304"/>
+                  </a:lnTo>
+                  <a:lnTo>
+                    <a:pt x="4512219" y="852649"/>
+                  </a:lnTo>
+                  <a:lnTo>
+                    <a:pt x="4583841" y="699577"/>
+                  </a:lnTo>
+                  <a:lnTo>
+                    <a:pt x="4655464" y="537601"/>
+                  </a:lnTo>
+                  <a:lnTo>
+                    <a:pt x="4727086" y="366201"/>
+                  </a:lnTo>
+                  <a:lnTo>
+                    <a:pt x="4798709" y="184830"/>
                   </a:lnTo>
                   <a:lnTo>
                     <a:pt x="4867684" y="0"/>
@@ -3349,304 +3349,304 @@
                     <a:pt x="7090630" y="0"/>
                   </a:lnTo>
                   <a:lnTo>
-                    <a:pt x="7090630" y="1561531"/>
-                  </a:lnTo>
-                  <a:lnTo>
-                    <a:pt x="7019007" y="1593800"/>
-                  </a:lnTo>
-                  <a:lnTo>
-                    <a:pt x="6947385" y="1625570"/>
-                  </a:lnTo>
-                  <a:lnTo>
-                    <a:pt x="6875762" y="1656851"/>
-                  </a:lnTo>
-                  <a:lnTo>
-                    <a:pt x="6804139" y="1687648"/>
-                  </a:lnTo>
-                  <a:lnTo>
-                    <a:pt x="6732517" y="1717971"/>
-                  </a:lnTo>
-                  <a:lnTo>
-                    <a:pt x="6660894" y="1747825"/>
-                  </a:lnTo>
-                  <a:lnTo>
-                    <a:pt x="6589272" y="1777219"/>
-                  </a:lnTo>
-                  <a:lnTo>
-                    <a:pt x="6517649" y="1806160"/>
-                  </a:lnTo>
-                  <a:lnTo>
-                    <a:pt x="6446027" y="1834653"/>
-                  </a:lnTo>
-                  <a:lnTo>
-                    <a:pt x="6374404" y="1862707"/>
-                  </a:lnTo>
-                  <a:lnTo>
-                    <a:pt x="6302782" y="1890328"/>
-                  </a:lnTo>
-                  <a:lnTo>
-                    <a:pt x="6231159" y="1917523"/>
-                  </a:lnTo>
-                  <a:lnTo>
-                    <a:pt x="6159537" y="1944298"/>
-                  </a:lnTo>
-                  <a:lnTo>
-                    <a:pt x="6087914" y="1970660"/>
-                  </a:lnTo>
-                  <a:lnTo>
-                    <a:pt x="6016292" y="1996615"/>
-                  </a:lnTo>
-                  <a:lnTo>
-                    <a:pt x="5944669" y="2022170"/>
-                  </a:lnTo>
-                  <a:lnTo>
-                    <a:pt x="5873047" y="2047330"/>
-                  </a:lnTo>
-                  <a:lnTo>
-                    <a:pt x="5801424" y="2072103"/>
-                  </a:lnTo>
-                  <a:lnTo>
-                    <a:pt x="5729802" y="2096492"/>
-                  </a:lnTo>
-                  <a:lnTo>
-                    <a:pt x="5658179" y="2120506"/>
-                  </a:lnTo>
-                  <a:lnTo>
-                    <a:pt x="5586557" y="2144149"/>
-                  </a:lnTo>
-                  <a:lnTo>
-                    <a:pt x="5514934" y="2167427"/>
-                  </a:lnTo>
-                  <a:lnTo>
-                    <a:pt x="5443311" y="2190346"/>
-                  </a:lnTo>
-                  <a:lnTo>
-                    <a:pt x="5371689" y="2212911"/>
-                  </a:lnTo>
-                  <a:lnTo>
-                    <a:pt x="5300066" y="2235128"/>
-                  </a:lnTo>
-                  <a:lnTo>
-                    <a:pt x="5228444" y="2257002"/>
-                  </a:lnTo>
-                  <a:lnTo>
-                    <a:pt x="5156821" y="2278538"/>
-                  </a:lnTo>
-                  <a:lnTo>
-                    <a:pt x="5085199" y="2299743"/>
-                  </a:lnTo>
-                  <a:lnTo>
-                    <a:pt x="5013576" y="2320620"/>
-                  </a:lnTo>
-                  <a:lnTo>
-                    <a:pt x="4941954" y="2341175"/>
-                  </a:lnTo>
-                  <a:lnTo>
-                    <a:pt x="4870331" y="2361412"/>
-                  </a:lnTo>
-                  <a:lnTo>
-                    <a:pt x="4798709" y="2381338"/>
-                  </a:lnTo>
-                  <a:lnTo>
-                    <a:pt x="4727086" y="2400956"/>
-                  </a:lnTo>
-                  <a:lnTo>
-                    <a:pt x="4655464" y="2420271"/>
-                  </a:lnTo>
-                  <a:lnTo>
-                    <a:pt x="4583841" y="2439288"/>
-                  </a:lnTo>
-                  <a:lnTo>
-                    <a:pt x="4512219" y="2458012"/>
-                  </a:lnTo>
-                  <a:lnTo>
-                    <a:pt x="4440596" y="2476446"/>
-                  </a:lnTo>
-                  <a:lnTo>
-                    <a:pt x="4368974" y="2494597"/>
-                  </a:lnTo>
-                  <a:lnTo>
-                    <a:pt x="4297351" y="2512467"/>
-                  </a:lnTo>
-                  <a:lnTo>
-                    <a:pt x="4225729" y="2530061"/>
-                  </a:lnTo>
-                  <a:lnTo>
-                    <a:pt x="4154106" y="2547384"/>
-                  </a:lnTo>
-                  <a:lnTo>
-                    <a:pt x="4082483" y="2564440"/>
-                  </a:lnTo>
-                  <a:lnTo>
-                    <a:pt x="4010861" y="2581232"/>
-                  </a:lnTo>
-                  <a:lnTo>
-                    <a:pt x="3939238" y="2597765"/>
-                  </a:lnTo>
-                  <a:lnTo>
-                    <a:pt x="3867616" y="2614044"/>
-                  </a:lnTo>
-                  <a:lnTo>
-                    <a:pt x="3795993" y="2630071"/>
-                  </a:lnTo>
-                  <a:lnTo>
-                    <a:pt x="3724371" y="2645850"/>
-                  </a:lnTo>
-                  <a:lnTo>
-                    <a:pt x="3652748" y="2661386"/>
-                  </a:lnTo>
-                  <a:lnTo>
-                    <a:pt x="3581126" y="2676683"/>
-                  </a:lnTo>
-                  <a:lnTo>
-                    <a:pt x="3509503" y="2691743"/>
-                  </a:lnTo>
-                  <a:lnTo>
-                    <a:pt x="3437881" y="2706571"/>
-                  </a:lnTo>
-                  <a:lnTo>
-                    <a:pt x="3366258" y="2721170"/>
-                  </a:lnTo>
-                  <a:lnTo>
-                    <a:pt x="3294636" y="2735544"/>
-                  </a:lnTo>
-                  <a:lnTo>
-                    <a:pt x="3223013" y="2749696"/>
-                  </a:lnTo>
-                  <a:lnTo>
-                    <a:pt x="3151391" y="2763630"/>
-                  </a:lnTo>
-                  <a:lnTo>
-                    <a:pt x="3079768" y="2777348"/>
-                  </a:lnTo>
-                  <a:lnTo>
-                    <a:pt x="3008146" y="2811311"/>
-                  </a:lnTo>
-                  <a:lnTo>
-                    <a:pt x="2936523" y="2857567"/>
-                  </a:lnTo>
-                  <a:lnTo>
-                    <a:pt x="2864901" y="2901279"/>
-                  </a:lnTo>
-                  <a:lnTo>
-                    <a:pt x="2793278" y="2942589"/>
-                  </a:lnTo>
-                  <a:lnTo>
-                    <a:pt x="2721655" y="2981627"/>
-                  </a:lnTo>
-                  <a:lnTo>
-                    <a:pt x="2650033" y="3018519"/>
-                  </a:lnTo>
-                  <a:lnTo>
-                    <a:pt x="2578410" y="3053382"/>
-                  </a:lnTo>
-                  <a:lnTo>
-                    <a:pt x="2506788" y="3086329"/>
-                  </a:lnTo>
-                  <a:lnTo>
-                    <a:pt x="2435165" y="3117464"/>
-                  </a:lnTo>
-                  <a:lnTo>
-                    <a:pt x="2363543" y="3146888"/>
-                  </a:lnTo>
-                  <a:lnTo>
-                    <a:pt x="2291920" y="3174694"/>
-                  </a:lnTo>
-                  <a:lnTo>
-                    <a:pt x="2220298" y="3200971"/>
-                  </a:lnTo>
-                  <a:lnTo>
-                    <a:pt x="2148675" y="3225804"/>
-                  </a:lnTo>
-                  <a:lnTo>
-                    <a:pt x="2077053" y="3249271"/>
-                  </a:lnTo>
-                  <a:lnTo>
-                    <a:pt x="2005430" y="3271448"/>
-                  </a:lnTo>
-                  <a:lnTo>
-                    <a:pt x="1933808" y="3292406"/>
-                  </a:lnTo>
-                  <a:lnTo>
-                    <a:pt x="1862185" y="3312211"/>
-                  </a:lnTo>
-                  <a:lnTo>
-                    <a:pt x="1790563" y="3330928"/>
-                  </a:lnTo>
-                  <a:lnTo>
-                    <a:pt x="1718940" y="3348616"/>
-                  </a:lnTo>
-                  <a:lnTo>
-                    <a:pt x="1647318" y="3365331"/>
-                  </a:lnTo>
-                  <a:lnTo>
-                    <a:pt x="1575695" y="3381127"/>
-                  </a:lnTo>
-                  <a:lnTo>
-                    <a:pt x="1504073" y="3396055"/>
-                  </a:lnTo>
-                  <a:lnTo>
-                    <a:pt x="1432450" y="3410162"/>
-                  </a:lnTo>
-                  <a:lnTo>
-                    <a:pt x="1360827" y="3423493"/>
-                  </a:lnTo>
-                  <a:lnTo>
-                    <a:pt x="1289205" y="3436092"/>
-                  </a:lnTo>
-                  <a:lnTo>
-                    <a:pt x="1217582" y="3447997"/>
-                  </a:lnTo>
-                  <a:lnTo>
-                    <a:pt x="1145960" y="3459249"/>
-                  </a:lnTo>
-                  <a:lnTo>
-                    <a:pt x="1074337" y="3469881"/>
-                  </a:lnTo>
-                  <a:lnTo>
-                    <a:pt x="1002715" y="3479929"/>
-                  </a:lnTo>
-                  <a:lnTo>
-                    <a:pt x="931092" y="3489425"/>
-                  </a:lnTo>
-                  <a:lnTo>
-                    <a:pt x="859470" y="3498399"/>
-                  </a:lnTo>
-                  <a:lnTo>
-                    <a:pt x="787847" y="3506879"/>
-                  </a:lnTo>
-                  <a:lnTo>
-                    <a:pt x="716225" y="3514893"/>
-                  </a:lnTo>
-                  <a:lnTo>
-                    <a:pt x="644602" y="3522466"/>
-                  </a:lnTo>
-                  <a:lnTo>
-                    <a:pt x="572980" y="3529623"/>
-                  </a:lnTo>
-                  <a:lnTo>
-                    <a:pt x="501357" y="3536387"/>
-                  </a:lnTo>
-                  <a:lnTo>
-                    <a:pt x="429735" y="3542778"/>
-                  </a:lnTo>
-                  <a:lnTo>
-                    <a:pt x="358112" y="3548819"/>
-                  </a:lnTo>
-                  <a:lnTo>
-                    <a:pt x="286490" y="3554527"/>
-                  </a:lnTo>
-                  <a:lnTo>
-                    <a:pt x="214867" y="3559921"/>
-                  </a:lnTo>
-                  <a:lnTo>
-                    <a:pt x="143245" y="3565019"/>
-                  </a:lnTo>
-                  <a:lnTo>
-                    <a:pt x="71622" y="3569837"/>
-                  </a:lnTo>
-                  <a:lnTo>
-                    <a:pt x="0" y="3574389"/>
+                    <a:pt x="7090630" y="1489326"/>
+                  </a:lnTo>
+                  <a:lnTo>
+                    <a:pt x="7019007" y="1520103"/>
+                  </a:lnTo>
+                  <a:lnTo>
+                    <a:pt x="6947385" y="1550405"/>
+                  </a:lnTo>
+                  <a:lnTo>
+                    <a:pt x="6875762" y="1580239"/>
+                  </a:lnTo>
+                  <a:lnTo>
+                    <a:pt x="6804139" y="1609612"/>
+                  </a:lnTo>
+                  <a:lnTo>
+                    <a:pt x="6732517" y="1638533"/>
+                  </a:lnTo>
+                  <a:lnTo>
+                    <a:pt x="6660894" y="1667007"/>
+                  </a:lnTo>
+                  <a:lnTo>
+                    <a:pt x="6589272" y="1695041"/>
+                  </a:lnTo>
+                  <a:lnTo>
+                    <a:pt x="6517649" y="1722643"/>
+                  </a:lnTo>
+                  <a:lnTo>
+                    <a:pt x="6446027" y="1749819"/>
+                  </a:lnTo>
+                  <a:lnTo>
+                    <a:pt x="6374404" y="1776576"/>
+                  </a:lnTo>
+                  <a:lnTo>
+                    <a:pt x="6302782" y="1802920"/>
+                  </a:lnTo>
+                  <a:lnTo>
+                    <a:pt x="6231159" y="1828857"/>
+                  </a:lnTo>
+                  <a:lnTo>
+                    <a:pt x="6159537" y="1854395"/>
+                  </a:lnTo>
+                  <a:lnTo>
+                    <a:pt x="6087914" y="1879538"/>
+                  </a:lnTo>
+                  <a:lnTo>
+                    <a:pt x="6016292" y="1904293"/>
+                  </a:lnTo>
+                  <a:lnTo>
+                    <a:pt x="5944669" y="1928666"/>
+                  </a:lnTo>
+                  <a:lnTo>
+                    <a:pt x="5873047" y="1952663"/>
+                  </a:lnTo>
+                  <a:lnTo>
+                    <a:pt x="5801424" y="1976289"/>
+                  </a:lnTo>
+                  <a:lnTo>
+                    <a:pt x="5729802" y="1999551"/>
+                  </a:lnTo>
+                  <a:lnTo>
+                    <a:pt x="5658179" y="2022454"/>
+                  </a:lnTo>
+                  <a:lnTo>
+                    <a:pt x="5586557" y="2045004"/>
+                  </a:lnTo>
+                  <a:lnTo>
+                    <a:pt x="5514934" y="2067206"/>
+                  </a:lnTo>
+                  <a:lnTo>
+                    <a:pt x="5443311" y="2089065"/>
+                  </a:lnTo>
+                  <a:lnTo>
+                    <a:pt x="5371689" y="2110587"/>
+                  </a:lnTo>
+                  <a:lnTo>
+                    <a:pt x="5300066" y="2131776"/>
+                  </a:lnTo>
+                  <a:lnTo>
+                    <a:pt x="5228444" y="2152639"/>
+                  </a:lnTo>
+                  <a:lnTo>
+                    <a:pt x="5156821" y="2173180"/>
+                  </a:lnTo>
+                  <a:lnTo>
+                    <a:pt x="5085199" y="2193403"/>
+                  </a:lnTo>
+                  <a:lnTo>
+                    <a:pt x="5013576" y="2213315"/>
+                  </a:lnTo>
+                  <a:lnTo>
+                    <a:pt x="4941954" y="2232920"/>
+                  </a:lnTo>
+                  <a:lnTo>
+                    <a:pt x="4870331" y="2252221"/>
+                  </a:lnTo>
+                  <a:lnTo>
+                    <a:pt x="4798709" y="2271226"/>
+                  </a:lnTo>
+                  <a:lnTo>
+                    <a:pt x="4727086" y="2289936"/>
+                  </a:lnTo>
+                  <a:lnTo>
+                    <a:pt x="4655464" y="2308358"/>
+                  </a:lnTo>
+                  <a:lnTo>
+                    <a:pt x="4583841" y="2326496"/>
+                  </a:lnTo>
+                  <a:lnTo>
+                    <a:pt x="4512219" y="2344354"/>
+                  </a:lnTo>
+                  <a:lnTo>
+                    <a:pt x="4440596" y="2361936"/>
+                  </a:lnTo>
+                  <a:lnTo>
+                    <a:pt x="4368974" y="2379247"/>
+                  </a:lnTo>
+                  <a:lnTo>
+                    <a:pt x="4297351" y="2396291"/>
+                  </a:lnTo>
+                  <a:lnTo>
+                    <a:pt x="4225729" y="2413072"/>
+                  </a:lnTo>
+                  <a:lnTo>
+                    <a:pt x="4154106" y="2429594"/>
+                  </a:lnTo>
+                  <a:lnTo>
+                    <a:pt x="4082483" y="2445861"/>
+                  </a:lnTo>
+                  <a:lnTo>
+                    <a:pt x="4010861" y="2461877"/>
+                  </a:lnTo>
+                  <a:lnTo>
+                    <a:pt x="3939238" y="2477646"/>
+                  </a:lnTo>
+                  <a:lnTo>
+                    <a:pt x="3867616" y="2493171"/>
+                  </a:lnTo>
+                  <a:lnTo>
+                    <a:pt x="3795993" y="2508457"/>
+                  </a:lnTo>
+                  <a:lnTo>
+                    <a:pt x="3724371" y="2523507"/>
+                  </a:lnTo>
+                  <a:lnTo>
+                    <a:pt x="3652748" y="2538325"/>
+                  </a:lnTo>
+                  <a:lnTo>
+                    <a:pt x="3581126" y="2552914"/>
+                  </a:lnTo>
+                  <a:lnTo>
+                    <a:pt x="3509503" y="2567278"/>
+                  </a:lnTo>
+                  <a:lnTo>
+                    <a:pt x="3437881" y="2581420"/>
+                  </a:lnTo>
+                  <a:lnTo>
+                    <a:pt x="3366258" y="2595344"/>
+                  </a:lnTo>
+                  <a:lnTo>
+                    <a:pt x="3294636" y="2609053"/>
+                  </a:lnTo>
+                  <a:lnTo>
+                    <a:pt x="3223013" y="2622551"/>
+                  </a:lnTo>
+                  <a:lnTo>
+                    <a:pt x="3151391" y="2635840"/>
+                  </a:lnTo>
+                  <a:lnTo>
+                    <a:pt x="3079768" y="2648925"/>
+                  </a:lnTo>
+                  <a:lnTo>
+                    <a:pt x="3008146" y="2681317"/>
+                  </a:lnTo>
+                  <a:lnTo>
+                    <a:pt x="2936523" y="2725434"/>
+                  </a:lnTo>
+                  <a:lnTo>
+                    <a:pt x="2864901" y="2767125"/>
+                  </a:lnTo>
+                  <a:lnTo>
+                    <a:pt x="2793278" y="2806524"/>
+                  </a:lnTo>
+                  <a:lnTo>
+                    <a:pt x="2721655" y="2843757"/>
+                  </a:lnTo>
+                  <a:lnTo>
+                    <a:pt x="2650033" y="2878943"/>
+                  </a:lnTo>
+                  <a:lnTo>
+                    <a:pt x="2578410" y="2912195"/>
+                  </a:lnTo>
+                  <a:lnTo>
+                    <a:pt x="2506788" y="2943618"/>
+                  </a:lnTo>
+                  <a:lnTo>
+                    <a:pt x="2435165" y="2973314"/>
+                  </a:lnTo>
+                  <a:lnTo>
+                    <a:pt x="2363543" y="3001377"/>
+                  </a:lnTo>
+                  <a:lnTo>
+                    <a:pt x="2291920" y="3027897"/>
+                  </a:lnTo>
+                  <a:lnTo>
+                    <a:pt x="2220298" y="3052960"/>
+                  </a:lnTo>
+                  <a:lnTo>
+                    <a:pt x="2148675" y="3076644"/>
+                  </a:lnTo>
+                  <a:lnTo>
+                    <a:pt x="2077053" y="3099026"/>
+                  </a:lnTo>
+                  <a:lnTo>
+                    <a:pt x="2005430" y="3120178"/>
+                  </a:lnTo>
+                  <a:lnTo>
+                    <a:pt x="1933808" y="3140166"/>
+                  </a:lnTo>
+                  <a:lnTo>
+                    <a:pt x="1862185" y="3159056"/>
+                  </a:lnTo>
+                  <a:lnTo>
+                    <a:pt x="1790563" y="3176907"/>
+                  </a:lnTo>
+                  <a:lnTo>
+                    <a:pt x="1718940" y="3193777"/>
+                  </a:lnTo>
+                  <a:lnTo>
+                    <a:pt x="1647318" y="3209719"/>
+                  </a:lnTo>
+                  <a:lnTo>
+                    <a:pt x="1575695" y="3224785"/>
+                  </a:lnTo>
+                  <a:lnTo>
+                    <a:pt x="1504073" y="3239022"/>
+                  </a:lnTo>
+                  <a:lnTo>
+                    <a:pt x="1432450" y="3252477"/>
+                  </a:lnTo>
+                  <a:lnTo>
+                    <a:pt x="1360827" y="3265192"/>
+                  </a:lnTo>
+                  <a:lnTo>
+                    <a:pt x="1289205" y="3277208"/>
+                  </a:lnTo>
+                  <a:lnTo>
+                    <a:pt x="1217582" y="3288563"/>
+                  </a:lnTo>
+                  <a:lnTo>
+                    <a:pt x="1145960" y="3299294"/>
+                  </a:lnTo>
+                  <a:lnTo>
+                    <a:pt x="1074337" y="3309435"/>
+                  </a:lnTo>
+                  <a:lnTo>
+                    <a:pt x="1002715" y="3319019"/>
+                  </a:lnTo>
+                  <a:lnTo>
+                    <a:pt x="931092" y="3328075"/>
+                  </a:lnTo>
+                  <a:lnTo>
+                    <a:pt x="859470" y="3336634"/>
+                  </a:lnTo>
+                  <a:lnTo>
+                    <a:pt x="787847" y="3344722"/>
+                  </a:lnTo>
+                  <a:lnTo>
+                    <a:pt x="716225" y="3352365"/>
+                  </a:lnTo>
+                  <a:lnTo>
+                    <a:pt x="644602" y="3359589"/>
+                  </a:lnTo>
+                  <a:lnTo>
+                    <a:pt x="572980" y="3366415"/>
+                  </a:lnTo>
+                  <a:lnTo>
+                    <a:pt x="501357" y="3372866"/>
+                  </a:lnTo>
+                  <a:lnTo>
+                    <a:pt x="429735" y="3378962"/>
+                  </a:lnTo>
+                  <a:lnTo>
+                    <a:pt x="358112" y="3384723"/>
+                  </a:lnTo>
+                  <a:lnTo>
+                    <a:pt x="286490" y="3390167"/>
+                  </a:lnTo>
+                  <a:lnTo>
+                    <a:pt x="214867" y="3395312"/>
+                  </a:lnTo>
+                  <a:lnTo>
+                    <a:pt x="143245" y="3400174"/>
+                  </a:lnTo>
+                  <a:lnTo>
+                    <a:pt x="71622" y="3404769"/>
+                  </a:lnTo>
+                  <a:lnTo>
+                    <a:pt x="0" y="3409111"/>
                   </a:lnTo>
                   <a:close/>
                 </a:path>
@@ -3672,216 +3672,216 @@
           </p:nvSpPr>
           <p:spPr>
             <a:xfrm>
-              <a:off x="1172049" y="1896563"/>
-              <a:ext cx="4867684" cy="3204173"/>
+              <a:off x="1172049" y="2073503"/>
+              <a:ext cx="4867684" cy="3056014"/>
             </a:xfrm>
             <a:custGeom>
               <a:avLst/>
               <a:pathLst>
-                <a:path w="4867684" h="3204173">
+                <a:path w="4867684" h="3056014">
                   <a:moveTo>
-                    <a:pt x="0" y="3204173"/>
+                    <a:pt x="0" y="3056014"/>
                   </a:moveTo>
                   <a:lnTo>
-                    <a:pt x="71622" y="3197145"/>
-                  </a:lnTo>
-                  <a:lnTo>
-                    <a:pt x="143245" y="3190005"/>
-                  </a:lnTo>
-                  <a:lnTo>
-                    <a:pt x="214867" y="3182754"/>
-                  </a:lnTo>
-                  <a:lnTo>
-                    <a:pt x="286490" y="3175390"/>
-                  </a:lnTo>
-                  <a:lnTo>
-                    <a:pt x="358112" y="3167910"/>
-                  </a:lnTo>
-                  <a:lnTo>
-                    <a:pt x="429735" y="3160312"/>
-                  </a:lnTo>
-                  <a:lnTo>
-                    <a:pt x="501357" y="3152596"/>
-                  </a:lnTo>
-                  <a:lnTo>
-                    <a:pt x="572980" y="3144759"/>
-                  </a:lnTo>
-                  <a:lnTo>
-                    <a:pt x="644602" y="3136798"/>
-                  </a:lnTo>
-                  <a:lnTo>
-                    <a:pt x="716225" y="3128714"/>
-                  </a:lnTo>
-                  <a:lnTo>
-                    <a:pt x="787847" y="3120502"/>
-                  </a:lnTo>
-                  <a:lnTo>
-                    <a:pt x="859470" y="3112162"/>
-                  </a:lnTo>
-                  <a:lnTo>
-                    <a:pt x="931092" y="3103691"/>
-                  </a:lnTo>
-                  <a:lnTo>
-                    <a:pt x="1002715" y="3095087"/>
-                  </a:lnTo>
-                  <a:lnTo>
-                    <a:pt x="1074337" y="3086348"/>
-                  </a:lnTo>
-                  <a:lnTo>
-                    <a:pt x="1145960" y="3077472"/>
-                  </a:lnTo>
-                  <a:lnTo>
-                    <a:pt x="1217582" y="3068458"/>
-                  </a:lnTo>
-                  <a:lnTo>
-                    <a:pt x="1289205" y="3059302"/>
-                  </a:lnTo>
-                  <a:lnTo>
-                    <a:pt x="1360827" y="3050002"/>
-                  </a:lnTo>
-                  <a:lnTo>
-                    <a:pt x="1432450" y="3040557"/>
-                  </a:lnTo>
-                  <a:lnTo>
-                    <a:pt x="1504073" y="3030963"/>
-                  </a:lnTo>
-                  <a:lnTo>
-                    <a:pt x="1575695" y="3021220"/>
-                  </a:lnTo>
-                  <a:lnTo>
-                    <a:pt x="1647318" y="3011323"/>
-                  </a:lnTo>
-                  <a:lnTo>
-                    <a:pt x="1718940" y="3001272"/>
-                  </a:lnTo>
-                  <a:lnTo>
-                    <a:pt x="1790563" y="2991063"/>
-                  </a:lnTo>
-                  <a:lnTo>
-                    <a:pt x="1862185" y="2980694"/>
-                  </a:lnTo>
-                  <a:lnTo>
-                    <a:pt x="1933808" y="2970162"/>
-                  </a:lnTo>
-                  <a:lnTo>
-                    <a:pt x="2005430" y="2959465"/>
-                  </a:lnTo>
-                  <a:lnTo>
-                    <a:pt x="2077053" y="2948601"/>
-                  </a:lnTo>
-                  <a:lnTo>
-                    <a:pt x="2148675" y="2937567"/>
-                  </a:lnTo>
-                  <a:lnTo>
-                    <a:pt x="2220298" y="2926359"/>
-                  </a:lnTo>
-                  <a:lnTo>
-                    <a:pt x="2291920" y="2914976"/>
-                  </a:lnTo>
-                  <a:lnTo>
-                    <a:pt x="2363543" y="2903414"/>
-                  </a:lnTo>
-                  <a:lnTo>
-                    <a:pt x="2435165" y="2891671"/>
-                  </a:lnTo>
-                  <a:lnTo>
-                    <a:pt x="2506788" y="2879745"/>
-                  </a:lnTo>
-                  <a:lnTo>
-                    <a:pt x="2578410" y="2867631"/>
-                  </a:lnTo>
-                  <a:lnTo>
-                    <a:pt x="2650033" y="2855327"/>
-                  </a:lnTo>
-                  <a:lnTo>
-                    <a:pt x="2721655" y="2842831"/>
-                  </a:lnTo>
-                  <a:lnTo>
-                    <a:pt x="2793278" y="2830138"/>
-                  </a:lnTo>
-                  <a:lnTo>
-                    <a:pt x="2864901" y="2817247"/>
-                  </a:lnTo>
-                  <a:lnTo>
-                    <a:pt x="2936523" y="2804154"/>
-                  </a:lnTo>
-                  <a:lnTo>
-                    <a:pt x="3008146" y="2790855"/>
-                  </a:lnTo>
-                  <a:lnTo>
-                    <a:pt x="3079768" y="2762364"/>
-                  </a:lnTo>
-                  <a:lnTo>
-                    <a:pt x="3151391" y="2710570"/>
-                  </a:lnTo>
-                  <a:lnTo>
-                    <a:pt x="3223013" y="2655762"/>
-                  </a:lnTo>
-                  <a:lnTo>
-                    <a:pt x="3294636" y="2597766"/>
-                  </a:lnTo>
-                  <a:lnTo>
-                    <a:pt x="3366258" y="2536396"/>
-                  </a:lnTo>
-                  <a:lnTo>
-                    <a:pt x="3437881" y="2471455"/>
-                  </a:lnTo>
-                  <a:lnTo>
-                    <a:pt x="3509503" y="2402737"/>
-                  </a:lnTo>
-                  <a:lnTo>
-                    <a:pt x="3581126" y="2330020"/>
-                  </a:lnTo>
-                  <a:lnTo>
-                    <a:pt x="3652748" y="2253073"/>
-                  </a:lnTo>
-                  <a:lnTo>
-                    <a:pt x="3724371" y="2171649"/>
-                  </a:lnTo>
-                  <a:lnTo>
-                    <a:pt x="3795993" y="2085488"/>
-                  </a:lnTo>
-                  <a:lnTo>
-                    <a:pt x="3867616" y="1994315"/>
-                  </a:lnTo>
-                  <a:lnTo>
-                    <a:pt x="3939238" y="1897837"/>
-                  </a:lnTo>
-                  <a:lnTo>
-                    <a:pt x="4010861" y="1795747"/>
-                  </a:lnTo>
-                  <a:lnTo>
-                    <a:pt x="4082483" y="1687717"/>
-                  </a:lnTo>
-                  <a:lnTo>
-                    <a:pt x="4154106" y="1573402"/>
-                  </a:lnTo>
-                  <a:lnTo>
-                    <a:pt x="4225729" y="1452437"/>
-                  </a:lnTo>
-                  <a:lnTo>
-                    <a:pt x="4297351" y="1324434"/>
-                  </a:lnTo>
-                  <a:lnTo>
-                    <a:pt x="4368974" y="1188984"/>
-                  </a:lnTo>
-                  <a:lnTo>
-                    <a:pt x="4440596" y="1045655"/>
-                  </a:lnTo>
-                  <a:lnTo>
-                    <a:pt x="4512219" y="893986"/>
-                  </a:lnTo>
-                  <a:lnTo>
-                    <a:pt x="4583841" y="733494"/>
-                  </a:lnTo>
-                  <a:lnTo>
-                    <a:pt x="4655464" y="563665"/>
-                  </a:lnTo>
-                  <a:lnTo>
-                    <a:pt x="4727086" y="383955"/>
-                  </a:lnTo>
-                  <a:lnTo>
-                    <a:pt x="4798709" y="193791"/>
+                    <a:pt x="71622" y="3049310"/>
+                  </a:lnTo>
+                  <a:lnTo>
+                    <a:pt x="143245" y="3042501"/>
+                  </a:lnTo>
+                  <a:lnTo>
+                    <a:pt x="214867" y="3035585"/>
+                  </a:lnTo>
+                  <a:lnTo>
+                    <a:pt x="286490" y="3028561"/>
+                  </a:lnTo>
+                  <a:lnTo>
+                    <a:pt x="358112" y="3021427"/>
+                  </a:lnTo>
+                  <a:lnTo>
+                    <a:pt x="429735" y="3014181"/>
+                  </a:lnTo>
+                  <a:lnTo>
+                    <a:pt x="501357" y="3006821"/>
+                  </a:lnTo>
+                  <a:lnTo>
+                    <a:pt x="572980" y="2999346"/>
+                  </a:lnTo>
+                  <a:lnTo>
+                    <a:pt x="644602" y="2991754"/>
+                  </a:lnTo>
+                  <a:lnTo>
+                    <a:pt x="716225" y="2984043"/>
+                  </a:lnTo>
+                  <a:lnTo>
+                    <a:pt x="787847" y="2976211"/>
+                  </a:lnTo>
+                  <a:lnTo>
+                    <a:pt x="859470" y="2968256"/>
+                  </a:lnTo>
+                  <a:lnTo>
+                    <a:pt x="931092" y="2960177"/>
+                  </a:lnTo>
+                  <a:lnTo>
+                    <a:pt x="1002715" y="2951971"/>
+                  </a:lnTo>
+                  <a:lnTo>
+                    <a:pt x="1074337" y="2943636"/>
+                  </a:lnTo>
+                  <a:lnTo>
+                    <a:pt x="1145960" y="2935171"/>
+                  </a:lnTo>
+                  <a:lnTo>
+                    <a:pt x="1217582" y="2926573"/>
+                  </a:lnTo>
+                  <a:lnTo>
+                    <a:pt x="1289205" y="2917841"/>
+                  </a:lnTo>
+                  <a:lnTo>
+                    <a:pt x="1360827" y="2908971"/>
+                  </a:lnTo>
+                  <a:lnTo>
+                    <a:pt x="1432450" y="2899962"/>
+                  </a:lnTo>
+                  <a:lnTo>
+                    <a:pt x="1504073" y="2890813"/>
+                  </a:lnTo>
+                  <a:lnTo>
+                    <a:pt x="1575695" y="2881520"/>
+                  </a:lnTo>
+                  <a:lnTo>
+                    <a:pt x="1647318" y="2872081"/>
+                  </a:lnTo>
+                  <a:lnTo>
+                    <a:pt x="1718940" y="2862494"/>
+                  </a:lnTo>
+                  <a:lnTo>
+                    <a:pt x="1790563" y="2852757"/>
+                  </a:lnTo>
+                  <a:lnTo>
+                    <a:pt x="1862185" y="2842867"/>
+                  </a:lnTo>
+                  <a:lnTo>
+                    <a:pt x="1933808" y="2832823"/>
+                  </a:lnTo>
+                  <a:lnTo>
+                    <a:pt x="2005430" y="2822621"/>
+                  </a:lnTo>
+                  <a:lnTo>
+                    <a:pt x="2077053" y="2812259"/>
+                  </a:lnTo>
+                  <a:lnTo>
+                    <a:pt x="2148675" y="2801735"/>
+                  </a:lnTo>
+                  <a:lnTo>
+                    <a:pt x="2220298" y="2791045"/>
+                  </a:lnTo>
+                  <a:lnTo>
+                    <a:pt x="2291920" y="2780188"/>
+                  </a:lnTo>
+                  <a:lnTo>
+                    <a:pt x="2363543" y="2769161"/>
+                  </a:lnTo>
+                  <a:lnTo>
+                    <a:pt x="2435165" y="2757962"/>
+                  </a:lnTo>
+                  <a:lnTo>
+                    <a:pt x="2506788" y="2746586"/>
+                  </a:lnTo>
+                  <a:lnTo>
+                    <a:pt x="2578410" y="2735033"/>
+                  </a:lnTo>
+                  <a:lnTo>
+                    <a:pt x="2650033" y="2723298"/>
+                  </a:lnTo>
+                  <a:lnTo>
+                    <a:pt x="2721655" y="2711379"/>
+                  </a:lnTo>
+                  <a:lnTo>
+                    <a:pt x="2793278" y="2699274"/>
+                  </a:lnTo>
+                  <a:lnTo>
+                    <a:pt x="2864901" y="2686979"/>
+                  </a:lnTo>
+                  <a:lnTo>
+                    <a:pt x="2936523" y="2674491"/>
+                  </a:lnTo>
+                  <a:lnTo>
+                    <a:pt x="3008146" y="2661807"/>
+                  </a:lnTo>
+                  <a:lnTo>
+                    <a:pt x="3079768" y="2634634"/>
+                  </a:lnTo>
+                  <a:lnTo>
+                    <a:pt x="3151391" y="2585234"/>
+                  </a:lnTo>
+                  <a:lnTo>
+                    <a:pt x="3223013" y="2532961"/>
+                  </a:lnTo>
+                  <a:lnTo>
+                    <a:pt x="3294636" y="2477646"/>
+                  </a:lnTo>
+                  <a:lnTo>
+                    <a:pt x="3366258" y="2419114"/>
+                  </a:lnTo>
+                  <a:lnTo>
+                    <a:pt x="3437881" y="2357176"/>
+                  </a:lnTo>
+                  <a:lnTo>
+                    <a:pt x="3509503" y="2291635"/>
+                  </a:lnTo>
+                  <a:lnTo>
+                    <a:pt x="3581126" y="2222281"/>
+                  </a:lnTo>
+                  <a:lnTo>
+                    <a:pt x="3652748" y="2148892"/>
+                  </a:lnTo>
+                  <a:lnTo>
+                    <a:pt x="3724371" y="2071233"/>
+                  </a:lnTo>
+                  <a:lnTo>
+                    <a:pt x="3795993" y="1989056"/>
+                  </a:lnTo>
+                  <a:lnTo>
+                    <a:pt x="3867616" y="1902099"/>
+                  </a:lnTo>
+                  <a:lnTo>
+                    <a:pt x="3939238" y="1810082"/>
+                  </a:lnTo>
+                  <a:lnTo>
+                    <a:pt x="4010861" y="1712712"/>
+                  </a:lnTo>
+                  <a:lnTo>
+                    <a:pt x="4082483" y="1609678"/>
+                  </a:lnTo>
+                  <a:lnTo>
+                    <a:pt x="4154106" y="1500649"/>
+                  </a:lnTo>
+                  <a:lnTo>
+                    <a:pt x="4225729" y="1385277"/>
+                  </a:lnTo>
+                  <a:lnTo>
+                    <a:pt x="4297351" y="1263193"/>
+                  </a:lnTo>
+                  <a:lnTo>
+                    <a:pt x="4368974" y="1134006"/>
+                  </a:lnTo>
+                  <a:lnTo>
+                    <a:pt x="4440596" y="997304"/>
+                  </a:lnTo>
+                  <a:lnTo>
+                    <a:pt x="4512219" y="852649"/>
+                  </a:lnTo>
+                  <a:lnTo>
+                    <a:pt x="4583841" y="699577"/>
+                  </a:lnTo>
+                  <a:lnTo>
+                    <a:pt x="4655464" y="537601"/>
+                  </a:lnTo>
+                  <a:lnTo>
+                    <a:pt x="4727086" y="366201"/>
+                  </a:lnTo>
+                  <a:lnTo>
+                    <a:pt x="4798709" y="184830"/>
                   </a:lnTo>
                   <a:lnTo>
                     <a:pt x="4867684" y="0"/>
@@ -3904,312 +3904,312 @@
           </p:nvSpPr>
           <p:spPr>
             <a:xfrm>
-              <a:off x="1172049" y="3458094"/>
-              <a:ext cx="7090630" cy="2012858"/>
+              <a:off x="1172049" y="3562829"/>
+              <a:ext cx="7090630" cy="1919784"/>
             </a:xfrm>
             <a:custGeom>
               <a:avLst/>
               <a:pathLst>
-                <a:path w="7090630" h="2012858">
+                <a:path w="7090630" h="1919784">
                   <a:moveTo>
                     <a:pt x="7090630" y="0"/>
                   </a:moveTo>
                   <a:lnTo>
-                    <a:pt x="7019007" y="32268"/>
-                  </a:lnTo>
-                  <a:lnTo>
-                    <a:pt x="6947385" y="64039"/>
-                  </a:lnTo>
-                  <a:lnTo>
-                    <a:pt x="6875762" y="95319"/>
-                  </a:lnTo>
-                  <a:lnTo>
-                    <a:pt x="6804139" y="126117"/>
-                  </a:lnTo>
-                  <a:lnTo>
-                    <a:pt x="6732517" y="156439"/>
-                  </a:lnTo>
-                  <a:lnTo>
-                    <a:pt x="6660894" y="186294"/>
-                  </a:lnTo>
-                  <a:lnTo>
-                    <a:pt x="6589272" y="215688"/>
-                  </a:lnTo>
-                  <a:lnTo>
-                    <a:pt x="6517649" y="244628"/>
-                  </a:lnTo>
-                  <a:lnTo>
-                    <a:pt x="6446027" y="273122"/>
-                  </a:lnTo>
-                  <a:lnTo>
-                    <a:pt x="6374404" y="301176"/>
-                  </a:lnTo>
-                  <a:lnTo>
-                    <a:pt x="6302782" y="328797"/>
-                  </a:lnTo>
-                  <a:lnTo>
-                    <a:pt x="6231159" y="355992"/>
-                  </a:lnTo>
-                  <a:lnTo>
-                    <a:pt x="6159537" y="382767"/>
-                  </a:lnTo>
-                  <a:lnTo>
-                    <a:pt x="6087914" y="409129"/>
-                  </a:lnTo>
-                  <a:lnTo>
-                    <a:pt x="6016292" y="435084"/>
-                  </a:lnTo>
-                  <a:lnTo>
-                    <a:pt x="5944669" y="460639"/>
-                  </a:lnTo>
-                  <a:lnTo>
-                    <a:pt x="5873047" y="485799"/>
-                  </a:lnTo>
-                  <a:lnTo>
-                    <a:pt x="5801424" y="510571"/>
-                  </a:lnTo>
-                  <a:lnTo>
-                    <a:pt x="5729802" y="534961"/>
-                  </a:lnTo>
-                  <a:lnTo>
-                    <a:pt x="5658179" y="558974"/>
-                  </a:lnTo>
-                  <a:lnTo>
-                    <a:pt x="5586557" y="582617"/>
-                  </a:lnTo>
-                  <a:lnTo>
-                    <a:pt x="5514934" y="605895"/>
-                  </a:lnTo>
-                  <a:lnTo>
-                    <a:pt x="5443311" y="628814"/>
-                  </a:lnTo>
-                  <a:lnTo>
-                    <a:pt x="5371689" y="651379"/>
-                  </a:lnTo>
-                  <a:lnTo>
-                    <a:pt x="5300066" y="673596"/>
-                  </a:lnTo>
-                  <a:lnTo>
-                    <a:pt x="5228444" y="695470"/>
-                  </a:lnTo>
-                  <a:lnTo>
-                    <a:pt x="5156821" y="717007"/>
-                  </a:lnTo>
-                  <a:lnTo>
-                    <a:pt x="5085199" y="738211"/>
-                  </a:lnTo>
-                  <a:lnTo>
-                    <a:pt x="5013576" y="759088"/>
-                  </a:lnTo>
-                  <a:lnTo>
-                    <a:pt x="4941954" y="779643"/>
-                  </a:lnTo>
-                  <a:lnTo>
-                    <a:pt x="4870331" y="799881"/>
-                  </a:lnTo>
-                  <a:lnTo>
-                    <a:pt x="4798709" y="819806"/>
-                  </a:lnTo>
-                  <a:lnTo>
-                    <a:pt x="4727086" y="839424"/>
-                  </a:lnTo>
-                  <a:lnTo>
-                    <a:pt x="4655464" y="858739"/>
-                  </a:lnTo>
-                  <a:lnTo>
-                    <a:pt x="4583841" y="877756"/>
-                  </a:lnTo>
-                  <a:lnTo>
-                    <a:pt x="4512219" y="896480"/>
-                  </a:lnTo>
-                  <a:lnTo>
-                    <a:pt x="4440596" y="914915"/>
-                  </a:lnTo>
-                  <a:lnTo>
-                    <a:pt x="4368974" y="933065"/>
-                  </a:lnTo>
-                  <a:lnTo>
-                    <a:pt x="4297351" y="950935"/>
-                  </a:lnTo>
-                  <a:lnTo>
-                    <a:pt x="4225729" y="968530"/>
-                  </a:lnTo>
-                  <a:lnTo>
-                    <a:pt x="4154106" y="985853"/>
-                  </a:lnTo>
-                  <a:lnTo>
-                    <a:pt x="4082483" y="1002908"/>
-                  </a:lnTo>
-                  <a:lnTo>
-                    <a:pt x="4010861" y="1019701"/>
-                  </a:lnTo>
-                  <a:lnTo>
-                    <a:pt x="3939238" y="1036234"/>
-                  </a:lnTo>
-                  <a:lnTo>
-                    <a:pt x="3867616" y="1052512"/>
-                  </a:lnTo>
-                  <a:lnTo>
-                    <a:pt x="3795993" y="1068539"/>
-                  </a:lnTo>
-                  <a:lnTo>
-                    <a:pt x="3724371" y="1084319"/>
-                  </a:lnTo>
-                  <a:lnTo>
-                    <a:pt x="3652748" y="1099855"/>
-                  </a:lnTo>
-                  <a:lnTo>
-                    <a:pt x="3581126" y="1115151"/>
-                  </a:lnTo>
-                  <a:lnTo>
-                    <a:pt x="3509503" y="1130212"/>
-                  </a:lnTo>
-                  <a:lnTo>
-                    <a:pt x="3437881" y="1145039"/>
-                  </a:lnTo>
-                  <a:lnTo>
-                    <a:pt x="3366258" y="1159639"/>
-                  </a:lnTo>
-                  <a:lnTo>
-                    <a:pt x="3294636" y="1174012"/>
-                  </a:lnTo>
-                  <a:lnTo>
-                    <a:pt x="3223013" y="1188165"/>
-                  </a:lnTo>
-                  <a:lnTo>
-                    <a:pt x="3151391" y="1202098"/>
-                  </a:lnTo>
-                  <a:lnTo>
-                    <a:pt x="3079768" y="1215817"/>
-                  </a:lnTo>
-                  <a:lnTo>
-                    <a:pt x="3008146" y="1249779"/>
-                  </a:lnTo>
-                  <a:lnTo>
-                    <a:pt x="2936523" y="1296035"/>
-                  </a:lnTo>
-                  <a:lnTo>
-                    <a:pt x="2864901" y="1339748"/>
-                  </a:lnTo>
-                  <a:lnTo>
-                    <a:pt x="2793278" y="1381057"/>
-                  </a:lnTo>
-                  <a:lnTo>
-                    <a:pt x="2721655" y="1420095"/>
-                  </a:lnTo>
-                  <a:lnTo>
-                    <a:pt x="2650033" y="1456987"/>
-                  </a:lnTo>
-                  <a:lnTo>
-                    <a:pt x="2578410" y="1491851"/>
-                  </a:lnTo>
-                  <a:lnTo>
-                    <a:pt x="2506788" y="1524797"/>
-                  </a:lnTo>
-                  <a:lnTo>
-                    <a:pt x="2435165" y="1555933"/>
-                  </a:lnTo>
-                  <a:lnTo>
-                    <a:pt x="2363543" y="1585357"/>
-                  </a:lnTo>
-                  <a:lnTo>
-                    <a:pt x="2291920" y="1613163"/>
-                  </a:lnTo>
-                  <a:lnTo>
-                    <a:pt x="2220298" y="1639440"/>
-                  </a:lnTo>
-                  <a:lnTo>
-                    <a:pt x="2148675" y="1664272"/>
-                  </a:lnTo>
-                  <a:lnTo>
-                    <a:pt x="2077053" y="1687739"/>
-                  </a:lnTo>
-                  <a:lnTo>
-                    <a:pt x="2005430" y="1709917"/>
-                  </a:lnTo>
-                  <a:lnTo>
-                    <a:pt x="1933808" y="1730874"/>
-                  </a:lnTo>
-                  <a:lnTo>
-                    <a:pt x="1862185" y="1750680"/>
-                  </a:lnTo>
-                  <a:lnTo>
-                    <a:pt x="1790563" y="1769396"/>
-                  </a:lnTo>
-                  <a:lnTo>
-                    <a:pt x="1718940" y="1787084"/>
-                  </a:lnTo>
-                  <a:lnTo>
-                    <a:pt x="1647318" y="1803799"/>
-                  </a:lnTo>
-                  <a:lnTo>
-                    <a:pt x="1575695" y="1819595"/>
-                  </a:lnTo>
-                  <a:lnTo>
-                    <a:pt x="1504073" y="1834523"/>
-                  </a:lnTo>
-                  <a:lnTo>
-                    <a:pt x="1432450" y="1848630"/>
-                  </a:lnTo>
-                  <a:lnTo>
-                    <a:pt x="1360827" y="1861962"/>
-                  </a:lnTo>
-                  <a:lnTo>
-                    <a:pt x="1289205" y="1874560"/>
-                  </a:lnTo>
-                  <a:lnTo>
-                    <a:pt x="1217582" y="1886466"/>
-                  </a:lnTo>
-                  <a:lnTo>
-                    <a:pt x="1145960" y="1897717"/>
-                  </a:lnTo>
-                  <a:lnTo>
-                    <a:pt x="1074337" y="1908350"/>
-                  </a:lnTo>
-                  <a:lnTo>
-                    <a:pt x="1002715" y="1918398"/>
-                  </a:lnTo>
-                  <a:lnTo>
-                    <a:pt x="931092" y="1927893"/>
-                  </a:lnTo>
-                  <a:lnTo>
-                    <a:pt x="859470" y="1936867"/>
-                  </a:lnTo>
-                  <a:lnTo>
-                    <a:pt x="787847" y="1945347"/>
-                  </a:lnTo>
-                  <a:lnTo>
-                    <a:pt x="716225" y="1953361"/>
-                  </a:lnTo>
-                  <a:lnTo>
-                    <a:pt x="644602" y="1960935"/>
-                  </a:lnTo>
-                  <a:lnTo>
-                    <a:pt x="572980" y="1968092"/>
-                  </a:lnTo>
-                  <a:lnTo>
-                    <a:pt x="501357" y="1974855"/>
-                  </a:lnTo>
-                  <a:lnTo>
-                    <a:pt x="429735" y="1981247"/>
-                  </a:lnTo>
-                  <a:lnTo>
-                    <a:pt x="358112" y="1987287"/>
-                  </a:lnTo>
-                  <a:lnTo>
-                    <a:pt x="286490" y="1992995"/>
-                  </a:lnTo>
-                  <a:lnTo>
-                    <a:pt x="214867" y="1998390"/>
-                  </a:lnTo>
-                  <a:lnTo>
-                    <a:pt x="143245" y="2003487"/>
-                  </a:lnTo>
-                  <a:lnTo>
-                    <a:pt x="71622" y="2008305"/>
-                  </a:lnTo>
-                  <a:lnTo>
-                    <a:pt x="0" y="2012858"/>
+                    <a:pt x="7019007" y="30776"/>
+                  </a:lnTo>
+                  <a:lnTo>
+                    <a:pt x="6947385" y="61078"/>
+                  </a:lnTo>
+                  <a:lnTo>
+                    <a:pt x="6875762" y="90912"/>
+                  </a:lnTo>
+                  <a:lnTo>
+                    <a:pt x="6804139" y="120285"/>
+                  </a:lnTo>
+                  <a:lnTo>
+                    <a:pt x="6732517" y="149206"/>
+                  </a:lnTo>
+                  <a:lnTo>
+                    <a:pt x="6660894" y="177680"/>
+                  </a:lnTo>
+                  <a:lnTo>
+                    <a:pt x="6589272" y="205714"/>
+                  </a:lnTo>
+                  <a:lnTo>
+                    <a:pt x="6517649" y="233316"/>
+                  </a:lnTo>
+                  <a:lnTo>
+                    <a:pt x="6446027" y="260493"/>
+                  </a:lnTo>
+                  <a:lnTo>
+                    <a:pt x="6374404" y="287249"/>
+                  </a:lnTo>
+                  <a:lnTo>
+                    <a:pt x="6302782" y="313593"/>
+                  </a:lnTo>
+                  <a:lnTo>
+                    <a:pt x="6231159" y="339531"/>
+                  </a:lnTo>
+                  <a:lnTo>
+                    <a:pt x="6159537" y="365068"/>
+                  </a:lnTo>
+                  <a:lnTo>
+                    <a:pt x="6087914" y="390211"/>
+                  </a:lnTo>
+                  <a:lnTo>
+                    <a:pt x="6016292" y="414966"/>
+                  </a:lnTo>
+                  <a:lnTo>
+                    <a:pt x="5944669" y="439339"/>
+                  </a:lnTo>
+                  <a:lnTo>
+                    <a:pt x="5873047" y="463336"/>
+                  </a:lnTo>
+                  <a:lnTo>
+                    <a:pt x="5801424" y="486962"/>
+                  </a:lnTo>
+                  <a:lnTo>
+                    <a:pt x="5729802" y="510224"/>
+                  </a:lnTo>
+                  <a:lnTo>
+                    <a:pt x="5658179" y="533128"/>
+                  </a:lnTo>
+                  <a:lnTo>
+                    <a:pt x="5586557" y="555677"/>
+                  </a:lnTo>
+                  <a:lnTo>
+                    <a:pt x="5514934" y="577879"/>
+                  </a:lnTo>
+                  <a:lnTo>
+                    <a:pt x="5443311" y="599738"/>
+                  </a:lnTo>
+                  <a:lnTo>
+                    <a:pt x="5371689" y="621260"/>
+                  </a:lnTo>
+                  <a:lnTo>
+                    <a:pt x="5300066" y="642449"/>
+                  </a:lnTo>
+                  <a:lnTo>
+                    <a:pt x="5228444" y="663312"/>
+                  </a:lnTo>
+                  <a:lnTo>
+                    <a:pt x="5156821" y="683853"/>
+                  </a:lnTo>
+                  <a:lnTo>
+                    <a:pt x="5085199" y="704077"/>
+                  </a:lnTo>
+                  <a:lnTo>
+                    <a:pt x="5013576" y="723988"/>
+                  </a:lnTo>
+                  <a:lnTo>
+                    <a:pt x="4941954" y="743593"/>
+                  </a:lnTo>
+                  <a:lnTo>
+                    <a:pt x="4870331" y="762895"/>
+                  </a:lnTo>
+                  <a:lnTo>
+                    <a:pt x="4798709" y="781899"/>
+                  </a:lnTo>
+                  <a:lnTo>
+                    <a:pt x="4727086" y="800609"/>
+                  </a:lnTo>
+                  <a:lnTo>
+                    <a:pt x="4655464" y="819031"/>
+                  </a:lnTo>
+                  <a:lnTo>
+                    <a:pt x="4583841" y="837169"/>
+                  </a:lnTo>
+                  <a:lnTo>
+                    <a:pt x="4512219" y="855027"/>
+                  </a:lnTo>
+                  <a:lnTo>
+                    <a:pt x="4440596" y="872609"/>
+                  </a:lnTo>
+                  <a:lnTo>
+                    <a:pt x="4368974" y="889920"/>
+                  </a:lnTo>
+                  <a:lnTo>
+                    <a:pt x="4297351" y="906964"/>
+                  </a:lnTo>
+                  <a:lnTo>
+                    <a:pt x="4225729" y="923745"/>
+                  </a:lnTo>
+                  <a:lnTo>
+                    <a:pt x="4154106" y="940267"/>
+                  </a:lnTo>
+                  <a:lnTo>
+                    <a:pt x="4082483" y="956534"/>
+                  </a:lnTo>
+                  <a:lnTo>
+                    <a:pt x="4010861" y="972550"/>
+                  </a:lnTo>
+                  <a:lnTo>
+                    <a:pt x="3939238" y="988319"/>
+                  </a:lnTo>
+                  <a:lnTo>
+                    <a:pt x="3867616" y="1003844"/>
+                  </a:lnTo>
+                  <a:lnTo>
+                    <a:pt x="3795993" y="1019130"/>
+                  </a:lnTo>
+                  <a:lnTo>
+                    <a:pt x="3724371" y="1034180"/>
+                  </a:lnTo>
+                  <a:lnTo>
+                    <a:pt x="3652748" y="1048998"/>
+                  </a:lnTo>
+                  <a:lnTo>
+                    <a:pt x="3581126" y="1063587"/>
+                  </a:lnTo>
+                  <a:lnTo>
+                    <a:pt x="3509503" y="1077951"/>
+                  </a:lnTo>
+                  <a:lnTo>
+                    <a:pt x="3437881" y="1092093"/>
+                  </a:lnTo>
+                  <a:lnTo>
+                    <a:pt x="3366258" y="1106017"/>
+                  </a:lnTo>
+                  <a:lnTo>
+                    <a:pt x="3294636" y="1119727"/>
+                  </a:lnTo>
+                  <a:lnTo>
+                    <a:pt x="3223013" y="1133224"/>
+                  </a:lnTo>
+                  <a:lnTo>
+                    <a:pt x="3151391" y="1146514"/>
+                  </a:lnTo>
+                  <a:lnTo>
+                    <a:pt x="3079768" y="1159598"/>
+                  </a:lnTo>
+                  <a:lnTo>
+                    <a:pt x="3008146" y="1191990"/>
+                  </a:lnTo>
+                  <a:lnTo>
+                    <a:pt x="2936523" y="1236107"/>
+                  </a:lnTo>
+                  <a:lnTo>
+                    <a:pt x="2864901" y="1277798"/>
+                  </a:lnTo>
+                  <a:lnTo>
+                    <a:pt x="2793278" y="1317197"/>
+                  </a:lnTo>
+                  <a:lnTo>
+                    <a:pt x="2721655" y="1354430"/>
+                  </a:lnTo>
+                  <a:lnTo>
+                    <a:pt x="2650033" y="1389617"/>
+                  </a:lnTo>
+                  <a:lnTo>
+                    <a:pt x="2578410" y="1422868"/>
+                  </a:lnTo>
+                  <a:lnTo>
+                    <a:pt x="2506788" y="1454291"/>
+                  </a:lnTo>
+                  <a:lnTo>
+                    <a:pt x="2435165" y="1483987"/>
+                  </a:lnTo>
+                  <a:lnTo>
+                    <a:pt x="2363543" y="1512050"/>
+                  </a:lnTo>
+                  <a:lnTo>
+                    <a:pt x="2291920" y="1538570"/>
+                  </a:lnTo>
+                  <a:lnTo>
+                    <a:pt x="2220298" y="1563633"/>
+                  </a:lnTo>
+                  <a:lnTo>
+                    <a:pt x="2148675" y="1587317"/>
+                  </a:lnTo>
+                  <a:lnTo>
+                    <a:pt x="2077053" y="1609699"/>
+                  </a:lnTo>
+                  <a:lnTo>
+                    <a:pt x="2005430" y="1630851"/>
+                  </a:lnTo>
+                  <a:lnTo>
+                    <a:pt x="1933808" y="1650839"/>
+                  </a:lnTo>
+                  <a:lnTo>
+                    <a:pt x="1862185" y="1669729"/>
+                  </a:lnTo>
+                  <a:lnTo>
+                    <a:pt x="1790563" y="1687580"/>
+                  </a:lnTo>
+                  <a:lnTo>
+                    <a:pt x="1718940" y="1704450"/>
+                  </a:lnTo>
+                  <a:lnTo>
+                    <a:pt x="1647318" y="1720392"/>
+                  </a:lnTo>
+                  <a:lnTo>
+                    <a:pt x="1575695" y="1735458"/>
+                  </a:lnTo>
+                  <a:lnTo>
+                    <a:pt x="1504073" y="1749695"/>
+                  </a:lnTo>
+                  <a:lnTo>
+                    <a:pt x="1432450" y="1763150"/>
+                  </a:lnTo>
+                  <a:lnTo>
+                    <a:pt x="1360827" y="1775865"/>
+                  </a:lnTo>
+                  <a:lnTo>
+                    <a:pt x="1289205" y="1787881"/>
+                  </a:lnTo>
+                  <a:lnTo>
+                    <a:pt x="1217582" y="1799236"/>
+                  </a:lnTo>
+                  <a:lnTo>
+                    <a:pt x="1145960" y="1809967"/>
+                  </a:lnTo>
+                  <a:lnTo>
+                    <a:pt x="1074337" y="1820108"/>
+                  </a:lnTo>
+                  <a:lnTo>
+                    <a:pt x="1002715" y="1829692"/>
+                  </a:lnTo>
+                  <a:lnTo>
+                    <a:pt x="931092" y="1838748"/>
+                  </a:lnTo>
+                  <a:lnTo>
+                    <a:pt x="859470" y="1847307"/>
+                  </a:lnTo>
+                  <a:lnTo>
+                    <a:pt x="787847" y="1855395"/>
+                  </a:lnTo>
+                  <a:lnTo>
+                    <a:pt x="716225" y="1863039"/>
+                  </a:lnTo>
+                  <a:lnTo>
+                    <a:pt x="644602" y="1870262"/>
+                  </a:lnTo>
+                  <a:lnTo>
+                    <a:pt x="572980" y="1877088"/>
+                  </a:lnTo>
+                  <a:lnTo>
+                    <a:pt x="501357" y="1883539"/>
+                  </a:lnTo>
+                  <a:lnTo>
+                    <a:pt x="429735" y="1889635"/>
+                  </a:lnTo>
+                  <a:lnTo>
+                    <a:pt x="358112" y="1895396"/>
+                  </a:lnTo>
+                  <a:lnTo>
+                    <a:pt x="286490" y="1900840"/>
+                  </a:lnTo>
+                  <a:lnTo>
+                    <a:pt x="214867" y="1905985"/>
+                  </a:lnTo>
+                  <a:lnTo>
+                    <a:pt x="143245" y="1910847"/>
+                  </a:lnTo>
+                  <a:lnTo>
+                    <a:pt x="71622" y="1915442"/>
+                  </a:lnTo>
+                  <a:lnTo>
+                    <a:pt x="0" y="1919784"/>
                   </a:lnTo>
                 </a:path>
               </a:pathLst>
@@ -4229,261 +4229,261 @@
           </p:nvSpPr>
           <p:spPr>
             <a:xfrm>
-              <a:off x="1172049" y="1896563"/>
-              <a:ext cx="5900974" cy="3465308"/>
+              <a:off x="1172049" y="2073503"/>
+              <a:ext cx="5900974" cy="3305073"/>
             </a:xfrm>
             <a:custGeom>
               <a:avLst/>
               <a:pathLst>
-                <a:path w="5900974" h="3465308">
+                <a:path w="5900974" h="3305073">
                   <a:moveTo>
-                    <a:pt x="0" y="3465308"/>
+                    <a:pt x="0" y="3305073"/>
                   </a:moveTo>
                   <a:lnTo>
-                    <a:pt x="71622" y="3458431"/>
-                  </a:lnTo>
-                  <a:lnTo>
-                    <a:pt x="143245" y="3451302"/>
-                  </a:lnTo>
-                  <a:lnTo>
-                    <a:pt x="214867" y="3443911"/>
-                  </a:lnTo>
-                  <a:lnTo>
-                    <a:pt x="286490" y="3436249"/>
-                  </a:lnTo>
-                  <a:lnTo>
-                    <a:pt x="358112" y="3428306"/>
-                  </a:lnTo>
-                  <a:lnTo>
-                    <a:pt x="429735" y="3420071"/>
-                  </a:lnTo>
-                  <a:lnTo>
-                    <a:pt x="501357" y="3411534"/>
-                  </a:lnTo>
-                  <a:lnTo>
-                    <a:pt x="572980" y="3402683"/>
-                  </a:lnTo>
-                  <a:lnTo>
-                    <a:pt x="644602" y="3393508"/>
-                  </a:lnTo>
-                  <a:lnTo>
-                    <a:pt x="716225" y="3383996"/>
-                  </a:lnTo>
-                  <a:lnTo>
-                    <a:pt x="787847" y="3374134"/>
-                  </a:lnTo>
-                  <a:lnTo>
-                    <a:pt x="859470" y="3363911"/>
-                  </a:lnTo>
-                  <a:lnTo>
-                    <a:pt x="931092" y="3353312"/>
-                  </a:lnTo>
-                  <a:lnTo>
-                    <a:pt x="1002715" y="3342324"/>
-                  </a:lnTo>
-                  <a:lnTo>
-                    <a:pt x="1074337" y="3330933"/>
-                  </a:lnTo>
-                  <a:lnTo>
-                    <a:pt x="1145960" y="3319124"/>
-                  </a:lnTo>
-                  <a:lnTo>
-                    <a:pt x="1217582" y="3306882"/>
-                  </a:lnTo>
-                  <a:lnTo>
-                    <a:pt x="1289205" y="3294189"/>
-                  </a:lnTo>
-                  <a:lnTo>
-                    <a:pt x="1360827" y="3281031"/>
-                  </a:lnTo>
-                  <a:lnTo>
-                    <a:pt x="1432450" y="3267390"/>
-                  </a:lnTo>
-                  <a:lnTo>
-                    <a:pt x="1504073" y="3253249"/>
-                  </a:lnTo>
-                  <a:lnTo>
-                    <a:pt x="1575695" y="3238588"/>
-                  </a:lnTo>
-                  <a:lnTo>
-                    <a:pt x="1647318" y="3223389"/>
-                  </a:lnTo>
-                  <a:lnTo>
-                    <a:pt x="1718940" y="3207632"/>
-                  </a:lnTo>
-                  <a:lnTo>
-                    <a:pt x="1790563" y="3191297"/>
-                  </a:lnTo>
-                  <a:lnTo>
-                    <a:pt x="1862185" y="3174362"/>
-                  </a:lnTo>
-                  <a:lnTo>
-                    <a:pt x="1933808" y="3156805"/>
-                  </a:lnTo>
-                  <a:lnTo>
-                    <a:pt x="2005430" y="3138604"/>
-                  </a:lnTo>
-                  <a:lnTo>
-                    <a:pt x="2077053" y="3119735"/>
-                  </a:lnTo>
-                  <a:lnTo>
-                    <a:pt x="2148675" y="3100173"/>
-                  </a:lnTo>
-                  <a:lnTo>
-                    <a:pt x="2220298" y="3079894"/>
-                  </a:lnTo>
-                  <a:lnTo>
-                    <a:pt x="2291920" y="3058869"/>
-                  </a:lnTo>
-                  <a:lnTo>
-                    <a:pt x="2363543" y="3037073"/>
-                  </a:lnTo>
-                  <a:lnTo>
-                    <a:pt x="2435165" y="3014477"/>
-                  </a:lnTo>
-                  <a:lnTo>
-                    <a:pt x="2506788" y="2991052"/>
-                  </a:lnTo>
-                  <a:lnTo>
-                    <a:pt x="2578410" y="2966766"/>
-                  </a:lnTo>
-                  <a:lnTo>
-                    <a:pt x="2650033" y="2941589"/>
-                  </a:lnTo>
-                  <a:lnTo>
-                    <a:pt x="2721655" y="2915488"/>
-                  </a:lnTo>
-                  <a:lnTo>
-                    <a:pt x="2793278" y="2888429"/>
-                  </a:lnTo>
-                  <a:lnTo>
-                    <a:pt x="2864901" y="2860377"/>
-                  </a:lnTo>
-                  <a:lnTo>
-                    <a:pt x="2936523" y="2831294"/>
-                  </a:lnTo>
-                  <a:lnTo>
-                    <a:pt x="3008146" y="2801145"/>
-                  </a:lnTo>
-                  <a:lnTo>
-                    <a:pt x="3079768" y="2769888"/>
-                  </a:lnTo>
-                  <a:lnTo>
-                    <a:pt x="3151391" y="2737484"/>
-                  </a:lnTo>
-                  <a:lnTo>
-                    <a:pt x="3223013" y="2703891"/>
-                  </a:lnTo>
-                  <a:lnTo>
-                    <a:pt x="3294636" y="2669065"/>
-                  </a:lnTo>
-                  <a:lnTo>
-                    <a:pt x="3366258" y="2632960"/>
-                  </a:lnTo>
-                  <a:lnTo>
-                    <a:pt x="3437881" y="2595530"/>
-                  </a:lnTo>
-                  <a:lnTo>
-                    <a:pt x="3509503" y="2556726"/>
-                  </a:lnTo>
-                  <a:lnTo>
-                    <a:pt x="3581126" y="2516497"/>
-                  </a:lnTo>
-                  <a:lnTo>
-                    <a:pt x="3652748" y="2474792"/>
-                  </a:lnTo>
-                  <a:lnTo>
-                    <a:pt x="3724371" y="2431556"/>
-                  </a:lnTo>
-                  <a:lnTo>
-                    <a:pt x="3795993" y="2386733"/>
-                  </a:lnTo>
-                  <a:lnTo>
-                    <a:pt x="3867616" y="2340264"/>
-                  </a:lnTo>
-                  <a:lnTo>
-                    <a:pt x="3939238" y="2292090"/>
-                  </a:lnTo>
-                  <a:lnTo>
-                    <a:pt x="4010861" y="2242147"/>
-                  </a:lnTo>
-                  <a:lnTo>
-                    <a:pt x="4082483" y="2190371"/>
-                  </a:lnTo>
-                  <a:lnTo>
-                    <a:pt x="4154106" y="2136695"/>
-                  </a:lnTo>
-                  <a:lnTo>
-                    <a:pt x="4225729" y="2081048"/>
-                  </a:lnTo>
-                  <a:lnTo>
-                    <a:pt x="4297351" y="2023358"/>
-                  </a:lnTo>
-                  <a:lnTo>
-                    <a:pt x="4368974" y="1963551"/>
-                  </a:lnTo>
-                  <a:lnTo>
-                    <a:pt x="4440596" y="1901549"/>
-                  </a:lnTo>
-                  <a:lnTo>
-                    <a:pt x="4512219" y="1837270"/>
-                  </a:lnTo>
-                  <a:lnTo>
-                    <a:pt x="4583841" y="1770632"/>
-                  </a:lnTo>
-                  <a:lnTo>
-                    <a:pt x="4655464" y="1701548"/>
-                  </a:lnTo>
-                  <a:lnTo>
-                    <a:pt x="4727086" y="1629928"/>
-                  </a:lnTo>
-                  <a:lnTo>
-                    <a:pt x="4798709" y="1555679"/>
-                  </a:lnTo>
-                  <a:lnTo>
-                    <a:pt x="4870331" y="1478705"/>
-                  </a:lnTo>
-                  <a:lnTo>
-                    <a:pt x="4941954" y="1398905"/>
-                  </a:lnTo>
-                  <a:lnTo>
-                    <a:pt x="5013576" y="1316175"/>
-                  </a:lnTo>
-                  <a:lnTo>
-                    <a:pt x="5085199" y="1230409"/>
-                  </a:lnTo>
-                  <a:lnTo>
-                    <a:pt x="5156821" y="1141495"/>
-                  </a:lnTo>
-                  <a:lnTo>
-                    <a:pt x="5228444" y="1049317"/>
-                  </a:lnTo>
-                  <a:lnTo>
-                    <a:pt x="5300066" y="953755"/>
-                  </a:lnTo>
-                  <a:lnTo>
-                    <a:pt x="5371689" y="854685"/>
-                  </a:lnTo>
-                  <a:lnTo>
-                    <a:pt x="5443311" y="751979"/>
-                  </a:lnTo>
-                  <a:lnTo>
-                    <a:pt x="5514934" y="645502"/>
-                  </a:lnTo>
-                  <a:lnTo>
-                    <a:pt x="5586557" y="535117"/>
-                  </a:lnTo>
-                  <a:lnTo>
-                    <a:pt x="5658179" y="420680"/>
-                  </a:lnTo>
-                  <a:lnTo>
-                    <a:pt x="5729802" y="302043"/>
-                  </a:lnTo>
-                  <a:lnTo>
-                    <a:pt x="5801424" y="179050"/>
-                  </a:lnTo>
-                  <a:lnTo>
-                    <a:pt x="5873047" y="51543"/>
+                    <a:pt x="71622" y="3298515"/>
+                  </a:lnTo>
+                  <a:lnTo>
+                    <a:pt x="143245" y="3291715"/>
+                  </a:lnTo>
+                  <a:lnTo>
+                    <a:pt x="214867" y="3284666"/>
+                  </a:lnTo>
+                  <a:lnTo>
+                    <a:pt x="286490" y="3277358"/>
+                  </a:lnTo>
+                  <a:lnTo>
+                    <a:pt x="358112" y="3269782"/>
+                  </a:lnTo>
+                  <a:lnTo>
+                    <a:pt x="429735" y="3261928"/>
+                  </a:lnTo>
+                  <a:lnTo>
+                    <a:pt x="501357" y="3253786"/>
+                  </a:lnTo>
+                  <a:lnTo>
+                    <a:pt x="572980" y="3245344"/>
+                  </a:lnTo>
+                  <a:lnTo>
+                    <a:pt x="644602" y="3236593"/>
+                  </a:lnTo>
+                  <a:lnTo>
+                    <a:pt x="716225" y="3227521"/>
+                  </a:lnTo>
+                  <a:lnTo>
+                    <a:pt x="787847" y="3218116"/>
+                  </a:lnTo>
+                  <a:lnTo>
+                    <a:pt x="859470" y="3208365"/>
+                  </a:lnTo>
+                  <a:lnTo>
+                    <a:pt x="931092" y="3198256"/>
+                  </a:lnTo>
+                  <a:lnTo>
+                    <a:pt x="1002715" y="3187777"/>
+                  </a:lnTo>
+                  <a:lnTo>
+                    <a:pt x="1074337" y="3176912"/>
+                  </a:lnTo>
+                  <a:lnTo>
+                    <a:pt x="1145960" y="3165649"/>
+                  </a:lnTo>
+                  <a:lnTo>
+                    <a:pt x="1217582" y="3153973"/>
+                  </a:lnTo>
+                  <a:lnTo>
+                    <a:pt x="1289205" y="3141867"/>
+                  </a:lnTo>
+                  <a:lnTo>
+                    <a:pt x="1360827" y="3129318"/>
+                  </a:lnTo>
+                  <a:lnTo>
+                    <a:pt x="1432450" y="3116308"/>
+                  </a:lnTo>
+                  <a:lnTo>
+                    <a:pt x="1504073" y="3102820"/>
+                  </a:lnTo>
+                  <a:lnTo>
+                    <a:pt x="1575695" y="3088837"/>
+                  </a:lnTo>
+                  <a:lnTo>
+                    <a:pt x="1647318" y="3074341"/>
+                  </a:lnTo>
+                  <a:lnTo>
+                    <a:pt x="1718940" y="3059312"/>
+                  </a:lnTo>
+                  <a:lnTo>
+                    <a:pt x="1790563" y="3043732"/>
+                  </a:lnTo>
+                  <a:lnTo>
+                    <a:pt x="1862185" y="3027581"/>
+                  </a:lnTo>
+                  <a:lnTo>
+                    <a:pt x="1933808" y="3010836"/>
+                  </a:lnTo>
+                  <a:lnTo>
+                    <a:pt x="2005430" y="2993476"/>
+                  </a:lnTo>
+                  <a:lnTo>
+                    <a:pt x="2077053" y="2975480"/>
+                  </a:lnTo>
+                  <a:lnTo>
+                    <a:pt x="2148675" y="2956822"/>
+                  </a:lnTo>
+                  <a:lnTo>
+                    <a:pt x="2220298" y="2937480"/>
+                  </a:lnTo>
+                  <a:lnTo>
+                    <a:pt x="2291920" y="2917428"/>
+                  </a:lnTo>
+                  <a:lnTo>
+                    <a:pt x="2363543" y="2896640"/>
+                  </a:lnTo>
+                  <a:lnTo>
+                    <a:pt x="2435165" y="2875089"/>
+                  </a:lnTo>
+                  <a:lnTo>
+                    <a:pt x="2506788" y="2852746"/>
+                  </a:lnTo>
+                  <a:lnTo>
+                    <a:pt x="2578410" y="2829584"/>
+                  </a:lnTo>
+                  <a:lnTo>
+                    <a:pt x="2650033" y="2805571"/>
+                  </a:lnTo>
+                  <a:lnTo>
+                    <a:pt x="2721655" y="2780677"/>
+                  </a:lnTo>
+                  <a:lnTo>
+                    <a:pt x="2793278" y="2754869"/>
+                  </a:lnTo>
+                  <a:lnTo>
+                    <a:pt x="2864901" y="2728114"/>
+                  </a:lnTo>
+                  <a:lnTo>
+                    <a:pt x="2936523" y="2700376"/>
+                  </a:lnTo>
+                  <a:lnTo>
+                    <a:pt x="3008146" y="2671621"/>
+                  </a:lnTo>
+                  <a:lnTo>
+                    <a:pt x="3079768" y="2641809"/>
+                  </a:lnTo>
+                  <a:lnTo>
+                    <a:pt x="3151391" y="2610904"/>
+                  </a:lnTo>
+                  <a:lnTo>
+                    <a:pt x="3223013" y="2578864"/>
+                  </a:lnTo>
+                  <a:lnTo>
+                    <a:pt x="3294636" y="2545648"/>
+                  </a:lnTo>
+                  <a:lnTo>
+                    <a:pt x="3366258" y="2511213"/>
+                  </a:lnTo>
+                  <a:lnTo>
+                    <a:pt x="3437881" y="2475513"/>
+                  </a:lnTo>
+                  <a:lnTo>
+                    <a:pt x="3509503" y="2438503"/>
+                  </a:lnTo>
+                  <a:lnTo>
+                    <a:pt x="3581126" y="2400135"/>
+                  </a:lnTo>
+                  <a:lnTo>
+                    <a:pt x="3652748" y="2360358"/>
+                  </a:lnTo>
+                  <a:lnTo>
+                    <a:pt x="3724371" y="2319121"/>
+                  </a:lnTo>
+                  <a:lnTo>
+                    <a:pt x="3795993" y="2276371"/>
+                  </a:lnTo>
+                  <a:lnTo>
+                    <a:pt x="3867616" y="2232051"/>
+                  </a:lnTo>
+                  <a:lnTo>
+                    <a:pt x="3939238" y="2186104"/>
+                  </a:lnTo>
+                  <a:lnTo>
+                    <a:pt x="4010861" y="2138471"/>
+                  </a:lnTo>
+                  <a:lnTo>
+                    <a:pt x="4082483" y="2089089"/>
+                  </a:lnTo>
+                  <a:lnTo>
+                    <a:pt x="4154106" y="2037895"/>
+                  </a:lnTo>
+                  <a:lnTo>
+                    <a:pt x="4225729" y="1984821"/>
+                  </a:lnTo>
+                  <a:lnTo>
+                    <a:pt x="4297351" y="1929799"/>
+                  </a:lnTo>
+                  <a:lnTo>
+                    <a:pt x="4368974" y="1872757"/>
+                  </a:lnTo>
+                  <a:lnTo>
+                    <a:pt x="4440596" y="1813622"/>
+                  </a:lnTo>
+                  <a:lnTo>
+                    <a:pt x="4512219" y="1752316"/>
+                  </a:lnTo>
+                  <a:lnTo>
+                    <a:pt x="4583841" y="1688759"/>
+                  </a:lnTo>
+                  <a:lnTo>
+                    <a:pt x="4655464" y="1622869"/>
+                  </a:lnTo>
+                  <a:lnTo>
+                    <a:pt x="4727086" y="1554561"/>
+                  </a:lnTo>
+                  <a:lnTo>
+                    <a:pt x="4798709" y="1483745"/>
+                  </a:lnTo>
+                  <a:lnTo>
+                    <a:pt x="4870331" y="1410330"/>
+                  </a:lnTo>
+                  <a:lnTo>
+                    <a:pt x="4941954" y="1334220"/>
+                  </a:lnTo>
+                  <a:lnTo>
+                    <a:pt x="5013576" y="1255316"/>
+                  </a:lnTo>
+                  <a:lnTo>
+                    <a:pt x="5085199" y="1173515"/>
+                  </a:lnTo>
+                  <a:lnTo>
+                    <a:pt x="5156821" y="1088712"/>
+                  </a:lnTo>
+                  <a:lnTo>
+                    <a:pt x="5228444" y="1000796"/>
+                  </a:lnTo>
+                  <a:lnTo>
+                    <a:pt x="5300066" y="909653"/>
+                  </a:lnTo>
+                  <a:lnTo>
+                    <a:pt x="5371689" y="815165"/>
+                  </a:lnTo>
+                  <a:lnTo>
+                    <a:pt x="5443311" y="717207"/>
+                  </a:lnTo>
+                  <a:lnTo>
+                    <a:pt x="5514934" y="615654"/>
+                  </a:lnTo>
+                  <a:lnTo>
+                    <a:pt x="5586557" y="510374"/>
+                  </a:lnTo>
+                  <a:lnTo>
+                    <a:pt x="5658179" y="401228"/>
+                  </a:lnTo>
+                  <a:lnTo>
+                    <a:pt x="5729802" y="288076"/>
+                  </a:lnTo>
+                  <a:lnTo>
+                    <a:pt x="5801424" y="170771"/>
+                  </a:lnTo>
+                  <a:lnTo>
+                    <a:pt x="5873047" y="49160"/>
                   </a:lnTo>
                   <a:lnTo>
                     <a:pt x="5900974" y="0"/>
@@ -4515,7 +4515,7 @@
           </p:nvSpPr>
           <p:spPr>
             <a:xfrm>
-              <a:off x="817517" y="4679530"/>
+              <a:off x="817517" y="4727786"/>
               <a:ext cx="7799693" cy="0"/>
             </a:xfrm>
             <a:custGeom>
@@ -4558,15 +4558,15 @@
           </p:nvSpPr>
           <p:spPr>
             <a:xfrm>
-              <a:off x="4222163" y="1896563"/>
-              <a:ext cx="0" cy="3826579"/>
+              <a:off x="4222163" y="2073503"/>
+              <a:ext cx="0" cy="3649639"/>
             </a:xfrm>
             <a:custGeom>
               <a:avLst/>
               <a:pathLst>
-                <a:path w="0" h="3826579">
+                <a:path w="0" h="3649639">
                   <a:moveTo>
-                    <a:pt x="0" y="3826579"/>
+                    <a:pt x="0" y="3649639"/>
                   </a:moveTo>
                   <a:lnTo>
                     <a:pt x="0" y="0"/>
@@ -4601,7 +4601,7 @@
           </p:nvSpPr>
           <p:spPr>
             <a:xfrm>
-              <a:off x="692708" y="5509156"/>
+              <a:off x="692708" y="5517199"/>
               <a:ext cx="62179" cy="80101"/>
             </a:xfrm>
             <a:prstGeom prst="rect">
@@ -4647,7 +4647,7 @@
           </p:nvSpPr>
           <p:spPr>
             <a:xfrm>
-              <a:off x="692708" y="4639479"/>
+              <a:off x="692708" y="4687735"/>
               <a:ext cx="62179" cy="80101"/>
             </a:xfrm>
             <a:prstGeom prst="rect">
@@ -4693,7 +4693,7 @@
           </p:nvSpPr>
           <p:spPr>
             <a:xfrm>
-              <a:off x="692708" y="3769802"/>
+              <a:off x="692708" y="3858272"/>
               <a:ext cx="62179" cy="80101"/>
             </a:xfrm>
             <a:prstGeom prst="rect">
@@ -4739,7 +4739,7 @@
           </p:nvSpPr>
           <p:spPr>
             <a:xfrm>
-              <a:off x="692708" y="2900125"/>
+              <a:off x="692708" y="3028808"/>
               <a:ext cx="62179" cy="80101"/>
             </a:xfrm>
             <a:prstGeom prst="rect">
@@ -4785,7 +4785,7 @@
           </p:nvSpPr>
           <p:spPr>
             <a:xfrm>
-              <a:off x="692708" y="2030448"/>
+              <a:off x="692708" y="2199345"/>
               <a:ext cx="62179" cy="80101"/>
             </a:xfrm>
             <a:prstGeom prst="rect">
@@ -5153,7 +5153,7 @@
           </p:nvSpPr>
           <p:spPr>
             <a:xfrm rot="-5400000">
-              <a:off x="68446" y="3759743"/>
+              <a:off x="68446" y="3848213"/>
               <a:ext cx="1016904" cy="100218"/>
             </a:xfrm>
             <a:prstGeom prst="rect">
@@ -5194,6 +5194,52 @@
         <p:sp>
           <p:nvSpPr>
             <p:cNvPr id="43" name="tx43"/>
+            <p:cNvSpPr/>
+            <p:nvPr/>
+          </p:nvSpPr>
+          <p:spPr>
+            <a:xfrm>
+              <a:off x="817517" y="1896563"/>
+              <a:ext cx="4500128" cy="82021"/>
+            </a:xfrm>
+            <a:prstGeom prst="rect">
+              <a:avLst/>
+            </a:prstGeom>
+            <a:noFill/>
+          </p:spPr>
+          <p:txBody>
+            <a:bodyPr lIns="0" rIns="0" tIns="0" bIns="0" anchorCtr="1" anchor="ctr" wrap="none"/>
+            <a:lstStyle/>
+            <a:p>
+              <a:pPr algn="l" marL="0" marR="0" indent="0">
+                <a:lnSpc>
+                  <a:spcPts val="900"/>
+                </a:lnSpc>
+                <a:spcBef>
+                  <a:spcPts val="0"/>
+                </a:spcBef>
+                <a:spcAft>
+                  <a:spcPts val="0"/>
+                </a:spcAft>
+              </a:pPr>
+              <a:r>
+                <a:rPr sz="900">
+                  <a:solidFill>
+                    <a:srgbClr val="404040">
+                      <a:alpha val="100000"/>
+                    </a:srgbClr>
+                  </a:solidFill>
+                  <a:latin typeface="Helvetica"/>
+                  <a:cs typeface="Helvetica"/>
+                </a:rPr>
+                <a:t>subHR = 1.41 (95% CI 1.16-1.71), p = &lt;0.001   (per 25 mg increase in dose discrepancy)</a:t>
+              </a:r>
+            </a:p>
+          </p:txBody>
+        </p:sp>
+        <p:sp>
+          <p:nvSpPr>
+            <p:cNvPr id="44" name="tx44"/>
             <p:cNvSpPr/>
             <p:nvPr/>
           </p:nvSpPr>

--- a/docs/plots/carbo/jx_carbo_linsubhr_dosedisc_sideeffect.pptx
+++ b/docs/plots/carbo/jx_carbo_linsubhr_dosedisc_sideeffect.pptx
@@ -2271,26 +2271,26 @@
           </p:nvSpPr>
           <p:spPr>
             <a:xfrm>
-              <a:off x="817517" y="5142518"/>
-              <a:ext cx="7799693" cy="0"/>
+              <a:off x="915645" y="5071743"/>
+              <a:ext cx="7682587" cy="0"/>
             </a:xfrm>
             <a:custGeom>
               <a:avLst/>
               <a:pathLst>
-                <a:path w="7799693" h="0">
+                <a:path w="7682587" h="0">
                   <a:moveTo>
                     <a:pt x="0" y="0"/>
                   </a:moveTo>
                   <a:lnTo>
-                    <a:pt x="7799693" y="0"/>
-                  </a:lnTo>
-                  <a:lnTo>
-                    <a:pt x="7799693" y="0"/>
+                    <a:pt x="7682587" y="0"/>
+                  </a:lnTo>
+                  <a:lnTo>
+                    <a:pt x="7682587" y="0"/>
                   </a:lnTo>
                 </a:path>
               </a:pathLst>
             </a:custGeom>
-            <a:ln w="6775" cap="flat">
+            <a:ln w="8623" cap="flat">
               <a:solidFill>
                 <a:srgbClr val="EBEBEB">
                   <a:alpha val="100000"/>
@@ -2314,26 +2314,26 @@
           </p:nvSpPr>
           <p:spPr>
             <a:xfrm>
-              <a:off x="817517" y="4313054"/>
-              <a:ext cx="7799693" cy="0"/>
+              <a:off x="915645" y="4298074"/>
+              <a:ext cx="7682587" cy="0"/>
             </a:xfrm>
             <a:custGeom>
               <a:avLst/>
               <a:pathLst>
-                <a:path w="7799693" h="0">
+                <a:path w="7682587" h="0">
                   <a:moveTo>
                     <a:pt x="0" y="0"/>
                   </a:moveTo>
                   <a:lnTo>
-                    <a:pt x="7799693" y="0"/>
-                  </a:lnTo>
-                  <a:lnTo>
-                    <a:pt x="7799693" y="0"/>
+                    <a:pt x="7682587" y="0"/>
+                  </a:lnTo>
+                  <a:lnTo>
+                    <a:pt x="7682587" y="0"/>
                   </a:lnTo>
                 </a:path>
               </a:pathLst>
             </a:custGeom>
-            <a:ln w="6775" cap="flat">
+            <a:ln w="8623" cap="flat">
               <a:solidFill>
                 <a:srgbClr val="EBEBEB">
                   <a:alpha val="100000"/>
@@ -2357,26 +2357,26 @@
           </p:nvSpPr>
           <p:spPr>
             <a:xfrm>
-              <a:off x="817517" y="3483591"/>
-              <a:ext cx="7799693" cy="0"/>
+              <a:off x="915645" y="3524405"/>
+              <a:ext cx="7682587" cy="0"/>
             </a:xfrm>
             <a:custGeom>
               <a:avLst/>
               <a:pathLst>
-                <a:path w="7799693" h="0">
+                <a:path w="7682587" h="0">
                   <a:moveTo>
                     <a:pt x="0" y="0"/>
                   </a:moveTo>
                   <a:lnTo>
-                    <a:pt x="7799693" y="0"/>
-                  </a:lnTo>
-                  <a:lnTo>
-                    <a:pt x="7799693" y="0"/>
+                    <a:pt x="7682587" y="0"/>
+                  </a:lnTo>
+                  <a:lnTo>
+                    <a:pt x="7682587" y="0"/>
                   </a:lnTo>
                 </a:path>
               </a:pathLst>
             </a:custGeom>
-            <a:ln w="6775" cap="flat">
+            <a:ln w="8623" cap="flat">
               <a:solidFill>
                 <a:srgbClr val="EBEBEB">
                   <a:alpha val="100000"/>
@@ -2400,26 +2400,26 @@
           </p:nvSpPr>
           <p:spPr>
             <a:xfrm>
-              <a:off x="817517" y="2654127"/>
-              <a:ext cx="7799693" cy="0"/>
+              <a:off x="915645" y="2750737"/>
+              <a:ext cx="7682587" cy="0"/>
             </a:xfrm>
             <a:custGeom>
               <a:avLst/>
               <a:pathLst>
-                <a:path w="7799693" h="0">
+                <a:path w="7682587" h="0">
                   <a:moveTo>
                     <a:pt x="0" y="0"/>
                   </a:moveTo>
                   <a:lnTo>
-                    <a:pt x="7799693" y="0"/>
-                  </a:lnTo>
-                  <a:lnTo>
-                    <a:pt x="7799693" y="0"/>
+                    <a:pt x="7682587" y="0"/>
+                  </a:lnTo>
+                  <a:lnTo>
+                    <a:pt x="7682587" y="0"/>
                   </a:lnTo>
                 </a:path>
               </a:pathLst>
             </a:custGeom>
-            <a:ln w="6775" cap="flat">
+            <a:ln w="8623" cap="flat">
               <a:solidFill>
                 <a:srgbClr val="EBEBEB">
                   <a:alpha val="100000"/>
@@ -2443,15 +2443,15 @@
           </p:nvSpPr>
           <p:spPr>
             <a:xfrm>
-              <a:off x="2122745" y="2073503"/>
-              <a:ext cx="0" cy="3649639"/>
+              <a:off x="2201275" y="2209169"/>
+              <a:ext cx="0" cy="3404141"/>
             </a:xfrm>
             <a:custGeom>
               <a:avLst/>
               <a:pathLst>
-                <a:path w="0" h="3649639">
+                <a:path w="0" h="3404141">
                   <a:moveTo>
-                    <a:pt x="0" y="3649639"/>
+                    <a:pt x="0" y="3404141"/>
                   </a:moveTo>
                   <a:lnTo>
                     <a:pt x="0" y="0"/>
@@ -2462,7 +2462,7 @@
                 </a:path>
               </a:pathLst>
             </a:custGeom>
-            <a:ln w="6775" cap="flat">
+            <a:ln w="8623" cap="flat">
               <a:solidFill>
                 <a:srgbClr val="EBEBEB">
                   <a:alpha val="100000"/>
@@ -2486,15 +2486,15 @@
           </p:nvSpPr>
           <p:spPr>
             <a:xfrm>
-              <a:off x="3487174" y="2073503"/>
-              <a:ext cx="0" cy="3649639"/>
+              <a:off x="3545219" y="2209169"/>
+              <a:ext cx="0" cy="3404141"/>
             </a:xfrm>
             <a:custGeom>
               <a:avLst/>
               <a:pathLst>
-                <a:path w="0" h="3649639">
+                <a:path w="0" h="3404141">
                   <a:moveTo>
-                    <a:pt x="0" y="3649639"/>
+                    <a:pt x="0" y="3404141"/>
                   </a:moveTo>
                   <a:lnTo>
                     <a:pt x="0" y="0"/>
@@ -2505,7 +2505,7 @@
                 </a:path>
               </a:pathLst>
             </a:custGeom>
-            <a:ln w="6775" cap="flat">
+            <a:ln w="8623" cap="flat">
               <a:solidFill>
                 <a:srgbClr val="EBEBEB">
                   <a:alpha val="100000"/>
@@ -2529,15 +2529,15 @@
           </p:nvSpPr>
           <p:spPr>
             <a:xfrm>
-              <a:off x="4851604" y="2073503"/>
-              <a:ext cx="0" cy="3649639"/>
+              <a:off x="4889163" y="2209169"/>
+              <a:ext cx="0" cy="3404141"/>
             </a:xfrm>
             <a:custGeom>
               <a:avLst/>
               <a:pathLst>
-                <a:path w="0" h="3649639">
+                <a:path w="0" h="3404141">
                   <a:moveTo>
-                    <a:pt x="0" y="3649639"/>
+                    <a:pt x="0" y="3404141"/>
                   </a:moveTo>
                   <a:lnTo>
                     <a:pt x="0" y="0"/>
@@ -2548,7 +2548,7 @@
                 </a:path>
               </a:pathLst>
             </a:custGeom>
-            <a:ln w="6775" cap="flat">
+            <a:ln w="8623" cap="flat">
               <a:solidFill>
                 <a:srgbClr val="EBEBEB">
                   <a:alpha val="100000"/>
@@ -2572,15 +2572,15 @@
           </p:nvSpPr>
           <p:spPr>
             <a:xfrm>
-              <a:off x="6216034" y="2073503"/>
-              <a:ext cx="0" cy="3649639"/>
+              <a:off x="6233107" y="2209169"/>
+              <a:ext cx="0" cy="3404141"/>
             </a:xfrm>
             <a:custGeom>
               <a:avLst/>
               <a:pathLst>
-                <a:path w="0" h="3649639">
+                <a:path w="0" h="3404141">
                   <a:moveTo>
-                    <a:pt x="0" y="3649639"/>
+                    <a:pt x="0" y="3404141"/>
                   </a:moveTo>
                   <a:lnTo>
                     <a:pt x="0" y="0"/>
@@ -2591,7 +2591,7 @@
                 </a:path>
               </a:pathLst>
             </a:custGeom>
-            <a:ln w="6775" cap="flat">
+            <a:ln w="8623" cap="flat">
               <a:solidFill>
                 <a:srgbClr val="EBEBEB">
                   <a:alpha val="100000"/>
@@ -2615,15 +2615,15 @@
           </p:nvSpPr>
           <p:spPr>
             <a:xfrm>
-              <a:off x="7580464" y="2073503"/>
-              <a:ext cx="0" cy="3649639"/>
+              <a:off x="7577051" y="2209169"/>
+              <a:ext cx="0" cy="3404141"/>
             </a:xfrm>
             <a:custGeom>
               <a:avLst/>
               <a:pathLst>
-                <a:path w="0" h="3649639">
+                <a:path w="0" h="3404141">
                   <a:moveTo>
-                    <a:pt x="0" y="3649639"/>
+                    <a:pt x="0" y="3404141"/>
                   </a:moveTo>
                   <a:lnTo>
                     <a:pt x="0" y="0"/>
@@ -2634,7 +2634,7 @@
                 </a:path>
               </a:pathLst>
             </a:custGeom>
-            <a:ln w="6775" cap="flat">
+            <a:ln w="8623" cap="flat">
               <a:solidFill>
                 <a:srgbClr val="EBEBEB">
                   <a:alpha val="100000"/>
@@ -2658,26 +2658,26 @@
           </p:nvSpPr>
           <p:spPr>
             <a:xfrm>
-              <a:off x="817517" y="5557249"/>
-              <a:ext cx="7799693" cy="0"/>
+              <a:off x="915645" y="5458577"/>
+              <a:ext cx="7682587" cy="0"/>
             </a:xfrm>
             <a:custGeom>
               <a:avLst/>
               <a:pathLst>
-                <a:path w="7799693" h="0">
+                <a:path w="7682587" h="0">
                   <a:moveTo>
                     <a:pt x="0" y="0"/>
                   </a:moveTo>
                   <a:lnTo>
-                    <a:pt x="7799693" y="0"/>
-                  </a:lnTo>
-                  <a:lnTo>
-                    <a:pt x="7799693" y="0"/>
+                    <a:pt x="7682587" y="0"/>
+                  </a:lnTo>
+                  <a:lnTo>
+                    <a:pt x="7682587" y="0"/>
                   </a:lnTo>
                 </a:path>
               </a:pathLst>
             </a:custGeom>
-            <a:ln w="13550" cap="flat">
+            <a:ln w="17246" cap="flat">
               <a:solidFill>
                 <a:srgbClr val="EBEBEB">
                   <a:alpha val="100000"/>
@@ -2701,26 +2701,26 @@
           </p:nvSpPr>
           <p:spPr>
             <a:xfrm>
-              <a:off x="817517" y="4727786"/>
-              <a:ext cx="7799693" cy="0"/>
+              <a:off x="915645" y="4684908"/>
+              <a:ext cx="7682587" cy="0"/>
             </a:xfrm>
             <a:custGeom>
               <a:avLst/>
               <a:pathLst>
-                <a:path w="7799693" h="0">
+                <a:path w="7682587" h="0">
                   <a:moveTo>
                     <a:pt x="0" y="0"/>
                   </a:moveTo>
                   <a:lnTo>
-                    <a:pt x="7799693" y="0"/>
-                  </a:lnTo>
-                  <a:lnTo>
-                    <a:pt x="7799693" y="0"/>
+                    <a:pt x="7682587" y="0"/>
+                  </a:lnTo>
+                  <a:lnTo>
+                    <a:pt x="7682587" y="0"/>
                   </a:lnTo>
                 </a:path>
               </a:pathLst>
             </a:custGeom>
-            <a:ln w="13550" cap="flat">
+            <a:ln w="17246" cap="flat">
               <a:solidFill>
                 <a:srgbClr val="EBEBEB">
                   <a:alpha val="100000"/>
@@ -2744,26 +2744,26 @@
           </p:nvSpPr>
           <p:spPr>
             <a:xfrm>
-              <a:off x="817517" y="3898322"/>
-              <a:ext cx="7799693" cy="0"/>
+              <a:off x="915645" y="3911240"/>
+              <a:ext cx="7682587" cy="0"/>
             </a:xfrm>
             <a:custGeom>
               <a:avLst/>
               <a:pathLst>
-                <a:path w="7799693" h="0">
+                <a:path w="7682587" h="0">
                   <a:moveTo>
                     <a:pt x="0" y="0"/>
                   </a:moveTo>
                   <a:lnTo>
-                    <a:pt x="7799693" y="0"/>
-                  </a:lnTo>
-                  <a:lnTo>
-                    <a:pt x="7799693" y="0"/>
+                    <a:pt x="7682587" y="0"/>
+                  </a:lnTo>
+                  <a:lnTo>
+                    <a:pt x="7682587" y="0"/>
                   </a:lnTo>
                 </a:path>
               </a:pathLst>
             </a:custGeom>
-            <a:ln w="13550" cap="flat">
+            <a:ln w="17246" cap="flat">
               <a:solidFill>
                 <a:srgbClr val="EBEBEB">
                   <a:alpha val="100000"/>
@@ -2787,26 +2787,26 @@
           </p:nvSpPr>
           <p:spPr>
             <a:xfrm>
-              <a:off x="817517" y="3068859"/>
-              <a:ext cx="7799693" cy="0"/>
+              <a:off x="915645" y="3137571"/>
+              <a:ext cx="7682587" cy="0"/>
             </a:xfrm>
             <a:custGeom>
               <a:avLst/>
               <a:pathLst>
-                <a:path w="7799693" h="0">
+                <a:path w="7682587" h="0">
                   <a:moveTo>
                     <a:pt x="0" y="0"/>
                   </a:moveTo>
                   <a:lnTo>
-                    <a:pt x="7799693" y="0"/>
-                  </a:lnTo>
-                  <a:lnTo>
-                    <a:pt x="7799693" y="0"/>
+                    <a:pt x="7682587" y="0"/>
+                  </a:lnTo>
+                  <a:lnTo>
+                    <a:pt x="7682587" y="0"/>
                   </a:lnTo>
                 </a:path>
               </a:pathLst>
             </a:custGeom>
-            <a:ln w="13550" cap="flat">
+            <a:ln w="17246" cap="flat">
               <a:solidFill>
                 <a:srgbClr val="EBEBEB">
                   <a:alpha val="100000"/>
@@ -2830,26 +2830,26 @@
           </p:nvSpPr>
           <p:spPr>
             <a:xfrm>
-              <a:off x="817517" y="2239395"/>
-              <a:ext cx="7799693" cy="0"/>
+              <a:off x="915645" y="2363903"/>
+              <a:ext cx="7682587" cy="0"/>
             </a:xfrm>
             <a:custGeom>
               <a:avLst/>
               <a:pathLst>
-                <a:path w="7799693" h="0">
+                <a:path w="7682587" h="0">
                   <a:moveTo>
                     <a:pt x="0" y="0"/>
                   </a:moveTo>
                   <a:lnTo>
-                    <a:pt x="7799693" y="0"/>
-                  </a:lnTo>
-                  <a:lnTo>
-                    <a:pt x="7799693" y="0"/>
+                    <a:pt x="7682587" y="0"/>
+                  </a:lnTo>
+                  <a:lnTo>
+                    <a:pt x="7682587" y="0"/>
                   </a:lnTo>
                 </a:path>
               </a:pathLst>
             </a:custGeom>
-            <a:ln w="13550" cap="flat">
+            <a:ln w="17246" cap="flat">
               <a:solidFill>
                 <a:srgbClr val="EBEBEB">
                   <a:alpha val="100000"/>
@@ -2873,15 +2873,15 @@
           </p:nvSpPr>
           <p:spPr>
             <a:xfrm>
-              <a:off x="1440530" y="2073503"/>
-              <a:ext cx="0" cy="3649639"/>
+              <a:off x="1529303" y="2209169"/>
+              <a:ext cx="0" cy="3404141"/>
             </a:xfrm>
             <a:custGeom>
               <a:avLst/>
               <a:pathLst>
-                <a:path w="0" h="3649639">
+                <a:path w="0" h="3404141">
                   <a:moveTo>
-                    <a:pt x="0" y="3649639"/>
+                    <a:pt x="0" y="3404141"/>
                   </a:moveTo>
                   <a:lnTo>
                     <a:pt x="0" y="0"/>
@@ -2892,7 +2892,7 @@
                 </a:path>
               </a:pathLst>
             </a:custGeom>
-            <a:ln w="13550" cap="flat">
+            <a:ln w="17246" cap="flat">
               <a:solidFill>
                 <a:srgbClr val="EBEBEB">
                   <a:alpha val="100000"/>
@@ -2916,15 +2916,15 @@
           </p:nvSpPr>
           <p:spPr>
             <a:xfrm>
-              <a:off x="2804959" y="2073503"/>
-              <a:ext cx="0" cy="3649639"/>
+              <a:off x="2873247" y="2209169"/>
+              <a:ext cx="0" cy="3404141"/>
             </a:xfrm>
             <a:custGeom>
               <a:avLst/>
               <a:pathLst>
-                <a:path w="0" h="3649639">
+                <a:path w="0" h="3404141">
                   <a:moveTo>
-                    <a:pt x="0" y="3649639"/>
+                    <a:pt x="0" y="3404141"/>
                   </a:moveTo>
                   <a:lnTo>
                     <a:pt x="0" y="0"/>
@@ -2935,7 +2935,7 @@
                 </a:path>
               </a:pathLst>
             </a:custGeom>
-            <a:ln w="13550" cap="flat">
+            <a:ln w="17246" cap="flat">
               <a:solidFill>
                 <a:srgbClr val="EBEBEB">
                   <a:alpha val="100000"/>
@@ -2959,15 +2959,15 @@
           </p:nvSpPr>
           <p:spPr>
             <a:xfrm>
-              <a:off x="4169389" y="2073503"/>
-              <a:ext cx="0" cy="3649639"/>
+              <a:off x="4217191" y="2209169"/>
+              <a:ext cx="0" cy="3404141"/>
             </a:xfrm>
             <a:custGeom>
               <a:avLst/>
               <a:pathLst>
-                <a:path w="0" h="3649639">
+                <a:path w="0" h="3404141">
                   <a:moveTo>
-                    <a:pt x="0" y="3649639"/>
+                    <a:pt x="0" y="3404141"/>
                   </a:moveTo>
                   <a:lnTo>
                     <a:pt x="0" y="0"/>
@@ -2978,7 +2978,7 @@
                 </a:path>
               </a:pathLst>
             </a:custGeom>
-            <a:ln w="13550" cap="flat">
+            <a:ln w="17246" cap="flat">
               <a:solidFill>
                 <a:srgbClr val="EBEBEB">
                   <a:alpha val="100000"/>
@@ -3002,15 +3002,15 @@
           </p:nvSpPr>
           <p:spPr>
             <a:xfrm>
-              <a:off x="5533819" y="2073503"/>
-              <a:ext cx="0" cy="3649639"/>
+              <a:off x="5561135" y="2209169"/>
+              <a:ext cx="0" cy="3404141"/>
             </a:xfrm>
             <a:custGeom>
               <a:avLst/>
               <a:pathLst>
-                <a:path w="0" h="3649639">
+                <a:path w="0" h="3404141">
                   <a:moveTo>
-                    <a:pt x="0" y="3649639"/>
+                    <a:pt x="0" y="3404141"/>
                   </a:moveTo>
                   <a:lnTo>
                     <a:pt x="0" y="0"/>
@@ -3021,7 +3021,7 @@
                 </a:path>
               </a:pathLst>
             </a:custGeom>
-            <a:ln w="13550" cap="flat">
+            <a:ln w="17246" cap="flat">
               <a:solidFill>
                 <a:srgbClr val="EBEBEB">
                   <a:alpha val="100000"/>
@@ -3045,15 +3045,15 @@
           </p:nvSpPr>
           <p:spPr>
             <a:xfrm>
-              <a:off x="6898249" y="2073503"/>
-              <a:ext cx="0" cy="3649639"/>
+              <a:off x="6905079" y="2209169"/>
+              <a:ext cx="0" cy="3404141"/>
             </a:xfrm>
             <a:custGeom>
               <a:avLst/>
               <a:pathLst>
-                <a:path w="0" h="3649639">
+                <a:path w="0" h="3404141">
                   <a:moveTo>
-                    <a:pt x="0" y="3649639"/>
+                    <a:pt x="0" y="3404141"/>
                   </a:moveTo>
                   <a:lnTo>
                     <a:pt x="0" y="0"/>
@@ -3064,7 +3064,7 @@
                 </a:path>
               </a:pathLst>
             </a:custGeom>
-            <a:ln w="13550" cap="flat">
+            <a:ln w="17246" cap="flat">
               <a:solidFill>
                 <a:srgbClr val="EBEBEB">
                   <a:alpha val="100000"/>
@@ -3088,15 +3088,15 @@
           </p:nvSpPr>
           <p:spPr>
             <a:xfrm>
-              <a:off x="8262679" y="2073503"/>
-              <a:ext cx="0" cy="3649639"/>
+              <a:off x="8249023" y="2209169"/>
+              <a:ext cx="0" cy="3404141"/>
             </a:xfrm>
             <a:custGeom>
               <a:avLst/>
               <a:pathLst>
-                <a:path w="0" h="3649639">
+                <a:path w="0" h="3404141">
                   <a:moveTo>
-                    <a:pt x="0" y="3649639"/>
+                    <a:pt x="0" y="3404141"/>
                   </a:moveTo>
                   <a:lnTo>
                     <a:pt x="0" y="0"/>
@@ -3107,7 +3107,7 @@
                 </a:path>
               </a:pathLst>
             </a:custGeom>
-            <a:ln w="13550" cap="flat">
+            <a:ln w="17246" cap="flat">
               <a:solidFill>
                 <a:srgbClr val="EBEBEB">
                   <a:alpha val="100000"/>
@@ -3131,522 +3131,522 @@
           </p:nvSpPr>
           <p:spPr>
             <a:xfrm>
-              <a:off x="1172049" y="2073503"/>
-              <a:ext cx="7090630" cy="3409111"/>
+              <a:off x="1264853" y="2209169"/>
+              <a:ext cx="6984170" cy="3179792"/>
             </a:xfrm>
             <a:custGeom>
               <a:avLst/>
               <a:pathLst>
-                <a:path w="7090630" h="3409111">
+                <a:path w="6984170" h="3179792">
                   <a:moveTo>
-                    <a:pt x="0" y="3056014"/>
+                    <a:pt x="0" y="2850447"/>
                   </a:moveTo>
                   <a:lnTo>
-                    <a:pt x="71622" y="3049310"/>
-                  </a:lnTo>
-                  <a:lnTo>
-                    <a:pt x="143245" y="3042501"/>
-                  </a:lnTo>
-                  <a:lnTo>
-                    <a:pt x="214867" y="3035585"/>
-                  </a:lnTo>
-                  <a:lnTo>
-                    <a:pt x="286490" y="3028561"/>
-                  </a:lnTo>
-                  <a:lnTo>
-                    <a:pt x="358112" y="3021427"/>
-                  </a:lnTo>
-                  <a:lnTo>
-                    <a:pt x="429735" y="3014181"/>
-                  </a:lnTo>
-                  <a:lnTo>
-                    <a:pt x="501357" y="3006821"/>
-                  </a:lnTo>
-                  <a:lnTo>
-                    <a:pt x="572980" y="2999346"/>
-                  </a:lnTo>
-                  <a:lnTo>
-                    <a:pt x="644602" y="2991754"/>
-                  </a:lnTo>
-                  <a:lnTo>
-                    <a:pt x="716225" y="2984043"/>
-                  </a:lnTo>
-                  <a:lnTo>
-                    <a:pt x="787847" y="2976211"/>
-                  </a:lnTo>
-                  <a:lnTo>
-                    <a:pt x="859470" y="2968256"/>
-                  </a:lnTo>
-                  <a:lnTo>
-                    <a:pt x="931092" y="2960177"/>
-                  </a:lnTo>
-                  <a:lnTo>
-                    <a:pt x="1002715" y="2951971"/>
-                  </a:lnTo>
-                  <a:lnTo>
-                    <a:pt x="1074337" y="2943636"/>
-                  </a:lnTo>
-                  <a:lnTo>
-                    <a:pt x="1145960" y="2935171"/>
-                  </a:lnTo>
-                  <a:lnTo>
-                    <a:pt x="1217582" y="2926573"/>
-                  </a:lnTo>
-                  <a:lnTo>
-                    <a:pt x="1289205" y="2917841"/>
-                  </a:lnTo>
-                  <a:lnTo>
-                    <a:pt x="1360827" y="2908971"/>
-                  </a:lnTo>
-                  <a:lnTo>
-                    <a:pt x="1432450" y="2899962"/>
-                  </a:lnTo>
-                  <a:lnTo>
-                    <a:pt x="1504073" y="2890813"/>
-                  </a:lnTo>
-                  <a:lnTo>
-                    <a:pt x="1575695" y="2881520"/>
-                  </a:lnTo>
-                  <a:lnTo>
-                    <a:pt x="1647318" y="2872081"/>
-                  </a:lnTo>
-                  <a:lnTo>
-                    <a:pt x="1718940" y="2862494"/>
-                  </a:lnTo>
-                  <a:lnTo>
-                    <a:pt x="1790563" y="2852757"/>
-                  </a:lnTo>
-                  <a:lnTo>
-                    <a:pt x="1862185" y="2842867"/>
-                  </a:lnTo>
-                  <a:lnTo>
-                    <a:pt x="1933808" y="2832823"/>
-                  </a:lnTo>
-                  <a:lnTo>
-                    <a:pt x="2005430" y="2822621"/>
-                  </a:lnTo>
-                  <a:lnTo>
-                    <a:pt x="2077053" y="2812259"/>
-                  </a:lnTo>
-                  <a:lnTo>
-                    <a:pt x="2148675" y="2801735"/>
-                  </a:lnTo>
-                  <a:lnTo>
-                    <a:pt x="2220298" y="2791045"/>
-                  </a:lnTo>
-                  <a:lnTo>
-                    <a:pt x="2291920" y="2780188"/>
-                  </a:lnTo>
-                  <a:lnTo>
-                    <a:pt x="2363543" y="2769161"/>
-                  </a:lnTo>
-                  <a:lnTo>
-                    <a:pt x="2435165" y="2757962"/>
-                  </a:lnTo>
-                  <a:lnTo>
-                    <a:pt x="2506788" y="2746586"/>
-                  </a:lnTo>
-                  <a:lnTo>
-                    <a:pt x="2578410" y="2735033"/>
-                  </a:lnTo>
-                  <a:lnTo>
-                    <a:pt x="2650033" y="2723298"/>
-                  </a:lnTo>
-                  <a:lnTo>
-                    <a:pt x="2721655" y="2711379"/>
-                  </a:lnTo>
-                  <a:lnTo>
-                    <a:pt x="2793278" y="2699274"/>
-                  </a:lnTo>
-                  <a:lnTo>
-                    <a:pt x="2864901" y="2686979"/>
-                  </a:lnTo>
-                  <a:lnTo>
-                    <a:pt x="2936523" y="2674491"/>
-                  </a:lnTo>
-                  <a:lnTo>
-                    <a:pt x="3008146" y="2661807"/>
-                  </a:lnTo>
-                  <a:lnTo>
-                    <a:pt x="3079768" y="2634634"/>
-                  </a:lnTo>
-                  <a:lnTo>
-                    <a:pt x="3151391" y="2585234"/>
-                  </a:lnTo>
-                  <a:lnTo>
-                    <a:pt x="3223013" y="2532961"/>
-                  </a:lnTo>
-                  <a:lnTo>
-                    <a:pt x="3294636" y="2477646"/>
-                  </a:lnTo>
-                  <a:lnTo>
-                    <a:pt x="3366258" y="2419114"/>
-                  </a:lnTo>
-                  <a:lnTo>
-                    <a:pt x="3437881" y="2357176"/>
-                  </a:lnTo>
-                  <a:lnTo>
-                    <a:pt x="3509503" y="2291635"/>
-                  </a:lnTo>
-                  <a:lnTo>
-                    <a:pt x="3581126" y="2222281"/>
-                  </a:lnTo>
-                  <a:lnTo>
-                    <a:pt x="3652748" y="2148892"/>
-                  </a:lnTo>
-                  <a:lnTo>
-                    <a:pt x="3724371" y="2071233"/>
-                  </a:lnTo>
-                  <a:lnTo>
-                    <a:pt x="3795993" y="1989056"/>
-                  </a:lnTo>
-                  <a:lnTo>
-                    <a:pt x="3867616" y="1902099"/>
-                  </a:lnTo>
-                  <a:lnTo>
-                    <a:pt x="3939238" y="1810082"/>
-                  </a:lnTo>
-                  <a:lnTo>
-                    <a:pt x="4010861" y="1712712"/>
-                  </a:lnTo>
-                  <a:lnTo>
-                    <a:pt x="4082483" y="1609678"/>
-                  </a:lnTo>
-                  <a:lnTo>
-                    <a:pt x="4154106" y="1500649"/>
-                  </a:lnTo>
-                  <a:lnTo>
-                    <a:pt x="4225729" y="1385277"/>
-                  </a:lnTo>
-                  <a:lnTo>
-                    <a:pt x="4297351" y="1263193"/>
-                  </a:lnTo>
-                  <a:lnTo>
-                    <a:pt x="4368974" y="1134006"/>
-                  </a:lnTo>
-                  <a:lnTo>
-                    <a:pt x="4440596" y="997304"/>
-                  </a:lnTo>
-                  <a:lnTo>
-                    <a:pt x="4512219" y="852649"/>
-                  </a:lnTo>
-                  <a:lnTo>
-                    <a:pt x="4583841" y="699577"/>
-                  </a:lnTo>
-                  <a:lnTo>
-                    <a:pt x="4655464" y="537601"/>
-                  </a:lnTo>
-                  <a:lnTo>
-                    <a:pt x="4727086" y="366201"/>
-                  </a:lnTo>
-                  <a:lnTo>
-                    <a:pt x="4798709" y="184830"/>
-                  </a:lnTo>
-                  <a:lnTo>
-                    <a:pt x="4867684" y="0"/>
-                  </a:lnTo>
-                  <a:lnTo>
-                    <a:pt x="7090630" y="0"/>
-                  </a:lnTo>
-                  <a:lnTo>
-                    <a:pt x="7090630" y="1489326"/>
-                  </a:lnTo>
-                  <a:lnTo>
-                    <a:pt x="7019007" y="1520103"/>
-                  </a:lnTo>
-                  <a:lnTo>
-                    <a:pt x="6947385" y="1550405"/>
-                  </a:lnTo>
-                  <a:lnTo>
-                    <a:pt x="6875762" y="1580239"/>
-                  </a:lnTo>
-                  <a:lnTo>
-                    <a:pt x="6804139" y="1609612"/>
-                  </a:lnTo>
-                  <a:lnTo>
-                    <a:pt x="6732517" y="1638533"/>
-                  </a:lnTo>
-                  <a:lnTo>
-                    <a:pt x="6660894" y="1667007"/>
-                  </a:lnTo>
-                  <a:lnTo>
-                    <a:pt x="6589272" y="1695041"/>
-                  </a:lnTo>
-                  <a:lnTo>
-                    <a:pt x="6517649" y="1722643"/>
-                  </a:lnTo>
-                  <a:lnTo>
-                    <a:pt x="6446027" y="1749819"/>
-                  </a:lnTo>
-                  <a:lnTo>
-                    <a:pt x="6374404" y="1776576"/>
-                  </a:lnTo>
-                  <a:lnTo>
-                    <a:pt x="6302782" y="1802920"/>
-                  </a:lnTo>
-                  <a:lnTo>
-                    <a:pt x="6231159" y="1828857"/>
-                  </a:lnTo>
-                  <a:lnTo>
-                    <a:pt x="6159537" y="1854395"/>
-                  </a:lnTo>
-                  <a:lnTo>
-                    <a:pt x="6087914" y="1879538"/>
-                  </a:lnTo>
-                  <a:lnTo>
-                    <a:pt x="6016292" y="1904293"/>
-                  </a:lnTo>
-                  <a:lnTo>
-                    <a:pt x="5944669" y="1928666"/>
-                  </a:lnTo>
-                  <a:lnTo>
-                    <a:pt x="5873047" y="1952663"/>
-                  </a:lnTo>
-                  <a:lnTo>
-                    <a:pt x="5801424" y="1976289"/>
-                  </a:lnTo>
-                  <a:lnTo>
-                    <a:pt x="5729802" y="1999551"/>
-                  </a:lnTo>
-                  <a:lnTo>
-                    <a:pt x="5658179" y="2022454"/>
-                  </a:lnTo>
-                  <a:lnTo>
-                    <a:pt x="5586557" y="2045004"/>
-                  </a:lnTo>
-                  <a:lnTo>
-                    <a:pt x="5514934" y="2067206"/>
-                  </a:lnTo>
-                  <a:lnTo>
-                    <a:pt x="5443311" y="2089065"/>
-                  </a:lnTo>
-                  <a:lnTo>
-                    <a:pt x="5371689" y="2110587"/>
-                  </a:lnTo>
-                  <a:lnTo>
-                    <a:pt x="5300066" y="2131776"/>
-                  </a:lnTo>
-                  <a:lnTo>
-                    <a:pt x="5228444" y="2152639"/>
-                  </a:lnTo>
-                  <a:lnTo>
-                    <a:pt x="5156821" y="2173180"/>
-                  </a:lnTo>
-                  <a:lnTo>
-                    <a:pt x="5085199" y="2193403"/>
-                  </a:lnTo>
-                  <a:lnTo>
-                    <a:pt x="5013576" y="2213315"/>
-                  </a:lnTo>
-                  <a:lnTo>
-                    <a:pt x="4941954" y="2232920"/>
-                  </a:lnTo>
-                  <a:lnTo>
-                    <a:pt x="4870331" y="2252221"/>
-                  </a:lnTo>
-                  <a:lnTo>
-                    <a:pt x="4798709" y="2271226"/>
-                  </a:lnTo>
-                  <a:lnTo>
-                    <a:pt x="4727086" y="2289936"/>
-                  </a:lnTo>
-                  <a:lnTo>
-                    <a:pt x="4655464" y="2308358"/>
-                  </a:lnTo>
-                  <a:lnTo>
-                    <a:pt x="4583841" y="2326496"/>
-                  </a:lnTo>
-                  <a:lnTo>
-                    <a:pt x="4512219" y="2344354"/>
-                  </a:lnTo>
-                  <a:lnTo>
-                    <a:pt x="4440596" y="2361936"/>
-                  </a:lnTo>
-                  <a:lnTo>
-                    <a:pt x="4368974" y="2379247"/>
-                  </a:lnTo>
-                  <a:lnTo>
-                    <a:pt x="4297351" y="2396291"/>
-                  </a:lnTo>
-                  <a:lnTo>
-                    <a:pt x="4225729" y="2413072"/>
-                  </a:lnTo>
-                  <a:lnTo>
-                    <a:pt x="4154106" y="2429594"/>
-                  </a:lnTo>
-                  <a:lnTo>
-                    <a:pt x="4082483" y="2445861"/>
-                  </a:lnTo>
-                  <a:lnTo>
-                    <a:pt x="4010861" y="2461877"/>
-                  </a:lnTo>
-                  <a:lnTo>
-                    <a:pt x="3939238" y="2477646"/>
-                  </a:lnTo>
-                  <a:lnTo>
-                    <a:pt x="3867616" y="2493171"/>
-                  </a:lnTo>
-                  <a:lnTo>
-                    <a:pt x="3795993" y="2508457"/>
-                  </a:lnTo>
-                  <a:lnTo>
-                    <a:pt x="3724371" y="2523507"/>
-                  </a:lnTo>
-                  <a:lnTo>
-                    <a:pt x="3652748" y="2538325"/>
-                  </a:lnTo>
-                  <a:lnTo>
-                    <a:pt x="3581126" y="2552914"/>
-                  </a:lnTo>
-                  <a:lnTo>
-                    <a:pt x="3509503" y="2567278"/>
-                  </a:lnTo>
-                  <a:lnTo>
-                    <a:pt x="3437881" y="2581420"/>
-                  </a:lnTo>
-                  <a:lnTo>
-                    <a:pt x="3366258" y="2595344"/>
-                  </a:lnTo>
-                  <a:lnTo>
-                    <a:pt x="3294636" y="2609053"/>
-                  </a:lnTo>
-                  <a:lnTo>
-                    <a:pt x="3223013" y="2622551"/>
-                  </a:lnTo>
-                  <a:lnTo>
-                    <a:pt x="3151391" y="2635840"/>
-                  </a:lnTo>
-                  <a:lnTo>
-                    <a:pt x="3079768" y="2648925"/>
-                  </a:lnTo>
-                  <a:lnTo>
-                    <a:pt x="3008146" y="2681317"/>
-                  </a:lnTo>
-                  <a:lnTo>
-                    <a:pt x="2936523" y="2725434"/>
-                  </a:lnTo>
-                  <a:lnTo>
-                    <a:pt x="2864901" y="2767125"/>
-                  </a:lnTo>
-                  <a:lnTo>
-                    <a:pt x="2793278" y="2806524"/>
-                  </a:lnTo>
-                  <a:lnTo>
-                    <a:pt x="2721655" y="2843757"/>
-                  </a:lnTo>
-                  <a:lnTo>
-                    <a:pt x="2650033" y="2878943"/>
-                  </a:lnTo>
-                  <a:lnTo>
-                    <a:pt x="2578410" y="2912195"/>
-                  </a:lnTo>
-                  <a:lnTo>
-                    <a:pt x="2506788" y="2943618"/>
-                  </a:lnTo>
-                  <a:lnTo>
-                    <a:pt x="2435165" y="2973314"/>
-                  </a:lnTo>
-                  <a:lnTo>
-                    <a:pt x="2363543" y="3001377"/>
-                  </a:lnTo>
-                  <a:lnTo>
-                    <a:pt x="2291920" y="3027897"/>
-                  </a:lnTo>
-                  <a:lnTo>
-                    <a:pt x="2220298" y="3052960"/>
-                  </a:lnTo>
-                  <a:lnTo>
-                    <a:pt x="2148675" y="3076644"/>
-                  </a:lnTo>
-                  <a:lnTo>
-                    <a:pt x="2077053" y="3099026"/>
-                  </a:lnTo>
-                  <a:lnTo>
-                    <a:pt x="2005430" y="3120178"/>
-                  </a:lnTo>
-                  <a:lnTo>
-                    <a:pt x="1933808" y="3140166"/>
-                  </a:lnTo>
-                  <a:lnTo>
-                    <a:pt x="1862185" y="3159056"/>
-                  </a:lnTo>
-                  <a:lnTo>
-                    <a:pt x="1790563" y="3176907"/>
-                  </a:lnTo>
-                  <a:lnTo>
-                    <a:pt x="1718940" y="3193777"/>
-                  </a:lnTo>
-                  <a:lnTo>
-                    <a:pt x="1647318" y="3209719"/>
-                  </a:lnTo>
-                  <a:lnTo>
-                    <a:pt x="1575695" y="3224785"/>
-                  </a:lnTo>
-                  <a:lnTo>
-                    <a:pt x="1504073" y="3239022"/>
-                  </a:lnTo>
-                  <a:lnTo>
-                    <a:pt x="1432450" y="3252477"/>
-                  </a:lnTo>
-                  <a:lnTo>
-                    <a:pt x="1360827" y="3265192"/>
-                  </a:lnTo>
-                  <a:lnTo>
-                    <a:pt x="1289205" y="3277208"/>
-                  </a:lnTo>
-                  <a:lnTo>
-                    <a:pt x="1217582" y="3288563"/>
-                  </a:lnTo>
-                  <a:lnTo>
-                    <a:pt x="1145960" y="3299294"/>
-                  </a:lnTo>
-                  <a:lnTo>
-                    <a:pt x="1074337" y="3309435"/>
-                  </a:lnTo>
-                  <a:lnTo>
-                    <a:pt x="1002715" y="3319019"/>
-                  </a:lnTo>
-                  <a:lnTo>
-                    <a:pt x="931092" y="3328075"/>
-                  </a:lnTo>
-                  <a:lnTo>
-                    <a:pt x="859470" y="3336634"/>
-                  </a:lnTo>
-                  <a:lnTo>
-                    <a:pt x="787847" y="3344722"/>
-                  </a:lnTo>
-                  <a:lnTo>
-                    <a:pt x="716225" y="3352365"/>
-                  </a:lnTo>
-                  <a:lnTo>
-                    <a:pt x="644602" y="3359589"/>
-                  </a:lnTo>
-                  <a:lnTo>
-                    <a:pt x="572980" y="3366415"/>
-                  </a:lnTo>
-                  <a:lnTo>
-                    <a:pt x="501357" y="3372866"/>
-                  </a:lnTo>
-                  <a:lnTo>
-                    <a:pt x="429735" y="3378962"/>
-                  </a:lnTo>
-                  <a:lnTo>
-                    <a:pt x="358112" y="3384723"/>
-                  </a:lnTo>
-                  <a:lnTo>
-                    <a:pt x="286490" y="3390167"/>
-                  </a:lnTo>
-                  <a:lnTo>
-                    <a:pt x="214867" y="3395312"/>
-                  </a:lnTo>
-                  <a:lnTo>
-                    <a:pt x="143245" y="3400174"/>
-                  </a:lnTo>
-                  <a:lnTo>
-                    <a:pt x="71622" y="3404769"/>
-                  </a:lnTo>
-                  <a:lnTo>
-                    <a:pt x="0" y="3409111"/>
+                    <a:pt x="70547" y="2844194"/>
+                  </a:lnTo>
+                  <a:lnTo>
+                    <a:pt x="141094" y="2837843"/>
+                  </a:lnTo>
+                  <a:lnTo>
+                    <a:pt x="211641" y="2831392"/>
+                  </a:lnTo>
+                  <a:lnTo>
+                    <a:pt x="282188" y="2824841"/>
+                  </a:lnTo>
+                  <a:lnTo>
+                    <a:pt x="352735" y="2818186"/>
+                  </a:lnTo>
+                  <a:lnTo>
+                    <a:pt x="423283" y="2811428"/>
+                  </a:lnTo>
+                  <a:lnTo>
+                    <a:pt x="493830" y="2804563"/>
+                  </a:lnTo>
+                  <a:lnTo>
+                    <a:pt x="564377" y="2797591"/>
+                  </a:lnTo>
+                  <a:lnTo>
+                    <a:pt x="634924" y="2790510"/>
+                  </a:lnTo>
+                  <a:lnTo>
+                    <a:pt x="705471" y="2783317"/>
+                  </a:lnTo>
+                  <a:lnTo>
+                    <a:pt x="776018" y="2776012"/>
+                  </a:lnTo>
+                  <a:lnTo>
+                    <a:pt x="846566" y="2768593"/>
+                  </a:lnTo>
+                  <a:lnTo>
+                    <a:pt x="917113" y="2761057"/>
+                  </a:lnTo>
+                  <a:lnTo>
+                    <a:pt x="987660" y="2753403"/>
+                  </a:lnTo>
+                  <a:lnTo>
+                    <a:pt x="1058207" y="2745629"/>
+                  </a:lnTo>
+                  <a:lnTo>
+                    <a:pt x="1128754" y="2737733"/>
+                  </a:lnTo>
+                  <a:lnTo>
+                    <a:pt x="1199301" y="2729713"/>
+                  </a:lnTo>
+                  <a:lnTo>
+                    <a:pt x="1269849" y="2721568"/>
+                  </a:lnTo>
+                  <a:lnTo>
+                    <a:pt x="1340396" y="2713295"/>
+                  </a:lnTo>
+                  <a:lnTo>
+                    <a:pt x="1410943" y="2704893"/>
+                  </a:lnTo>
+                  <a:lnTo>
+                    <a:pt x="1481490" y="2696358"/>
+                  </a:lnTo>
+                  <a:lnTo>
+                    <a:pt x="1552037" y="2687690"/>
+                  </a:lnTo>
+                  <a:lnTo>
+                    <a:pt x="1622584" y="2678886"/>
+                  </a:lnTo>
+                  <a:lnTo>
+                    <a:pt x="1693132" y="2669945"/>
+                  </a:lnTo>
+                  <a:lnTo>
+                    <a:pt x="1763679" y="2660863"/>
+                  </a:lnTo>
+                  <a:lnTo>
+                    <a:pt x="1834226" y="2651638"/>
+                  </a:lnTo>
+                  <a:lnTo>
+                    <a:pt x="1904773" y="2642269"/>
+                  </a:lnTo>
+                  <a:lnTo>
+                    <a:pt x="1975320" y="2632753"/>
+                  </a:lnTo>
+                  <a:lnTo>
+                    <a:pt x="2045868" y="2623089"/>
+                  </a:lnTo>
+                  <a:lnTo>
+                    <a:pt x="2116415" y="2613272"/>
+                  </a:lnTo>
+                  <a:lnTo>
+                    <a:pt x="2186962" y="2603302"/>
+                  </a:lnTo>
+                  <a:lnTo>
+                    <a:pt x="2257509" y="2593175"/>
+                  </a:lnTo>
+                  <a:lnTo>
+                    <a:pt x="2328056" y="2582890"/>
+                  </a:lnTo>
+                  <a:lnTo>
+                    <a:pt x="2398603" y="2572444"/>
+                  </a:lnTo>
+                  <a:lnTo>
+                    <a:pt x="2469151" y="2561833"/>
+                  </a:lnTo>
+                  <a:lnTo>
+                    <a:pt x="2539698" y="2551057"/>
+                  </a:lnTo>
+                  <a:lnTo>
+                    <a:pt x="2610245" y="2540112"/>
+                  </a:lnTo>
+                  <a:lnTo>
+                    <a:pt x="2680792" y="2528995"/>
+                  </a:lnTo>
+                  <a:lnTo>
+                    <a:pt x="2751339" y="2517704"/>
+                  </a:lnTo>
+                  <a:lnTo>
+                    <a:pt x="2821886" y="2506235"/>
+                  </a:lnTo>
+                  <a:lnTo>
+                    <a:pt x="2892434" y="2494588"/>
+                  </a:lnTo>
+                  <a:lnTo>
+                    <a:pt x="2962981" y="2482757"/>
+                  </a:lnTo>
+                  <a:lnTo>
+                    <a:pt x="3033528" y="2457411"/>
+                  </a:lnTo>
+                  <a:lnTo>
+                    <a:pt x="3104075" y="2411335"/>
+                  </a:lnTo>
+                  <a:lnTo>
+                    <a:pt x="3174622" y="2362578"/>
+                  </a:lnTo>
+                  <a:lnTo>
+                    <a:pt x="3245169" y="2310984"/>
+                  </a:lnTo>
+                  <a:lnTo>
+                    <a:pt x="3315717" y="2256389"/>
+                  </a:lnTo>
+                  <a:lnTo>
+                    <a:pt x="3386264" y="2198617"/>
+                  </a:lnTo>
+                  <a:lnTo>
+                    <a:pt x="3456811" y="2137485"/>
+                  </a:lnTo>
+                  <a:lnTo>
+                    <a:pt x="3527358" y="2072796"/>
+                  </a:lnTo>
+                  <a:lnTo>
+                    <a:pt x="3597905" y="2004343"/>
+                  </a:lnTo>
+                  <a:lnTo>
+                    <a:pt x="3668452" y="1931909"/>
+                  </a:lnTo>
+                  <a:lnTo>
+                    <a:pt x="3739000" y="1855260"/>
+                  </a:lnTo>
+                  <a:lnTo>
+                    <a:pt x="3809547" y="1774151"/>
+                  </a:lnTo>
+                  <a:lnTo>
+                    <a:pt x="3880094" y="1688324"/>
+                  </a:lnTo>
+                  <a:lnTo>
+                    <a:pt x="3950641" y="1597504"/>
+                  </a:lnTo>
+                  <a:lnTo>
+                    <a:pt x="4021188" y="1501400"/>
+                  </a:lnTo>
+                  <a:lnTo>
+                    <a:pt x="4091736" y="1399706"/>
+                  </a:lnTo>
+                  <a:lnTo>
+                    <a:pt x="4162283" y="1292094"/>
+                  </a:lnTo>
+                  <a:lnTo>
+                    <a:pt x="4232830" y="1178222"/>
+                  </a:lnTo>
+                  <a:lnTo>
+                    <a:pt x="4303377" y="1057726"/>
+                  </a:lnTo>
+                  <a:lnTo>
+                    <a:pt x="4373924" y="930219"/>
+                  </a:lnTo>
+                  <a:lnTo>
+                    <a:pt x="4444471" y="795294"/>
+                  </a:lnTo>
+                  <a:lnTo>
+                    <a:pt x="4515019" y="652519"/>
+                  </a:lnTo>
+                  <a:lnTo>
+                    <a:pt x="4585566" y="501439"/>
+                  </a:lnTo>
+                  <a:lnTo>
+                    <a:pt x="4656113" y="341568"/>
+                  </a:lnTo>
+                  <a:lnTo>
+                    <a:pt x="4726660" y="172397"/>
+                  </a:lnTo>
+                  <a:lnTo>
+                    <a:pt x="4794600" y="0"/>
+                  </a:lnTo>
+                  <a:lnTo>
+                    <a:pt x="6984170" y="0"/>
+                  </a:lnTo>
+                  <a:lnTo>
+                    <a:pt x="6984170" y="1389145"/>
+                  </a:lnTo>
+                  <a:lnTo>
+                    <a:pt x="6913622" y="1417851"/>
+                  </a:lnTo>
+                  <a:lnTo>
+                    <a:pt x="6843075" y="1446114"/>
+                  </a:lnTo>
+                  <a:lnTo>
+                    <a:pt x="6772528" y="1473942"/>
+                  </a:lnTo>
+                  <a:lnTo>
+                    <a:pt x="6701981" y="1501339"/>
+                  </a:lnTo>
+                  <a:lnTo>
+                    <a:pt x="6631434" y="1528314"/>
+                  </a:lnTo>
+                  <a:lnTo>
+                    <a:pt x="6560887" y="1554873"/>
+                  </a:lnTo>
+                  <a:lnTo>
+                    <a:pt x="6490339" y="1581022"/>
+                  </a:lnTo>
+                  <a:lnTo>
+                    <a:pt x="6419792" y="1606767"/>
+                  </a:lnTo>
+                  <a:lnTo>
+                    <a:pt x="6349245" y="1632116"/>
+                  </a:lnTo>
+                  <a:lnTo>
+                    <a:pt x="6278698" y="1657072"/>
+                  </a:lnTo>
+                  <a:lnTo>
+                    <a:pt x="6208151" y="1681644"/>
+                  </a:lnTo>
+                  <a:lnTo>
+                    <a:pt x="6137604" y="1705837"/>
+                  </a:lnTo>
+                  <a:lnTo>
+                    <a:pt x="6067056" y="1729656"/>
+                  </a:lnTo>
+                  <a:lnTo>
+                    <a:pt x="5996509" y="1753108"/>
+                  </a:lnTo>
+                  <a:lnTo>
+                    <a:pt x="5925962" y="1776198"/>
+                  </a:lnTo>
+                  <a:lnTo>
+                    <a:pt x="5855415" y="1798931"/>
+                  </a:lnTo>
+                  <a:lnTo>
+                    <a:pt x="5784868" y="1821314"/>
+                  </a:lnTo>
+                  <a:lnTo>
+                    <a:pt x="5714320" y="1843352"/>
+                  </a:lnTo>
+                  <a:lnTo>
+                    <a:pt x="5643773" y="1865049"/>
+                  </a:lnTo>
+                  <a:lnTo>
+                    <a:pt x="5573226" y="1886411"/>
+                  </a:lnTo>
+                  <a:lnTo>
+                    <a:pt x="5502679" y="1907444"/>
+                  </a:lnTo>
+                  <a:lnTo>
+                    <a:pt x="5432132" y="1928152"/>
+                  </a:lnTo>
+                  <a:lnTo>
+                    <a:pt x="5361585" y="1948541"/>
+                  </a:lnTo>
+                  <a:lnTo>
+                    <a:pt x="5291037" y="1968615"/>
+                  </a:lnTo>
+                  <a:lnTo>
+                    <a:pt x="5220490" y="1988379"/>
+                  </a:lnTo>
+                  <a:lnTo>
+                    <a:pt x="5149943" y="2007839"/>
+                  </a:lnTo>
+                  <a:lnTo>
+                    <a:pt x="5079396" y="2026998"/>
+                  </a:lnTo>
+                  <a:lnTo>
+                    <a:pt x="5008849" y="2045861"/>
+                  </a:lnTo>
+                  <a:lnTo>
+                    <a:pt x="4938302" y="2064434"/>
+                  </a:lnTo>
+                  <a:lnTo>
+                    <a:pt x="4867754" y="2082719"/>
+                  </a:lnTo>
+                  <a:lnTo>
+                    <a:pt x="4797207" y="2100723"/>
+                  </a:lnTo>
+                  <a:lnTo>
+                    <a:pt x="4726660" y="2118448"/>
+                  </a:lnTo>
+                  <a:lnTo>
+                    <a:pt x="4656113" y="2135901"/>
+                  </a:lnTo>
+                  <a:lnTo>
+                    <a:pt x="4585566" y="2153084"/>
+                  </a:lnTo>
+                  <a:lnTo>
+                    <a:pt x="4515019" y="2170001"/>
+                  </a:lnTo>
+                  <a:lnTo>
+                    <a:pt x="4444471" y="2186658"/>
+                  </a:lnTo>
+                  <a:lnTo>
+                    <a:pt x="4373924" y="2203058"/>
+                  </a:lnTo>
+                  <a:lnTo>
+                    <a:pt x="4303377" y="2219204"/>
+                  </a:lnTo>
+                  <a:lnTo>
+                    <a:pt x="4232830" y="2235101"/>
+                  </a:lnTo>
+                  <a:lnTo>
+                    <a:pt x="4162283" y="2250754"/>
+                  </a:lnTo>
+                  <a:lnTo>
+                    <a:pt x="4091736" y="2266164"/>
+                  </a:lnTo>
+                  <a:lnTo>
+                    <a:pt x="4021188" y="2281337"/>
+                  </a:lnTo>
+                  <a:lnTo>
+                    <a:pt x="3950641" y="2296275"/>
+                  </a:lnTo>
+                  <a:lnTo>
+                    <a:pt x="3880094" y="2310984"/>
+                  </a:lnTo>
+                  <a:lnTo>
+                    <a:pt x="3809547" y="2325465"/>
+                  </a:lnTo>
+                  <a:lnTo>
+                    <a:pt x="3739000" y="2339722"/>
+                  </a:lnTo>
+                  <a:lnTo>
+                    <a:pt x="3668452" y="2353760"/>
+                  </a:lnTo>
+                  <a:lnTo>
+                    <a:pt x="3597905" y="2367581"/>
+                  </a:lnTo>
+                  <a:lnTo>
+                    <a:pt x="3527358" y="2381189"/>
+                  </a:lnTo>
+                  <a:lnTo>
+                    <a:pt x="3456811" y="2394586"/>
+                  </a:lnTo>
+                  <a:lnTo>
+                    <a:pt x="3386264" y="2407777"/>
+                  </a:lnTo>
+                  <a:lnTo>
+                    <a:pt x="3315717" y="2420765"/>
+                  </a:lnTo>
+                  <a:lnTo>
+                    <a:pt x="3245169" y="2433552"/>
+                  </a:lnTo>
+                  <a:lnTo>
+                    <a:pt x="3174622" y="2446142"/>
+                  </a:lnTo>
+                  <a:lnTo>
+                    <a:pt x="3104075" y="2458537"/>
+                  </a:lnTo>
+                  <a:lnTo>
+                    <a:pt x="3033528" y="2470741"/>
+                  </a:lnTo>
+                  <a:lnTo>
+                    <a:pt x="2962981" y="2500955"/>
+                  </a:lnTo>
+                  <a:lnTo>
+                    <a:pt x="2892434" y="2542104"/>
+                  </a:lnTo>
+                  <a:lnTo>
+                    <a:pt x="2821886" y="2580991"/>
+                  </a:lnTo>
+                  <a:lnTo>
+                    <a:pt x="2751339" y="2617740"/>
+                  </a:lnTo>
+                  <a:lnTo>
+                    <a:pt x="2680792" y="2652468"/>
+                  </a:lnTo>
+                  <a:lnTo>
+                    <a:pt x="2610245" y="2685287"/>
+                  </a:lnTo>
+                  <a:lnTo>
+                    <a:pt x="2539698" y="2716302"/>
+                  </a:lnTo>
+                  <a:lnTo>
+                    <a:pt x="2469151" y="2745612"/>
+                  </a:lnTo>
+                  <a:lnTo>
+                    <a:pt x="2398603" y="2773310"/>
+                  </a:lnTo>
+                  <a:lnTo>
+                    <a:pt x="2328056" y="2799486"/>
+                  </a:lnTo>
+                  <a:lnTo>
+                    <a:pt x="2257509" y="2824222"/>
+                  </a:lnTo>
+                  <a:lnTo>
+                    <a:pt x="2186962" y="2847598"/>
+                  </a:lnTo>
+                  <a:lnTo>
+                    <a:pt x="2116415" y="2869689"/>
+                  </a:lnTo>
+                  <a:lnTo>
+                    <a:pt x="2045868" y="2890566"/>
+                  </a:lnTo>
+                  <a:lnTo>
+                    <a:pt x="1975320" y="2910295"/>
+                  </a:lnTo>
+                  <a:lnTo>
+                    <a:pt x="1904773" y="2928939"/>
+                  </a:lnTo>
+                  <a:lnTo>
+                    <a:pt x="1834226" y="2946558"/>
+                  </a:lnTo>
+                  <a:lnTo>
+                    <a:pt x="1763679" y="2963208"/>
+                  </a:lnTo>
+                  <a:lnTo>
+                    <a:pt x="1693132" y="2978943"/>
+                  </a:lnTo>
+                  <a:lnTo>
+                    <a:pt x="1622584" y="2993813"/>
+                  </a:lnTo>
+                  <a:lnTo>
+                    <a:pt x="1552037" y="3007865"/>
+                  </a:lnTo>
+                  <a:lnTo>
+                    <a:pt x="1481490" y="3021145"/>
+                  </a:lnTo>
+                  <a:lnTo>
+                    <a:pt x="1410943" y="3033695"/>
+                  </a:lnTo>
+                  <a:lnTo>
+                    <a:pt x="1340396" y="3045555"/>
+                  </a:lnTo>
+                  <a:lnTo>
+                    <a:pt x="1269849" y="3056762"/>
+                  </a:lnTo>
+                  <a:lnTo>
+                    <a:pt x="1199301" y="3067354"/>
+                  </a:lnTo>
+                  <a:lnTo>
+                    <a:pt x="1128754" y="3077363"/>
+                  </a:lnTo>
+                  <a:lnTo>
+                    <a:pt x="1058207" y="3086822"/>
+                  </a:lnTo>
+                  <a:lnTo>
+                    <a:pt x="987660" y="3095760"/>
+                  </a:lnTo>
+                  <a:lnTo>
+                    <a:pt x="917113" y="3104208"/>
+                  </a:lnTo>
+                  <a:lnTo>
+                    <a:pt x="846566" y="3112191"/>
+                  </a:lnTo>
+                  <a:lnTo>
+                    <a:pt x="776018" y="3119735"/>
+                  </a:lnTo>
+                  <a:lnTo>
+                    <a:pt x="705471" y="3126864"/>
+                  </a:lnTo>
+                  <a:lnTo>
+                    <a:pt x="634924" y="3133601"/>
+                  </a:lnTo>
+                  <a:lnTo>
+                    <a:pt x="564377" y="3139968"/>
+                  </a:lnTo>
+                  <a:lnTo>
+                    <a:pt x="493830" y="3145985"/>
+                  </a:lnTo>
+                  <a:lnTo>
+                    <a:pt x="423283" y="3151671"/>
+                  </a:lnTo>
+                  <a:lnTo>
+                    <a:pt x="352735" y="3157045"/>
+                  </a:lnTo>
+                  <a:lnTo>
+                    <a:pt x="282188" y="3162123"/>
+                  </a:lnTo>
+                  <a:lnTo>
+                    <a:pt x="211641" y="3166922"/>
+                  </a:lnTo>
+                  <a:lnTo>
+                    <a:pt x="141094" y="3171457"/>
+                  </a:lnTo>
+                  <a:lnTo>
+                    <a:pt x="70547" y="3175742"/>
+                  </a:lnTo>
+                  <a:lnTo>
+                    <a:pt x="0" y="3179792"/>
                   </a:lnTo>
                   <a:close/>
                 </a:path>
@@ -3672,219 +3672,219 @@
           </p:nvSpPr>
           <p:spPr>
             <a:xfrm>
-              <a:off x="1172049" y="2073503"/>
-              <a:ext cx="4867684" cy="3056014"/>
+              <a:off x="1264853" y="2209169"/>
+              <a:ext cx="4794600" cy="2850447"/>
             </a:xfrm>
             <a:custGeom>
               <a:avLst/>
               <a:pathLst>
-                <a:path w="4867684" h="3056014">
+                <a:path w="4794600" h="2850447">
                   <a:moveTo>
-                    <a:pt x="0" y="3056014"/>
+                    <a:pt x="0" y="2850447"/>
                   </a:moveTo>
                   <a:lnTo>
-                    <a:pt x="71622" y="3049310"/>
-                  </a:lnTo>
-                  <a:lnTo>
-                    <a:pt x="143245" y="3042501"/>
-                  </a:lnTo>
-                  <a:lnTo>
-                    <a:pt x="214867" y="3035585"/>
-                  </a:lnTo>
-                  <a:lnTo>
-                    <a:pt x="286490" y="3028561"/>
-                  </a:lnTo>
-                  <a:lnTo>
-                    <a:pt x="358112" y="3021427"/>
-                  </a:lnTo>
-                  <a:lnTo>
-                    <a:pt x="429735" y="3014181"/>
-                  </a:lnTo>
-                  <a:lnTo>
-                    <a:pt x="501357" y="3006821"/>
-                  </a:lnTo>
-                  <a:lnTo>
-                    <a:pt x="572980" y="2999346"/>
-                  </a:lnTo>
-                  <a:lnTo>
-                    <a:pt x="644602" y="2991754"/>
-                  </a:lnTo>
-                  <a:lnTo>
-                    <a:pt x="716225" y="2984043"/>
-                  </a:lnTo>
-                  <a:lnTo>
-                    <a:pt x="787847" y="2976211"/>
-                  </a:lnTo>
-                  <a:lnTo>
-                    <a:pt x="859470" y="2968256"/>
-                  </a:lnTo>
-                  <a:lnTo>
-                    <a:pt x="931092" y="2960177"/>
-                  </a:lnTo>
-                  <a:lnTo>
-                    <a:pt x="1002715" y="2951971"/>
-                  </a:lnTo>
-                  <a:lnTo>
-                    <a:pt x="1074337" y="2943636"/>
-                  </a:lnTo>
-                  <a:lnTo>
-                    <a:pt x="1145960" y="2935171"/>
-                  </a:lnTo>
-                  <a:lnTo>
-                    <a:pt x="1217582" y="2926573"/>
-                  </a:lnTo>
-                  <a:lnTo>
-                    <a:pt x="1289205" y="2917841"/>
-                  </a:lnTo>
-                  <a:lnTo>
-                    <a:pt x="1360827" y="2908971"/>
-                  </a:lnTo>
-                  <a:lnTo>
-                    <a:pt x="1432450" y="2899962"/>
-                  </a:lnTo>
-                  <a:lnTo>
-                    <a:pt x="1504073" y="2890813"/>
-                  </a:lnTo>
-                  <a:lnTo>
-                    <a:pt x="1575695" y="2881520"/>
-                  </a:lnTo>
-                  <a:lnTo>
-                    <a:pt x="1647318" y="2872081"/>
-                  </a:lnTo>
-                  <a:lnTo>
-                    <a:pt x="1718940" y="2862494"/>
-                  </a:lnTo>
-                  <a:lnTo>
-                    <a:pt x="1790563" y="2852757"/>
-                  </a:lnTo>
-                  <a:lnTo>
-                    <a:pt x="1862185" y="2842867"/>
-                  </a:lnTo>
-                  <a:lnTo>
-                    <a:pt x="1933808" y="2832823"/>
-                  </a:lnTo>
-                  <a:lnTo>
-                    <a:pt x="2005430" y="2822621"/>
-                  </a:lnTo>
-                  <a:lnTo>
-                    <a:pt x="2077053" y="2812259"/>
-                  </a:lnTo>
-                  <a:lnTo>
-                    <a:pt x="2148675" y="2801735"/>
-                  </a:lnTo>
-                  <a:lnTo>
-                    <a:pt x="2220298" y="2791045"/>
-                  </a:lnTo>
-                  <a:lnTo>
-                    <a:pt x="2291920" y="2780188"/>
-                  </a:lnTo>
-                  <a:lnTo>
-                    <a:pt x="2363543" y="2769161"/>
-                  </a:lnTo>
-                  <a:lnTo>
-                    <a:pt x="2435165" y="2757962"/>
-                  </a:lnTo>
-                  <a:lnTo>
-                    <a:pt x="2506788" y="2746586"/>
-                  </a:lnTo>
-                  <a:lnTo>
-                    <a:pt x="2578410" y="2735033"/>
-                  </a:lnTo>
-                  <a:lnTo>
-                    <a:pt x="2650033" y="2723298"/>
-                  </a:lnTo>
-                  <a:lnTo>
-                    <a:pt x="2721655" y="2711379"/>
-                  </a:lnTo>
-                  <a:lnTo>
-                    <a:pt x="2793278" y="2699274"/>
-                  </a:lnTo>
-                  <a:lnTo>
-                    <a:pt x="2864901" y="2686979"/>
-                  </a:lnTo>
-                  <a:lnTo>
-                    <a:pt x="2936523" y="2674491"/>
-                  </a:lnTo>
-                  <a:lnTo>
-                    <a:pt x="3008146" y="2661807"/>
-                  </a:lnTo>
-                  <a:lnTo>
-                    <a:pt x="3079768" y="2634634"/>
-                  </a:lnTo>
-                  <a:lnTo>
-                    <a:pt x="3151391" y="2585234"/>
-                  </a:lnTo>
-                  <a:lnTo>
-                    <a:pt x="3223013" y="2532961"/>
-                  </a:lnTo>
-                  <a:lnTo>
-                    <a:pt x="3294636" y="2477646"/>
-                  </a:lnTo>
-                  <a:lnTo>
-                    <a:pt x="3366258" y="2419114"/>
-                  </a:lnTo>
-                  <a:lnTo>
-                    <a:pt x="3437881" y="2357176"/>
-                  </a:lnTo>
-                  <a:lnTo>
-                    <a:pt x="3509503" y="2291635"/>
-                  </a:lnTo>
-                  <a:lnTo>
-                    <a:pt x="3581126" y="2222281"/>
-                  </a:lnTo>
-                  <a:lnTo>
-                    <a:pt x="3652748" y="2148892"/>
-                  </a:lnTo>
-                  <a:lnTo>
-                    <a:pt x="3724371" y="2071233"/>
-                  </a:lnTo>
-                  <a:lnTo>
-                    <a:pt x="3795993" y="1989056"/>
-                  </a:lnTo>
-                  <a:lnTo>
-                    <a:pt x="3867616" y="1902099"/>
-                  </a:lnTo>
-                  <a:lnTo>
-                    <a:pt x="3939238" y="1810082"/>
-                  </a:lnTo>
-                  <a:lnTo>
-                    <a:pt x="4010861" y="1712712"/>
-                  </a:lnTo>
-                  <a:lnTo>
-                    <a:pt x="4082483" y="1609678"/>
-                  </a:lnTo>
-                  <a:lnTo>
-                    <a:pt x="4154106" y="1500649"/>
-                  </a:lnTo>
-                  <a:lnTo>
-                    <a:pt x="4225729" y="1385277"/>
-                  </a:lnTo>
-                  <a:lnTo>
-                    <a:pt x="4297351" y="1263193"/>
-                  </a:lnTo>
-                  <a:lnTo>
-                    <a:pt x="4368974" y="1134006"/>
-                  </a:lnTo>
-                  <a:lnTo>
-                    <a:pt x="4440596" y="997304"/>
-                  </a:lnTo>
-                  <a:lnTo>
-                    <a:pt x="4512219" y="852649"/>
-                  </a:lnTo>
-                  <a:lnTo>
-                    <a:pt x="4583841" y="699577"/>
-                  </a:lnTo>
-                  <a:lnTo>
-                    <a:pt x="4655464" y="537601"/>
-                  </a:lnTo>
-                  <a:lnTo>
-                    <a:pt x="4727086" y="366201"/>
-                  </a:lnTo>
-                  <a:lnTo>
-                    <a:pt x="4798709" y="184830"/>
-                  </a:lnTo>
-                  <a:lnTo>
-                    <a:pt x="4867684" y="0"/>
+                    <a:pt x="70547" y="2844194"/>
+                  </a:lnTo>
+                  <a:lnTo>
+                    <a:pt x="141094" y="2837843"/>
+                  </a:lnTo>
+                  <a:lnTo>
+                    <a:pt x="211641" y="2831392"/>
+                  </a:lnTo>
+                  <a:lnTo>
+                    <a:pt x="282188" y="2824841"/>
+                  </a:lnTo>
+                  <a:lnTo>
+                    <a:pt x="352735" y="2818186"/>
+                  </a:lnTo>
+                  <a:lnTo>
+                    <a:pt x="423283" y="2811428"/>
+                  </a:lnTo>
+                  <a:lnTo>
+                    <a:pt x="493830" y="2804563"/>
+                  </a:lnTo>
+                  <a:lnTo>
+                    <a:pt x="564377" y="2797591"/>
+                  </a:lnTo>
+                  <a:lnTo>
+                    <a:pt x="634924" y="2790510"/>
+                  </a:lnTo>
+                  <a:lnTo>
+                    <a:pt x="705471" y="2783317"/>
+                  </a:lnTo>
+                  <a:lnTo>
+                    <a:pt x="776018" y="2776012"/>
+                  </a:lnTo>
+                  <a:lnTo>
+                    <a:pt x="846566" y="2768593"/>
+                  </a:lnTo>
+                  <a:lnTo>
+                    <a:pt x="917113" y="2761057"/>
+                  </a:lnTo>
+                  <a:lnTo>
+                    <a:pt x="987660" y="2753403"/>
+                  </a:lnTo>
+                  <a:lnTo>
+                    <a:pt x="1058207" y="2745629"/>
+                  </a:lnTo>
+                  <a:lnTo>
+                    <a:pt x="1128754" y="2737733"/>
+                  </a:lnTo>
+                  <a:lnTo>
+                    <a:pt x="1199301" y="2729713"/>
+                  </a:lnTo>
+                  <a:lnTo>
+                    <a:pt x="1269849" y="2721568"/>
+                  </a:lnTo>
+                  <a:lnTo>
+                    <a:pt x="1340396" y="2713295"/>
+                  </a:lnTo>
+                  <a:lnTo>
+                    <a:pt x="1410943" y="2704893"/>
+                  </a:lnTo>
+                  <a:lnTo>
+                    <a:pt x="1481490" y="2696358"/>
+                  </a:lnTo>
+                  <a:lnTo>
+                    <a:pt x="1552037" y="2687690"/>
+                  </a:lnTo>
+                  <a:lnTo>
+                    <a:pt x="1622584" y="2678886"/>
+                  </a:lnTo>
+                  <a:lnTo>
+                    <a:pt x="1693132" y="2669945"/>
+                  </a:lnTo>
+                  <a:lnTo>
+                    <a:pt x="1763679" y="2660863"/>
+                  </a:lnTo>
+                  <a:lnTo>
+                    <a:pt x="1834226" y="2651638"/>
+                  </a:lnTo>
+                  <a:lnTo>
+                    <a:pt x="1904773" y="2642269"/>
+                  </a:lnTo>
+                  <a:lnTo>
+                    <a:pt x="1975320" y="2632753"/>
+                  </a:lnTo>
+                  <a:lnTo>
+                    <a:pt x="2045868" y="2623089"/>
+                  </a:lnTo>
+                  <a:lnTo>
+                    <a:pt x="2116415" y="2613272"/>
+                  </a:lnTo>
+                  <a:lnTo>
+                    <a:pt x="2186962" y="2603302"/>
+                  </a:lnTo>
+                  <a:lnTo>
+                    <a:pt x="2257509" y="2593175"/>
+                  </a:lnTo>
+                  <a:lnTo>
+                    <a:pt x="2328056" y="2582890"/>
+                  </a:lnTo>
+                  <a:lnTo>
+                    <a:pt x="2398603" y="2572444"/>
+                  </a:lnTo>
+                  <a:lnTo>
+                    <a:pt x="2469151" y="2561833"/>
+                  </a:lnTo>
+                  <a:lnTo>
+                    <a:pt x="2539698" y="2551057"/>
+                  </a:lnTo>
+                  <a:lnTo>
+                    <a:pt x="2610245" y="2540112"/>
+                  </a:lnTo>
+                  <a:lnTo>
+                    <a:pt x="2680792" y="2528995"/>
+                  </a:lnTo>
+                  <a:lnTo>
+                    <a:pt x="2751339" y="2517704"/>
+                  </a:lnTo>
+                  <a:lnTo>
+                    <a:pt x="2821886" y="2506235"/>
+                  </a:lnTo>
+                  <a:lnTo>
+                    <a:pt x="2892434" y="2494588"/>
+                  </a:lnTo>
+                  <a:lnTo>
+                    <a:pt x="2962981" y="2482757"/>
+                  </a:lnTo>
+                  <a:lnTo>
+                    <a:pt x="3033528" y="2457411"/>
+                  </a:lnTo>
+                  <a:lnTo>
+                    <a:pt x="3104075" y="2411335"/>
+                  </a:lnTo>
+                  <a:lnTo>
+                    <a:pt x="3174622" y="2362578"/>
+                  </a:lnTo>
+                  <a:lnTo>
+                    <a:pt x="3245169" y="2310984"/>
+                  </a:lnTo>
+                  <a:lnTo>
+                    <a:pt x="3315717" y="2256389"/>
+                  </a:lnTo>
+                  <a:lnTo>
+                    <a:pt x="3386264" y="2198617"/>
+                  </a:lnTo>
+                  <a:lnTo>
+                    <a:pt x="3456811" y="2137485"/>
+                  </a:lnTo>
+                  <a:lnTo>
+                    <a:pt x="3527358" y="2072796"/>
+                  </a:lnTo>
+                  <a:lnTo>
+                    <a:pt x="3597905" y="2004343"/>
+                  </a:lnTo>
+                  <a:lnTo>
+                    <a:pt x="3668452" y="1931909"/>
+                  </a:lnTo>
+                  <a:lnTo>
+                    <a:pt x="3739000" y="1855260"/>
+                  </a:lnTo>
+                  <a:lnTo>
+                    <a:pt x="3809547" y="1774151"/>
+                  </a:lnTo>
+                  <a:lnTo>
+                    <a:pt x="3880094" y="1688324"/>
+                  </a:lnTo>
+                  <a:lnTo>
+                    <a:pt x="3950641" y="1597504"/>
+                  </a:lnTo>
+                  <a:lnTo>
+                    <a:pt x="4021188" y="1501400"/>
+                  </a:lnTo>
+                  <a:lnTo>
+                    <a:pt x="4091736" y="1399706"/>
+                  </a:lnTo>
+                  <a:lnTo>
+                    <a:pt x="4162283" y="1292094"/>
+                  </a:lnTo>
+                  <a:lnTo>
+                    <a:pt x="4232830" y="1178222"/>
+                  </a:lnTo>
+                  <a:lnTo>
+                    <a:pt x="4303377" y="1057726"/>
+                  </a:lnTo>
+                  <a:lnTo>
+                    <a:pt x="4373924" y="930219"/>
+                  </a:lnTo>
+                  <a:lnTo>
+                    <a:pt x="4444471" y="795294"/>
+                  </a:lnTo>
+                  <a:lnTo>
+                    <a:pt x="4515019" y="652519"/>
+                  </a:lnTo>
+                  <a:lnTo>
+                    <a:pt x="4585566" y="501439"/>
+                  </a:lnTo>
+                  <a:lnTo>
+                    <a:pt x="4656113" y="341568"/>
+                  </a:lnTo>
+                  <a:lnTo>
+                    <a:pt x="4726660" y="172397"/>
+                  </a:lnTo>
+                  <a:lnTo>
+                    <a:pt x="4794600" y="0"/>
                   </a:lnTo>
                 </a:path>
               </a:pathLst>
@@ -3904,312 +3904,312 @@
           </p:nvSpPr>
           <p:spPr>
             <a:xfrm>
-              <a:off x="1172049" y="3562829"/>
-              <a:ext cx="7090630" cy="1919784"/>
+              <a:off x="1264853" y="3598314"/>
+              <a:ext cx="6984170" cy="1790647"/>
             </a:xfrm>
             <a:custGeom>
               <a:avLst/>
               <a:pathLst>
-                <a:path w="7090630" h="1919784">
+                <a:path w="6984170" h="1790647">
                   <a:moveTo>
-                    <a:pt x="7090630" y="0"/>
+                    <a:pt x="6984170" y="0"/>
                   </a:moveTo>
                   <a:lnTo>
-                    <a:pt x="7019007" y="30776"/>
-                  </a:lnTo>
-                  <a:lnTo>
-                    <a:pt x="6947385" y="61078"/>
-                  </a:lnTo>
-                  <a:lnTo>
-                    <a:pt x="6875762" y="90912"/>
-                  </a:lnTo>
-                  <a:lnTo>
-                    <a:pt x="6804139" y="120285"/>
-                  </a:lnTo>
-                  <a:lnTo>
-                    <a:pt x="6732517" y="149206"/>
-                  </a:lnTo>
-                  <a:lnTo>
-                    <a:pt x="6660894" y="177680"/>
-                  </a:lnTo>
-                  <a:lnTo>
-                    <a:pt x="6589272" y="205714"/>
-                  </a:lnTo>
-                  <a:lnTo>
-                    <a:pt x="6517649" y="233316"/>
-                  </a:lnTo>
-                  <a:lnTo>
-                    <a:pt x="6446027" y="260493"/>
-                  </a:lnTo>
-                  <a:lnTo>
-                    <a:pt x="6374404" y="287249"/>
-                  </a:lnTo>
-                  <a:lnTo>
-                    <a:pt x="6302782" y="313593"/>
-                  </a:lnTo>
-                  <a:lnTo>
-                    <a:pt x="6231159" y="339531"/>
-                  </a:lnTo>
-                  <a:lnTo>
-                    <a:pt x="6159537" y="365068"/>
-                  </a:lnTo>
-                  <a:lnTo>
-                    <a:pt x="6087914" y="390211"/>
-                  </a:lnTo>
-                  <a:lnTo>
-                    <a:pt x="6016292" y="414966"/>
-                  </a:lnTo>
-                  <a:lnTo>
-                    <a:pt x="5944669" y="439339"/>
-                  </a:lnTo>
-                  <a:lnTo>
-                    <a:pt x="5873047" y="463336"/>
-                  </a:lnTo>
-                  <a:lnTo>
-                    <a:pt x="5801424" y="486962"/>
-                  </a:lnTo>
-                  <a:lnTo>
-                    <a:pt x="5729802" y="510224"/>
-                  </a:lnTo>
-                  <a:lnTo>
-                    <a:pt x="5658179" y="533128"/>
-                  </a:lnTo>
-                  <a:lnTo>
-                    <a:pt x="5586557" y="555677"/>
-                  </a:lnTo>
-                  <a:lnTo>
-                    <a:pt x="5514934" y="577879"/>
-                  </a:lnTo>
-                  <a:lnTo>
-                    <a:pt x="5443311" y="599738"/>
-                  </a:lnTo>
-                  <a:lnTo>
-                    <a:pt x="5371689" y="621260"/>
-                  </a:lnTo>
-                  <a:lnTo>
-                    <a:pt x="5300066" y="642449"/>
-                  </a:lnTo>
-                  <a:lnTo>
-                    <a:pt x="5228444" y="663312"/>
-                  </a:lnTo>
-                  <a:lnTo>
-                    <a:pt x="5156821" y="683853"/>
-                  </a:lnTo>
-                  <a:lnTo>
-                    <a:pt x="5085199" y="704077"/>
-                  </a:lnTo>
-                  <a:lnTo>
-                    <a:pt x="5013576" y="723988"/>
-                  </a:lnTo>
-                  <a:lnTo>
-                    <a:pt x="4941954" y="743593"/>
-                  </a:lnTo>
-                  <a:lnTo>
-                    <a:pt x="4870331" y="762895"/>
-                  </a:lnTo>
-                  <a:lnTo>
-                    <a:pt x="4798709" y="781899"/>
-                  </a:lnTo>
-                  <a:lnTo>
-                    <a:pt x="4727086" y="800609"/>
-                  </a:lnTo>
-                  <a:lnTo>
-                    <a:pt x="4655464" y="819031"/>
-                  </a:lnTo>
-                  <a:lnTo>
-                    <a:pt x="4583841" y="837169"/>
-                  </a:lnTo>
-                  <a:lnTo>
-                    <a:pt x="4512219" y="855027"/>
-                  </a:lnTo>
-                  <a:lnTo>
-                    <a:pt x="4440596" y="872609"/>
-                  </a:lnTo>
-                  <a:lnTo>
-                    <a:pt x="4368974" y="889920"/>
-                  </a:lnTo>
-                  <a:lnTo>
-                    <a:pt x="4297351" y="906964"/>
-                  </a:lnTo>
-                  <a:lnTo>
-                    <a:pt x="4225729" y="923745"/>
-                  </a:lnTo>
-                  <a:lnTo>
-                    <a:pt x="4154106" y="940267"/>
-                  </a:lnTo>
-                  <a:lnTo>
-                    <a:pt x="4082483" y="956534"/>
-                  </a:lnTo>
-                  <a:lnTo>
-                    <a:pt x="4010861" y="972550"/>
-                  </a:lnTo>
-                  <a:lnTo>
-                    <a:pt x="3939238" y="988319"/>
-                  </a:lnTo>
-                  <a:lnTo>
-                    <a:pt x="3867616" y="1003844"/>
-                  </a:lnTo>
-                  <a:lnTo>
-                    <a:pt x="3795993" y="1019130"/>
-                  </a:lnTo>
-                  <a:lnTo>
-                    <a:pt x="3724371" y="1034180"/>
-                  </a:lnTo>
-                  <a:lnTo>
-                    <a:pt x="3652748" y="1048998"/>
-                  </a:lnTo>
-                  <a:lnTo>
-                    <a:pt x="3581126" y="1063587"/>
-                  </a:lnTo>
-                  <a:lnTo>
-                    <a:pt x="3509503" y="1077951"/>
-                  </a:lnTo>
-                  <a:lnTo>
-                    <a:pt x="3437881" y="1092093"/>
-                  </a:lnTo>
-                  <a:lnTo>
-                    <a:pt x="3366258" y="1106017"/>
-                  </a:lnTo>
-                  <a:lnTo>
-                    <a:pt x="3294636" y="1119727"/>
-                  </a:lnTo>
-                  <a:lnTo>
-                    <a:pt x="3223013" y="1133224"/>
-                  </a:lnTo>
-                  <a:lnTo>
-                    <a:pt x="3151391" y="1146514"/>
-                  </a:lnTo>
-                  <a:lnTo>
-                    <a:pt x="3079768" y="1159598"/>
-                  </a:lnTo>
-                  <a:lnTo>
-                    <a:pt x="3008146" y="1191990"/>
-                  </a:lnTo>
-                  <a:lnTo>
-                    <a:pt x="2936523" y="1236107"/>
-                  </a:lnTo>
-                  <a:lnTo>
-                    <a:pt x="2864901" y="1277798"/>
-                  </a:lnTo>
-                  <a:lnTo>
-                    <a:pt x="2793278" y="1317197"/>
-                  </a:lnTo>
-                  <a:lnTo>
-                    <a:pt x="2721655" y="1354430"/>
-                  </a:lnTo>
-                  <a:lnTo>
-                    <a:pt x="2650033" y="1389617"/>
-                  </a:lnTo>
-                  <a:lnTo>
-                    <a:pt x="2578410" y="1422868"/>
-                  </a:lnTo>
-                  <a:lnTo>
-                    <a:pt x="2506788" y="1454291"/>
-                  </a:lnTo>
-                  <a:lnTo>
-                    <a:pt x="2435165" y="1483987"/>
-                  </a:lnTo>
-                  <a:lnTo>
-                    <a:pt x="2363543" y="1512050"/>
-                  </a:lnTo>
-                  <a:lnTo>
-                    <a:pt x="2291920" y="1538570"/>
-                  </a:lnTo>
-                  <a:lnTo>
-                    <a:pt x="2220298" y="1563633"/>
-                  </a:lnTo>
-                  <a:lnTo>
-                    <a:pt x="2148675" y="1587317"/>
-                  </a:lnTo>
-                  <a:lnTo>
-                    <a:pt x="2077053" y="1609699"/>
-                  </a:lnTo>
-                  <a:lnTo>
-                    <a:pt x="2005430" y="1630851"/>
-                  </a:lnTo>
-                  <a:lnTo>
-                    <a:pt x="1933808" y="1650839"/>
-                  </a:lnTo>
-                  <a:lnTo>
-                    <a:pt x="1862185" y="1669729"/>
-                  </a:lnTo>
-                  <a:lnTo>
-                    <a:pt x="1790563" y="1687580"/>
-                  </a:lnTo>
-                  <a:lnTo>
-                    <a:pt x="1718940" y="1704450"/>
-                  </a:lnTo>
-                  <a:lnTo>
-                    <a:pt x="1647318" y="1720392"/>
-                  </a:lnTo>
-                  <a:lnTo>
-                    <a:pt x="1575695" y="1735458"/>
-                  </a:lnTo>
-                  <a:lnTo>
-                    <a:pt x="1504073" y="1749695"/>
-                  </a:lnTo>
-                  <a:lnTo>
-                    <a:pt x="1432450" y="1763150"/>
-                  </a:lnTo>
-                  <a:lnTo>
-                    <a:pt x="1360827" y="1775865"/>
-                  </a:lnTo>
-                  <a:lnTo>
-                    <a:pt x="1289205" y="1787881"/>
-                  </a:lnTo>
-                  <a:lnTo>
-                    <a:pt x="1217582" y="1799236"/>
-                  </a:lnTo>
-                  <a:lnTo>
-                    <a:pt x="1145960" y="1809967"/>
-                  </a:lnTo>
-                  <a:lnTo>
-                    <a:pt x="1074337" y="1820108"/>
-                  </a:lnTo>
-                  <a:lnTo>
-                    <a:pt x="1002715" y="1829692"/>
-                  </a:lnTo>
-                  <a:lnTo>
-                    <a:pt x="931092" y="1838748"/>
-                  </a:lnTo>
-                  <a:lnTo>
-                    <a:pt x="859470" y="1847307"/>
-                  </a:lnTo>
-                  <a:lnTo>
-                    <a:pt x="787847" y="1855395"/>
-                  </a:lnTo>
-                  <a:lnTo>
-                    <a:pt x="716225" y="1863039"/>
-                  </a:lnTo>
-                  <a:lnTo>
-                    <a:pt x="644602" y="1870262"/>
-                  </a:lnTo>
-                  <a:lnTo>
-                    <a:pt x="572980" y="1877088"/>
-                  </a:lnTo>
-                  <a:lnTo>
-                    <a:pt x="501357" y="1883539"/>
-                  </a:lnTo>
-                  <a:lnTo>
-                    <a:pt x="429735" y="1889635"/>
-                  </a:lnTo>
-                  <a:lnTo>
-                    <a:pt x="358112" y="1895396"/>
-                  </a:lnTo>
-                  <a:lnTo>
-                    <a:pt x="286490" y="1900840"/>
-                  </a:lnTo>
-                  <a:lnTo>
-                    <a:pt x="214867" y="1905985"/>
-                  </a:lnTo>
-                  <a:lnTo>
-                    <a:pt x="143245" y="1910847"/>
-                  </a:lnTo>
-                  <a:lnTo>
-                    <a:pt x="71622" y="1915442"/>
-                  </a:lnTo>
-                  <a:lnTo>
-                    <a:pt x="0" y="1919784"/>
+                    <a:pt x="6913622" y="28706"/>
+                  </a:lnTo>
+                  <a:lnTo>
+                    <a:pt x="6843075" y="56969"/>
+                  </a:lnTo>
+                  <a:lnTo>
+                    <a:pt x="6772528" y="84796"/>
+                  </a:lnTo>
+                  <a:lnTo>
+                    <a:pt x="6701981" y="112194"/>
+                  </a:lnTo>
+                  <a:lnTo>
+                    <a:pt x="6631434" y="139169"/>
+                  </a:lnTo>
+                  <a:lnTo>
+                    <a:pt x="6560887" y="165728"/>
+                  </a:lnTo>
+                  <a:lnTo>
+                    <a:pt x="6490339" y="191877"/>
+                  </a:lnTo>
+                  <a:lnTo>
+                    <a:pt x="6419792" y="217622"/>
+                  </a:lnTo>
+                  <a:lnTo>
+                    <a:pt x="6349245" y="242970"/>
+                  </a:lnTo>
+                  <a:lnTo>
+                    <a:pt x="6278698" y="267927"/>
+                  </a:lnTo>
+                  <a:lnTo>
+                    <a:pt x="6208151" y="292499"/>
+                  </a:lnTo>
+                  <a:lnTo>
+                    <a:pt x="6137604" y="316692"/>
+                  </a:lnTo>
+                  <a:lnTo>
+                    <a:pt x="6067056" y="340511"/>
+                  </a:lnTo>
+                  <a:lnTo>
+                    <a:pt x="5996509" y="363963"/>
+                  </a:lnTo>
+                  <a:lnTo>
+                    <a:pt x="5925962" y="387053"/>
+                  </a:lnTo>
+                  <a:lnTo>
+                    <a:pt x="5855415" y="409786"/>
+                  </a:lnTo>
+                  <a:lnTo>
+                    <a:pt x="5784868" y="432169"/>
+                  </a:lnTo>
+                  <a:lnTo>
+                    <a:pt x="5714320" y="454206"/>
+                  </a:lnTo>
+                  <a:lnTo>
+                    <a:pt x="5643773" y="475903"/>
+                  </a:lnTo>
+                  <a:lnTo>
+                    <a:pt x="5573226" y="497266"/>
+                  </a:lnTo>
+                  <a:lnTo>
+                    <a:pt x="5502679" y="518299"/>
+                  </a:lnTo>
+                  <a:lnTo>
+                    <a:pt x="5432132" y="539007"/>
+                  </a:lnTo>
+                  <a:lnTo>
+                    <a:pt x="5361585" y="559396"/>
+                  </a:lnTo>
+                  <a:lnTo>
+                    <a:pt x="5291037" y="579470"/>
+                  </a:lnTo>
+                  <a:lnTo>
+                    <a:pt x="5220490" y="599234"/>
+                  </a:lnTo>
+                  <a:lnTo>
+                    <a:pt x="5149943" y="618693"/>
+                  </a:lnTo>
+                  <a:lnTo>
+                    <a:pt x="5079396" y="637852"/>
+                  </a:lnTo>
+                  <a:lnTo>
+                    <a:pt x="5008849" y="656716"/>
+                  </a:lnTo>
+                  <a:lnTo>
+                    <a:pt x="4938302" y="675288"/>
+                  </a:lnTo>
+                  <a:lnTo>
+                    <a:pt x="4867754" y="693574"/>
+                  </a:lnTo>
+                  <a:lnTo>
+                    <a:pt x="4797207" y="711577"/>
+                  </a:lnTo>
+                  <a:lnTo>
+                    <a:pt x="4726660" y="729303"/>
+                  </a:lnTo>
+                  <a:lnTo>
+                    <a:pt x="4656113" y="746755"/>
+                  </a:lnTo>
+                  <a:lnTo>
+                    <a:pt x="4585566" y="763938"/>
+                  </a:lnTo>
+                  <a:lnTo>
+                    <a:pt x="4515019" y="780856"/>
+                  </a:lnTo>
+                  <a:lnTo>
+                    <a:pt x="4444471" y="797513"/>
+                  </a:lnTo>
+                  <a:lnTo>
+                    <a:pt x="4373924" y="813912"/>
+                  </a:lnTo>
+                  <a:lnTo>
+                    <a:pt x="4303377" y="830059"/>
+                  </a:lnTo>
+                  <a:lnTo>
+                    <a:pt x="4232830" y="845956"/>
+                  </a:lnTo>
+                  <a:lnTo>
+                    <a:pt x="4162283" y="861608"/>
+                  </a:lnTo>
+                  <a:lnTo>
+                    <a:pt x="4091736" y="877019"/>
+                  </a:lnTo>
+                  <a:lnTo>
+                    <a:pt x="4021188" y="892191"/>
+                  </a:lnTo>
+                  <a:lnTo>
+                    <a:pt x="3950641" y="907130"/>
+                  </a:lnTo>
+                  <a:lnTo>
+                    <a:pt x="3880094" y="921838"/>
+                  </a:lnTo>
+                  <a:lnTo>
+                    <a:pt x="3809547" y="936319"/>
+                  </a:lnTo>
+                  <a:lnTo>
+                    <a:pt x="3739000" y="950577"/>
+                  </a:lnTo>
+                  <a:lnTo>
+                    <a:pt x="3668452" y="964615"/>
+                  </a:lnTo>
+                  <a:lnTo>
+                    <a:pt x="3597905" y="978436"/>
+                  </a:lnTo>
+                  <a:lnTo>
+                    <a:pt x="3527358" y="992043"/>
+                  </a:lnTo>
+                  <a:lnTo>
+                    <a:pt x="3456811" y="1005441"/>
+                  </a:lnTo>
+                  <a:lnTo>
+                    <a:pt x="3386264" y="1018632"/>
+                  </a:lnTo>
+                  <a:lnTo>
+                    <a:pt x="3315717" y="1031620"/>
+                  </a:lnTo>
+                  <a:lnTo>
+                    <a:pt x="3245169" y="1044407"/>
+                  </a:lnTo>
+                  <a:lnTo>
+                    <a:pt x="3174622" y="1056996"/>
+                  </a:lnTo>
+                  <a:lnTo>
+                    <a:pt x="3104075" y="1069392"/>
+                  </a:lnTo>
+                  <a:lnTo>
+                    <a:pt x="3033528" y="1081596"/>
+                  </a:lnTo>
+                  <a:lnTo>
+                    <a:pt x="2962981" y="1111809"/>
+                  </a:lnTo>
+                  <a:lnTo>
+                    <a:pt x="2892434" y="1152959"/>
+                  </a:lnTo>
+                  <a:lnTo>
+                    <a:pt x="2821886" y="1191845"/>
+                  </a:lnTo>
+                  <a:lnTo>
+                    <a:pt x="2751339" y="1228594"/>
+                  </a:lnTo>
+                  <a:lnTo>
+                    <a:pt x="2680792" y="1263323"/>
+                  </a:lnTo>
+                  <a:lnTo>
+                    <a:pt x="2610245" y="1296142"/>
+                  </a:lnTo>
+                  <a:lnTo>
+                    <a:pt x="2539698" y="1327157"/>
+                  </a:lnTo>
+                  <a:lnTo>
+                    <a:pt x="2469151" y="1356467"/>
+                  </a:lnTo>
+                  <a:lnTo>
+                    <a:pt x="2398603" y="1384165"/>
+                  </a:lnTo>
+                  <a:lnTo>
+                    <a:pt x="2328056" y="1410340"/>
+                  </a:lnTo>
+                  <a:lnTo>
+                    <a:pt x="2257509" y="1435076"/>
+                  </a:lnTo>
+                  <a:lnTo>
+                    <a:pt x="2186962" y="1458453"/>
+                  </a:lnTo>
+                  <a:lnTo>
+                    <a:pt x="2116415" y="1480544"/>
+                  </a:lnTo>
+                  <a:lnTo>
+                    <a:pt x="2045868" y="1501420"/>
+                  </a:lnTo>
+                  <a:lnTo>
+                    <a:pt x="1975320" y="1521149"/>
+                  </a:lnTo>
+                  <a:lnTo>
+                    <a:pt x="1904773" y="1539793"/>
+                  </a:lnTo>
+                  <a:lnTo>
+                    <a:pt x="1834226" y="1557412"/>
+                  </a:lnTo>
+                  <a:lnTo>
+                    <a:pt x="1763679" y="1574063"/>
+                  </a:lnTo>
+                  <a:lnTo>
+                    <a:pt x="1693132" y="1589798"/>
+                  </a:lnTo>
+                  <a:lnTo>
+                    <a:pt x="1622584" y="1604668"/>
+                  </a:lnTo>
+                  <a:lnTo>
+                    <a:pt x="1552037" y="1618720"/>
+                  </a:lnTo>
+                  <a:lnTo>
+                    <a:pt x="1481490" y="1632000"/>
+                  </a:lnTo>
+                  <a:lnTo>
+                    <a:pt x="1410943" y="1644549"/>
+                  </a:lnTo>
+                  <a:lnTo>
+                    <a:pt x="1340396" y="1656409"/>
+                  </a:lnTo>
+                  <a:lnTo>
+                    <a:pt x="1269849" y="1667617"/>
+                  </a:lnTo>
+                  <a:lnTo>
+                    <a:pt x="1199301" y="1678208"/>
+                  </a:lnTo>
+                  <a:lnTo>
+                    <a:pt x="1128754" y="1688217"/>
+                  </a:lnTo>
+                  <a:lnTo>
+                    <a:pt x="1058207" y="1697676"/>
+                  </a:lnTo>
+                  <a:lnTo>
+                    <a:pt x="987660" y="1706615"/>
+                  </a:lnTo>
+                  <a:lnTo>
+                    <a:pt x="917113" y="1715063"/>
+                  </a:lnTo>
+                  <a:lnTo>
+                    <a:pt x="846566" y="1723045"/>
+                  </a:lnTo>
+                  <a:lnTo>
+                    <a:pt x="776018" y="1730590"/>
+                  </a:lnTo>
+                  <a:lnTo>
+                    <a:pt x="705471" y="1737719"/>
+                  </a:lnTo>
+                  <a:lnTo>
+                    <a:pt x="634924" y="1744456"/>
+                  </a:lnTo>
+                  <a:lnTo>
+                    <a:pt x="564377" y="1750823"/>
+                  </a:lnTo>
+                  <a:lnTo>
+                    <a:pt x="493830" y="1756840"/>
+                  </a:lnTo>
+                  <a:lnTo>
+                    <a:pt x="423283" y="1762526"/>
+                  </a:lnTo>
+                  <a:lnTo>
+                    <a:pt x="352735" y="1767899"/>
+                  </a:lnTo>
+                  <a:lnTo>
+                    <a:pt x="282188" y="1772977"/>
+                  </a:lnTo>
+                  <a:lnTo>
+                    <a:pt x="211641" y="1777776"/>
+                  </a:lnTo>
+                  <a:lnTo>
+                    <a:pt x="141094" y="1782311"/>
+                  </a:lnTo>
+                  <a:lnTo>
+                    <a:pt x="70547" y="1786597"/>
+                  </a:lnTo>
+                  <a:lnTo>
+                    <a:pt x="0" y="1790647"/>
                   </a:lnTo>
                 </a:path>
               </a:pathLst>
@@ -4229,264 +4229,264 @@
           </p:nvSpPr>
           <p:spPr>
             <a:xfrm>
-              <a:off x="1172049" y="2073503"/>
-              <a:ext cx="5900974" cy="3305073"/>
+              <a:off x="1264853" y="2209169"/>
+              <a:ext cx="5812376" cy="3082753"/>
             </a:xfrm>
             <a:custGeom>
               <a:avLst/>
               <a:pathLst>
-                <a:path w="5900974" h="3305073">
+                <a:path w="5812376" h="3082753">
                   <a:moveTo>
-                    <a:pt x="0" y="3305073"/>
+                    <a:pt x="0" y="3082753"/>
                   </a:moveTo>
                   <a:lnTo>
-                    <a:pt x="71622" y="3298515"/>
-                  </a:lnTo>
-                  <a:lnTo>
-                    <a:pt x="143245" y="3291715"/>
-                  </a:lnTo>
-                  <a:lnTo>
-                    <a:pt x="214867" y="3284666"/>
-                  </a:lnTo>
-                  <a:lnTo>
-                    <a:pt x="286490" y="3277358"/>
-                  </a:lnTo>
-                  <a:lnTo>
-                    <a:pt x="358112" y="3269782"/>
-                  </a:lnTo>
-                  <a:lnTo>
-                    <a:pt x="429735" y="3261928"/>
-                  </a:lnTo>
-                  <a:lnTo>
-                    <a:pt x="501357" y="3253786"/>
-                  </a:lnTo>
-                  <a:lnTo>
-                    <a:pt x="572980" y="3245344"/>
-                  </a:lnTo>
-                  <a:lnTo>
-                    <a:pt x="644602" y="3236593"/>
-                  </a:lnTo>
-                  <a:lnTo>
-                    <a:pt x="716225" y="3227521"/>
-                  </a:lnTo>
-                  <a:lnTo>
-                    <a:pt x="787847" y="3218116"/>
-                  </a:lnTo>
-                  <a:lnTo>
-                    <a:pt x="859470" y="3208365"/>
-                  </a:lnTo>
-                  <a:lnTo>
-                    <a:pt x="931092" y="3198256"/>
-                  </a:lnTo>
-                  <a:lnTo>
-                    <a:pt x="1002715" y="3187777"/>
-                  </a:lnTo>
-                  <a:lnTo>
-                    <a:pt x="1074337" y="3176912"/>
-                  </a:lnTo>
-                  <a:lnTo>
-                    <a:pt x="1145960" y="3165649"/>
-                  </a:lnTo>
-                  <a:lnTo>
-                    <a:pt x="1217582" y="3153973"/>
-                  </a:lnTo>
-                  <a:lnTo>
-                    <a:pt x="1289205" y="3141867"/>
-                  </a:lnTo>
-                  <a:lnTo>
-                    <a:pt x="1360827" y="3129318"/>
-                  </a:lnTo>
-                  <a:lnTo>
-                    <a:pt x="1432450" y="3116308"/>
-                  </a:lnTo>
-                  <a:lnTo>
-                    <a:pt x="1504073" y="3102820"/>
-                  </a:lnTo>
-                  <a:lnTo>
-                    <a:pt x="1575695" y="3088837"/>
-                  </a:lnTo>
-                  <a:lnTo>
-                    <a:pt x="1647318" y="3074341"/>
-                  </a:lnTo>
-                  <a:lnTo>
-                    <a:pt x="1718940" y="3059312"/>
-                  </a:lnTo>
-                  <a:lnTo>
-                    <a:pt x="1790563" y="3043732"/>
-                  </a:lnTo>
-                  <a:lnTo>
-                    <a:pt x="1862185" y="3027581"/>
-                  </a:lnTo>
-                  <a:lnTo>
-                    <a:pt x="1933808" y="3010836"/>
-                  </a:lnTo>
-                  <a:lnTo>
-                    <a:pt x="2005430" y="2993476"/>
-                  </a:lnTo>
-                  <a:lnTo>
-                    <a:pt x="2077053" y="2975480"/>
-                  </a:lnTo>
-                  <a:lnTo>
-                    <a:pt x="2148675" y="2956822"/>
-                  </a:lnTo>
-                  <a:lnTo>
-                    <a:pt x="2220298" y="2937480"/>
-                  </a:lnTo>
-                  <a:lnTo>
-                    <a:pt x="2291920" y="2917428"/>
-                  </a:lnTo>
-                  <a:lnTo>
-                    <a:pt x="2363543" y="2896640"/>
-                  </a:lnTo>
-                  <a:lnTo>
-                    <a:pt x="2435165" y="2875089"/>
-                  </a:lnTo>
-                  <a:lnTo>
-                    <a:pt x="2506788" y="2852746"/>
-                  </a:lnTo>
-                  <a:lnTo>
-                    <a:pt x="2578410" y="2829584"/>
-                  </a:lnTo>
-                  <a:lnTo>
-                    <a:pt x="2650033" y="2805571"/>
-                  </a:lnTo>
-                  <a:lnTo>
-                    <a:pt x="2721655" y="2780677"/>
-                  </a:lnTo>
-                  <a:lnTo>
-                    <a:pt x="2793278" y="2754869"/>
-                  </a:lnTo>
-                  <a:lnTo>
-                    <a:pt x="2864901" y="2728114"/>
-                  </a:lnTo>
-                  <a:lnTo>
-                    <a:pt x="2936523" y="2700376"/>
-                  </a:lnTo>
-                  <a:lnTo>
-                    <a:pt x="3008146" y="2671621"/>
-                  </a:lnTo>
-                  <a:lnTo>
-                    <a:pt x="3079768" y="2641809"/>
-                  </a:lnTo>
-                  <a:lnTo>
-                    <a:pt x="3151391" y="2610904"/>
-                  </a:lnTo>
-                  <a:lnTo>
-                    <a:pt x="3223013" y="2578864"/>
-                  </a:lnTo>
-                  <a:lnTo>
-                    <a:pt x="3294636" y="2545648"/>
-                  </a:lnTo>
-                  <a:lnTo>
-                    <a:pt x="3366258" y="2511213"/>
-                  </a:lnTo>
-                  <a:lnTo>
-                    <a:pt x="3437881" y="2475513"/>
-                  </a:lnTo>
-                  <a:lnTo>
-                    <a:pt x="3509503" y="2438503"/>
-                  </a:lnTo>
-                  <a:lnTo>
-                    <a:pt x="3581126" y="2400135"/>
-                  </a:lnTo>
-                  <a:lnTo>
-                    <a:pt x="3652748" y="2360358"/>
-                  </a:lnTo>
-                  <a:lnTo>
-                    <a:pt x="3724371" y="2319121"/>
-                  </a:lnTo>
-                  <a:lnTo>
-                    <a:pt x="3795993" y="2276371"/>
-                  </a:lnTo>
-                  <a:lnTo>
-                    <a:pt x="3867616" y="2232051"/>
-                  </a:lnTo>
-                  <a:lnTo>
-                    <a:pt x="3939238" y="2186104"/>
-                  </a:lnTo>
-                  <a:lnTo>
-                    <a:pt x="4010861" y="2138471"/>
-                  </a:lnTo>
-                  <a:lnTo>
-                    <a:pt x="4082483" y="2089089"/>
-                  </a:lnTo>
-                  <a:lnTo>
-                    <a:pt x="4154106" y="2037895"/>
-                  </a:lnTo>
-                  <a:lnTo>
-                    <a:pt x="4225729" y="1984821"/>
-                  </a:lnTo>
-                  <a:lnTo>
-                    <a:pt x="4297351" y="1929799"/>
-                  </a:lnTo>
-                  <a:lnTo>
-                    <a:pt x="4368974" y="1872757"/>
-                  </a:lnTo>
-                  <a:lnTo>
-                    <a:pt x="4440596" y="1813622"/>
-                  </a:lnTo>
-                  <a:lnTo>
-                    <a:pt x="4512219" y="1752316"/>
-                  </a:lnTo>
-                  <a:lnTo>
-                    <a:pt x="4583841" y="1688759"/>
-                  </a:lnTo>
-                  <a:lnTo>
-                    <a:pt x="4655464" y="1622869"/>
-                  </a:lnTo>
-                  <a:lnTo>
-                    <a:pt x="4727086" y="1554561"/>
-                  </a:lnTo>
-                  <a:lnTo>
-                    <a:pt x="4798709" y="1483745"/>
-                  </a:lnTo>
-                  <a:lnTo>
-                    <a:pt x="4870331" y="1410330"/>
-                  </a:lnTo>
-                  <a:lnTo>
-                    <a:pt x="4941954" y="1334220"/>
-                  </a:lnTo>
-                  <a:lnTo>
-                    <a:pt x="5013576" y="1255316"/>
-                  </a:lnTo>
-                  <a:lnTo>
-                    <a:pt x="5085199" y="1173515"/>
-                  </a:lnTo>
-                  <a:lnTo>
-                    <a:pt x="5156821" y="1088712"/>
-                  </a:lnTo>
-                  <a:lnTo>
-                    <a:pt x="5228444" y="1000796"/>
-                  </a:lnTo>
-                  <a:lnTo>
-                    <a:pt x="5300066" y="909653"/>
-                  </a:lnTo>
-                  <a:lnTo>
-                    <a:pt x="5371689" y="815165"/>
-                  </a:lnTo>
-                  <a:lnTo>
-                    <a:pt x="5443311" y="717207"/>
-                  </a:lnTo>
-                  <a:lnTo>
-                    <a:pt x="5514934" y="615654"/>
-                  </a:lnTo>
-                  <a:lnTo>
-                    <a:pt x="5586557" y="510374"/>
-                  </a:lnTo>
-                  <a:lnTo>
-                    <a:pt x="5658179" y="401228"/>
-                  </a:lnTo>
-                  <a:lnTo>
-                    <a:pt x="5729802" y="288076"/>
-                  </a:lnTo>
-                  <a:lnTo>
-                    <a:pt x="5801424" y="170771"/>
-                  </a:lnTo>
-                  <a:lnTo>
-                    <a:pt x="5873047" y="49160"/>
-                  </a:lnTo>
-                  <a:lnTo>
-                    <a:pt x="5900974" y="0"/>
+                    <a:pt x="70547" y="3076636"/>
+                  </a:lnTo>
+                  <a:lnTo>
+                    <a:pt x="141094" y="3070293"/>
+                  </a:lnTo>
+                  <a:lnTo>
+                    <a:pt x="211641" y="3063719"/>
+                  </a:lnTo>
+                  <a:lnTo>
+                    <a:pt x="282188" y="3056902"/>
+                  </a:lnTo>
+                  <a:lnTo>
+                    <a:pt x="352735" y="3049836"/>
+                  </a:lnTo>
+                  <a:lnTo>
+                    <a:pt x="423283" y="3042510"/>
+                  </a:lnTo>
+                  <a:lnTo>
+                    <a:pt x="493830" y="3034916"/>
+                  </a:lnTo>
+                  <a:lnTo>
+                    <a:pt x="564377" y="3027042"/>
+                  </a:lnTo>
+                  <a:lnTo>
+                    <a:pt x="634924" y="3018880"/>
+                  </a:lnTo>
+                  <a:lnTo>
+                    <a:pt x="705471" y="3010417"/>
+                  </a:lnTo>
+                  <a:lnTo>
+                    <a:pt x="776018" y="3001645"/>
+                  </a:lnTo>
+                  <a:lnTo>
+                    <a:pt x="846566" y="2992550"/>
+                  </a:lnTo>
+                  <a:lnTo>
+                    <a:pt x="917113" y="2983121"/>
+                  </a:lnTo>
+                  <a:lnTo>
+                    <a:pt x="987660" y="2973347"/>
+                  </a:lnTo>
+                  <a:lnTo>
+                    <a:pt x="1058207" y="2963213"/>
+                  </a:lnTo>
+                  <a:lnTo>
+                    <a:pt x="1128754" y="2952707"/>
+                  </a:lnTo>
+                  <a:lnTo>
+                    <a:pt x="1199301" y="2941816"/>
+                  </a:lnTo>
+                  <a:lnTo>
+                    <a:pt x="1269849" y="2930525"/>
+                  </a:lnTo>
+                  <a:lnTo>
+                    <a:pt x="1340396" y="2918820"/>
+                  </a:lnTo>
+                  <a:lnTo>
+                    <a:pt x="1410943" y="2906685"/>
+                  </a:lnTo>
+                  <a:lnTo>
+                    <a:pt x="1481490" y="2894104"/>
+                  </a:lnTo>
+                  <a:lnTo>
+                    <a:pt x="1552037" y="2881062"/>
+                  </a:lnTo>
+                  <a:lnTo>
+                    <a:pt x="1622584" y="2867541"/>
+                  </a:lnTo>
+                  <a:lnTo>
+                    <a:pt x="1693132" y="2853524"/>
+                  </a:lnTo>
+                  <a:lnTo>
+                    <a:pt x="1763679" y="2838992"/>
+                  </a:lnTo>
+                  <a:lnTo>
+                    <a:pt x="1834226" y="2823926"/>
+                  </a:lnTo>
+                  <a:lnTo>
+                    <a:pt x="1904773" y="2808308"/>
+                  </a:lnTo>
+                  <a:lnTo>
+                    <a:pt x="1975320" y="2792116"/>
+                  </a:lnTo>
+                  <a:lnTo>
+                    <a:pt x="2045868" y="2775330"/>
+                  </a:lnTo>
+                  <a:lnTo>
+                    <a:pt x="2116415" y="2757928"/>
+                  </a:lnTo>
+                  <a:lnTo>
+                    <a:pt x="2186962" y="2739887"/>
+                  </a:lnTo>
+                  <a:lnTo>
+                    <a:pt x="2257509" y="2721184"/>
+                  </a:lnTo>
+                  <a:lnTo>
+                    <a:pt x="2328056" y="2701794"/>
+                  </a:lnTo>
+                  <a:lnTo>
+                    <a:pt x="2398603" y="2681692"/>
+                  </a:lnTo>
+                  <a:lnTo>
+                    <a:pt x="2469151" y="2660853"/>
+                  </a:lnTo>
+                  <a:lnTo>
+                    <a:pt x="2539698" y="2639248"/>
+                  </a:lnTo>
+                  <a:lnTo>
+                    <a:pt x="2610245" y="2616851"/>
+                  </a:lnTo>
+                  <a:lnTo>
+                    <a:pt x="2680792" y="2593631"/>
+                  </a:lnTo>
+                  <a:lnTo>
+                    <a:pt x="2751339" y="2569559"/>
+                  </a:lnTo>
+                  <a:lnTo>
+                    <a:pt x="2821886" y="2544604"/>
+                  </a:lnTo>
+                  <a:lnTo>
+                    <a:pt x="2892434" y="2518732"/>
+                  </a:lnTo>
+                  <a:lnTo>
+                    <a:pt x="2962981" y="2491911"/>
+                  </a:lnTo>
+                  <a:lnTo>
+                    <a:pt x="3033528" y="2464105"/>
+                  </a:lnTo>
+                  <a:lnTo>
+                    <a:pt x="3104075" y="2435278"/>
+                  </a:lnTo>
+                  <a:lnTo>
+                    <a:pt x="3174622" y="2405393"/>
+                  </a:lnTo>
+                  <a:lnTo>
+                    <a:pt x="3245169" y="2374412"/>
+                  </a:lnTo>
+                  <a:lnTo>
+                    <a:pt x="3315717" y="2342293"/>
+                  </a:lnTo>
+                  <a:lnTo>
+                    <a:pt x="3386264" y="2308995"/>
+                  </a:lnTo>
+                  <a:lnTo>
+                    <a:pt x="3456811" y="2274474"/>
+                  </a:lnTo>
+                  <a:lnTo>
+                    <a:pt x="3527358" y="2238687"/>
+                  </a:lnTo>
+                  <a:lnTo>
+                    <a:pt x="3597905" y="2201586"/>
+                  </a:lnTo>
+                  <a:lnTo>
+                    <a:pt x="3668452" y="2163123"/>
+                  </a:lnTo>
+                  <a:lnTo>
+                    <a:pt x="3739000" y="2123248"/>
+                  </a:lnTo>
+                  <a:lnTo>
+                    <a:pt x="3809547" y="2081909"/>
+                  </a:lnTo>
+                  <a:lnTo>
+                    <a:pt x="3880094" y="2039053"/>
+                  </a:lnTo>
+                  <a:lnTo>
+                    <a:pt x="3950641" y="1994624"/>
+                  </a:lnTo>
+                  <a:lnTo>
+                    <a:pt x="4021188" y="1948564"/>
+                  </a:lnTo>
+                  <a:lnTo>
+                    <a:pt x="4091736" y="1900813"/>
+                  </a:lnTo>
+                  <a:lnTo>
+                    <a:pt x="4162283" y="1851309"/>
+                  </a:lnTo>
+                  <a:lnTo>
+                    <a:pt x="4232830" y="1799988"/>
+                  </a:lnTo>
+                  <a:lnTo>
+                    <a:pt x="4303377" y="1746784"/>
+                  </a:lnTo>
+                  <a:lnTo>
+                    <a:pt x="4373924" y="1691626"/>
+                  </a:lnTo>
+                  <a:lnTo>
+                    <a:pt x="4444471" y="1634444"/>
+                  </a:lnTo>
+                  <a:lnTo>
+                    <a:pt x="4515019" y="1575162"/>
+                  </a:lnTo>
+                  <a:lnTo>
+                    <a:pt x="4585566" y="1513705"/>
+                  </a:lnTo>
+                  <a:lnTo>
+                    <a:pt x="4656113" y="1449991"/>
+                  </a:lnTo>
+                  <a:lnTo>
+                    <a:pt x="4726660" y="1383939"/>
+                  </a:lnTo>
+                  <a:lnTo>
+                    <a:pt x="4797207" y="1315462"/>
+                  </a:lnTo>
+                  <a:lnTo>
+                    <a:pt x="4867754" y="1244472"/>
+                  </a:lnTo>
+                  <a:lnTo>
+                    <a:pt x="4938302" y="1170875"/>
+                  </a:lnTo>
+                  <a:lnTo>
+                    <a:pt x="5008849" y="1094577"/>
+                  </a:lnTo>
+                  <a:lnTo>
+                    <a:pt x="5079396" y="1015479"/>
+                  </a:lnTo>
+                  <a:lnTo>
+                    <a:pt x="5149943" y="933477"/>
+                  </a:lnTo>
+                  <a:lnTo>
+                    <a:pt x="5220490" y="848464"/>
+                  </a:lnTo>
+                  <a:lnTo>
+                    <a:pt x="5291037" y="760331"/>
+                  </a:lnTo>
+                  <a:lnTo>
+                    <a:pt x="5361585" y="668963"/>
+                  </a:lnTo>
+                  <a:lnTo>
+                    <a:pt x="5432132" y="574242"/>
+                  </a:lnTo>
+                  <a:lnTo>
+                    <a:pt x="5502679" y="476043"/>
+                  </a:lnTo>
+                  <a:lnTo>
+                    <a:pt x="5573226" y="374239"/>
+                  </a:lnTo>
+                  <a:lnTo>
+                    <a:pt x="5643773" y="268699"/>
+                  </a:lnTo>
+                  <a:lnTo>
+                    <a:pt x="5714320" y="159284"/>
+                  </a:lnTo>
+                  <a:lnTo>
+                    <a:pt x="5784868" y="45853"/>
+                  </a:lnTo>
+                  <a:lnTo>
+                    <a:pt x="5812376" y="0"/>
                   </a:lnTo>
                 </a:path>
               </a:pathLst>
@@ -4515,21 +4515,21 @@
           </p:nvSpPr>
           <p:spPr>
             <a:xfrm>
-              <a:off x="817517" y="4727786"/>
-              <a:ext cx="7799693" cy="0"/>
+              <a:off x="915645" y="4684908"/>
+              <a:ext cx="7682587" cy="0"/>
             </a:xfrm>
             <a:custGeom>
               <a:avLst/>
               <a:pathLst>
-                <a:path w="7799693" h="0">
+                <a:path w="7682587" h="0">
                   <a:moveTo>
                     <a:pt x="0" y="0"/>
                   </a:moveTo>
                   <a:lnTo>
-                    <a:pt x="7799693" y="0"/>
-                  </a:lnTo>
-                  <a:lnTo>
-                    <a:pt x="7799693" y="0"/>
+                    <a:pt x="7682587" y="0"/>
+                  </a:lnTo>
+                  <a:lnTo>
+                    <a:pt x="7682587" y="0"/>
                   </a:lnTo>
                 </a:path>
               </a:pathLst>
@@ -4558,15 +4558,15 @@
           </p:nvSpPr>
           <p:spPr>
             <a:xfrm>
-              <a:off x="4222163" y="2073503"/>
-              <a:ext cx="0" cy="3649639"/>
+              <a:off x="4269172" y="2209169"/>
+              <a:ext cx="0" cy="3404141"/>
             </a:xfrm>
             <a:custGeom>
               <a:avLst/>
               <a:pathLst>
-                <a:path w="0" h="3649639">
+                <a:path w="0" h="3404141">
                   <a:moveTo>
-                    <a:pt x="0" y="3649639"/>
+                    <a:pt x="0" y="3404141"/>
                   </a:moveTo>
                   <a:lnTo>
                     <a:pt x="0" y="0"/>
@@ -4601,8 +4601,8 @@
           </p:nvSpPr>
           <p:spPr>
             <a:xfrm>
-              <a:off x="692708" y="5517199"/>
-              <a:ext cx="62179" cy="80101"/>
+              <a:off x="756929" y="5407599"/>
+              <a:ext cx="79004" cy="101955"/>
             </a:xfrm>
             <a:prstGeom prst="rect">
               <a:avLst/>
@@ -4615,7 +4615,7 @@
             <a:p>
               <a:pPr algn="l" marL="0" marR="0" indent="0">
                 <a:lnSpc>
-                  <a:spcPts val="880"/>
+                  <a:spcPts val="1120"/>
                 </a:lnSpc>
                 <a:spcBef>
                   <a:spcPts val="0"/>
@@ -4625,7 +4625,7 @@
                 </a:spcAft>
               </a:pPr>
               <a:r>
-                <a:rPr sz="880">
+                <a:rPr sz="1120">
                   <a:solidFill>
                     <a:srgbClr val="4D4D4D">
                       <a:alpha val="100000"/>
@@ -4647,8 +4647,8 @@
           </p:nvSpPr>
           <p:spPr>
             <a:xfrm>
-              <a:off x="692708" y="4687735"/>
-              <a:ext cx="62179" cy="80101"/>
+              <a:off x="756929" y="4633931"/>
+              <a:ext cx="79004" cy="101955"/>
             </a:xfrm>
             <a:prstGeom prst="rect">
               <a:avLst/>
@@ -4661,7 +4661,7 @@
             <a:p>
               <a:pPr algn="l" marL="0" marR="0" indent="0">
                 <a:lnSpc>
-                  <a:spcPts val="880"/>
+                  <a:spcPts val="1120"/>
                 </a:lnSpc>
                 <a:spcBef>
                   <a:spcPts val="0"/>
@@ -4671,7 +4671,7 @@
                 </a:spcAft>
               </a:pPr>
               <a:r>
-                <a:rPr sz="880">
+                <a:rPr sz="1120">
                   <a:solidFill>
                     <a:srgbClr val="4D4D4D">
                       <a:alpha val="100000"/>
@@ -4693,8 +4693,8 @@
           </p:nvSpPr>
           <p:spPr>
             <a:xfrm>
-              <a:off x="692708" y="3858272"/>
-              <a:ext cx="62179" cy="80101"/>
+              <a:off x="756929" y="3860262"/>
+              <a:ext cx="79004" cy="101955"/>
             </a:xfrm>
             <a:prstGeom prst="rect">
               <a:avLst/>
@@ -4707,7 +4707,7 @@
             <a:p>
               <a:pPr algn="l" marL="0" marR="0" indent="0">
                 <a:lnSpc>
-                  <a:spcPts val="880"/>
+                  <a:spcPts val="1120"/>
                 </a:lnSpc>
                 <a:spcBef>
                   <a:spcPts val="0"/>
@@ -4717,7 +4717,7 @@
                 </a:spcAft>
               </a:pPr>
               <a:r>
-                <a:rPr sz="880">
+                <a:rPr sz="1120">
                   <a:solidFill>
                     <a:srgbClr val="4D4D4D">
                       <a:alpha val="100000"/>
@@ -4739,8 +4739,8 @@
           </p:nvSpPr>
           <p:spPr>
             <a:xfrm>
-              <a:off x="692708" y="3028808"/>
-              <a:ext cx="62179" cy="80101"/>
+              <a:off x="756929" y="3086593"/>
+              <a:ext cx="79004" cy="101955"/>
             </a:xfrm>
             <a:prstGeom prst="rect">
               <a:avLst/>
@@ -4753,7 +4753,7 @@
             <a:p>
               <a:pPr algn="l" marL="0" marR="0" indent="0">
                 <a:lnSpc>
-                  <a:spcPts val="880"/>
+                  <a:spcPts val="1120"/>
                 </a:lnSpc>
                 <a:spcBef>
                   <a:spcPts val="0"/>
@@ -4763,7 +4763,7 @@
                 </a:spcAft>
               </a:pPr>
               <a:r>
-                <a:rPr sz="880">
+                <a:rPr sz="1120">
                   <a:solidFill>
                     <a:srgbClr val="4D4D4D">
                       <a:alpha val="100000"/>
@@ -4785,8 +4785,8 @@
           </p:nvSpPr>
           <p:spPr>
             <a:xfrm>
-              <a:off x="692708" y="2199345"/>
-              <a:ext cx="62179" cy="80101"/>
+              <a:off x="756929" y="2312925"/>
+              <a:ext cx="79004" cy="101955"/>
             </a:xfrm>
             <a:prstGeom prst="rect">
               <a:avLst/>
@@ -4799,7 +4799,7 @@
             <a:p>
               <a:pPr algn="l" marL="0" marR="0" indent="0">
                 <a:lnSpc>
-                  <a:spcPts val="880"/>
+                  <a:spcPts val="1120"/>
                 </a:lnSpc>
                 <a:spcBef>
                   <a:spcPts val="0"/>
@@ -4809,7 +4809,7 @@
                 </a:spcAft>
               </a:pPr>
               <a:r>
-                <a:rPr sz="880">
+                <a:rPr sz="1120">
                   <a:solidFill>
                     <a:srgbClr val="4D4D4D">
                       <a:alpha val="100000"/>
@@ -4831,8 +4831,8 @@
           </p:nvSpPr>
           <p:spPr>
             <a:xfrm>
-              <a:off x="1328653" y="5785772"/>
-              <a:ext cx="223753" cy="80101"/>
+              <a:off x="1387159" y="5693022"/>
+              <a:ext cx="284286" cy="101955"/>
             </a:xfrm>
             <a:prstGeom prst="rect">
               <a:avLst/>
@@ -4845,7 +4845,7 @@
             <a:p>
               <a:pPr algn="l" marL="0" marR="0" indent="0">
                 <a:lnSpc>
-                  <a:spcPts val="880"/>
+                  <a:spcPts val="1120"/>
                 </a:lnSpc>
                 <a:spcBef>
                   <a:spcPts val="0"/>
@@ -4855,7 +4855,7 @@
                 </a:spcAft>
               </a:pPr>
               <a:r>
-                <a:rPr sz="880">
+                <a:rPr sz="1120">
                   <a:solidFill>
                     <a:srgbClr val="4D4D4D">
                       <a:alpha val="100000"/>
@@ -4877,8 +4877,8 @@
           </p:nvSpPr>
           <p:spPr>
             <a:xfrm>
-              <a:off x="2724172" y="5785772"/>
-              <a:ext cx="161574" cy="80101"/>
+              <a:off x="2770605" y="5693022"/>
+              <a:ext cx="205282" cy="101955"/>
             </a:xfrm>
             <a:prstGeom prst="rect">
               <a:avLst/>
@@ -4891,7 +4891,7 @@
             <a:p>
               <a:pPr algn="l" marL="0" marR="0" indent="0">
                 <a:lnSpc>
-                  <a:spcPts val="880"/>
+                  <a:spcPts val="1120"/>
                 </a:lnSpc>
                 <a:spcBef>
                   <a:spcPts val="0"/>
@@ -4901,7 +4901,7 @@
                 </a:spcAft>
               </a:pPr>
               <a:r>
-                <a:rPr sz="880">
+                <a:rPr sz="1120">
                   <a:solidFill>
                     <a:srgbClr val="4D4D4D">
                       <a:alpha val="100000"/>
@@ -4923,8 +4923,8 @@
           </p:nvSpPr>
           <p:spPr>
             <a:xfrm>
-              <a:off x="4138300" y="5785772"/>
-              <a:ext cx="62179" cy="80101"/>
+              <a:off x="4177689" y="5693022"/>
+              <a:ext cx="79004" cy="101955"/>
             </a:xfrm>
             <a:prstGeom prst="rect">
               <a:avLst/>
@@ -4937,7 +4937,7 @@
             <a:p>
               <a:pPr algn="l" marL="0" marR="0" indent="0">
                 <a:lnSpc>
-                  <a:spcPts val="880"/>
+                  <a:spcPts val="1120"/>
                 </a:lnSpc>
                 <a:spcBef>
                   <a:spcPts val="0"/>
@@ -4947,7 +4947,7 @@
                 </a:spcAft>
               </a:pPr>
               <a:r>
-                <a:rPr sz="880">
+                <a:rPr sz="1120">
                   <a:solidFill>
                     <a:srgbClr val="4D4D4D">
                       <a:alpha val="100000"/>
@@ -4969,8 +4969,8 @@
           </p:nvSpPr>
           <p:spPr>
             <a:xfrm>
-              <a:off x="5471640" y="5785772"/>
-              <a:ext cx="124358" cy="80101"/>
+              <a:off x="5482131" y="5693022"/>
+              <a:ext cx="158008" cy="101955"/>
             </a:xfrm>
             <a:prstGeom prst="rect">
               <a:avLst/>
@@ -4983,7 +4983,7 @@
             <a:p>
               <a:pPr algn="l" marL="0" marR="0" indent="0">
                 <a:lnSpc>
-                  <a:spcPts val="880"/>
+                  <a:spcPts val="1120"/>
                 </a:lnSpc>
                 <a:spcBef>
                   <a:spcPts val="0"/>
@@ -4993,7 +4993,7 @@
                 </a:spcAft>
               </a:pPr>
               <a:r>
-                <a:rPr sz="880">
+                <a:rPr sz="1120">
                   <a:solidFill>
                     <a:srgbClr val="4D4D4D">
                       <a:alpha val="100000"/>
@@ -5015,8 +5015,8 @@
           </p:nvSpPr>
           <p:spPr>
             <a:xfrm>
-              <a:off x="6804980" y="5785772"/>
-              <a:ext cx="186537" cy="80101"/>
+              <a:off x="6786573" y="5693022"/>
+              <a:ext cx="237012" cy="101955"/>
             </a:xfrm>
             <a:prstGeom prst="rect">
               <a:avLst/>
@@ -5029,7 +5029,7 @@
             <a:p>
               <a:pPr algn="l" marL="0" marR="0" indent="0">
                 <a:lnSpc>
-                  <a:spcPts val="880"/>
+                  <a:spcPts val="1120"/>
                 </a:lnSpc>
                 <a:spcBef>
                   <a:spcPts val="0"/>
@@ -5039,7 +5039,7 @@
                 </a:spcAft>
               </a:pPr>
               <a:r>
-                <a:rPr sz="880">
+                <a:rPr sz="1120">
                   <a:solidFill>
                     <a:srgbClr val="4D4D4D">
                       <a:alpha val="100000"/>
@@ -5061,8 +5061,8 @@
           </p:nvSpPr>
           <p:spPr>
             <a:xfrm>
-              <a:off x="8169410" y="5785772"/>
-              <a:ext cx="186537" cy="80101"/>
+              <a:off x="8130517" y="5693022"/>
+              <a:ext cx="237012" cy="101955"/>
             </a:xfrm>
             <a:prstGeom prst="rect">
               <a:avLst/>
@@ -5075,7 +5075,7 @@
             <a:p>
               <a:pPr algn="l" marL="0" marR="0" indent="0">
                 <a:lnSpc>
-                  <a:spcPts val="880"/>
+                  <a:spcPts val="1120"/>
                 </a:lnSpc>
                 <a:spcBef>
                   <a:spcPts val="0"/>
@@ -5085,7 +5085,7 @@
                 </a:spcAft>
               </a:pPr>
               <a:r>
-                <a:rPr sz="880">
+                <a:rPr sz="1120">
                   <a:solidFill>
                     <a:srgbClr val="4D4D4D">
                       <a:alpha val="100000"/>
@@ -5107,8 +5107,8 @@
           </p:nvSpPr>
           <p:spPr>
             <a:xfrm>
-              <a:off x="3987536" y="5925448"/>
-              <a:ext cx="1459656" cy="100218"/>
+              <a:off x="3828319" y="5870717"/>
+              <a:ext cx="1857237" cy="127558"/>
             </a:xfrm>
             <a:prstGeom prst="rect">
               <a:avLst/>
@@ -5121,7 +5121,7 @@
             <a:p>
               <a:pPr algn="l" marL="0" marR="0" indent="0">
                 <a:lnSpc>
-                  <a:spcPts val="1100"/>
+                  <a:spcPts val="1400"/>
                 </a:lnSpc>
                 <a:spcBef>
                   <a:spcPts val="0"/>
@@ -5131,7 +5131,7 @@
                 </a:spcAft>
               </a:pPr>
               <a:r>
-                <a:rPr sz="1100">
+                <a:rPr sz="1400">
                   <a:solidFill>
                     <a:srgbClr val="000000">
                       <a:alpha val="100000"/>
@@ -5153,8 +5153,8 @@
           </p:nvSpPr>
           <p:spPr>
             <a:xfrm rot="-5400000">
-              <a:off x="68446" y="3848213"/>
-              <a:ext cx="1016904" cy="100218"/>
+              <a:off x="-37527" y="3847460"/>
+              <a:ext cx="1294150" cy="127558"/>
             </a:xfrm>
             <a:prstGeom prst="rect">
               <a:avLst/>
@@ -5167,7 +5167,7 @@
             <a:p>
               <a:pPr algn="l" marL="0" marR="0" indent="0">
                 <a:lnSpc>
-                  <a:spcPts val="1100"/>
+                  <a:spcPts val="1400"/>
                 </a:lnSpc>
                 <a:spcBef>
                   <a:spcPts val="0"/>
@@ -5177,7 +5177,7 @@
                 </a:spcAft>
               </a:pPr>
               <a:r>
-                <a:rPr sz="1100">
+                <a:rPr sz="1400">
                   <a:solidFill>
                     <a:srgbClr val="000000">
                       <a:alpha val="100000"/>
@@ -5199,8 +5199,8 @@
           </p:nvSpPr>
           <p:spPr>
             <a:xfrm>
-              <a:off x="817517" y="1896563"/>
-              <a:ext cx="4500128" cy="82021"/>
+              <a:off x="915645" y="1977589"/>
+              <a:ext cx="6001755" cy="109362"/>
             </a:xfrm>
             <a:prstGeom prst="rect">
               <a:avLst/>
@@ -5213,7 +5213,7 @@
             <a:p>
               <a:pPr algn="l" marL="0" marR="0" indent="0">
                 <a:lnSpc>
-                  <a:spcPts val="900"/>
+                  <a:spcPts val="1200"/>
                 </a:lnSpc>
                 <a:spcBef>
                   <a:spcPts val="0"/>
@@ -5223,7 +5223,7 @@
                 </a:spcAft>
               </a:pPr>
               <a:r>
-                <a:rPr sz="900">
+                <a:rPr sz="1200">
                   <a:solidFill>
                     <a:srgbClr val="404040">
                       <a:alpha val="100000"/>
@@ -5245,8 +5245,8 @@
           </p:nvSpPr>
           <p:spPr>
             <a:xfrm>
-              <a:off x="817517" y="1669789"/>
-              <a:ext cx="3435949" cy="120152"/>
+              <a:off x="915645" y="1688767"/>
+              <a:ext cx="4374032" cy="153070"/>
             </a:xfrm>
             <a:prstGeom prst="rect">
               <a:avLst/>
@@ -5259,7 +5259,7 @@
             <a:p>
               <a:pPr algn="l" marL="0" marR="0" indent="0">
                 <a:lnSpc>
-                  <a:spcPts val="1320"/>
+                  <a:spcPts val="1680"/>
                 </a:lnSpc>
                 <a:spcBef>
                   <a:spcPts val="0"/>
@@ -5269,7 +5269,7 @@
                 </a:spcAft>
               </a:pPr>
               <a:r>
-                <a:rPr sz="1320">
+                <a:rPr sz="1680">
                   <a:solidFill>
                     <a:srgbClr val="000000">
                       <a:alpha val="100000"/>
